--- a/ppt/FE Assignment Template-3.pptx
+++ b/ppt/FE Assignment Template-3.pptx
@@ -5,9 +5,9 @@
     <p:sldMasterId id="2147483648" r:id="rId1"/>
   </p:sldMasterIdLst>
   <p:sldIdLst>
-    <p:sldId id="256" r:id="rId6"/>
-    <p:sldId id="257" r:id="rId7"/>
-    <p:sldId id="258" r:id="rId8"/>
+    <p:sldId id="256" r:id="rId2"/>
+    <p:sldId id="257" r:id="rId3"/>
+    <p:sldId id="258" r:id="rId4"/>
   </p:sldIdLst>
   <p:sldSz cx="7569200" cy="10699750"/>
   <p:notesSz cx="7569200" cy="10699750"/>
@@ -16,11 +16,27 @@
       <a:defRPr kern="0"/>
     </a:defPPr>
   </p:defaultTextStyle>
+  <p:extLst>
+    <p:ext uri="{EFAFB233-063F-42B5-8137-9DF3F51BA10A}">
+      <p15:sldGuideLst xmlns:p15="http://schemas.microsoft.com/office/powerpoint/2012/main">
+        <p15:guide id="1" orient="horz" pos="2880">
+          <p15:clr>
+            <a:srgbClr val="A4A3A4"/>
+          </p15:clr>
+        </p15:guide>
+        <p15:guide id="2" pos="2160">
+          <p15:clr>
+            <a:srgbClr val="A4A3A4"/>
+          </p15:clr>
+        </p15:guide>
+      </p15:sldGuideLst>
+    </p:ext>
+  </p:extLst>
 </p:presentation>
 </file>
 
 <file path=ppt/slideLayouts/slideLayout1.xml><?xml version="1.0" encoding="utf-8"?>
-<p:sldLayout xmlns:a="http://schemas.openxmlformats.org/drawingml/2006/main" xmlns:r="http://schemas.openxmlformats.org/officeDocument/2006/relationships" xmlns:p="http://schemas.openxmlformats.org/presentationml/2006/main" preserve="1" type="obj">
+<p:sldLayout xmlns:a="http://schemas.openxmlformats.org/drawingml/2006/main" xmlns:r="http://schemas.openxmlformats.org/officeDocument/2006/relationships" xmlns:p="http://schemas.openxmlformats.org/presentationml/2006/main" type="obj" preserve="1">
   <p:cSld name="Title Slide">
     <p:spTree>
       <p:nvGrpSpPr>
@@ -64,7 +80,9 @@
               <a:defRPr/>
             </a:lvl1pPr>
           </a:lstStyle>
-          <a:p/>
+          <a:p>
+            <a:endParaRPr/>
+          </a:p>
         </p:txBody>
       </p:sp>
       <p:sp>
@@ -95,7 +113,9 @@
               <a:defRPr/>
             </a:lvl1pPr>
           </a:lstStyle>
-          <a:p/>
+          <a:p>
+            <a:endParaRPr/>
+          </a:p>
         </p:txBody>
       </p:sp>
       <p:sp>
@@ -105,7 +125,7 @@
             <a:spLocks noGrp="1"/>
           </p:cNvSpPr>
           <p:nvPr>
-            <p:ph type="ftr" idx="5" sz="quarter"/>
+            <p:ph type="ftr" sz="quarter" idx="5"/>
           </p:nvPr>
         </p:nvSpPr>
         <p:spPr/>
@@ -122,7 +142,9 @@
               </a:defRPr>
             </a:lvl1pPr>
           </a:lstStyle>
-          <a:p/>
+          <a:p>
+            <a:endParaRPr/>
+          </a:p>
         </p:txBody>
       </p:sp>
       <p:sp>
@@ -132,7 +154,7 @@
             <a:spLocks noGrp="1"/>
           </p:cNvSpPr>
           <p:nvPr>
-            <p:ph type="dt" idx="6" sz="half"/>
+            <p:ph type="dt" sz="half" idx="6"/>
           </p:nvPr>
         </p:nvSpPr>
         <p:spPr/>
@@ -152,7 +174,9 @@
           <a:p>
             <a:fld id="{1D8BD707-D9CF-40AE-B4C6-C98DA3205C09}" type="datetimeFigureOut">
               <a:rPr lang="en-US"/>
+              <a:t>3/4/2026</a:t>
             </a:fld>
+            <a:endParaRPr lang="en-US"/>
           </a:p>
         </p:txBody>
       </p:sp>
@@ -163,7 +187,7 @@
             <a:spLocks noGrp="1"/>
           </p:cNvSpPr>
           <p:nvPr>
-            <p:ph type="sldNum" idx="7" sz="quarter"/>
+            <p:ph type="sldNum" sz="quarter" idx="7"/>
           </p:nvPr>
         </p:nvSpPr>
         <p:spPr/>
@@ -182,8 +206,9 @@
           </a:lstStyle>
           <a:p>
             <a:fld id="{B6F15528-21DE-4FAA-801E-634DDDAF4B2B}" type="slidenum">
-              <a:t>#</a:t>
+              <a:t>‹#›</a:t>
             </a:fld>
+            <a:endParaRPr/>
           </a:p>
         </p:txBody>
       </p:sp>
@@ -196,7 +221,7 @@
 </file>
 
 <file path=ppt/slideLayouts/slideLayout2.xml><?xml version="1.0" encoding="utf-8"?>
-<p:sldLayout xmlns:a="http://schemas.openxmlformats.org/drawingml/2006/main" xmlns:r="http://schemas.openxmlformats.org/officeDocument/2006/relationships" xmlns:p="http://schemas.openxmlformats.org/presentationml/2006/main" preserve="1" type="obj">
+<p:sldLayout xmlns:a="http://schemas.openxmlformats.org/drawingml/2006/main" xmlns:r="http://schemas.openxmlformats.org/officeDocument/2006/relationships" xmlns:p="http://schemas.openxmlformats.org/presentationml/2006/main" type="obj" preserve="1">
   <p:cSld name="Title and Content">
     <p:spTree>
       <p:nvGrpSpPr>
@@ -230,7 +255,9 @@
               <a:defRPr/>
             </a:lvl1pPr>
           </a:lstStyle>
-          <a:p/>
+          <a:p>
+            <a:endParaRPr/>
+          </a:p>
         </p:txBody>
       </p:sp>
       <p:sp>
@@ -251,7 +278,9 @@
               <a:defRPr/>
             </a:lvl1pPr>
           </a:lstStyle>
-          <a:p/>
+          <a:p>
+            <a:endParaRPr/>
+          </a:p>
         </p:txBody>
       </p:sp>
       <p:sp>
@@ -261,7 +290,7 @@
             <a:spLocks noGrp="1"/>
           </p:cNvSpPr>
           <p:nvPr>
-            <p:ph type="ftr" idx="5" sz="quarter"/>
+            <p:ph type="ftr" sz="quarter" idx="5"/>
           </p:nvPr>
         </p:nvSpPr>
         <p:spPr/>
@@ -278,7 +307,9 @@
               </a:defRPr>
             </a:lvl1pPr>
           </a:lstStyle>
-          <a:p/>
+          <a:p>
+            <a:endParaRPr/>
+          </a:p>
         </p:txBody>
       </p:sp>
       <p:sp>
@@ -288,7 +319,7 @@
             <a:spLocks noGrp="1"/>
           </p:cNvSpPr>
           <p:nvPr>
-            <p:ph type="dt" idx="6" sz="half"/>
+            <p:ph type="dt" sz="half" idx="6"/>
           </p:nvPr>
         </p:nvSpPr>
         <p:spPr/>
@@ -308,7 +339,9 @@
           <a:p>
             <a:fld id="{1D8BD707-D9CF-40AE-B4C6-C98DA3205C09}" type="datetimeFigureOut">
               <a:rPr lang="en-US"/>
+              <a:t>3/4/2026</a:t>
             </a:fld>
+            <a:endParaRPr lang="en-US"/>
           </a:p>
         </p:txBody>
       </p:sp>
@@ -319,7 +352,7 @@
             <a:spLocks noGrp="1"/>
           </p:cNvSpPr>
           <p:nvPr>
-            <p:ph type="sldNum" idx="7" sz="quarter"/>
+            <p:ph type="sldNum" sz="quarter" idx="7"/>
           </p:nvPr>
         </p:nvSpPr>
         <p:spPr/>
@@ -338,8 +371,9 @@
           </a:lstStyle>
           <a:p>
             <a:fld id="{B6F15528-21DE-4FAA-801E-634DDDAF4B2B}" type="slidenum">
-              <a:t>#</a:t>
+              <a:t>‹#›</a:t>
             </a:fld>
+            <a:endParaRPr/>
           </a:p>
         </p:txBody>
       </p:sp>
@@ -352,7 +386,7 @@
 </file>
 
 <file path=ppt/slideLayouts/slideLayout3.xml><?xml version="1.0" encoding="utf-8"?>
-<p:sldLayout xmlns:a="http://schemas.openxmlformats.org/drawingml/2006/main" xmlns:r="http://schemas.openxmlformats.org/officeDocument/2006/relationships" xmlns:p="http://schemas.openxmlformats.org/presentationml/2006/main" preserve="1" type="obj">
+<p:sldLayout xmlns:a="http://schemas.openxmlformats.org/drawingml/2006/main" xmlns:r="http://schemas.openxmlformats.org/officeDocument/2006/relationships" xmlns:p="http://schemas.openxmlformats.org/presentationml/2006/main" type="obj" preserve="1">
   <p:cSld name="Two Content">
     <p:spTree>
       <p:nvGrpSpPr>
@@ -386,7 +420,9 @@
               <a:defRPr/>
             </a:lvl1pPr>
           </a:lstStyle>
-          <a:p/>
+          <a:p>
+            <a:endParaRPr/>
+          </a:p>
         </p:txBody>
       </p:sp>
       <p:sp>
@@ -396,7 +432,7 @@
             <a:spLocks noGrp="1"/>
           </p:cNvSpPr>
           <p:nvPr>
-            <p:ph idx="2" sz="half"/>
+            <p:ph sz="half" idx="2"/>
           </p:nvPr>
         </p:nvSpPr>
         <p:spPr>
@@ -417,7 +453,9 @@
               <a:defRPr/>
             </a:lvl1pPr>
           </a:lstStyle>
-          <a:p/>
+          <a:p>
+            <a:endParaRPr/>
+          </a:p>
         </p:txBody>
       </p:sp>
       <p:sp>
@@ -427,7 +465,7 @@
             <a:spLocks noGrp="1"/>
           </p:cNvSpPr>
           <p:nvPr>
-            <p:ph idx="3" sz="half"/>
+            <p:ph sz="half" idx="3"/>
           </p:nvPr>
         </p:nvSpPr>
         <p:spPr>
@@ -448,7 +486,9 @@
               <a:defRPr/>
             </a:lvl1pPr>
           </a:lstStyle>
-          <a:p/>
+          <a:p>
+            <a:endParaRPr/>
+          </a:p>
         </p:txBody>
       </p:sp>
       <p:sp>
@@ -458,7 +498,7 @@
             <a:spLocks noGrp="1"/>
           </p:cNvSpPr>
           <p:nvPr>
-            <p:ph type="ftr" idx="5" sz="quarter"/>
+            <p:ph type="ftr" sz="quarter" idx="5"/>
           </p:nvPr>
         </p:nvSpPr>
         <p:spPr/>
@@ -475,7 +515,9 @@
               </a:defRPr>
             </a:lvl1pPr>
           </a:lstStyle>
-          <a:p/>
+          <a:p>
+            <a:endParaRPr/>
+          </a:p>
         </p:txBody>
       </p:sp>
       <p:sp>
@@ -485,7 +527,7 @@
             <a:spLocks noGrp="1"/>
           </p:cNvSpPr>
           <p:nvPr>
-            <p:ph type="dt" idx="6" sz="half"/>
+            <p:ph type="dt" sz="half" idx="6"/>
           </p:nvPr>
         </p:nvSpPr>
         <p:spPr/>
@@ -505,7 +547,9 @@
           <a:p>
             <a:fld id="{1D8BD707-D9CF-40AE-B4C6-C98DA3205C09}" type="datetimeFigureOut">
               <a:rPr lang="en-US"/>
+              <a:t>3/4/2026</a:t>
             </a:fld>
+            <a:endParaRPr lang="en-US"/>
           </a:p>
         </p:txBody>
       </p:sp>
@@ -516,7 +560,7 @@
             <a:spLocks noGrp="1"/>
           </p:cNvSpPr>
           <p:nvPr>
-            <p:ph type="sldNum" idx="7" sz="quarter"/>
+            <p:ph type="sldNum" sz="quarter" idx="7"/>
           </p:nvPr>
         </p:nvSpPr>
         <p:spPr/>
@@ -535,8 +579,9 @@
           </a:lstStyle>
           <a:p>
             <a:fld id="{B6F15528-21DE-4FAA-801E-634DDDAF4B2B}" type="slidenum">
-              <a:t>#</a:t>
+              <a:t>‹#›</a:t>
             </a:fld>
+            <a:endParaRPr/>
           </a:p>
         </p:txBody>
       </p:sp>
@@ -549,7 +594,7 @@
 </file>
 
 <file path=ppt/slideLayouts/slideLayout4.xml><?xml version="1.0" encoding="utf-8"?>
-<p:sldLayout xmlns:a="http://schemas.openxmlformats.org/drawingml/2006/main" xmlns:r="http://schemas.openxmlformats.org/officeDocument/2006/relationships" xmlns:p="http://schemas.openxmlformats.org/presentationml/2006/main" preserve="1" type="obj">
+<p:sldLayout xmlns:a="http://schemas.openxmlformats.org/drawingml/2006/main" xmlns:r="http://schemas.openxmlformats.org/officeDocument/2006/relationships" xmlns:p="http://schemas.openxmlformats.org/presentationml/2006/main" type="obj" preserve="1">
   <p:cSld name="Title Only">
     <p:spTree>
       <p:nvGrpSpPr>
@@ -583,7 +628,9 @@
               <a:defRPr/>
             </a:lvl1pPr>
           </a:lstStyle>
-          <a:p/>
+          <a:p>
+            <a:endParaRPr/>
+          </a:p>
         </p:txBody>
       </p:sp>
       <p:sp>
@@ -593,7 +640,7 @@
             <a:spLocks noGrp="1"/>
           </p:cNvSpPr>
           <p:nvPr>
-            <p:ph type="ftr" idx="5" sz="quarter"/>
+            <p:ph type="ftr" sz="quarter" idx="5"/>
           </p:nvPr>
         </p:nvSpPr>
         <p:spPr/>
@@ -610,7 +657,9 @@
               </a:defRPr>
             </a:lvl1pPr>
           </a:lstStyle>
-          <a:p/>
+          <a:p>
+            <a:endParaRPr/>
+          </a:p>
         </p:txBody>
       </p:sp>
       <p:sp>
@@ -620,7 +669,7 @@
             <a:spLocks noGrp="1"/>
           </p:cNvSpPr>
           <p:nvPr>
-            <p:ph type="dt" idx="6" sz="half"/>
+            <p:ph type="dt" sz="half" idx="6"/>
           </p:nvPr>
         </p:nvSpPr>
         <p:spPr/>
@@ -640,7 +689,9 @@
           <a:p>
             <a:fld id="{1D8BD707-D9CF-40AE-B4C6-C98DA3205C09}" type="datetimeFigureOut">
               <a:rPr lang="en-US"/>
+              <a:t>3/4/2026</a:t>
             </a:fld>
+            <a:endParaRPr lang="en-US"/>
           </a:p>
         </p:txBody>
       </p:sp>
@@ -651,7 +702,7 @@
             <a:spLocks noGrp="1"/>
           </p:cNvSpPr>
           <p:nvPr>
-            <p:ph type="sldNum" idx="7" sz="quarter"/>
+            <p:ph type="sldNum" sz="quarter" idx="7"/>
           </p:nvPr>
         </p:nvSpPr>
         <p:spPr/>
@@ -670,8 +721,9 @@
           </a:lstStyle>
           <a:p>
             <a:fld id="{B6F15528-21DE-4FAA-801E-634DDDAF4B2B}" type="slidenum">
-              <a:t>#</a:t>
+              <a:t>‹#›</a:t>
             </a:fld>
+            <a:endParaRPr/>
           </a:p>
         </p:txBody>
       </p:sp>
@@ -684,7 +736,7 @@
 </file>
 
 <file path=ppt/slideLayouts/slideLayout5.xml><?xml version="1.0" encoding="utf-8"?>
-<p:sldLayout xmlns:a="http://schemas.openxmlformats.org/drawingml/2006/main" xmlns:r="http://schemas.openxmlformats.org/officeDocument/2006/relationships" xmlns:p="http://schemas.openxmlformats.org/presentationml/2006/main" preserve="1" type="obj">
+<p:sldLayout xmlns:a="http://schemas.openxmlformats.org/drawingml/2006/main" xmlns:r="http://schemas.openxmlformats.org/officeDocument/2006/relationships" xmlns:p="http://schemas.openxmlformats.org/presentationml/2006/main" type="obj" preserve="1">
   <p:cSld name="Blank">
     <p:spTree>
       <p:nvGrpSpPr>
@@ -707,7 +759,7 @@
             <a:spLocks noGrp="1"/>
           </p:cNvSpPr>
           <p:nvPr>
-            <p:ph type="ftr" idx="5" sz="quarter"/>
+            <p:ph type="ftr" sz="quarter" idx="5"/>
           </p:nvPr>
         </p:nvSpPr>
         <p:spPr/>
@@ -724,7 +776,9 @@
               </a:defRPr>
             </a:lvl1pPr>
           </a:lstStyle>
-          <a:p/>
+          <a:p>
+            <a:endParaRPr/>
+          </a:p>
         </p:txBody>
       </p:sp>
       <p:sp>
@@ -734,7 +788,7 @@
             <a:spLocks noGrp="1"/>
           </p:cNvSpPr>
           <p:nvPr>
-            <p:ph type="dt" idx="6" sz="half"/>
+            <p:ph type="dt" sz="half" idx="6"/>
           </p:nvPr>
         </p:nvSpPr>
         <p:spPr/>
@@ -754,7 +808,9 @@
           <a:p>
             <a:fld id="{1D8BD707-D9CF-40AE-B4C6-C98DA3205C09}" type="datetimeFigureOut">
               <a:rPr lang="en-US"/>
+              <a:t>3/4/2026</a:t>
             </a:fld>
+            <a:endParaRPr lang="en-US"/>
           </a:p>
         </p:txBody>
       </p:sp>
@@ -765,7 +821,7 @@
             <a:spLocks noGrp="1"/>
           </p:cNvSpPr>
           <p:nvPr>
-            <p:ph type="sldNum" idx="7" sz="quarter"/>
+            <p:ph type="sldNum" sz="quarter" idx="7"/>
           </p:nvPr>
         </p:nvSpPr>
         <p:spPr/>
@@ -784,8 +840,9 @@
           </a:lstStyle>
           <a:p>
             <a:fld id="{B6F15528-21DE-4FAA-801E-634DDDAF4B2B}" type="slidenum">
-              <a:t>#</a:t>
+              <a:t>‹#›</a:t>
             </a:fld>
+            <a:endParaRPr/>
           </a:p>
         </p:txBody>
       </p:sp>
@@ -850,7 +907,9 @@
               <a:defRPr/>
             </a:lvl1pPr>
           </a:lstStyle>
-          <a:p/>
+          <a:p>
+            <a:endParaRPr/>
+          </a:p>
         </p:txBody>
       </p:sp>
       <p:sp>
@@ -881,7 +940,9 @@
               <a:defRPr/>
             </a:lvl1pPr>
           </a:lstStyle>
-          <a:p/>
+          <a:p>
+            <a:endParaRPr/>
+          </a:p>
         </p:txBody>
       </p:sp>
       <p:sp>
@@ -891,7 +952,7 @@
             <a:spLocks noGrp="1"/>
           </p:cNvSpPr>
           <p:nvPr>
-            <p:ph type="ftr" idx="5" sz="quarter"/>
+            <p:ph type="ftr" sz="quarter" idx="5"/>
           </p:nvPr>
         </p:nvSpPr>
         <p:spPr>
@@ -918,7 +979,9 @@
               </a:defRPr>
             </a:lvl1pPr>
           </a:lstStyle>
-          <a:p/>
+          <a:p>
+            <a:endParaRPr/>
+          </a:p>
         </p:txBody>
       </p:sp>
       <p:sp>
@@ -928,7 +991,7 @@
             <a:spLocks noGrp="1"/>
           </p:cNvSpPr>
           <p:nvPr>
-            <p:ph type="dt" idx="6" sz="half"/>
+            <p:ph type="dt" sz="half" idx="6"/>
           </p:nvPr>
         </p:nvSpPr>
         <p:spPr>
@@ -958,7 +1021,9 @@
           <a:p>
             <a:fld id="{1D8BD707-D9CF-40AE-B4C6-C98DA3205C09}" type="datetimeFigureOut">
               <a:rPr lang="en-US"/>
+              <a:t>3/4/2026</a:t>
             </a:fld>
+            <a:endParaRPr lang="en-US"/>
           </a:p>
         </p:txBody>
       </p:sp>
@@ -969,7 +1034,7 @@
             <a:spLocks noGrp="1"/>
           </p:cNvSpPr>
           <p:nvPr>
-            <p:ph type="sldNum" idx="7" sz="quarter"/>
+            <p:ph type="sldNum" sz="quarter" idx="7"/>
           </p:nvPr>
         </p:nvSpPr>
         <p:spPr>
@@ -998,14 +1063,15 @@
           </a:lstStyle>
           <a:p>
             <a:fld id="{B6F15528-21DE-4FAA-801E-634DDDAF4B2B}" type="slidenum">
-              <a:t>#</a:t>
+              <a:t>‹#›</a:t>
             </a:fld>
+            <a:endParaRPr/>
           </a:p>
         </p:txBody>
       </p:sp>
     </p:spTree>
   </p:cSld>
-  <p:clrMap folHlink="folHlink" hlink="hlink" accent1="accent1" accent2="accent2" accent3="accent3" accent4="accent4" accent5="accent5" accent6="accent6" tx2="dk2" bg2="lt2" tx1="dk1" bg1="lt1"/>
+  <p:clrMap bg1="lt1" tx1="dk1" bg2="lt2" tx2="dk2" accent1="accent1" accent2="accent2" accent3="accent3" accent4="accent4" accent5="accent5" accent6="accent6" hlink="hlink" folHlink="folHlink"/>
   <p:sldLayoutIdLst>
     <p:sldLayoutId id="2147483661" r:id="rId1"/>
     <p:sldLayoutId id="2147483662" r:id="rId2"/>
@@ -1176,7 +1242,7 @@
       </p:grpSpPr>
       <p:grpSp>
         <p:nvGrpSpPr>
-          <p:cNvPr id="2" name="object 2" descr=""/>
+          <p:cNvPr id="2" name="object 2"/>
           <p:cNvGrpSpPr/>
           <p:nvPr/>
         </p:nvGrpSpPr>
@@ -1190,7 +1256,7 @@
         </p:grpSpPr>
         <p:sp>
           <p:nvSpPr>
-            <p:cNvPr id="3" name="object 3" descr=""/>
+            <p:cNvPr id="3" name="object 3"/>
             <p:cNvSpPr/>
             <p:nvPr/>
           </p:nvSpPr>
@@ -1233,12 +1299,14 @@
           <p:txBody>
             <a:bodyPr wrap="square" lIns="0" tIns="0" rIns="0" bIns="0" rtlCol="0"/>
             <a:lstStyle/>
-            <a:p/>
+            <a:p>
+              <a:endParaRPr/>
+            </a:p>
           </p:txBody>
         </p:sp>
         <p:sp>
           <p:nvSpPr>
-            <p:cNvPr id="4" name="object 4" descr=""/>
+            <p:cNvPr id="4" name="object 4"/>
             <p:cNvSpPr/>
             <p:nvPr/>
           </p:nvSpPr>
@@ -1281,12 +1349,14 @@
           <p:txBody>
             <a:bodyPr wrap="square" lIns="0" tIns="0" rIns="0" bIns="0" rtlCol="0"/>
             <a:lstStyle/>
-            <a:p/>
+            <a:p>
+              <a:endParaRPr/>
+            </a:p>
           </p:txBody>
         </p:sp>
         <p:sp>
           <p:nvSpPr>
-            <p:cNvPr id="5" name="object 5" descr=""/>
+            <p:cNvPr id="5" name="object 5"/>
             <p:cNvSpPr/>
             <p:nvPr/>
           </p:nvSpPr>
@@ -1347,12 +1417,14 @@
           <p:txBody>
             <a:bodyPr wrap="square" lIns="0" tIns="0" rIns="0" bIns="0" rtlCol="0"/>
             <a:lstStyle/>
-            <a:p/>
+            <a:p>
+              <a:endParaRPr/>
+            </a:p>
           </p:txBody>
         </p:sp>
         <p:sp>
           <p:nvSpPr>
-            <p:cNvPr id="6" name="object 6" descr=""/>
+            <p:cNvPr id="6" name="object 6"/>
             <p:cNvSpPr/>
             <p:nvPr/>
           </p:nvSpPr>
@@ -1395,12 +1467,14 @@
           <p:txBody>
             <a:bodyPr wrap="square" lIns="0" tIns="0" rIns="0" bIns="0" rtlCol="0"/>
             <a:lstStyle/>
-            <a:p/>
+            <a:p>
+              <a:endParaRPr/>
+            </a:p>
           </p:txBody>
         </p:sp>
         <p:sp>
           <p:nvSpPr>
-            <p:cNvPr id="7" name="object 7" descr=""/>
+            <p:cNvPr id="7" name="object 7"/>
             <p:cNvSpPr/>
             <p:nvPr/>
           </p:nvSpPr>
@@ -1443,12 +1517,14 @@
           <p:txBody>
             <a:bodyPr wrap="square" lIns="0" tIns="0" rIns="0" bIns="0" rtlCol="0"/>
             <a:lstStyle/>
-            <a:p/>
+            <a:p>
+              <a:endParaRPr/>
+            </a:p>
           </p:txBody>
         </p:sp>
         <p:sp>
           <p:nvSpPr>
-            <p:cNvPr id="8" name="object 8" descr=""/>
+            <p:cNvPr id="8" name="object 8"/>
             <p:cNvSpPr/>
             <p:nvPr/>
           </p:nvSpPr>
@@ -1503,13 +1579,15 @@
           <p:txBody>
             <a:bodyPr wrap="square" lIns="0" tIns="0" rIns="0" bIns="0" rtlCol="0"/>
             <a:lstStyle/>
-            <a:p/>
+            <a:p>
+              <a:endParaRPr/>
+            </a:p>
           </p:txBody>
         </p:sp>
       </p:grpSp>
       <p:sp>
         <p:nvSpPr>
-          <p:cNvPr id="9" name="object 9" descr=""/>
+          <p:cNvPr id="9" name="object 9"/>
           <p:cNvSpPr txBox="1"/>
           <p:nvPr/>
         </p:nvSpPr>
@@ -1523,12 +1601,12 @@
           </a:prstGeom>
         </p:spPr>
         <p:txBody>
-          <a:bodyPr wrap="square" lIns="0" tIns="12700" rIns="0" bIns="0" rtlCol="0" vert="horz">
+          <a:bodyPr vert="horz" wrap="square" lIns="0" tIns="12700" rIns="0" bIns="0" rtlCol="0">
             <a:spAutoFit/>
           </a:bodyPr>
           <a:lstStyle/>
           <a:p>
-            <a:pPr algn="ctr" marR="137160">
+            <a:pPr marR="137160" algn="ctr">
               <a:lnSpc>
                 <a:spcPct val="100000"/>
               </a:lnSpc>
@@ -1537,40 +1615,40 @@
               </a:spcBef>
             </a:pPr>
             <a:r>
-              <a:rPr dirty="0" sz="2100" spc="-25" b="1">
+              <a:rPr sz="2100" b="1" spc="-25" dirty="0">
                 <a:latin typeface="Times New Roman"/>
                 <a:cs typeface="Times New Roman"/>
               </a:rPr>
               <a:t>FRONT-</a:t>
             </a:r>
             <a:r>
-              <a:rPr dirty="0" sz="2100" b="1">
+              <a:rPr sz="2100" b="1" dirty="0">
                 <a:latin typeface="Times New Roman"/>
                 <a:cs typeface="Times New Roman"/>
               </a:rPr>
               <a:t>END</a:t>
             </a:r>
             <a:r>
-              <a:rPr dirty="0" sz="2100" spc="50" b="1">
-                <a:latin typeface="Times New Roman"/>
-                <a:cs typeface="Times New Roman"/>
-              </a:rPr>
-              <a:t> </a:t>
-            </a:r>
-            <a:r>
-              <a:rPr dirty="0" sz="2100" spc="-10" b="1">
+              <a:rPr sz="2100" b="1" spc="50" dirty="0">
+                <a:latin typeface="Times New Roman"/>
+                <a:cs typeface="Times New Roman"/>
+              </a:rPr>
+              <a:t> </a:t>
+            </a:r>
+            <a:r>
+              <a:rPr sz="2100" b="1" spc="-10" dirty="0">
                 <a:latin typeface="Times New Roman"/>
                 <a:cs typeface="Times New Roman"/>
               </a:rPr>
               <a:t>DEVELOPMENT</a:t>
             </a:r>
-            <a:endParaRPr sz="2100">
+            <a:endParaRPr sz="2100" dirty="0">
               <a:latin typeface="Times New Roman"/>
               <a:cs typeface="Times New Roman"/>
             </a:endParaRPr>
           </a:p>
           <a:p>
-            <a:pPr algn="ctr" marR="136525">
+            <a:pPr marR="136525" algn="ctr">
               <a:lnSpc>
                 <a:spcPct val="100000"/>
               </a:lnSpc>
@@ -1579,41 +1657,41 @@
               </a:spcBef>
             </a:pPr>
             <a:r>
-              <a:rPr dirty="0" sz="1500" b="1">
+              <a:rPr sz="1500" b="1" dirty="0">
                 <a:latin typeface="Times New Roman"/>
                 <a:cs typeface="Times New Roman"/>
               </a:rPr>
               <a:t>ASSIGNMENT</a:t>
             </a:r>
             <a:r>
-              <a:rPr dirty="0" sz="1500" spc="-45" b="1">
-                <a:latin typeface="Times New Roman"/>
-                <a:cs typeface="Times New Roman"/>
-              </a:rPr>
-              <a:t> </a:t>
-            </a:r>
-            <a:r>
-              <a:rPr dirty="0" sz="1500" b="1">
+              <a:rPr sz="1500" b="1" spc="-45" dirty="0">
+                <a:latin typeface="Times New Roman"/>
+                <a:cs typeface="Times New Roman"/>
+              </a:rPr>
+              <a:t> </a:t>
+            </a:r>
+            <a:r>
+              <a:rPr sz="1500" b="1" dirty="0">
                 <a:latin typeface="Times New Roman"/>
                 <a:cs typeface="Times New Roman"/>
               </a:rPr>
               <a:t>3</a:t>
             </a:r>
             <a:r>
-              <a:rPr dirty="0" sz="1500" spc="-20" b="1">
-                <a:latin typeface="Times New Roman"/>
-                <a:cs typeface="Times New Roman"/>
-              </a:rPr>
-              <a:t> </a:t>
-            </a:r>
-            <a:r>
-              <a:rPr dirty="0" sz="1500" spc="-10" b="1">
+              <a:rPr sz="1500" b="1" spc="-20" dirty="0">
+                <a:latin typeface="Times New Roman"/>
+                <a:cs typeface="Times New Roman"/>
+              </a:rPr>
+              <a:t> </a:t>
+            </a:r>
+            <a:r>
+              <a:rPr sz="1500" b="1" spc="-10" dirty="0">
                 <a:latin typeface="Times New Roman"/>
                 <a:cs typeface="Times New Roman"/>
               </a:rPr>
               <a:t>TEMPLATE</a:t>
             </a:r>
-            <a:endParaRPr sz="1500">
+            <a:endParaRPr sz="1500" dirty="0">
               <a:latin typeface="Times New Roman"/>
               <a:cs typeface="Times New Roman"/>
             </a:endParaRPr>
@@ -1627,7 +1705,7 @@
                 <a:spcPts val="540"/>
               </a:spcBef>
             </a:pPr>
-            <a:endParaRPr sz="1500">
+            <a:endParaRPr sz="1500" dirty="0">
               <a:latin typeface="Times New Roman"/>
               <a:cs typeface="Times New Roman"/>
             </a:endParaRPr>
@@ -1639,20 +1717,41 @@
               </a:lnSpc>
             </a:pPr>
             <a:r>
-              <a:rPr dirty="0" sz="1200" b="1">
+              <a:rPr sz="1200" b="1" dirty="0">
                 <a:latin typeface="Times New Roman"/>
                 <a:cs typeface="Times New Roman"/>
               </a:rPr>
               <a:t>STUDENT</a:t>
             </a:r>
             <a:r>
-              <a:rPr dirty="0" sz="1200" spc="-10" b="1">
-                <a:latin typeface="Times New Roman"/>
-                <a:cs typeface="Times New Roman"/>
-              </a:rPr>
-              <a:t> NAME:</a:t>
-            </a:r>
-            <a:endParaRPr sz="1200">
+              <a:rPr sz="1200" b="1" spc="-10" dirty="0">
+                <a:latin typeface="Times New Roman"/>
+                <a:cs typeface="Times New Roman"/>
+              </a:rPr>
+              <a:t> </a:t>
+            </a:r>
+            <a:r>
+              <a:rPr sz="1200" b="1" spc="-10" dirty="0" err="1">
+                <a:latin typeface="Times New Roman"/>
+                <a:cs typeface="Times New Roman"/>
+              </a:rPr>
+              <a:t>NAME:</a:t>
+            </a:r>
+            <a:r>
+              <a:rPr lang="en-US" sz="1200" b="1" spc="-10" dirty="0" err="1">
+                <a:latin typeface="Times New Roman"/>
+                <a:cs typeface="Times New Roman"/>
+              </a:rPr>
+              <a:t>Hariharan</a:t>
+            </a:r>
+            <a:r>
+              <a:rPr lang="en-US" sz="1200" b="1" spc="-10" dirty="0">
+                <a:latin typeface="Times New Roman"/>
+                <a:cs typeface="Times New Roman"/>
+              </a:rPr>
+              <a:t> s</a:t>
+            </a:r>
+            <a:endParaRPr sz="1200" dirty="0">
               <a:latin typeface="Times New Roman"/>
               <a:cs typeface="Times New Roman"/>
             </a:endParaRPr>
@@ -1667,13 +1766,20 @@
               </a:spcBef>
             </a:pPr>
             <a:r>
-              <a:rPr dirty="0" sz="1200" spc="-10" b="1">
+              <a:rPr sz="1200" b="1" spc="-10" dirty="0">
                 <a:latin typeface="Times New Roman"/>
                 <a:cs typeface="Times New Roman"/>
               </a:rPr>
               <a:t>YEAR:</a:t>
             </a:r>
-            <a:endParaRPr sz="1200">
+            <a:r>
+              <a:rPr lang="en-US" sz="1200" b="1" spc="-10" dirty="0">
+                <a:latin typeface="Times New Roman"/>
+                <a:cs typeface="Times New Roman"/>
+              </a:rPr>
+              <a:t>2026</a:t>
+            </a:r>
+            <a:endParaRPr sz="1200" dirty="0">
               <a:latin typeface="Times New Roman"/>
               <a:cs typeface="Times New Roman"/>
             </a:endParaRPr>
@@ -1688,27 +1794,34 @@
               </a:spcBef>
             </a:pPr>
             <a:r>
-              <a:rPr dirty="0" sz="1200" b="1">
+              <a:rPr sz="1200" b="1" dirty="0">
                 <a:latin typeface="Times New Roman"/>
                 <a:cs typeface="Times New Roman"/>
               </a:rPr>
               <a:t>COLLEGE</a:t>
             </a:r>
             <a:r>
-              <a:rPr dirty="0" sz="1200" spc="-20" b="1">
-                <a:latin typeface="Times New Roman"/>
-                <a:cs typeface="Times New Roman"/>
-              </a:rPr>
-              <a:t> </a:t>
-            </a:r>
-            <a:r>
-              <a:rPr dirty="0" sz="1200" spc="-10" b="1">
+              <a:rPr sz="1200" b="1" spc="-20" dirty="0">
+                <a:latin typeface="Times New Roman"/>
+                <a:cs typeface="Times New Roman"/>
+              </a:rPr>
+              <a:t> </a:t>
+            </a:r>
+            <a:r>
+              <a:rPr sz="1200" b="1" spc="-10">
                 <a:latin typeface="Times New Roman"/>
                 <a:cs typeface="Times New Roman"/>
               </a:rPr>
               <a:t>CODE:</a:t>
             </a:r>
-            <a:endParaRPr sz="1200">
+            <a:r>
+              <a:rPr lang="en-US" sz="1200" b="1" spc="-10">
+                <a:latin typeface="Times New Roman"/>
+                <a:cs typeface="Times New Roman"/>
+              </a:rPr>
+              <a:t>1455</a:t>
+            </a:r>
+            <a:endParaRPr sz="1200" dirty="0">
               <a:latin typeface="Times New Roman"/>
               <a:cs typeface="Times New Roman"/>
             </a:endParaRPr>
@@ -1723,20 +1836,20 @@
               </a:spcBef>
             </a:pPr>
             <a:r>
-              <a:rPr dirty="0" sz="1200" b="1">
+              <a:rPr sz="1200" b="1" dirty="0">
                 <a:latin typeface="Times New Roman"/>
                 <a:cs typeface="Times New Roman"/>
               </a:rPr>
               <a:t>COLLEGE</a:t>
             </a:r>
             <a:r>
-              <a:rPr dirty="0" sz="1200" spc="-20" b="1">
+              <a:rPr sz="1200" b="1" spc="-20" dirty="0">
                 <a:latin typeface="Times New Roman"/>
                 <a:cs typeface="Times New Roman"/>
               </a:rPr>
               <a:t> NAME:</a:t>
             </a:r>
-            <a:endParaRPr sz="1200">
+            <a:endParaRPr sz="1200" dirty="0">
               <a:latin typeface="Times New Roman"/>
               <a:cs typeface="Times New Roman"/>
             </a:endParaRPr>
@@ -1751,13 +1864,13 @@
               </a:spcBef>
             </a:pPr>
             <a:r>
-              <a:rPr dirty="0" sz="1200" spc="-10" b="1">
+              <a:rPr sz="1200" b="1" spc="-10" dirty="0">
                 <a:latin typeface="Times New Roman"/>
                 <a:cs typeface="Times New Roman"/>
               </a:rPr>
               <a:t>DEPARTMENT:</a:t>
             </a:r>
-            <a:endParaRPr sz="1200">
+            <a:endParaRPr sz="1200" dirty="0">
               <a:latin typeface="Times New Roman"/>
               <a:cs typeface="Times New Roman"/>
             </a:endParaRPr>
@@ -1772,13 +1885,13 @@
               </a:spcBef>
             </a:pPr>
             <a:r>
-              <a:rPr dirty="0" sz="1200" spc="-10" b="1">
+              <a:rPr sz="1200" b="1" spc="-10" dirty="0">
                 <a:latin typeface="Times New Roman"/>
                 <a:cs typeface="Times New Roman"/>
               </a:rPr>
               <a:t>SEMESTER:</a:t>
             </a:r>
-            <a:endParaRPr sz="1200">
+            <a:endParaRPr sz="1200" dirty="0">
               <a:latin typeface="Times New Roman"/>
               <a:cs typeface="Times New Roman"/>
             </a:endParaRPr>
@@ -1793,20 +1906,20 @@
               </a:spcBef>
             </a:pPr>
             <a:r>
-              <a:rPr dirty="0" sz="1200" b="1">
+              <a:rPr sz="1200" b="1" dirty="0">
                 <a:latin typeface="Times New Roman"/>
                 <a:cs typeface="Times New Roman"/>
               </a:rPr>
               <a:t>ROLL </a:t>
             </a:r>
             <a:r>
-              <a:rPr dirty="0" sz="1200" spc="-25" b="1">
+              <a:rPr sz="1200" b="1" spc="-25" dirty="0">
                 <a:latin typeface="Times New Roman"/>
                 <a:cs typeface="Times New Roman"/>
               </a:rPr>
               <a:t>NO:</a:t>
             </a:r>
-            <a:endParaRPr sz="1200">
+            <a:endParaRPr sz="1200" dirty="0">
               <a:latin typeface="Times New Roman"/>
               <a:cs typeface="Times New Roman"/>
             </a:endParaRPr>
@@ -1821,13 +1934,13 @@
               </a:spcBef>
             </a:pPr>
             <a:r>
-              <a:rPr dirty="0" sz="1200" spc="-10" b="1">
+              <a:rPr sz="1200" b="1" spc="-10" dirty="0">
                 <a:latin typeface="Times New Roman"/>
                 <a:cs typeface="Times New Roman"/>
               </a:rPr>
               <a:t>NMID:</a:t>
             </a:r>
-            <a:endParaRPr sz="1200">
+            <a:endParaRPr sz="1200" dirty="0">
               <a:latin typeface="Times New Roman"/>
               <a:cs typeface="Times New Roman"/>
             </a:endParaRPr>
@@ -1842,13 +1955,13 @@
               </a:spcBef>
             </a:pPr>
             <a:r>
-              <a:rPr dirty="0" sz="1200" spc="-10" b="1">
+              <a:rPr sz="1200" b="1" spc="-10" dirty="0">
                 <a:latin typeface="Times New Roman"/>
                 <a:cs typeface="Times New Roman"/>
               </a:rPr>
               <a:t>DATE:</a:t>
             </a:r>
-            <a:endParaRPr sz="1200">
+            <a:endParaRPr sz="1200" dirty="0">
               <a:latin typeface="Times New Roman"/>
               <a:cs typeface="Times New Roman"/>
             </a:endParaRPr>
@@ -1863,27 +1976,27 @@
               </a:spcBef>
             </a:pPr>
             <a:r>
-              <a:rPr dirty="0" sz="1200" b="1">
+              <a:rPr sz="1200" b="1" dirty="0">
                 <a:latin typeface="Times New Roman"/>
                 <a:cs typeface="Times New Roman"/>
               </a:rPr>
               <a:t>PROJECT</a:t>
             </a:r>
             <a:r>
-              <a:rPr dirty="0" sz="1200" spc="-50" b="1">
-                <a:latin typeface="Times New Roman"/>
-                <a:cs typeface="Times New Roman"/>
-              </a:rPr>
-              <a:t> </a:t>
-            </a:r>
-            <a:r>
-              <a:rPr dirty="0" sz="1200" spc="-10" b="1">
+              <a:rPr sz="1200" b="1" spc="-50" dirty="0">
+                <a:latin typeface="Times New Roman"/>
+                <a:cs typeface="Times New Roman"/>
+              </a:rPr>
+              <a:t> </a:t>
+            </a:r>
+            <a:r>
+              <a:rPr sz="1200" b="1" spc="-10" dirty="0">
                 <a:latin typeface="Times New Roman"/>
                 <a:cs typeface="Times New Roman"/>
               </a:rPr>
               <a:t>TITLE:</a:t>
             </a:r>
-            <a:endParaRPr sz="1200">
+            <a:endParaRPr sz="1200" dirty="0">
               <a:latin typeface="Times New Roman"/>
               <a:cs typeface="Times New Roman"/>
             </a:endParaRPr>
@@ -1894,7 +2007,7 @@
                 <a:spcPct val="100000"/>
               </a:lnSpc>
             </a:pPr>
-            <a:endParaRPr sz="1200">
+            <a:endParaRPr sz="1200" dirty="0">
               <a:latin typeface="Times New Roman"/>
               <a:cs typeface="Times New Roman"/>
             </a:endParaRPr>
@@ -1908,7 +2021,7 @@
                 <a:spcPts val="650"/>
               </a:spcBef>
             </a:pPr>
-            <a:endParaRPr sz="1200">
+            <a:endParaRPr sz="1200" dirty="0">
               <a:latin typeface="Times New Roman"/>
               <a:cs typeface="Times New Roman"/>
             </a:endParaRPr>
@@ -1920,7 +2033,7 @@
               </a:lnSpc>
             </a:pPr>
             <a:r>
-              <a:rPr dirty="0" sz="1400" b="1">
+              <a:rPr sz="1400" b="1" dirty="0">
                 <a:solidFill>
                   <a:srgbClr val="3B78D7"/>
                 </a:solidFill>
@@ -1930,7 +2043,7 @@
               <a:t>1.</a:t>
             </a:r>
             <a:r>
-              <a:rPr dirty="0" sz="1400" spc="-10" b="1">
+              <a:rPr sz="1400" b="1" spc="-10" dirty="0">
                 <a:solidFill>
                   <a:srgbClr val="3B78D7"/>
                 </a:solidFill>
@@ -1940,7 +2053,7 @@
               <a:t> </a:t>
             </a:r>
             <a:r>
-              <a:rPr dirty="0" sz="1400" b="1">
+              <a:rPr sz="1400" b="1" dirty="0">
                 <a:solidFill>
                   <a:srgbClr val="3B78D7"/>
                 </a:solidFill>
@@ -1950,7 +2063,7 @@
               <a:t>Problem</a:t>
             </a:r>
             <a:r>
-              <a:rPr dirty="0" sz="1400" spc="-10" b="1">
+              <a:rPr sz="1400" b="1" spc="-10" dirty="0">
                 <a:solidFill>
                   <a:srgbClr val="3B78D7"/>
                 </a:solidFill>
@@ -1959,7 +2072,7 @@
               </a:rPr>
               <a:t> Statement:</a:t>
             </a:r>
-            <a:endParaRPr sz="1400">
+            <a:endParaRPr sz="1400" dirty="0">
               <a:latin typeface="Times New Roman"/>
               <a:cs typeface="Times New Roman"/>
             </a:endParaRPr>
@@ -1974,314 +2087,314 @@
               </a:spcBef>
             </a:pPr>
             <a:r>
-              <a:rPr dirty="0" sz="1200" i="1">
+              <a:rPr sz="1200" i="1" dirty="0">
                 <a:latin typeface="Times New Roman"/>
                 <a:cs typeface="Times New Roman"/>
               </a:rPr>
               <a:t>(This</a:t>
             </a:r>
             <a:r>
-              <a:rPr dirty="0" sz="1200" spc="-25" i="1">
-                <a:latin typeface="Times New Roman"/>
-                <a:cs typeface="Times New Roman"/>
-              </a:rPr>
-              <a:t> </a:t>
-            </a:r>
-            <a:r>
-              <a:rPr dirty="0" sz="1200" i="1">
+              <a:rPr sz="1200" i="1" spc="-25" dirty="0">
+                <a:latin typeface="Times New Roman"/>
+                <a:cs typeface="Times New Roman"/>
+              </a:rPr>
+              <a:t> </a:t>
+            </a:r>
+            <a:r>
+              <a:rPr sz="1200" i="1" dirty="0">
                 <a:latin typeface="Times New Roman"/>
                 <a:cs typeface="Times New Roman"/>
               </a:rPr>
               <a:t>section</a:t>
             </a:r>
             <a:r>
-              <a:rPr dirty="0" sz="1200" spc="-20" i="1">
-                <a:latin typeface="Times New Roman"/>
-                <a:cs typeface="Times New Roman"/>
-              </a:rPr>
-              <a:t> </a:t>
-            </a:r>
-            <a:r>
-              <a:rPr dirty="0" sz="1200" i="1">
+              <a:rPr sz="1200" i="1" spc="-20" dirty="0">
+                <a:latin typeface="Times New Roman"/>
+                <a:cs typeface="Times New Roman"/>
+              </a:rPr>
+              <a:t> </a:t>
+            </a:r>
+            <a:r>
+              <a:rPr sz="1200" i="1" dirty="0">
                 <a:latin typeface="Times New Roman"/>
                 <a:cs typeface="Times New Roman"/>
               </a:rPr>
               <a:t>explains</a:t>
             </a:r>
             <a:r>
-              <a:rPr dirty="0" sz="1200" spc="-25" i="1">
-                <a:latin typeface="Times New Roman"/>
-                <a:cs typeface="Times New Roman"/>
-              </a:rPr>
-              <a:t> </a:t>
-            </a:r>
-            <a:r>
-              <a:rPr dirty="0" sz="1200" i="1">
+              <a:rPr sz="1200" i="1" spc="-25" dirty="0">
+                <a:latin typeface="Times New Roman"/>
+                <a:cs typeface="Times New Roman"/>
+              </a:rPr>
+              <a:t> </a:t>
+            </a:r>
+            <a:r>
+              <a:rPr sz="1200" i="1" dirty="0">
                 <a:latin typeface="Times New Roman"/>
                 <a:cs typeface="Times New Roman"/>
               </a:rPr>
               <a:t>the</a:t>
             </a:r>
             <a:r>
-              <a:rPr dirty="0" sz="1200" spc="-25" i="1">
-                <a:latin typeface="Times New Roman"/>
-                <a:cs typeface="Times New Roman"/>
-              </a:rPr>
-              <a:t> </a:t>
-            </a:r>
-            <a:r>
-              <a:rPr dirty="0" sz="1200" i="1">
+              <a:rPr sz="1200" i="1" spc="-25" dirty="0">
+                <a:latin typeface="Times New Roman"/>
+                <a:cs typeface="Times New Roman"/>
+              </a:rPr>
+              <a:t> </a:t>
+            </a:r>
+            <a:r>
+              <a:rPr sz="1200" i="1" dirty="0">
                 <a:latin typeface="Times New Roman"/>
                 <a:cs typeface="Times New Roman"/>
               </a:rPr>
               <a:t>need</a:t>
             </a:r>
             <a:r>
-              <a:rPr dirty="0" sz="1200" spc="-15" i="1">
-                <a:latin typeface="Times New Roman"/>
-                <a:cs typeface="Times New Roman"/>
-              </a:rPr>
-              <a:t> </a:t>
-            </a:r>
-            <a:r>
-              <a:rPr dirty="0" sz="1200" i="1">
+              <a:rPr sz="1200" i="1" spc="-15" dirty="0">
+                <a:latin typeface="Times New Roman"/>
+                <a:cs typeface="Times New Roman"/>
+              </a:rPr>
+              <a:t> </a:t>
+            </a:r>
+            <a:r>
+              <a:rPr sz="1200" i="1" dirty="0">
                 <a:latin typeface="Times New Roman"/>
                 <a:cs typeface="Times New Roman"/>
               </a:rPr>
               <a:t>to</a:t>
             </a:r>
             <a:r>
-              <a:rPr dirty="0" sz="1200" spc="-20" i="1">
-                <a:latin typeface="Times New Roman"/>
-                <a:cs typeface="Times New Roman"/>
-              </a:rPr>
-              <a:t> </a:t>
-            </a:r>
-            <a:r>
-              <a:rPr dirty="0" sz="1200" i="1">
+              <a:rPr sz="1200" i="1" spc="-20" dirty="0">
+                <a:latin typeface="Times New Roman"/>
+                <a:cs typeface="Times New Roman"/>
+              </a:rPr>
+              <a:t> </a:t>
+            </a:r>
+            <a:r>
+              <a:rPr sz="1200" i="1" dirty="0">
                 <a:latin typeface="Times New Roman"/>
                 <a:cs typeface="Times New Roman"/>
               </a:rPr>
               <a:t>make</a:t>
             </a:r>
             <a:r>
-              <a:rPr dirty="0" sz="1200" spc="-25" i="1">
-                <a:latin typeface="Times New Roman"/>
-                <a:cs typeface="Times New Roman"/>
-              </a:rPr>
-              <a:t> </a:t>
-            </a:r>
-            <a:r>
-              <a:rPr dirty="0" sz="1200" i="1">
+              <a:rPr sz="1200" i="1" spc="-25" dirty="0">
+                <a:latin typeface="Times New Roman"/>
+                <a:cs typeface="Times New Roman"/>
+              </a:rPr>
+              <a:t> </a:t>
+            </a:r>
+            <a:r>
+              <a:rPr sz="1200" i="1" dirty="0">
                 <a:latin typeface="Times New Roman"/>
                 <a:cs typeface="Times New Roman"/>
               </a:rPr>
               <a:t>the</a:t>
             </a:r>
             <a:r>
-              <a:rPr dirty="0" sz="1200" spc="-20" i="1">
-                <a:latin typeface="Times New Roman"/>
-                <a:cs typeface="Times New Roman"/>
-              </a:rPr>
-              <a:t> </a:t>
-            </a:r>
-            <a:r>
-              <a:rPr dirty="0" sz="1200" i="1">
+              <a:rPr sz="1200" i="1" spc="-20" dirty="0">
+                <a:latin typeface="Times New Roman"/>
+                <a:cs typeface="Times New Roman"/>
+              </a:rPr>
+              <a:t> </a:t>
+            </a:r>
+            <a:r>
+              <a:rPr sz="1200" i="1" dirty="0">
                 <a:latin typeface="Times New Roman"/>
                 <a:cs typeface="Times New Roman"/>
               </a:rPr>
               <a:t>previously</a:t>
             </a:r>
             <a:r>
-              <a:rPr dirty="0" sz="1200" spc="-20" i="1">
-                <a:latin typeface="Times New Roman"/>
-                <a:cs typeface="Times New Roman"/>
-              </a:rPr>
-              <a:t> </a:t>
-            </a:r>
-            <a:r>
-              <a:rPr dirty="0" sz="1200" i="1">
+              <a:rPr sz="1200" i="1" spc="-20" dirty="0">
+                <a:latin typeface="Times New Roman"/>
+                <a:cs typeface="Times New Roman"/>
+              </a:rPr>
+              <a:t> </a:t>
+            </a:r>
+            <a:r>
+              <a:rPr sz="1200" i="1" dirty="0">
                 <a:latin typeface="Times New Roman"/>
                 <a:cs typeface="Times New Roman"/>
               </a:rPr>
               <a:t>created</a:t>
             </a:r>
             <a:r>
-              <a:rPr dirty="0" sz="1200" spc="-20" i="1">
-                <a:latin typeface="Times New Roman"/>
-                <a:cs typeface="Times New Roman"/>
-              </a:rPr>
-              <a:t> </a:t>
-            </a:r>
-            <a:r>
-              <a:rPr dirty="0" sz="1200" i="1">
+              <a:rPr sz="1200" i="1" spc="-20" dirty="0">
+                <a:latin typeface="Times New Roman"/>
+                <a:cs typeface="Times New Roman"/>
+              </a:rPr>
+              <a:t> </a:t>
+            </a:r>
+            <a:r>
+              <a:rPr sz="1200" i="1" dirty="0">
                 <a:latin typeface="Times New Roman"/>
                 <a:cs typeface="Times New Roman"/>
               </a:rPr>
               <a:t>HTML</a:t>
             </a:r>
             <a:r>
-              <a:rPr dirty="0" sz="1200" spc="-15" i="1">
-                <a:latin typeface="Times New Roman"/>
-                <a:cs typeface="Times New Roman"/>
-              </a:rPr>
-              <a:t> </a:t>
-            </a:r>
-            <a:r>
-              <a:rPr dirty="0" sz="1200" i="1">
+              <a:rPr sz="1200" i="1" spc="-15" dirty="0">
+                <a:latin typeface="Times New Roman"/>
+                <a:cs typeface="Times New Roman"/>
+              </a:rPr>
+              <a:t> </a:t>
+            </a:r>
+            <a:r>
+              <a:rPr sz="1200" i="1" dirty="0">
                 <a:latin typeface="Times New Roman"/>
                 <a:cs typeface="Times New Roman"/>
               </a:rPr>
               <a:t>and</a:t>
             </a:r>
             <a:r>
-              <a:rPr dirty="0" sz="1200" spc="-10" i="1">
-                <a:latin typeface="Times New Roman"/>
-                <a:cs typeface="Times New Roman"/>
-              </a:rPr>
-              <a:t> </a:t>
-            </a:r>
-            <a:r>
-              <a:rPr dirty="0" sz="1200" i="1">
+              <a:rPr sz="1200" i="1" spc="-10" dirty="0">
+                <a:latin typeface="Times New Roman"/>
+                <a:cs typeface="Times New Roman"/>
+              </a:rPr>
+              <a:t> </a:t>
+            </a:r>
+            <a:r>
+              <a:rPr sz="1200" i="1" dirty="0">
                 <a:latin typeface="Times New Roman"/>
                 <a:cs typeface="Times New Roman"/>
               </a:rPr>
               <a:t>CSS</a:t>
             </a:r>
             <a:r>
-              <a:rPr dirty="0" sz="1200" spc="-20" i="1">
-                <a:latin typeface="Times New Roman"/>
-                <a:cs typeface="Times New Roman"/>
-              </a:rPr>
-              <a:t> </a:t>
-            </a:r>
-            <a:r>
-              <a:rPr dirty="0" sz="1200" i="1">
+              <a:rPr sz="1200" i="1" spc="-20" dirty="0">
+                <a:latin typeface="Times New Roman"/>
+                <a:cs typeface="Times New Roman"/>
+              </a:rPr>
+              <a:t> </a:t>
+            </a:r>
+            <a:r>
+              <a:rPr sz="1200" i="1" dirty="0">
                 <a:latin typeface="Times New Roman"/>
                 <a:cs typeface="Times New Roman"/>
               </a:rPr>
               <a:t>page</a:t>
             </a:r>
             <a:r>
-              <a:rPr dirty="0" sz="1200" spc="-25" i="1">
-                <a:latin typeface="Times New Roman"/>
-                <a:cs typeface="Times New Roman"/>
-              </a:rPr>
-              <a:t> </a:t>
-            </a:r>
-            <a:r>
-              <a:rPr dirty="0" sz="1200" spc="-10" i="1">
+              <a:rPr sz="1200" i="1" spc="-25" dirty="0">
+                <a:latin typeface="Times New Roman"/>
+                <a:cs typeface="Times New Roman"/>
+              </a:rPr>
+              <a:t> </a:t>
+            </a:r>
+            <a:r>
+              <a:rPr sz="1200" i="1" spc="-10" dirty="0">
                 <a:latin typeface="Times New Roman"/>
                 <a:cs typeface="Times New Roman"/>
               </a:rPr>
               <a:t>interactive</a:t>
             </a:r>
             <a:r>
-              <a:rPr dirty="0" sz="1200" spc="-25" i="1">
-                <a:latin typeface="Times New Roman"/>
-                <a:cs typeface="Times New Roman"/>
-              </a:rPr>
-              <a:t> </a:t>
-            </a:r>
-            <a:r>
-              <a:rPr dirty="0" sz="1200" spc="-10" i="1">
+              <a:rPr sz="1200" i="1" spc="-25" dirty="0">
+                <a:latin typeface="Times New Roman"/>
+                <a:cs typeface="Times New Roman"/>
+              </a:rPr>
+              <a:t> </a:t>
+            </a:r>
+            <a:r>
+              <a:rPr sz="1200" i="1" spc="-10" dirty="0">
                 <a:latin typeface="Times New Roman"/>
                 <a:cs typeface="Times New Roman"/>
               </a:rPr>
               <a:t>using </a:t>
             </a:r>
             <a:r>
-              <a:rPr dirty="0" sz="1200" i="1">
+              <a:rPr sz="1200" i="1" dirty="0">
                 <a:latin typeface="Times New Roman"/>
                 <a:cs typeface="Times New Roman"/>
               </a:rPr>
               <a:t>JavaScript</a:t>
             </a:r>
             <a:r>
-              <a:rPr dirty="0" sz="1200" spc="-30" i="1">
-                <a:latin typeface="Times New Roman"/>
-                <a:cs typeface="Times New Roman"/>
-              </a:rPr>
-              <a:t> </a:t>
-            </a:r>
-            <a:r>
-              <a:rPr dirty="0" sz="1200" i="1">
+              <a:rPr sz="1200" i="1" spc="-30" dirty="0">
+                <a:latin typeface="Times New Roman"/>
+                <a:cs typeface="Times New Roman"/>
+              </a:rPr>
+              <a:t> </a:t>
+            </a:r>
+            <a:r>
+              <a:rPr sz="1200" i="1" dirty="0">
                 <a:latin typeface="Times New Roman"/>
                 <a:cs typeface="Times New Roman"/>
               </a:rPr>
               <a:t>for</a:t>
             </a:r>
             <a:r>
-              <a:rPr dirty="0" sz="1200" spc="-35" i="1">
-                <a:latin typeface="Times New Roman"/>
-                <a:cs typeface="Times New Roman"/>
-              </a:rPr>
-              <a:t> </a:t>
-            </a:r>
-            <a:r>
-              <a:rPr dirty="0" sz="1200" i="1">
+              <a:rPr sz="1200" i="1" spc="-35" dirty="0">
+                <a:latin typeface="Times New Roman"/>
+                <a:cs typeface="Times New Roman"/>
+              </a:rPr>
+              <a:t> </a:t>
+            </a:r>
+            <a:r>
+              <a:rPr sz="1200" i="1" dirty="0">
                 <a:latin typeface="Times New Roman"/>
                 <a:cs typeface="Times New Roman"/>
               </a:rPr>
               <a:t>validation</a:t>
             </a:r>
             <a:r>
-              <a:rPr dirty="0" sz="1200" spc="-30" i="1">
-                <a:latin typeface="Times New Roman"/>
-                <a:cs typeface="Times New Roman"/>
-              </a:rPr>
-              <a:t> </a:t>
-            </a:r>
-            <a:r>
-              <a:rPr dirty="0" sz="1200" i="1">
+              <a:rPr sz="1200" i="1" spc="-30" dirty="0">
+                <a:latin typeface="Times New Roman"/>
+                <a:cs typeface="Times New Roman"/>
+              </a:rPr>
+              <a:t> </a:t>
+            </a:r>
+            <a:r>
+              <a:rPr sz="1200" i="1" dirty="0">
                 <a:latin typeface="Times New Roman"/>
                 <a:cs typeface="Times New Roman"/>
               </a:rPr>
               <a:t>and</a:t>
             </a:r>
             <a:r>
-              <a:rPr dirty="0" sz="1200" spc="-30" i="1">
-                <a:latin typeface="Times New Roman"/>
-                <a:cs typeface="Times New Roman"/>
-              </a:rPr>
-              <a:t> </a:t>
-            </a:r>
-            <a:r>
-              <a:rPr dirty="0" sz="1200" i="1">
+              <a:rPr sz="1200" i="1" spc="-30" dirty="0">
+                <a:latin typeface="Times New Roman"/>
+                <a:cs typeface="Times New Roman"/>
+              </a:rPr>
+              <a:t> </a:t>
+            </a:r>
+            <a:r>
+              <a:rPr sz="1200" i="1" dirty="0">
                 <a:latin typeface="Times New Roman"/>
                 <a:cs typeface="Times New Roman"/>
               </a:rPr>
               <a:t>dynamic</a:t>
             </a:r>
             <a:r>
-              <a:rPr dirty="0" sz="1200" spc="-35" i="1">
-                <a:latin typeface="Times New Roman"/>
-                <a:cs typeface="Times New Roman"/>
-              </a:rPr>
-              <a:t> </a:t>
-            </a:r>
-            <a:r>
-              <a:rPr dirty="0" sz="1200" i="1">
+              <a:rPr sz="1200" i="1" spc="-35" dirty="0">
+                <a:latin typeface="Times New Roman"/>
+                <a:cs typeface="Times New Roman"/>
+              </a:rPr>
+              <a:t> </a:t>
+            </a:r>
+            <a:r>
+              <a:rPr sz="1200" i="1" dirty="0">
                 <a:latin typeface="Times New Roman"/>
                 <a:cs typeface="Times New Roman"/>
               </a:rPr>
               <a:t>data</a:t>
             </a:r>
             <a:r>
-              <a:rPr dirty="0" sz="1200" spc="-30" i="1">
-                <a:latin typeface="Times New Roman"/>
-                <a:cs typeface="Times New Roman"/>
-              </a:rPr>
-              <a:t> </a:t>
-            </a:r>
-            <a:r>
-              <a:rPr dirty="0" sz="1200" spc="-10" i="1">
+              <a:rPr sz="1200" i="1" spc="-30" dirty="0">
+                <a:latin typeface="Times New Roman"/>
+                <a:cs typeface="Times New Roman"/>
+              </a:rPr>
+              <a:t> </a:t>
+            </a:r>
+            <a:r>
+              <a:rPr sz="1200" i="1" spc="-10" dirty="0">
                 <a:latin typeface="Times New Roman"/>
                 <a:cs typeface="Times New Roman"/>
               </a:rPr>
               <a:t>handling.)</a:t>
             </a:r>
-            <a:endParaRPr sz="1200">
+            <a:endParaRPr sz="1200" dirty="0">
               <a:latin typeface="Times New Roman"/>
               <a:cs typeface="Times New Roman"/>
             </a:endParaRPr>
@@ -2290,7 +2403,7 @@
       </p:sp>
       <p:grpSp>
         <p:nvGrpSpPr>
-          <p:cNvPr id="10" name="object 10" descr=""/>
+          <p:cNvPr id="10" name="object 10"/>
           <p:cNvGrpSpPr/>
           <p:nvPr/>
         </p:nvGrpSpPr>
@@ -2304,7 +2417,7 @@
         </p:grpSpPr>
         <p:sp>
           <p:nvSpPr>
-            <p:cNvPr id="11" name="object 11" descr=""/>
+            <p:cNvPr id="11" name="object 11"/>
             <p:cNvSpPr/>
             <p:nvPr/>
           </p:nvSpPr>
@@ -2347,12 +2460,14 @@
           <p:txBody>
             <a:bodyPr wrap="square" lIns="0" tIns="0" rIns="0" bIns="0" rtlCol="0"/>
             <a:lstStyle/>
-            <a:p/>
+            <a:p>
+              <a:endParaRPr/>
+            </a:p>
           </p:txBody>
         </p:sp>
         <p:sp>
           <p:nvSpPr>
-            <p:cNvPr id="12" name="object 12" descr=""/>
+            <p:cNvPr id="12" name="object 12"/>
             <p:cNvSpPr/>
             <p:nvPr/>
           </p:nvSpPr>
@@ -2395,12 +2510,14 @@
           <p:txBody>
             <a:bodyPr wrap="square" lIns="0" tIns="0" rIns="0" bIns="0" rtlCol="0"/>
             <a:lstStyle/>
-            <a:p/>
+            <a:p>
+              <a:endParaRPr/>
+            </a:p>
           </p:txBody>
         </p:sp>
         <p:sp>
           <p:nvSpPr>
-            <p:cNvPr id="13" name="object 13" descr=""/>
+            <p:cNvPr id="13" name="object 13"/>
             <p:cNvSpPr/>
             <p:nvPr/>
           </p:nvSpPr>
@@ -2461,12 +2578,14 @@
           <p:txBody>
             <a:bodyPr wrap="square" lIns="0" tIns="0" rIns="0" bIns="0" rtlCol="0"/>
             <a:lstStyle/>
-            <a:p/>
+            <a:p>
+              <a:endParaRPr/>
+            </a:p>
           </p:txBody>
         </p:sp>
         <p:sp>
           <p:nvSpPr>
-            <p:cNvPr id="14" name="object 14" descr=""/>
+            <p:cNvPr id="14" name="object 14"/>
             <p:cNvSpPr/>
             <p:nvPr/>
           </p:nvSpPr>
@@ -2509,12 +2628,14 @@
           <p:txBody>
             <a:bodyPr wrap="square" lIns="0" tIns="0" rIns="0" bIns="0" rtlCol="0"/>
             <a:lstStyle/>
-            <a:p/>
+            <a:p>
+              <a:endParaRPr/>
+            </a:p>
           </p:txBody>
         </p:sp>
         <p:sp>
           <p:nvSpPr>
-            <p:cNvPr id="15" name="object 15" descr=""/>
+            <p:cNvPr id="15" name="object 15"/>
             <p:cNvSpPr/>
             <p:nvPr/>
           </p:nvSpPr>
@@ -2557,12 +2678,14 @@
           <p:txBody>
             <a:bodyPr wrap="square" lIns="0" tIns="0" rIns="0" bIns="0" rtlCol="0"/>
             <a:lstStyle/>
-            <a:p/>
+            <a:p>
+              <a:endParaRPr/>
+            </a:p>
           </p:txBody>
         </p:sp>
         <p:sp>
           <p:nvSpPr>
-            <p:cNvPr id="16" name="object 16" descr=""/>
+            <p:cNvPr id="16" name="object 16"/>
             <p:cNvSpPr/>
             <p:nvPr/>
           </p:nvSpPr>
@@ -2617,13 +2740,15 @@
           <p:txBody>
             <a:bodyPr wrap="square" lIns="0" tIns="0" rIns="0" bIns="0" rtlCol="0"/>
             <a:lstStyle/>
-            <a:p/>
+            <a:p>
+              <a:endParaRPr/>
+            </a:p>
           </p:txBody>
         </p:sp>
       </p:grpSp>
       <p:sp>
         <p:nvSpPr>
-          <p:cNvPr id="17" name="object 17" descr=""/>
+          <p:cNvPr id="17" name="object 17"/>
           <p:cNvSpPr txBox="1"/>
           <p:nvPr/>
         </p:nvSpPr>
@@ -2637,7 +2762,7 @@
           </a:prstGeom>
         </p:spPr>
         <p:txBody>
-          <a:bodyPr wrap="square" lIns="0" tIns="13335" rIns="0" bIns="0" rtlCol="0" vert="horz">
+          <a:bodyPr vert="horz" wrap="square" lIns="0" tIns="13335" rIns="0" bIns="0" rtlCol="0">
             <a:spAutoFit/>
           </a:bodyPr>
           <a:lstStyle/>
@@ -2651,7 +2776,7 @@
               </a:spcBef>
             </a:pPr>
             <a:r>
-              <a:rPr dirty="0" sz="1400" b="1">
+              <a:rPr sz="1400" b="1" dirty="0">
                 <a:solidFill>
                   <a:srgbClr val="3B78D7"/>
                 </a:solidFill>
@@ -2661,7 +2786,7 @@
               <a:t>2.</a:t>
             </a:r>
             <a:r>
-              <a:rPr dirty="0" sz="1400" spc="-5" b="1">
+              <a:rPr sz="1400" b="1" spc="-5" dirty="0">
                 <a:solidFill>
                   <a:srgbClr val="3B78D7"/>
                 </a:solidFill>
@@ -2671,7 +2796,7 @@
               <a:t> </a:t>
             </a:r>
             <a:r>
-              <a:rPr dirty="0" sz="1400" spc="-10" b="1">
+              <a:rPr sz="1400" b="1" spc="-10" dirty="0">
                 <a:solidFill>
                   <a:srgbClr val="3B78D7"/>
                 </a:solidFill>
@@ -2695,273 +2820,273 @@
               </a:spcBef>
             </a:pPr>
             <a:r>
-              <a:rPr dirty="0" sz="1200" i="1">
+              <a:rPr sz="1200" i="1" dirty="0">
                 <a:latin typeface="Times New Roman"/>
                 <a:cs typeface="Times New Roman"/>
               </a:rPr>
               <a:t>(This</a:t>
             </a:r>
             <a:r>
-              <a:rPr dirty="0" sz="1200" spc="-20" i="1">
-                <a:latin typeface="Times New Roman"/>
-                <a:cs typeface="Times New Roman"/>
-              </a:rPr>
-              <a:t> </a:t>
-            </a:r>
-            <a:r>
-              <a:rPr dirty="0" sz="1200" i="1">
+              <a:rPr sz="1200" i="1" spc="-20" dirty="0">
+                <a:latin typeface="Times New Roman"/>
+                <a:cs typeface="Times New Roman"/>
+              </a:rPr>
+              <a:t> </a:t>
+            </a:r>
+            <a:r>
+              <a:rPr sz="1200" i="1" dirty="0">
                 <a:latin typeface="Times New Roman"/>
                 <a:cs typeface="Times New Roman"/>
               </a:rPr>
               <a:t>section</a:t>
             </a:r>
             <a:r>
-              <a:rPr dirty="0" sz="1200" spc="-10" i="1">
-                <a:latin typeface="Times New Roman"/>
-                <a:cs typeface="Times New Roman"/>
-              </a:rPr>
-              <a:t> </a:t>
-            </a:r>
-            <a:r>
-              <a:rPr dirty="0" sz="1200" i="1">
+              <a:rPr sz="1200" i="1" spc="-10" dirty="0">
+                <a:latin typeface="Times New Roman"/>
+                <a:cs typeface="Times New Roman"/>
+              </a:rPr>
+              <a:t> </a:t>
+            </a:r>
+            <a:r>
+              <a:rPr sz="1200" i="1" dirty="0">
                 <a:latin typeface="Times New Roman"/>
                 <a:cs typeface="Times New Roman"/>
               </a:rPr>
               <a:t>describes</a:t>
             </a:r>
             <a:r>
-              <a:rPr dirty="0" sz="1200" spc="-15" i="1">
-                <a:latin typeface="Times New Roman"/>
-                <a:cs typeface="Times New Roman"/>
-              </a:rPr>
-              <a:t> </a:t>
-            </a:r>
-            <a:r>
-              <a:rPr dirty="0" sz="1200" i="1">
+              <a:rPr sz="1200" i="1" spc="-15" dirty="0">
+                <a:latin typeface="Times New Roman"/>
+                <a:cs typeface="Times New Roman"/>
+              </a:rPr>
+              <a:t> </a:t>
+            </a:r>
+            <a:r>
+              <a:rPr sz="1200" i="1" dirty="0">
                 <a:latin typeface="Times New Roman"/>
                 <a:cs typeface="Times New Roman"/>
               </a:rPr>
               <a:t>the</a:t>
             </a:r>
             <a:r>
-              <a:rPr dirty="0" sz="1200" spc="-10" i="1">
-                <a:latin typeface="Times New Roman"/>
-                <a:cs typeface="Times New Roman"/>
-              </a:rPr>
-              <a:t> </a:t>
-            </a:r>
-            <a:r>
-              <a:rPr dirty="0" sz="1200" i="1">
+              <a:rPr sz="1200" i="1" spc="-10" dirty="0">
+                <a:latin typeface="Times New Roman"/>
+                <a:cs typeface="Times New Roman"/>
+              </a:rPr>
+              <a:t> </a:t>
+            </a:r>
+            <a:r>
+              <a:rPr sz="1200" i="1" dirty="0">
                 <a:latin typeface="Times New Roman"/>
                 <a:cs typeface="Times New Roman"/>
               </a:rPr>
               <a:t>goal</a:t>
             </a:r>
             <a:r>
-              <a:rPr dirty="0" sz="1200" spc="-15" i="1">
-                <a:latin typeface="Times New Roman"/>
-                <a:cs typeface="Times New Roman"/>
-              </a:rPr>
-              <a:t> </a:t>
-            </a:r>
-            <a:r>
-              <a:rPr dirty="0" sz="1200" i="1">
+              <a:rPr sz="1200" i="1" spc="-15" dirty="0">
+                <a:latin typeface="Times New Roman"/>
+                <a:cs typeface="Times New Roman"/>
+              </a:rPr>
+              <a:t> </a:t>
+            </a:r>
+            <a:r>
+              <a:rPr sz="1200" i="1" dirty="0">
                 <a:latin typeface="Times New Roman"/>
                 <a:cs typeface="Times New Roman"/>
               </a:rPr>
               <a:t>of</a:t>
             </a:r>
             <a:r>
-              <a:rPr dirty="0" sz="1200" spc="-10" i="1">
-                <a:latin typeface="Times New Roman"/>
-                <a:cs typeface="Times New Roman"/>
-              </a:rPr>
-              <a:t> </a:t>
-            </a:r>
-            <a:r>
-              <a:rPr dirty="0" sz="1200" i="1">
+              <a:rPr sz="1200" i="1" spc="-10" dirty="0">
+                <a:latin typeface="Times New Roman"/>
+                <a:cs typeface="Times New Roman"/>
+              </a:rPr>
+              <a:t> </a:t>
+            </a:r>
+            <a:r>
+              <a:rPr sz="1200" i="1" dirty="0">
                 <a:latin typeface="Times New Roman"/>
                 <a:cs typeface="Times New Roman"/>
               </a:rPr>
               <a:t>the</a:t>
             </a:r>
             <a:r>
-              <a:rPr dirty="0" sz="1200" spc="-15" i="1">
-                <a:latin typeface="Times New Roman"/>
-                <a:cs typeface="Times New Roman"/>
-              </a:rPr>
-              <a:t> </a:t>
-            </a:r>
-            <a:r>
-              <a:rPr dirty="0" sz="1200" i="1">
+              <a:rPr sz="1200" i="1" spc="-15" dirty="0">
+                <a:latin typeface="Times New Roman"/>
+                <a:cs typeface="Times New Roman"/>
+              </a:rPr>
+              <a:t> </a:t>
+            </a:r>
+            <a:r>
+              <a:rPr sz="1200" i="1" dirty="0">
                 <a:latin typeface="Times New Roman"/>
                 <a:cs typeface="Times New Roman"/>
               </a:rPr>
               <a:t>assignment,</a:t>
             </a:r>
             <a:r>
-              <a:rPr dirty="0" sz="1200" spc="-10" i="1">
-                <a:latin typeface="Times New Roman"/>
-                <a:cs typeface="Times New Roman"/>
-              </a:rPr>
-              <a:t> </a:t>
-            </a:r>
-            <a:r>
-              <a:rPr dirty="0" sz="1200" i="1">
+              <a:rPr sz="1200" i="1" spc="-10" dirty="0">
+                <a:latin typeface="Times New Roman"/>
+                <a:cs typeface="Times New Roman"/>
+              </a:rPr>
+              <a:t> </a:t>
+            </a:r>
+            <a:r>
+              <a:rPr sz="1200" i="1" dirty="0">
                 <a:latin typeface="Times New Roman"/>
                 <a:cs typeface="Times New Roman"/>
               </a:rPr>
               <a:t>which</a:t>
             </a:r>
             <a:r>
-              <a:rPr dirty="0" sz="1200" spc="-15" i="1">
-                <a:latin typeface="Times New Roman"/>
-                <a:cs typeface="Times New Roman"/>
-              </a:rPr>
-              <a:t> </a:t>
-            </a:r>
-            <a:r>
-              <a:rPr dirty="0" sz="1200" i="1">
+              <a:rPr sz="1200" i="1" spc="-15" dirty="0">
+                <a:latin typeface="Times New Roman"/>
+                <a:cs typeface="Times New Roman"/>
+              </a:rPr>
+              <a:t> </a:t>
+            </a:r>
+            <a:r>
+              <a:rPr sz="1200" i="1" dirty="0">
                 <a:latin typeface="Times New Roman"/>
                 <a:cs typeface="Times New Roman"/>
               </a:rPr>
               <a:t>is</a:t>
             </a:r>
             <a:r>
-              <a:rPr dirty="0" sz="1200" spc="-15" i="1">
-                <a:latin typeface="Times New Roman"/>
-                <a:cs typeface="Times New Roman"/>
-              </a:rPr>
-              <a:t> </a:t>
-            </a:r>
-            <a:r>
-              <a:rPr dirty="0" sz="1200" i="1">
+              <a:rPr sz="1200" i="1" spc="-15" dirty="0">
+                <a:latin typeface="Times New Roman"/>
+                <a:cs typeface="Times New Roman"/>
+              </a:rPr>
+              <a:t> </a:t>
+            </a:r>
+            <a:r>
+              <a:rPr sz="1200" i="1" dirty="0">
                 <a:latin typeface="Times New Roman"/>
                 <a:cs typeface="Times New Roman"/>
               </a:rPr>
               <a:t>to</a:t>
             </a:r>
             <a:r>
-              <a:rPr dirty="0" sz="1200" spc="-10" i="1">
+              <a:rPr sz="1200" i="1" spc="-10" dirty="0">
                 <a:latin typeface="Times New Roman"/>
                 <a:cs typeface="Times New Roman"/>
               </a:rPr>
               <a:t> implement client-</a:t>
             </a:r>
             <a:r>
-              <a:rPr dirty="0" sz="1200" i="1">
+              <a:rPr sz="1200" i="1" dirty="0">
                 <a:latin typeface="Times New Roman"/>
                 <a:cs typeface="Times New Roman"/>
               </a:rPr>
               <a:t>side</a:t>
             </a:r>
             <a:r>
-              <a:rPr dirty="0" sz="1200" spc="-15" i="1">
-                <a:latin typeface="Times New Roman"/>
-                <a:cs typeface="Times New Roman"/>
-              </a:rPr>
-              <a:t> </a:t>
-            </a:r>
-            <a:r>
-              <a:rPr dirty="0" sz="1200" spc="-10" i="1">
+              <a:rPr sz="1200" i="1" spc="-15" dirty="0">
+                <a:latin typeface="Times New Roman"/>
+                <a:cs typeface="Times New Roman"/>
+              </a:rPr>
+              <a:t> </a:t>
+            </a:r>
+            <a:r>
+              <a:rPr sz="1200" i="1" spc="-10" dirty="0">
                 <a:latin typeface="Times New Roman"/>
                 <a:cs typeface="Times New Roman"/>
               </a:rPr>
               <a:t>interactivity, </a:t>
             </a:r>
             <a:r>
-              <a:rPr dirty="0" sz="1200" spc="-20" i="1">
+              <a:rPr sz="1200" i="1" spc="-20" dirty="0">
                 <a:latin typeface="Times New Roman"/>
                 <a:cs typeface="Times New Roman"/>
               </a:rPr>
               <a:t>form </a:t>
             </a:r>
             <a:r>
-              <a:rPr dirty="0" sz="1200" i="1">
+              <a:rPr sz="1200" i="1" dirty="0">
                 <a:latin typeface="Times New Roman"/>
                 <a:cs typeface="Times New Roman"/>
               </a:rPr>
               <a:t>validation,</a:t>
             </a:r>
             <a:r>
-              <a:rPr dirty="0" sz="1200" spc="-35" i="1">
-                <a:latin typeface="Times New Roman"/>
-                <a:cs typeface="Times New Roman"/>
-              </a:rPr>
-              <a:t> </a:t>
-            </a:r>
-            <a:r>
-              <a:rPr dirty="0" sz="1200" i="1">
+              <a:rPr sz="1200" i="1" spc="-35" dirty="0">
+                <a:latin typeface="Times New Roman"/>
+                <a:cs typeface="Times New Roman"/>
+              </a:rPr>
+              <a:t> </a:t>
+            </a:r>
+            <a:r>
+              <a:rPr sz="1200" i="1" dirty="0">
                 <a:latin typeface="Times New Roman"/>
                 <a:cs typeface="Times New Roman"/>
               </a:rPr>
               <a:t>and</a:t>
             </a:r>
             <a:r>
-              <a:rPr dirty="0" sz="1200" spc="-30" i="1">
-                <a:latin typeface="Times New Roman"/>
-                <a:cs typeface="Times New Roman"/>
-              </a:rPr>
-              <a:t> </a:t>
-            </a:r>
-            <a:r>
-              <a:rPr dirty="0" sz="1200" i="1">
+              <a:rPr sz="1200" i="1" spc="-30" dirty="0">
+                <a:latin typeface="Times New Roman"/>
+                <a:cs typeface="Times New Roman"/>
+              </a:rPr>
+              <a:t> </a:t>
+            </a:r>
+            <a:r>
+              <a:rPr sz="1200" i="1" dirty="0">
                 <a:latin typeface="Times New Roman"/>
                 <a:cs typeface="Times New Roman"/>
               </a:rPr>
               <a:t>dynamic</a:t>
             </a:r>
             <a:r>
-              <a:rPr dirty="0" sz="1200" spc="-30" i="1">
-                <a:latin typeface="Times New Roman"/>
-                <a:cs typeface="Times New Roman"/>
-              </a:rPr>
-              <a:t> </a:t>
-            </a:r>
-            <a:r>
-              <a:rPr dirty="0" sz="1200" i="1">
+              <a:rPr sz="1200" i="1" spc="-30" dirty="0">
+                <a:latin typeface="Times New Roman"/>
+                <a:cs typeface="Times New Roman"/>
+              </a:rPr>
+              <a:t> </a:t>
+            </a:r>
+            <a:r>
+              <a:rPr sz="1200" i="1" dirty="0">
                 <a:latin typeface="Times New Roman"/>
                 <a:cs typeface="Times New Roman"/>
               </a:rPr>
               <a:t>table</a:t>
             </a:r>
             <a:r>
-              <a:rPr dirty="0" sz="1200" spc="-35" i="1">
-                <a:latin typeface="Times New Roman"/>
-                <a:cs typeface="Times New Roman"/>
-              </a:rPr>
-              <a:t> </a:t>
-            </a:r>
-            <a:r>
-              <a:rPr dirty="0" sz="1200" i="1">
+              <a:rPr sz="1200" i="1" spc="-35" dirty="0">
+                <a:latin typeface="Times New Roman"/>
+                <a:cs typeface="Times New Roman"/>
+              </a:rPr>
+              <a:t> </a:t>
+            </a:r>
+            <a:r>
+              <a:rPr sz="1200" i="1" dirty="0">
                 <a:latin typeface="Times New Roman"/>
                 <a:cs typeface="Times New Roman"/>
               </a:rPr>
               <a:t>updates</a:t>
             </a:r>
             <a:r>
-              <a:rPr dirty="0" sz="1200" spc="-35" i="1">
-                <a:latin typeface="Times New Roman"/>
-                <a:cs typeface="Times New Roman"/>
-              </a:rPr>
-              <a:t> </a:t>
-            </a:r>
-            <a:r>
-              <a:rPr dirty="0" sz="1200" i="1">
+              <a:rPr sz="1200" i="1" spc="-35" dirty="0">
+                <a:latin typeface="Times New Roman"/>
+                <a:cs typeface="Times New Roman"/>
+              </a:rPr>
+              <a:t> </a:t>
+            </a:r>
+            <a:r>
+              <a:rPr sz="1200" i="1" dirty="0">
                 <a:latin typeface="Times New Roman"/>
                 <a:cs typeface="Times New Roman"/>
               </a:rPr>
               <a:t>using</a:t>
             </a:r>
             <a:r>
-              <a:rPr dirty="0" sz="1200" spc="-30" i="1">
-                <a:latin typeface="Times New Roman"/>
-                <a:cs typeface="Times New Roman"/>
-              </a:rPr>
-              <a:t> </a:t>
-            </a:r>
-            <a:r>
-              <a:rPr dirty="0" sz="1200" spc="-10" i="1">
+              <a:rPr sz="1200" i="1" spc="-30" dirty="0">
+                <a:latin typeface="Times New Roman"/>
+                <a:cs typeface="Times New Roman"/>
+              </a:rPr>
+              <a:t> </a:t>
+            </a:r>
+            <a:r>
+              <a:rPr sz="1200" i="1" spc="-10" dirty="0">
                 <a:latin typeface="Times New Roman"/>
                 <a:cs typeface="Times New Roman"/>
               </a:rPr>
@@ -2976,7 +3101,7 @@
       </p:sp>
       <p:grpSp>
         <p:nvGrpSpPr>
-          <p:cNvPr id="18" name="object 18" descr=""/>
+          <p:cNvPr id="18" name="object 18"/>
           <p:cNvGrpSpPr/>
           <p:nvPr/>
         </p:nvGrpSpPr>
@@ -2990,7 +3115,7 @@
         </p:grpSpPr>
         <p:sp>
           <p:nvSpPr>
-            <p:cNvPr id="19" name="object 19" descr=""/>
+            <p:cNvPr id="19" name="object 19"/>
             <p:cNvSpPr/>
             <p:nvPr/>
           </p:nvSpPr>
@@ -3033,12 +3158,14 @@
           <p:txBody>
             <a:bodyPr wrap="square" lIns="0" tIns="0" rIns="0" bIns="0" rtlCol="0"/>
             <a:lstStyle/>
-            <a:p/>
+            <a:p>
+              <a:endParaRPr/>
+            </a:p>
           </p:txBody>
         </p:sp>
         <p:sp>
           <p:nvSpPr>
-            <p:cNvPr id="20" name="object 20" descr=""/>
+            <p:cNvPr id="20" name="object 20"/>
             <p:cNvSpPr/>
             <p:nvPr/>
           </p:nvSpPr>
@@ -3081,12 +3208,14 @@
           <p:txBody>
             <a:bodyPr wrap="square" lIns="0" tIns="0" rIns="0" bIns="0" rtlCol="0"/>
             <a:lstStyle/>
-            <a:p/>
+            <a:p>
+              <a:endParaRPr/>
+            </a:p>
           </p:txBody>
         </p:sp>
         <p:sp>
           <p:nvSpPr>
-            <p:cNvPr id="21" name="object 21" descr=""/>
+            <p:cNvPr id="21" name="object 21"/>
             <p:cNvSpPr/>
             <p:nvPr/>
           </p:nvSpPr>
@@ -3147,12 +3276,14 @@
           <p:txBody>
             <a:bodyPr wrap="square" lIns="0" tIns="0" rIns="0" bIns="0" rtlCol="0"/>
             <a:lstStyle/>
-            <a:p/>
+            <a:p>
+              <a:endParaRPr/>
+            </a:p>
           </p:txBody>
         </p:sp>
         <p:sp>
           <p:nvSpPr>
-            <p:cNvPr id="22" name="object 22" descr=""/>
+            <p:cNvPr id="22" name="object 22"/>
             <p:cNvSpPr/>
             <p:nvPr/>
           </p:nvSpPr>
@@ -3195,12 +3326,14 @@
           <p:txBody>
             <a:bodyPr wrap="square" lIns="0" tIns="0" rIns="0" bIns="0" rtlCol="0"/>
             <a:lstStyle/>
-            <a:p/>
+            <a:p>
+              <a:endParaRPr/>
+            </a:p>
           </p:txBody>
         </p:sp>
         <p:sp>
           <p:nvSpPr>
-            <p:cNvPr id="23" name="object 23" descr=""/>
+            <p:cNvPr id="23" name="object 23"/>
             <p:cNvSpPr/>
             <p:nvPr/>
           </p:nvSpPr>
@@ -3243,12 +3376,14 @@
           <p:txBody>
             <a:bodyPr wrap="square" lIns="0" tIns="0" rIns="0" bIns="0" rtlCol="0"/>
             <a:lstStyle/>
-            <a:p/>
+            <a:p>
+              <a:endParaRPr/>
+            </a:p>
           </p:txBody>
         </p:sp>
         <p:sp>
           <p:nvSpPr>
-            <p:cNvPr id="24" name="object 24" descr=""/>
+            <p:cNvPr id="24" name="object 24"/>
             <p:cNvSpPr/>
             <p:nvPr/>
           </p:nvSpPr>
@@ -3303,13 +3438,15 @@
           <p:txBody>
             <a:bodyPr wrap="square" lIns="0" tIns="0" rIns="0" bIns="0" rtlCol="0"/>
             <a:lstStyle/>
-            <a:p/>
+            <a:p>
+              <a:endParaRPr/>
+            </a:p>
           </p:txBody>
         </p:sp>
       </p:grpSp>
       <p:sp>
         <p:nvSpPr>
-          <p:cNvPr id="25" name="object 25" descr=""/>
+          <p:cNvPr id="25" name="object 25"/>
           <p:cNvSpPr txBox="1"/>
           <p:nvPr/>
         </p:nvSpPr>
@@ -3323,7 +3460,7 @@
           </a:prstGeom>
         </p:spPr>
         <p:txBody>
-          <a:bodyPr wrap="square" lIns="0" tIns="92710" rIns="0" bIns="0" rtlCol="0" vert="horz">
+          <a:bodyPr vert="horz" wrap="square" lIns="0" tIns="92710" rIns="0" bIns="0" rtlCol="0">
             <a:spAutoFit/>
           </a:bodyPr>
           <a:lstStyle/>
@@ -3342,7 +3479,7 @@
               </a:tabLst>
             </a:pPr>
             <a:r>
-              <a:rPr dirty="0" sz="1400" spc="-10" b="1">
+              <a:rPr sz="1400" b="1" spc="-10" dirty="0">
                 <a:solidFill>
                   <a:srgbClr val="3B78D7"/>
                 </a:solidFill>
@@ -3366,161 +3503,161 @@
               </a:spcBef>
             </a:pPr>
             <a:r>
-              <a:rPr dirty="0" sz="1200" i="1">
+              <a:rPr sz="1200" i="1" dirty="0">
                 <a:latin typeface="Times New Roman"/>
                 <a:cs typeface="Times New Roman"/>
               </a:rPr>
               <a:t>(This</a:t>
             </a:r>
             <a:r>
-              <a:rPr dirty="0" sz="1200" spc="-20" i="1">
-                <a:latin typeface="Times New Roman"/>
-                <a:cs typeface="Times New Roman"/>
-              </a:rPr>
-              <a:t> </a:t>
-            </a:r>
-            <a:r>
-              <a:rPr dirty="0" sz="1200" i="1">
+              <a:rPr sz="1200" i="1" spc="-20" dirty="0">
+                <a:latin typeface="Times New Roman"/>
+                <a:cs typeface="Times New Roman"/>
+              </a:rPr>
+              <a:t> </a:t>
+            </a:r>
+            <a:r>
+              <a:rPr sz="1200" i="1" dirty="0">
                 <a:latin typeface="Times New Roman"/>
                 <a:cs typeface="Times New Roman"/>
               </a:rPr>
               <a:t>section</a:t>
             </a:r>
             <a:r>
-              <a:rPr dirty="0" sz="1200" spc="-10" i="1">
-                <a:latin typeface="Times New Roman"/>
-                <a:cs typeface="Times New Roman"/>
-              </a:rPr>
-              <a:t> </a:t>
-            </a:r>
-            <a:r>
-              <a:rPr dirty="0" sz="1200" i="1">
+              <a:rPr sz="1200" i="1" spc="-10" dirty="0">
+                <a:latin typeface="Times New Roman"/>
+                <a:cs typeface="Times New Roman"/>
+              </a:rPr>
+              <a:t> </a:t>
+            </a:r>
+            <a:r>
+              <a:rPr sz="1200" i="1" dirty="0">
                 <a:latin typeface="Times New Roman"/>
                 <a:cs typeface="Times New Roman"/>
               </a:rPr>
               <a:t>lists</a:t>
             </a:r>
             <a:r>
-              <a:rPr dirty="0" sz="1200" spc="-10" i="1">
-                <a:latin typeface="Times New Roman"/>
-                <a:cs typeface="Times New Roman"/>
-              </a:rPr>
-              <a:t> </a:t>
-            </a:r>
-            <a:r>
-              <a:rPr dirty="0" sz="1200" i="1">
+              <a:rPr sz="1200" i="1" spc="-10" dirty="0">
+                <a:latin typeface="Times New Roman"/>
+                <a:cs typeface="Times New Roman"/>
+              </a:rPr>
+              <a:t> </a:t>
+            </a:r>
+            <a:r>
+              <a:rPr sz="1200" i="1" dirty="0">
                 <a:latin typeface="Times New Roman"/>
                 <a:cs typeface="Times New Roman"/>
               </a:rPr>
               <a:t>the</a:t>
             </a:r>
             <a:r>
-              <a:rPr dirty="0" sz="1200" spc="-10" i="1">
-                <a:latin typeface="Times New Roman"/>
-                <a:cs typeface="Times New Roman"/>
-              </a:rPr>
-              <a:t> </a:t>
-            </a:r>
-            <a:r>
-              <a:rPr dirty="0" sz="1200" i="1">
+              <a:rPr sz="1200" i="1" spc="-10" dirty="0">
+                <a:latin typeface="Times New Roman"/>
+                <a:cs typeface="Times New Roman"/>
+              </a:rPr>
+              <a:t> </a:t>
+            </a:r>
+            <a:r>
+              <a:rPr sz="1200" i="1" dirty="0">
                 <a:latin typeface="Times New Roman"/>
                 <a:cs typeface="Times New Roman"/>
               </a:rPr>
               <a:t>JavaScript</a:t>
             </a:r>
             <a:r>
-              <a:rPr dirty="0" sz="1200" spc="-5" i="1">
-                <a:latin typeface="Times New Roman"/>
-                <a:cs typeface="Times New Roman"/>
-              </a:rPr>
-              <a:t> </a:t>
-            </a:r>
-            <a:r>
-              <a:rPr dirty="0" sz="1200" spc="-10" i="1">
+              <a:rPr sz="1200" i="1" spc="-5" dirty="0">
+                <a:latin typeface="Times New Roman"/>
+                <a:cs typeface="Times New Roman"/>
+              </a:rPr>
+              <a:t> </a:t>
+            </a:r>
+            <a:r>
+              <a:rPr sz="1200" i="1" spc="-10" dirty="0">
                 <a:latin typeface="Times New Roman"/>
                 <a:cs typeface="Times New Roman"/>
               </a:rPr>
               <a:t>functionalities</a:t>
             </a:r>
             <a:r>
-              <a:rPr dirty="0" sz="1200" spc="-15" i="1">
-                <a:latin typeface="Times New Roman"/>
-                <a:cs typeface="Times New Roman"/>
-              </a:rPr>
-              <a:t> </a:t>
-            </a:r>
-            <a:r>
-              <a:rPr dirty="0" sz="1200" i="1">
+              <a:rPr sz="1200" i="1" spc="-15" dirty="0">
+                <a:latin typeface="Times New Roman"/>
+                <a:cs typeface="Times New Roman"/>
+              </a:rPr>
+              <a:t> </a:t>
+            </a:r>
+            <a:r>
+              <a:rPr sz="1200" i="1" dirty="0">
                 <a:latin typeface="Times New Roman"/>
                 <a:cs typeface="Times New Roman"/>
               </a:rPr>
               <a:t>that</a:t>
             </a:r>
             <a:r>
-              <a:rPr dirty="0" sz="1200" spc="-10" i="1">
-                <a:latin typeface="Times New Roman"/>
-                <a:cs typeface="Times New Roman"/>
-              </a:rPr>
-              <a:t> </a:t>
-            </a:r>
-            <a:r>
-              <a:rPr dirty="0" sz="1200" i="1">
+              <a:rPr sz="1200" i="1" spc="-10" dirty="0">
+                <a:latin typeface="Times New Roman"/>
+                <a:cs typeface="Times New Roman"/>
+              </a:rPr>
+              <a:t> </a:t>
+            </a:r>
+            <a:r>
+              <a:rPr sz="1200" i="1" dirty="0">
                 <a:latin typeface="Times New Roman"/>
                 <a:cs typeface="Times New Roman"/>
               </a:rPr>
               <a:t>must</a:t>
             </a:r>
             <a:r>
-              <a:rPr dirty="0" sz="1200" spc="-15" i="1">
-                <a:latin typeface="Times New Roman"/>
-                <a:cs typeface="Times New Roman"/>
-              </a:rPr>
-              <a:t> </a:t>
-            </a:r>
-            <a:r>
-              <a:rPr dirty="0" sz="1200" i="1">
+              <a:rPr sz="1200" i="1" spc="-15" dirty="0">
+                <a:latin typeface="Times New Roman"/>
+                <a:cs typeface="Times New Roman"/>
+              </a:rPr>
+              <a:t> </a:t>
+            </a:r>
+            <a:r>
+              <a:rPr sz="1200" i="1" dirty="0">
                 <a:latin typeface="Times New Roman"/>
                 <a:cs typeface="Times New Roman"/>
               </a:rPr>
               <a:t>be</a:t>
             </a:r>
             <a:r>
-              <a:rPr dirty="0" sz="1200" spc="-15" i="1">
-                <a:latin typeface="Times New Roman"/>
-                <a:cs typeface="Times New Roman"/>
-              </a:rPr>
-              <a:t> </a:t>
-            </a:r>
-            <a:r>
-              <a:rPr dirty="0" sz="1200" spc="-10" i="1">
+              <a:rPr sz="1200" i="1" spc="-15" dirty="0">
+                <a:latin typeface="Times New Roman"/>
+                <a:cs typeface="Times New Roman"/>
+              </a:rPr>
+              <a:t> </a:t>
+            </a:r>
+            <a:r>
+              <a:rPr sz="1200" i="1" spc="-10" dirty="0">
                 <a:latin typeface="Times New Roman"/>
                 <a:cs typeface="Times New Roman"/>
               </a:rPr>
               <a:t>implemented </a:t>
             </a:r>
             <a:r>
-              <a:rPr dirty="0" sz="1200" i="1">
+              <a:rPr sz="1200" i="1" dirty="0">
                 <a:latin typeface="Times New Roman"/>
                 <a:cs typeface="Times New Roman"/>
               </a:rPr>
               <a:t>in</a:t>
             </a:r>
             <a:r>
-              <a:rPr dirty="0" sz="1200" spc="-10" i="1">
-                <a:latin typeface="Times New Roman"/>
-                <a:cs typeface="Times New Roman"/>
-              </a:rPr>
-              <a:t> </a:t>
-            </a:r>
-            <a:r>
-              <a:rPr dirty="0" sz="1200" i="1">
+              <a:rPr sz="1200" i="1" spc="-10" dirty="0">
+                <a:latin typeface="Times New Roman"/>
+                <a:cs typeface="Times New Roman"/>
+              </a:rPr>
+              <a:t> </a:t>
+            </a:r>
+            <a:r>
+              <a:rPr sz="1200" i="1" dirty="0">
                 <a:latin typeface="Times New Roman"/>
                 <a:cs typeface="Times New Roman"/>
               </a:rPr>
               <a:t>the</a:t>
             </a:r>
             <a:r>
-              <a:rPr dirty="0" sz="1200" spc="-10" i="1">
+              <a:rPr sz="1200" i="1" spc="-10" dirty="0">
                 <a:latin typeface="Times New Roman"/>
                 <a:cs typeface="Times New Roman"/>
               </a:rPr>
@@ -3546,7 +3683,7 @@
             </a:endParaRPr>
           </a:p>
           <a:p>
-            <a:pPr lvl="1" marL="304165" indent="-246379">
+            <a:pPr marL="304165" lvl="1" indent="-246379">
               <a:lnSpc>
                 <a:spcPct val="100000"/>
               </a:lnSpc>
@@ -3559,21 +3696,21 @@
               </a:tabLst>
             </a:pPr>
             <a:r>
-              <a:rPr dirty="0" sz="1300" b="1">
+              <a:rPr sz="1300" b="1" dirty="0">
                 <a:latin typeface="Times New Roman"/>
                 <a:cs typeface="Times New Roman"/>
               </a:rPr>
               <a:t>Form</a:t>
             </a:r>
             <a:r>
-              <a:rPr dirty="0" sz="1300" spc="-25" b="1">
-                <a:latin typeface="Times New Roman"/>
-                <a:cs typeface="Times New Roman"/>
-              </a:rPr>
-              <a:t> </a:t>
-            </a:r>
-            <a:r>
-              <a:rPr dirty="0" sz="1300" spc="-10" b="1">
+              <a:rPr sz="1300" b="1" spc="-25" dirty="0">
+                <a:latin typeface="Times New Roman"/>
+                <a:cs typeface="Times New Roman"/>
+              </a:rPr>
+              <a:t> </a:t>
+            </a:r>
+            <a:r>
+              <a:rPr sz="1300" b="1" spc="-10" dirty="0">
                 <a:latin typeface="Times New Roman"/>
                 <a:cs typeface="Times New Roman"/>
               </a:rPr>
@@ -3594,210 +3731,210 @@
               </a:spcBef>
             </a:pPr>
             <a:r>
-              <a:rPr dirty="0" sz="1200" i="1">
+              <a:rPr sz="1200" i="1" dirty="0">
                 <a:latin typeface="Times New Roman"/>
                 <a:cs typeface="Times New Roman"/>
               </a:rPr>
               <a:t>(Validate</a:t>
             </a:r>
             <a:r>
-              <a:rPr dirty="0" sz="1200" spc="-30" i="1">
-                <a:latin typeface="Times New Roman"/>
-                <a:cs typeface="Times New Roman"/>
-              </a:rPr>
-              <a:t> </a:t>
-            </a:r>
-            <a:r>
-              <a:rPr dirty="0" sz="1200" i="1">
+              <a:rPr sz="1200" i="1" spc="-30" dirty="0">
+                <a:latin typeface="Times New Roman"/>
+                <a:cs typeface="Times New Roman"/>
+              </a:rPr>
+              <a:t> </a:t>
+            </a:r>
+            <a:r>
+              <a:rPr sz="1200" i="1" dirty="0">
                 <a:latin typeface="Times New Roman"/>
                 <a:cs typeface="Times New Roman"/>
               </a:rPr>
               <a:t>all</a:t>
             </a:r>
             <a:r>
-              <a:rPr dirty="0" sz="1200" spc="-30" i="1">
-                <a:latin typeface="Times New Roman"/>
-                <a:cs typeface="Times New Roman"/>
-              </a:rPr>
-              <a:t> </a:t>
-            </a:r>
-            <a:r>
-              <a:rPr dirty="0" sz="1200" i="1">
+              <a:rPr sz="1200" i="1" spc="-30" dirty="0">
+                <a:latin typeface="Times New Roman"/>
+                <a:cs typeface="Times New Roman"/>
+              </a:rPr>
+              <a:t> </a:t>
+            </a:r>
+            <a:r>
+              <a:rPr sz="1200" i="1" dirty="0">
                 <a:latin typeface="Times New Roman"/>
                 <a:cs typeface="Times New Roman"/>
               </a:rPr>
               <a:t>required</a:t>
             </a:r>
             <a:r>
-              <a:rPr dirty="0" sz="1200" spc="-25" i="1">
-                <a:latin typeface="Times New Roman"/>
-                <a:cs typeface="Times New Roman"/>
-              </a:rPr>
-              <a:t> </a:t>
-            </a:r>
-            <a:r>
-              <a:rPr dirty="0" sz="1200" i="1">
+              <a:rPr sz="1200" i="1" spc="-25" dirty="0">
+                <a:latin typeface="Times New Roman"/>
+                <a:cs typeface="Times New Roman"/>
+              </a:rPr>
+              <a:t> </a:t>
+            </a:r>
+            <a:r>
+              <a:rPr sz="1200" i="1" dirty="0">
                 <a:latin typeface="Times New Roman"/>
                 <a:cs typeface="Times New Roman"/>
               </a:rPr>
               <a:t>fields</a:t>
             </a:r>
             <a:r>
-              <a:rPr dirty="0" sz="1200" spc="-35" i="1">
-                <a:latin typeface="Times New Roman"/>
-                <a:cs typeface="Times New Roman"/>
-              </a:rPr>
-              <a:t> </a:t>
-            </a:r>
-            <a:r>
-              <a:rPr dirty="0" sz="1200" i="1">
+              <a:rPr sz="1200" i="1" spc="-35" dirty="0">
+                <a:latin typeface="Times New Roman"/>
+                <a:cs typeface="Times New Roman"/>
+              </a:rPr>
+              <a:t> </a:t>
+            </a:r>
+            <a:r>
+              <a:rPr sz="1200" i="1" dirty="0">
                 <a:latin typeface="Times New Roman"/>
                 <a:cs typeface="Times New Roman"/>
               </a:rPr>
               <a:t>using</a:t>
             </a:r>
             <a:r>
-              <a:rPr dirty="0" sz="1200" spc="-25" i="1">
-                <a:latin typeface="Times New Roman"/>
-                <a:cs typeface="Times New Roman"/>
-              </a:rPr>
-              <a:t> </a:t>
-            </a:r>
-            <a:r>
-              <a:rPr dirty="0" sz="1200" i="1">
+              <a:rPr sz="1200" i="1" spc="-25" dirty="0">
+                <a:latin typeface="Times New Roman"/>
+                <a:cs typeface="Times New Roman"/>
+              </a:rPr>
+              <a:t> </a:t>
+            </a:r>
+            <a:r>
+              <a:rPr sz="1200" i="1" dirty="0">
                 <a:latin typeface="Times New Roman"/>
                 <a:cs typeface="Times New Roman"/>
               </a:rPr>
               <a:t>JavaScript</a:t>
             </a:r>
             <a:r>
-              <a:rPr dirty="0" sz="1200" spc="-25" i="1">
-                <a:latin typeface="Times New Roman"/>
-                <a:cs typeface="Times New Roman"/>
-              </a:rPr>
-              <a:t> </a:t>
-            </a:r>
-            <a:r>
-              <a:rPr dirty="0" sz="1200" i="1">
+              <a:rPr sz="1200" i="1" spc="-25" dirty="0">
+                <a:latin typeface="Times New Roman"/>
+                <a:cs typeface="Times New Roman"/>
+              </a:rPr>
+              <a:t> </a:t>
+            </a:r>
+            <a:r>
+              <a:rPr sz="1200" i="1" dirty="0">
                 <a:latin typeface="Times New Roman"/>
                 <a:cs typeface="Times New Roman"/>
               </a:rPr>
               <a:t>and</a:t>
             </a:r>
             <a:r>
-              <a:rPr dirty="0" sz="1200" spc="-25" i="1">
-                <a:latin typeface="Times New Roman"/>
-                <a:cs typeface="Times New Roman"/>
-              </a:rPr>
-              <a:t> </a:t>
-            </a:r>
-            <a:r>
-              <a:rPr dirty="0" sz="1200" i="1">
+              <a:rPr sz="1200" i="1" spc="-25" dirty="0">
+                <a:latin typeface="Times New Roman"/>
+                <a:cs typeface="Times New Roman"/>
+              </a:rPr>
+              <a:t> </a:t>
+            </a:r>
+            <a:r>
+              <a:rPr sz="1200" i="1" dirty="0">
                 <a:latin typeface="Times New Roman"/>
                 <a:cs typeface="Times New Roman"/>
               </a:rPr>
               <a:t>ensure</a:t>
             </a:r>
             <a:r>
-              <a:rPr dirty="0" sz="1200" spc="-30" i="1">
-                <a:latin typeface="Times New Roman"/>
-                <a:cs typeface="Times New Roman"/>
-              </a:rPr>
-              <a:t> </a:t>
-            </a:r>
-            <a:r>
-              <a:rPr dirty="0" sz="1200" i="1">
+              <a:rPr sz="1200" i="1" spc="-30" dirty="0">
+                <a:latin typeface="Times New Roman"/>
+                <a:cs typeface="Times New Roman"/>
+              </a:rPr>
+              <a:t> </a:t>
+            </a:r>
+            <a:r>
+              <a:rPr sz="1200" i="1" dirty="0">
                 <a:latin typeface="Times New Roman"/>
                 <a:cs typeface="Times New Roman"/>
               </a:rPr>
               <a:t>that</a:t>
             </a:r>
             <a:r>
-              <a:rPr dirty="0" sz="1200" spc="-25" i="1">
-                <a:latin typeface="Times New Roman"/>
-                <a:cs typeface="Times New Roman"/>
-              </a:rPr>
-              <a:t> </a:t>
-            </a:r>
-            <a:r>
-              <a:rPr dirty="0" sz="1200" i="1">
+              <a:rPr sz="1200" i="1" spc="-25" dirty="0">
+                <a:latin typeface="Times New Roman"/>
+                <a:cs typeface="Times New Roman"/>
+              </a:rPr>
+              <a:t> </a:t>
+            </a:r>
+            <a:r>
+              <a:rPr sz="1200" i="1" dirty="0">
                 <a:latin typeface="Times New Roman"/>
                 <a:cs typeface="Times New Roman"/>
               </a:rPr>
               <a:t>incorrect</a:t>
             </a:r>
             <a:r>
-              <a:rPr dirty="0" sz="1200" spc="-30" i="1">
-                <a:latin typeface="Times New Roman"/>
-                <a:cs typeface="Times New Roman"/>
-              </a:rPr>
-              <a:t> </a:t>
-            </a:r>
-            <a:r>
-              <a:rPr dirty="0" sz="1200" i="1">
+              <a:rPr sz="1200" i="1" spc="-30" dirty="0">
+                <a:latin typeface="Times New Roman"/>
+                <a:cs typeface="Times New Roman"/>
+              </a:rPr>
+              <a:t> </a:t>
+            </a:r>
+            <a:r>
+              <a:rPr sz="1200" i="1" dirty="0">
                 <a:latin typeface="Times New Roman"/>
                 <a:cs typeface="Times New Roman"/>
               </a:rPr>
               <a:t>or</a:t>
             </a:r>
             <a:r>
-              <a:rPr dirty="0" sz="1200" spc="-30" i="1">
-                <a:latin typeface="Times New Roman"/>
-                <a:cs typeface="Times New Roman"/>
-              </a:rPr>
-              <a:t> </a:t>
-            </a:r>
-            <a:r>
-              <a:rPr dirty="0" sz="1200" i="1">
+              <a:rPr sz="1200" i="1" spc="-30" dirty="0">
+                <a:latin typeface="Times New Roman"/>
+                <a:cs typeface="Times New Roman"/>
+              </a:rPr>
+              <a:t> </a:t>
+            </a:r>
+            <a:r>
+              <a:rPr sz="1200" i="1" dirty="0">
                 <a:latin typeface="Times New Roman"/>
                 <a:cs typeface="Times New Roman"/>
               </a:rPr>
               <a:t>empty</a:t>
             </a:r>
             <a:r>
-              <a:rPr dirty="0" sz="1200" spc="-35" i="1">
-                <a:latin typeface="Times New Roman"/>
-                <a:cs typeface="Times New Roman"/>
-              </a:rPr>
-              <a:t> </a:t>
-            </a:r>
-            <a:r>
-              <a:rPr dirty="0" sz="1200" i="1">
+              <a:rPr sz="1200" i="1" spc="-35" dirty="0">
+                <a:latin typeface="Times New Roman"/>
+                <a:cs typeface="Times New Roman"/>
+              </a:rPr>
+              <a:t> </a:t>
+            </a:r>
+            <a:r>
+              <a:rPr sz="1200" i="1" dirty="0">
                 <a:latin typeface="Times New Roman"/>
                 <a:cs typeface="Times New Roman"/>
               </a:rPr>
               <a:t>inputs</a:t>
             </a:r>
             <a:r>
-              <a:rPr dirty="0" sz="1200" spc="-30" i="1">
-                <a:latin typeface="Times New Roman"/>
-                <a:cs typeface="Times New Roman"/>
-              </a:rPr>
-              <a:t> </a:t>
-            </a:r>
-            <a:r>
-              <a:rPr dirty="0" sz="1200" i="1">
+              <a:rPr sz="1200" i="1" spc="-30" dirty="0">
+                <a:latin typeface="Times New Roman"/>
+                <a:cs typeface="Times New Roman"/>
+              </a:rPr>
+              <a:t> </a:t>
+            </a:r>
+            <a:r>
+              <a:rPr sz="1200" i="1" dirty="0">
                 <a:latin typeface="Times New Roman"/>
                 <a:cs typeface="Times New Roman"/>
               </a:rPr>
               <a:t>are</a:t>
             </a:r>
             <a:r>
-              <a:rPr dirty="0" sz="1200" spc="-30" i="1">
-                <a:latin typeface="Times New Roman"/>
-                <a:cs typeface="Times New Roman"/>
-              </a:rPr>
-              <a:t> </a:t>
-            </a:r>
-            <a:r>
-              <a:rPr dirty="0" sz="1200" spc="-25" i="1">
+              <a:rPr sz="1200" i="1" spc="-30" dirty="0">
+                <a:latin typeface="Times New Roman"/>
+                <a:cs typeface="Times New Roman"/>
+              </a:rPr>
+              <a:t> </a:t>
+            </a:r>
+            <a:r>
+              <a:rPr sz="1200" i="1" spc="-25" dirty="0">
                 <a:latin typeface="Times New Roman"/>
                 <a:cs typeface="Times New Roman"/>
               </a:rPr>
               <a:t>not </a:t>
             </a:r>
             <a:r>
-              <a:rPr dirty="0" sz="1200" spc="-10" i="1">
+              <a:rPr sz="1200" i="1" spc="-10" dirty="0">
                 <a:latin typeface="Times New Roman"/>
                 <a:cs typeface="Times New Roman"/>
               </a:rPr>
@@ -3812,7 +3949,7 @@
       </p:sp>
       <p:grpSp>
         <p:nvGrpSpPr>
-          <p:cNvPr id="26" name="object 26" descr=""/>
+          <p:cNvPr id="26" name="object 26"/>
           <p:cNvGrpSpPr/>
           <p:nvPr/>
         </p:nvGrpSpPr>
@@ -3826,7 +3963,7 @@
         </p:grpSpPr>
         <p:sp>
           <p:nvSpPr>
-            <p:cNvPr id="27" name="object 27" descr=""/>
+            <p:cNvPr id="27" name="object 27"/>
             <p:cNvSpPr/>
             <p:nvPr/>
           </p:nvSpPr>
@@ -3869,12 +4006,14 @@
           <p:txBody>
             <a:bodyPr wrap="square" lIns="0" tIns="0" rIns="0" bIns="0" rtlCol="0"/>
             <a:lstStyle/>
-            <a:p/>
+            <a:p>
+              <a:endParaRPr/>
+            </a:p>
           </p:txBody>
         </p:sp>
         <p:sp>
           <p:nvSpPr>
-            <p:cNvPr id="28" name="object 28" descr=""/>
+            <p:cNvPr id="28" name="object 28"/>
             <p:cNvSpPr/>
             <p:nvPr/>
           </p:nvSpPr>
@@ -3917,12 +4056,14 @@
           <p:txBody>
             <a:bodyPr wrap="square" lIns="0" tIns="0" rIns="0" bIns="0" rtlCol="0"/>
             <a:lstStyle/>
-            <a:p/>
+            <a:p>
+              <a:endParaRPr/>
+            </a:p>
           </p:txBody>
         </p:sp>
         <p:sp>
           <p:nvSpPr>
-            <p:cNvPr id="29" name="object 29" descr=""/>
+            <p:cNvPr id="29" name="object 29"/>
             <p:cNvSpPr/>
             <p:nvPr/>
           </p:nvSpPr>
@@ -3983,12 +4124,14 @@
           <p:txBody>
             <a:bodyPr wrap="square" lIns="0" tIns="0" rIns="0" bIns="0" rtlCol="0"/>
             <a:lstStyle/>
-            <a:p/>
+            <a:p>
+              <a:endParaRPr/>
+            </a:p>
           </p:txBody>
         </p:sp>
         <p:sp>
           <p:nvSpPr>
-            <p:cNvPr id="30" name="object 30" descr=""/>
+            <p:cNvPr id="30" name="object 30"/>
             <p:cNvSpPr/>
             <p:nvPr/>
           </p:nvSpPr>
@@ -4031,12 +4174,14 @@
           <p:txBody>
             <a:bodyPr wrap="square" lIns="0" tIns="0" rIns="0" bIns="0" rtlCol="0"/>
             <a:lstStyle/>
-            <a:p/>
+            <a:p>
+              <a:endParaRPr/>
+            </a:p>
           </p:txBody>
         </p:sp>
         <p:sp>
           <p:nvSpPr>
-            <p:cNvPr id="31" name="object 31" descr=""/>
+            <p:cNvPr id="31" name="object 31"/>
             <p:cNvSpPr/>
             <p:nvPr/>
           </p:nvSpPr>
@@ -4079,12 +4224,14 @@
           <p:txBody>
             <a:bodyPr wrap="square" lIns="0" tIns="0" rIns="0" bIns="0" rtlCol="0"/>
             <a:lstStyle/>
-            <a:p/>
+            <a:p>
+              <a:endParaRPr/>
+            </a:p>
           </p:txBody>
         </p:sp>
         <p:sp>
           <p:nvSpPr>
-            <p:cNvPr id="32" name="object 32" descr=""/>
+            <p:cNvPr id="32" name="object 32"/>
             <p:cNvSpPr/>
             <p:nvPr/>
           </p:nvSpPr>
@@ -4139,13 +4286,15 @@
           <p:txBody>
             <a:bodyPr wrap="square" lIns="0" tIns="0" rIns="0" bIns="0" rtlCol="0"/>
             <a:lstStyle/>
-            <a:p/>
+            <a:p>
+              <a:endParaRPr/>
+            </a:p>
           </p:txBody>
         </p:sp>
       </p:grpSp>
       <p:pic>
         <p:nvPicPr>
-          <p:cNvPr id="33" name="object 33" descr=""/>
+          <p:cNvPr id="33" name="object 33"/>
           <p:cNvPicPr/>
           <p:nvPr/>
         </p:nvPicPr>
@@ -4167,7 +4316,7 @@
       </p:pic>
       <p:pic>
         <p:nvPicPr>
-          <p:cNvPr id="34" name="object 34" descr=""/>
+          <p:cNvPr id="34" name="object 34"/>
           <p:cNvPicPr/>
           <p:nvPr/>
         </p:nvPicPr>
@@ -4189,7 +4338,7 @@
       </p:pic>
       <p:pic>
         <p:nvPicPr>
-          <p:cNvPr id="35" name="object 35" descr=""/>
+          <p:cNvPr id="35" name="object 35"/>
           <p:cNvPicPr/>
           <p:nvPr/>
         </p:nvPicPr>
@@ -4211,7 +4360,7 @@
       </p:pic>
       <p:pic>
         <p:nvPicPr>
-          <p:cNvPr id="36" name="object 36" descr=""/>
+          <p:cNvPr id="36" name="object 36"/>
           <p:cNvPicPr/>
           <p:nvPr/>
         </p:nvPicPr>
@@ -4258,7 +4407,7 @@
       </p:grpSpPr>
       <p:pic>
         <p:nvPicPr>
-          <p:cNvPr id="2" name="object 2" descr=""/>
+          <p:cNvPr id="2" name="object 2"/>
           <p:cNvPicPr/>
           <p:nvPr/>
         </p:nvPicPr>
@@ -4280,7 +4429,7 @@
       </p:pic>
       <p:pic>
         <p:nvPicPr>
-          <p:cNvPr id="3" name="object 3" descr=""/>
+          <p:cNvPr id="3" name="object 3"/>
           <p:cNvPicPr/>
           <p:nvPr/>
         </p:nvPicPr>
@@ -4302,7 +4451,7 @@
       </p:pic>
       <p:sp>
         <p:nvSpPr>
-          <p:cNvPr id="4" name="object 4" descr=""/>
+          <p:cNvPr id="4" name="object 4"/>
           <p:cNvSpPr txBox="1"/>
           <p:nvPr/>
         </p:nvSpPr>
@@ -4316,7 +4465,7 @@
           </a:prstGeom>
         </p:spPr>
         <p:txBody>
-          <a:bodyPr wrap="square" lIns="0" tIns="57150" rIns="0" bIns="0" rtlCol="0" vert="horz">
+          <a:bodyPr vert="horz" wrap="square" lIns="0" tIns="57150" rIns="0" bIns="0" rtlCol="0">
             <a:spAutoFit/>
           </a:bodyPr>
           <a:lstStyle/>
@@ -4330,49 +4479,49 @@
               </a:spcBef>
             </a:pPr>
             <a:r>
-              <a:rPr dirty="0" sz="1300" b="1">
+              <a:rPr sz="1300" b="1" dirty="0">
                 <a:latin typeface="Times New Roman"/>
                 <a:cs typeface="Times New Roman"/>
               </a:rPr>
               <a:t>3.2</a:t>
             </a:r>
             <a:r>
-              <a:rPr dirty="0" sz="1300" spc="-55" b="1">
-                <a:latin typeface="Times New Roman"/>
-                <a:cs typeface="Times New Roman"/>
-              </a:rPr>
-              <a:t> </a:t>
-            </a:r>
-            <a:r>
-              <a:rPr dirty="0" sz="1300" b="1">
+              <a:rPr sz="1300" b="1" spc="-55" dirty="0">
+                <a:latin typeface="Times New Roman"/>
+                <a:cs typeface="Times New Roman"/>
+              </a:rPr>
+              <a:t> </a:t>
+            </a:r>
+            <a:r>
+              <a:rPr sz="1300" b="1" dirty="0">
                 <a:latin typeface="Times New Roman"/>
                 <a:cs typeface="Times New Roman"/>
               </a:rPr>
               <a:t>Confirmation</a:t>
             </a:r>
             <a:r>
-              <a:rPr dirty="0" sz="1300" spc="-45" b="1">
-                <a:latin typeface="Times New Roman"/>
-                <a:cs typeface="Times New Roman"/>
-              </a:rPr>
-              <a:t> </a:t>
-            </a:r>
-            <a:r>
-              <a:rPr dirty="0" sz="1300" b="1">
+              <a:rPr sz="1300" b="1" spc="-45" dirty="0">
+                <a:latin typeface="Times New Roman"/>
+                <a:cs typeface="Times New Roman"/>
+              </a:rPr>
+              <a:t> </a:t>
+            </a:r>
+            <a:r>
+              <a:rPr sz="1300" b="1" dirty="0">
                 <a:latin typeface="Times New Roman"/>
                 <a:cs typeface="Times New Roman"/>
               </a:rPr>
               <a:t>Checkbox</a:t>
             </a:r>
             <a:r>
-              <a:rPr dirty="0" sz="1300" spc="-55" b="1">
-                <a:latin typeface="Times New Roman"/>
-                <a:cs typeface="Times New Roman"/>
-              </a:rPr>
-              <a:t> </a:t>
-            </a:r>
-            <a:r>
-              <a:rPr dirty="0" sz="1300" spc="-10" b="1">
+              <a:rPr sz="1300" b="1" spc="-55" dirty="0">
+                <a:latin typeface="Times New Roman"/>
+                <a:cs typeface="Times New Roman"/>
+              </a:rPr>
+              <a:t> </a:t>
+            </a:r>
+            <a:r>
+              <a:rPr sz="1300" b="1" spc="-10" dirty="0">
                 <a:latin typeface="Times New Roman"/>
                 <a:cs typeface="Times New Roman"/>
               </a:rPr>
@@ -4393,147 +4542,147 @@
               </a:spcBef>
             </a:pPr>
             <a:r>
-              <a:rPr dirty="0" sz="1200" i="1">
+              <a:rPr sz="1200" i="1" dirty="0">
                 <a:latin typeface="Times New Roman"/>
                 <a:cs typeface="Times New Roman"/>
               </a:rPr>
               <a:t>(Ensure</a:t>
             </a:r>
             <a:r>
-              <a:rPr dirty="0" sz="1200" spc="-30" i="1">
-                <a:latin typeface="Times New Roman"/>
-                <a:cs typeface="Times New Roman"/>
-              </a:rPr>
-              <a:t> </a:t>
-            </a:r>
-            <a:r>
-              <a:rPr dirty="0" sz="1200" i="1">
+              <a:rPr sz="1200" i="1" spc="-30" dirty="0">
+                <a:latin typeface="Times New Roman"/>
+                <a:cs typeface="Times New Roman"/>
+              </a:rPr>
+              <a:t> </a:t>
+            </a:r>
+            <a:r>
+              <a:rPr sz="1200" i="1" dirty="0">
                 <a:latin typeface="Times New Roman"/>
                 <a:cs typeface="Times New Roman"/>
               </a:rPr>
               <a:t>that</a:t>
             </a:r>
             <a:r>
-              <a:rPr dirty="0" sz="1200" spc="-25" i="1">
-                <a:latin typeface="Times New Roman"/>
-                <a:cs typeface="Times New Roman"/>
-              </a:rPr>
-              <a:t> </a:t>
-            </a:r>
-            <a:r>
-              <a:rPr dirty="0" sz="1200" i="1">
+              <a:rPr sz="1200" i="1" spc="-25" dirty="0">
+                <a:latin typeface="Times New Roman"/>
+                <a:cs typeface="Times New Roman"/>
+              </a:rPr>
+              <a:t> </a:t>
+            </a:r>
+            <a:r>
+              <a:rPr sz="1200" i="1" dirty="0">
                 <a:latin typeface="Times New Roman"/>
                 <a:cs typeface="Times New Roman"/>
               </a:rPr>
               <a:t>the</a:t>
             </a:r>
             <a:r>
-              <a:rPr dirty="0" sz="1200" spc="-30" i="1">
-                <a:latin typeface="Times New Roman"/>
-                <a:cs typeface="Times New Roman"/>
-              </a:rPr>
-              <a:t> </a:t>
-            </a:r>
-            <a:r>
-              <a:rPr dirty="0" sz="1200" i="1">
+              <a:rPr sz="1200" i="1" spc="-30" dirty="0">
+                <a:latin typeface="Times New Roman"/>
+                <a:cs typeface="Times New Roman"/>
+              </a:rPr>
+              <a:t> </a:t>
+            </a:r>
+            <a:r>
+              <a:rPr sz="1200" i="1" dirty="0">
                 <a:latin typeface="Times New Roman"/>
                 <a:cs typeface="Times New Roman"/>
               </a:rPr>
               <a:t>declaration</a:t>
             </a:r>
             <a:r>
-              <a:rPr dirty="0" sz="1200" spc="-25" i="1">
-                <a:latin typeface="Times New Roman"/>
-                <a:cs typeface="Times New Roman"/>
-              </a:rPr>
-              <a:t> </a:t>
-            </a:r>
-            <a:r>
-              <a:rPr dirty="0" sz="1200" i="1">
+              <a:rPr sz="1200" i="1" spc="-25" dirty="0">
+                <a:latin typeface="Times New Roman"/>
+                <a:cs typeface="Times New Roman"/>
+              </a:rPr>
+              <a:t> </a:t>
+            </a:r>
+            <a:r>
+              <a:rPr sz="1200" i="1" dirty="0">
                 <a:latin typeface="Times New Roman"/>
                 <a:cs typeface="Times New Roman"/>
               </a:rPr>
               <a:t>checkbox</a:t>
             </a:r>
             <a:r>
-              <a:rPr dirty="0" sz="1200" spc="-35" i="1">
-                <a:latin typeface="Times New Roman"/>
-                <a:cs typeface="Times New Roman"/>
-              </a:rPr>
-              <a:t> </a:t>
-            </a:r>
-            <a:r>
-              <a:rPr dirty="0" sz="1200" i="1">
+              <a:rPr sz="1200" i="1" spc="-35" dirty="0">
+                <a:latin typeface="Times New Roman"/>
+                <a:cs typeface="Times New Roman"/>
+              </a:rPr>
+              <a:t> </a:t>
+            </a:r>
+            <a:r>
+              <a:rPr sz="1200" i="1" dirty="0">
                 <a:latin typeface="Times New Roman"/>
                 <a:cs typeface="Times New Roman"/>
               </a:rPr>
               <a:t>is</a:t>
             </a:r>
             <a:r>
-              <a:rPr dirty="0" sz="1200" spc="-30" i="1">
-                <a:latin typeface="Times New Roman"/>
-                <a:cs typeface="Times New Roman"/>
-              </a:rPr>
-              <a:t> </a:t>
-            </a:r>
-            <a:r>
-              <a:rPr dirty="0" sz="1200" i="1">
+              <a:rPr sz="1200" i="1" spc="-30" dirty="0">
+                <a:latin typeface="Times New Roman"/>
+                <a:cs typeface="Times New Roman"/>
+              </a:rPr>
+              <a:t> </a:t>
+            </a:r>
+            <a:r>
+              <a:rPr sz="1200" i="1" dirty="0">
                 <a:latin typeface="Times New Roman"/>
                 <a:cs typeface="Times New Roman"/>
               </a:rPr>
               <a:t>selected</a:t>
             </a:r>
             <a:r>
-              <a:rPr dirty="0" sz="1200" spc="-20" i="1">
-                <a:latin typeface="Times New Roman"/>
-                <a:cs typeface="Times New Roman"/>
-              </a:rPr>
-              <a:t> </a:t>
-            </a:r>
-            <a:r>
-              <a:rPr dirty="0" sz="1200" i="1">
+              <a:rPr sz="1200" i="1" spc="-20" dirty="0">
+                <a:latin typeface="Times New Roman"/>
+                <a:cs typeface="Times New Roman"/>
+              </a:rPr>
+              <a:t> </a:t>
+            </a:r>
+            <a:r>
+              <a:rPr sz="1200" i="1" dirty="0">
                 <a:latin typeface="Times New Roman"/>
                 <a:cs typeface="Times New Roman"/>
               </a:rPr>
               <a:t>before</a:t>
             </a:r>
             <a:r>
-              <a:rPr dirty="0" sz="1200" spc="-25" i="1">
-                <a:latin typeface="Times New Roman"/>
-                <a:cs typeface="Times New Roman"/>
-              </a:rPr>
-              <a:t> </a:t>
-            </a:r>
-            <a:r>
-              <a:rPr dirty="0" sz="1200" i="1">
+              <a:rPr sz="1200" i="1" spc="-25" dirty="0">
+                <a:latin typeface="Times New Roman"/>
+                <a:cs typeface="Times New Roman"/>
+              </a:rPr>
+              <a:t> </a:t>
+            </a:r>
+            <a:r>
+              <a:rPr sz="1200" i="1" dirty="0">
                 <a:latin typeface="Times New Roman"/>
                 <a:cs typeface="Times New Roman"/>
               </a:rPr>
               <a:t>allowing</a:t>
             </a:r>
             <a:r>
-              <a:rPr dirty="0" sz="1200" spc="-30" i="1">
-                <a:latin typeface="Times New Roman"/>
-                <a:cs typeface="Times New Roman"/>
-              </a:rPr>
-              <a:t> </a:t>
-            </a:r>
-            <a:r>
-              <a:rPr dirty="0" sz="1200" i="1">
+              <a:rPr sz="1200" i="1" spc="-30" dirty="0">
+                <a:latin typeface="Times New Roman"/>
+                <a:cs typeface="Times New Roman"/>
+              </a:rPr>
+              <a:t> </a:t>
+            </a:r>
+            <a:r>
+              <a:rPr sz="1200" i="1" dirty="0">
                 <a:latin typeface="Times New Roman"/>
                 <a:cs typeface="Times New Roman"/>
               </a:rPr>
               <a:t>form</a:t>
             </a:r>
             <a:r>
-              <a:rPr dirty="0" sz="1200" spc="-30" i="1">
-                <a:latin typeface="Times New Roman"/>
-                <a:cs typeface="Times New Roman"/>
-              </a:rPr>
-              <a:t> </a:t>
-            </a:r>
-            <a:r>
-              <a:rPr dirty="0" sz="1200" spc="-10" i="1">
+              <a:rPr sz="1200" i="1" spc="-30" dirty="0">
+                <a:latin typeface="Times New Roman"/>
+                <a:cs typeface="Times New Roman"/>
+              </a:rPr>
+              <a:t> </a:t>
+            </a:r>
+            <a:r>
+              <a:rPr sz="1200" i="1" spc="-10" dirty="0">
                 <a:latin typeface="Times New Roman"/>
                 <a:cs typeface="Times New Roman"/>
               </a:rPr>
@@ -4548,7 +4697,7 @@
       </p:sp>
       <p:grpSp>
         <p:nvGrpSpPr>
-          <p:cNvPr id="5" name="object 5" descr=""/>
+          <p:cNvPr id="5" name="object 5"/>
           <p:cNvGrpSpPr/>
           <p:nvPr/>
         </p:nvGrpSpPr>
@@ -4562,7 +4711,7 @@
         </p:grpSpPr>
         <p:sp>
           <p:nvSpPr>
-            <p:cNvPr id="6" name="object 6" descr=""/>
+            <p:cNvPr id="6" name="object 6"/>
             <p:cNvSpPr/>
             <p:nvPr/>
           </p:nvSpPr>
@@ -4614,12 +4763,14 @@
           <p:txBody>
             <a:bodyPr wrap="square" lIns="0" tIns="0" rIns="0" bIns="0" rtlCol="0"/>
             <a:lstStyle/>
-            <a:p/>
+            <a:p>
+              <a:endParaRPr/>
+            </a:p>
           </p:txBody>
         </p:sp>
         <p:sp>
           <p:nvSpPr>
-            <p:cNvPr id="7" name="object 7" descr=""/>
+            <p:cNvPr id="7" name="object 7"/>
             <p:cNvSpPr/>
             <p:nvPr/>
           </p:nvSpPr>
@@ -4662,12 +4813,14 @@
           <p:txBody>
             <a:bodyPr wrap="square" lIns="0" tIns="0" rIns="0" bIns="0" rtlCol="0"/>
             <a:lstStyle/>
-            <a:p/>
+            <a:p>
+              <a:endParaRPr/>
+            </a:p>
           </p:txBody>
         </p:sp>
         <p:sp>
           <p:nvSpPr>
-            <p:cNvPr id="8" name="object 8" descr=""/>
+            <p:cNvPr id="8" name="object 8"/>
             <p:cNvSpPr/>
             <p:nvPr/>
           </p:nvSpPr>
@@ -4728,12 +4881,14 @@
           <p:txBody>
             <a:bodyPr wrap="square" lIns="0" tIns="0" rIns="0" bIns="0" rtlCol="0"/>
             <a:lstStyle/>
-            <a:p/>
+            <a:p>
+              <a:endParaRPr/>
+            </a:p>
           </p:txBody>
         </p:sp>
         <p:sp>
           <p:nvSpPr>
-            <p:cNvPr id="9" name="object 9" descr=""/>
+            <p:cNvPr id="9" name="object 9"/>
             <p:cNvSpPr/>
             <p:nvPr/>
           </p:nvSpPr>
@@ -4776,12 +4931,14 @@
           <p:txBody>
             <a:bodyPr wrap="square" lIns="0" tIns="0" rIns="0" bIns="0" rtlCol="0"/>
             <a:lstStyle/>
-            <a:p/>
+            <a:p>
+              <a:endParaRPr/>
+            </a:p>
           </p:txBody>
         </p:sp>
         <p:sp>
           <p:nvSpPr>
-            <p:cNvPr id="10" name="object 10" descr=""/>
+            <p:cNvPr id="10" name="object 10"/>
             <p:cNvSpPr/>
             <p:nvPr/>
           </p:nvSpPr>
@@ -4824,12 +4981,14 @@
           <p:txBody>
             <a:bodyPr wrap="square" lIns="0" tIns="0" rIns="0" bIns="0" rtlCol="0"/>
             <a:lstStyle/>
-            <a:p/>
+            <a:p>
+              <a:endParaRPr/>
+            </a:p>
           </p:txBody>
         </p:sp>
         <p:sp>
           <p:nvSpPr>
-            <p:cNvPr id="11" name="object 11" descr=""/>
+            <p:cNvPr id="11" name="object 11"/>
             <p:cNvSpPr/>
             <p:nvPr/>
           </p:nvSpPr>
@@ -4884,13 +5043,15 @@
           <p:txBody>
             <a:bodyPr wrap="square" lIns="0" tIns="0" rIns="0" bIns="0" rtlCol="0"/>
             <a:lstStyle/>
-            <a:p/>
+            <a:p>
+              <a:endParaRPr/>
+            </a:p>
           </p:txBody>
         </p:sp>
       </p:grpSp>
       <p:sp>
         <p:nvSpPr>
-          <p:cNvPr id="12" name="object 12" descr=""/>
+          <p:cNvPr id="12" name="object 12"/>
           <p:cNvSpPr txBox="1"/>
           <p:nvPr/>
         </p:nvSpPr>
@@ -4904,7 +5065,7 @@
           </a:prstGeom>
         </p:spPr>
         <p:txBody>
-          <a:bodyPr wrap="square" lIns="0" tIns="12065" rIns="0" bIns="0" rtlCol="0" vert="horz">
+          <a:bodyPr vert="horz" wrap="square" lIns="0" tIns="12065" rIns="0" bIns="0" rtlCol="0">
             <a:spAutoFit/>
           </a:bodyPr>
           <a:lstStyle/>
@@ -4918,63 +5079,63 @@
               </a:spcBef>
             </a:pPr>
             <a:r>
-              <a:rPr dirty="0" sz="1300" b="1">
+              <a:rPr sz="1300" b="1" dirty="0">
                 <a:latin typeface="Times New Roman"/>
                 <a:cs typeface="Times New Roman"/>
               </a:rPr>
               <a:t>3.3.Dynamic</a:t>
             </a:r>
             <a:r>
-              <a:rPr dirty="0" sz="1300" spc="-45" b="1">
-                <a:latin typeface="Times New Roman"/>
-                <a:cs typeface="Times New Roman"/>
-              </a:rPr>
-              <a:t> </a:t>
-            </a:r>
-            <a:r>
-              <a:rPr dirty="0" sz="1300" b="1">
+              <a:rPr sz="1300" b="1" spc="-45" dirty="0">
+                <a:latin typeface="Times New Roman"/>
+                <a:cs typeface="Times New Roman"/>
+              </a:rPr>
+              <a:t> </a:t>
+            </a:r>
+            <a:r>
+              <a:rPr sz="1300" b="1" dirty="0">
                 <a:latin typeface="Times New Roman"/>
                 <a:cs typeface="Times New Roman"/>
               </a:rPr>
               <a:t>Display</a:t>
             </a:r>
             <a:r>
-              <a:rPr dirty="0" sz="1300" spc="-30" b="1">
-                <a:latin typeface="Times New Roman"/>
-                <a:cs typeface="Times New Roman"/>
-              </a:rPr>
-              <a:t> </a:t>
-            </a:r>
-            <a:r>
-              <a:rPr dirty="0" sz="1300" b="1">
+              <a:rPr sz="1300" b="1" spc="-30" dirty="0">
+                <a:latin typeface="Times New Roman"/>
+                <a:cs typeface="Times New Roman"/>
+              </a:rPr>
+              <a:t> </a:t>
+            </a:r>
+            <a:r>
+              <a:rPr sz="1300" b="1" dirty="0">
                 <a:latin typeface="Times New Roman"/>
                 <a:cs typeface="Times New Roman"/>
               </a:rPr>
               <a:t>of</a:t>
             </a:r>
             <a:r>
-              <a:rPr dirty="0" sz="1300" spc="-40" b="1">
-                <a:latin typeface="Times New Roman"/>
-                <a:cs typeface="Times New Roman"/>
-              </a:rPr>
-              <a:t> </a:t>
-            </a:r>
-            <a:r>
-              <a:rPr dirty="0" sz="1300" b="1">
+              <a:rPr sz="1300" b="1" spc="-40" dirty="0">
+                <a:latin typeface="Times New Roman"/>
+                <a:cs typeface="Times New Roman"/>
+              </a:rPr>
+              <a:t> </a:t>
+            </a:r>
+            <a:r>
+              <a:rPr sz="1300" b="1" dirty="0">
                 <a:latin typeface="Times New Roman"/>
                 <a:cs typeface="Times New Roman"/>
               </a:rPr>
               <a:t>Registered</a:t>
             </a:r>
             <a:r>
-              <a:rPr dirty="0" sz="1300" spc="-40" b="1">
-                <a:latin typeface="Times New Roman"/>
-                <a:cs typeface="Times New Roman"/>
-              </a:rPr>
-              <a:t> </a:t>
-            </a:r>
-            <a:r>
-              <a:rPr dirty="0" sz="1300" spc="-10" b="1">
+              <a:rPr sz="1300" b="1" spc="-40" dirty="0">
+                <a:latin typeface="Times New Roman"/>
+                <a:cs typeface="Times New Roman"/>
+              </a:rPr>
+              <a:t> </a:t>
+            </a:r>
+            <a:r>
+              <a:rPr sz="1300" b="1" spc="-10" dirty="0">
                 <a:latin typeface="Times New Roman"/>
                 <a:cs typeface="Times New Roman"/>
               </a:rPr>
@@ -4995,203 +5156,203 @@
               </a:spcBef>
             </a:pPr>
             <a:r>
-              <a:rPr dirty="0" sz="1200">
+              <a:rPr sz="1200" dirty="0">
                 <a:latin typeface="Times New Roman"/>
                 <a:cs typeface="Times New Roman"/>
               </a:rPr>
               <a:t>(</a:t>
             </a:r>
             <a:r>
-              <a:rPr dirty="0" sz="1200" i="1">
+              <a:rPr sz="1200" i="1" dirty="0">
                 <a:latin typeface="Times New Roman"/>
                 <a:cs typeface="Times New Roman"/>
               </a:rPr>
               <a:t>Capture</a:t>
             </a:r>
             <a:r>
-              <a:rPr dirty="0" sz="1200" spc="-30" i="1">
-                <a:latin typeface="Times New Roman"/>
-                <a:cs typeface="Times New Roman"/>
-              </a:rPr>
-              <a:t> </a:t>
-            </a:r>
-            <a:r>
-              <a:rPr dirty="0" sz="1200" i="1">
+              <a:rPr sz="1200" i="1" spc="-30" dirty="0">
+                <a:latin typeface="Times New Roman"/>
+                <a:cs typeface="Times New Roman"/>
+              </a:rPr>
+              <a:t> </a:t>
+            </a:r>
+            <a:r>
+              <a:rPr sz="1200" i="1" dirty="0">
                 <a:latin typeface="Times New Roman"/>
                 <a:cs typeface="Times New Roman"/>
               </a:rPr>
               <a:t>form</a:t>
             </a:r>
             <a:r>
-              <a:rPr dirty="0" sz="1200" spc="-30" i="1">
-                <a:latin typeface="Times New Roman"/>
-                <a:cs typeface="Times New Roman"/>
-              </a:rPr>
-              <a:t> </a:t>
-            </a:r>
-            <a:r>
-              <a:rPr dirty="0" sz="1200" i="1">
+              <a:rPr sz="1200" i="1" spc="-30" dirty="0">
+                <a:latin typeface="Times New Roman"/>
+                <a:cs typeface="Times New Roman"/>
+              </a:rPr>
+              <a:t> </a:t>
+            </a:r>
+            <a:r>
+              <a:rPr sz="1200" i="1" dirty="0">
                 <a:latin typeface="Times New Roman"/>
                 <a:cs typeface="Times New Roman"/>
               </a:rPr>
               <a:t>data</a:t>
             </a:r>
             <a:r>
-              <a:rPr dirty="0" sz="1200" spc="-25" i="1">
-                <a:latin typeface="Times New Roman"/>
-                <a:cs typeface="Times New Roman"/>
-              </a:rPr>
-              <a:t> </a:t>
-            </a:r>
-            <a:r>
-              <a:rPr dirty="0" sz="1200" i="1">
+              <a:rPr sz="1200" i="1" spc="-25" dirty="0">
+                <a:latin typeface="Times New Roman"/>
+                <a:cs typeface="Times New Roman"/>
+              </a:rPr>
+              <a:t> </a:t>
+            </a:r>
+            <a:r>
+              <a:rPr sz="1200" i="1" dirty="0">
                 <a:latin typeface="Times New Roman"/>
                 <a:cs typeface="Times New Roman"/>
               </a:rPr>
               <a:t>using</a:t>
             </a:r>
             <a:r>
-              <a:rPr dirty="0" sz="1200" spc="-20" i="1">
-                <a:latin typeface="Times New Roman"/>
-                <a:cs typeface="Times New Roman"/>
-              </a:rPr>
-              <a:t> </a:t>
-            </a:r>
-            <a:r>
-              <a:rPr dirty="0" sz="1200" i="1">
+              <a:rPr sz="1200" i="1" spc="-20" dirty="0">
+                <a:latin typeface="Times New Roman"/>
+                <a:cs typeface="Times New Roman"/>
+              </a:rPr>
+              <a:t> </a:t>
+            </a:r>
+            <a:r>
+              <a:rPr sz="1200" i="1" dirty="0">
                 <a:latin typeface="Times New Roman"/>
                 <a:cs typeface="Times New Roman"/>
               </a:rPr>
               <a:t>JavaScript</a:t>
             </a:r>
             <a:r>
-              <a:rPr dirty="0" sz="1200" spc="-20" i="1">
-                <a:latin typeface="Times New Roman"/>
-                <a:cs typeface="Times New Roman"/>
-              </a:rPr>
-              <a:t> </a:t>
-            </a:r>
-            <a:r>
-              <a:rPr dirty="0" sz="1200" i="1">
+              <a:rPr sz="1200" i="1" spc="-20" dirty="0">
+                <a:latin typeface="Times New Roman"/>
+                <a:cs typeface="Times New Roman"/>
+              </a:rPr>
+              <a:t> </a:t>
+            </a:r>
+            <a:r>
+              <a:rPr sz="1200" i="1" dirty="0">
                 <a:latin typeface="Times New Roman"/>
                 <a:cs typeface="Times New Roman"/>
               </a:rPr>
               <a:t>and</a:t>
             </a:r>
             <a:r>
-              <a:rPr dirty="0" sz="1200" spc="-25" i="1">
-                <a:latin typeface="Times New Roman"/>
-                <a:cs typeface="Times New Roman"/>
-              </a:rPr>
-              <a:t> </a:t>
-            </a:r>
-            <a:r>
-              <a:rPr dirty="0" sz="1200" i="1">
+              <a:rPr sz="1200" i="1" spc="-25" dirty="0">
+                <a:latin typeface="Times New Roman"/>
+                <a:cs typeface="Times New Roman"/>
+              </a:rPr>
+              <a:t> </a:t>
+            </a:r>
+            <a:r>
+              <a:rPr sz="1200" i="1" dirty="0">
                 <a:latin typeface="Times New Roman"/>
                 <a:cs typeface="Times New Roman"/>
               </a:rPr>
               <a:t>dynamically</a:t>
             </a:r>
             <a:r>
-              <a:rPr dirty="0" sz="1200" spc="-30" i="1">
-                <a:latin typeface="Times New Roman"/>
-                <a:cs typeface="Times New Roman"/>
-              </a:rPr>
-              <a:t> </a:t>
-            </a:r>
-            <a:r>
-              <a:rPr dirty="0" sz="1200" i="1">
+              <a:rPr sz="1200" i="1" spc="-30" dirty="0">
+                <a:latin typeface="Times New Roman"/>
+                <a:cs typeface="Times New Roman"/>
+              </a:rPr>
+              <a:t> </a:t>
+            </a:r>
+            <a:r>
+              <a:rPr sz="1200" i="1" dirty="0">
                 <a:latin typeface="Times New Roman"/>
                 <a:cs typeface="Times New Roman"/>
               </a:rPr>
               <a:t>add</a:t>
             </a:r>
             <a:r>
-              <a:rPr dirty="0" sz="1200" spc="-20" i="1">
-                <a:latin typeface="Times New Roman"/>
-                <a:cs typeface="Times New Roman"/>
-              </a:rPr>
-              <a:t> </a:t>
-            </a:r>
-            <a:r>
-              <a:rPr dirty="0" sz="1200" i="1">
+              <a:rPr sz="1200" i="1" spc="-20" dirty="0">
+                <a:latin typeface="Times New Roman"/>
+                <a:cs typeface="Times New Roman"/>
+              </a:rPr>
+              <a:t> </a:t>
+            </a:r>
+            <a:r>
+              <a:rPr sz="1200" i="1" dirty="0">
                 <a:latin typeface="Times New Roman"/>
                 <a:cs typeface="Times New Roman"/>
               </a:rPr>
               <a:t>the</a:t>
             </a:r>
             <a:r>
-              <a:rPr dirty="0" sz="1200" spc="-25" i="1">
-                <a:latin typeface="Times New Roman"/>
-                <a:cs typeface="Times New Roman"/>
-              </a:rPr>
-              <a:t> </a:t>
-            </a:r>
-            <a:r>
-              <a:rPr dirty="0" sz="1200" i="1">
+              <a:rPr sz="1200" i="1" spc="-25" dirty="0">
+                <a:latin typeface="Times New Roman"/>
+                <a:cs typeface="Times New Roman"/>
+              </a:rPr>
+              <a:t> </a:t>
+            </a:r>
+            <a:r>
+              <a:rPr sz="1200" i="1" dirty="0">
                 <a:latin typeface="Times New Roman"/>
                 <a:cs typeface="Times New Roman"/>
               </a:rPr>
               <a:t>submitted</a:t>
             </a:r>
             <a:r>
-              <a:rPr dirty="0" sz="1200" spc="-25" i="1">
-                <a:latin typeface="Times New Roman"/>
-                <a:cs typeface="Times New Roman"/>
-              </a:rPr>
-              <a:t> </a:t>
-            </a:r>
-            <a:r>
-              <a:rPr dirty="0" sz="1200" i="1">
+              <a:rPr sz="1200" i="1" spc="-25" dirty="0">
+                <a:latin typeface="Times New Roman"/>
+                <a:cs typeface="Times New Roman"/>
+              </a:rPr>
+              <a:t> </a:t>
+            </a:r>
+            <a:r>
+              <a:rPr sz="1200" i="1" dirty="0">
                 <a:latin typeface="Times New Roman"/>
                 <a:cs typeface="Times New Roman"/>
               </a:rPr>
               <a:t>details</a:t>
             </a:r>
             <a:r>
-              <a:rPr dirty="0" sz="1200" spc="-30" i="1">
-                <a:latin typeface="Times New Roman"/>
-                <a:cs typeface="Times New Roman"/>
-              </a:rPr>
-              <a:t> </a:t>
-            </a:r>
-            <a:r>
-              <a:rPr dirty="0" sz="1200" i="1">
+              <a:rPr sz="1200" i="1" spc="-30" dirty="0">
+                <a:latin typeface="Times New Roman"/>
+                <a:cs typeface="Times New Roman"/>
+              </a:rPr>
+              <a:t> </a:t>
+            </a:r>
+            <a:r>
+              <a:rPr sz="1200" i="1" dirty="0">
                 <a:latin typeface="Times New Roman"/>
                 <a:cs typeface="Times New Roman"/>
               </a:rPr>
               <a:t>to</a:t>
             </a:r>
             <a:r>
-              <a:rPr dirty="0" sz="1200" spc="-20" i="1">
-                <a:latin typeface="Times New Roman"/>
-                <a:cs typeface="Times New Roman"/>
-              </a:rPr>
-              <a:t> </a:t>
-            </a:r>
-            <a:r>
-              <a:rPr dirty="0" sz="1200" i="1">
+              <a:rPr sz="1200" i="1" spc="-20" dirty="0">
+                <a:latin typeface="Times New Roman"/>
+                <a:cs typeface="Times New Roman"/>
+              </a:rPr>
+              <a:t> </a:t>
+            </a:r>
+            <a:r>
+              <a:rPr sz="1200" i="1" dirty="0">
                 <a:latin typeface="Times New Roman"/>
                 <a:cs typeface="Times New Roman"/>
               </a:rPr>
               <a:t>the</a:t>
             </a:r>
             <a:r>
-              <a:rPr dirty="0" sz="1200" spc="-25" i="1">
-                <a:latin typeface="Times New Roman"/>
-                <a:cs typeface="Times New Roman"/>
-              </a:rPr>
-              <a:t> </a:t>
-            </a:r>
-            <a:r>
-              <a:rPr dirty="0" sz="1200" spc="-10" i="1">
+              <a:rPr sz="1200" i="1" spc="-25" dirty="0">
+                <a:latin typeface="Times New Roman"/>
+                <a:cs typeface="Times New Roman"/>
+              </a:rPr>
+              <a:t> </a:t>
+            </a:r>
+            <a:r>
+              <a:rPr sz="1200" i="1" spc="-10" dirty="0">
                 <a:latin typeface="Times New Roman"/>
                 <a:cs typeface="Times New Roman"/>
               </a:rPr>
               <a:t>participants table.</a:t>
             </a:r>
             <a:r>
-              <a:rPr dirty="0" sz="1200" spc="-10">
+              <a:rPr sz="1200" spc="-10" dirty="0">
                 <a:latin typeface="Times New Roman"/>
                 <a:cs typeface="Times New Roman"/>
               </a:rPr>
@@ -5206,7 +5367,7 @@
       </p:sp>
       <p:grpSp>
         <p:nvGrpSpPr>
-          <p:cNvPr id="13" name="object 13" descr=""/>
+          <p:cNvPr id="13" name="object 13"/>
           <p:cNvGrpSpPr/>
           <p:nvPr/>
         </p:nvGrpSpPr>
@@ -5220,7 +5381,7 @@
         </p:grpSpPr>
         <p:sp>
           <p:nvSpPr>
-            <p:cNvPr id="14" name="object 14" descr=""/>
+            <p:cNvPr id="14" name="object 14"/>
             <p:cNvSpPr/>
             <p:nvPr/>
           </p:nvSpPr>
@@ -5263,12 +5424,14 @@
           <p:txBody>
             <a:bodyPr wrap="square" lIns="0" tIns="0" rIns="0" bIns="0" rtlCol="0"/>
             <a:lstStyle/>
-            <a:p/>
+            <a:p>
+              <a:endParaRPr/>
+            </a:p>
           </p:txBody>
         </p:sp>
         <p:sp>
           <p:nvSpPr>
-            <p:cNvPr id="15" name="object 15" descr=""/>
+            <p:cNvPr id="15" name="object 15"/>
             <p:cNvSpPr/>
             <p:nvPr/>
           </p:nvSpPr>
@@ -5311,12 +5474,14 @@
           <p:txBody>
             <a:bodyPr wrap="square" lIns="0" tIns="0" rIns="0" bIns="0" rtlCol="0"/>
             <a:lstStyle/>
-            <a:p/>
+            <a:p>
+              <a:endParaRPr/>
+            </a:p>
           </p:txBody>
         </p:sp>
         <p:sp>
           <p:nvSpPr>
-            <p:cNvPr id="16" name="object 16" descr=""/>
+            <p:cNvPr id="16" name="object 16"/>
             <p:cNvSpPr/>
             <p:nvPr/>
           </p:nvSpPr>
@@ -5377,12 +5542,14 @@
           <p:txBody>
             <a:bodyPr wrap="square" lIns="0" tIns="0" rIns="0" bIns="0" rtlCol="0"/>
             <a:lstStyle/>
-            <a:p/>
+            <a:p>
+              <a:endParaRPr/>
+            </a:p>
           </p:txBody>
         </p:sp>
         <p:sp>
           <p:nvSpPr>
-            <p:cNvPr id="17" name="object 17" descr=""/>
+            <p:cNvPr id="17" name="object 17"/>
             <p:cNvSpPr/>
             <p:nvPr/>
           </p:nvSpPr>
@@ -5425,12 +5592,14 @@
           <p:txBody>
             <a:bodyPr wrap="square" lIns="0" tIns="0" rIns="0" bIns="0" rtlCol="0"/>
             <a:lstStyle/>
-            <a:p/>
+            <a:p>
+              <a:endParaRPr/>
+            </a:p>
           </p:txBody>
         </p:sp>
         <p:sp>
           <p:nvSpPr>
-            <p:cNvPr id="18" name="object 18" descr=""/>
+            <p:cNvPr id="18" name="object 18"/>
             <p:cNvSpPr/>
             <p:nvPr/>
           </p:nvSpPr>
@@ -5473,12 +5642,14 @@
           <p:txBody>
             <a:bodyPr wrap="square" lIns="0" tIns="0" rIns="0" bIns="0" rtlCol="0"/>
             <a:lstStyle/>
-            <a:p/>
+            <a:p>
+              <a:endParaRPr/>
+            </a:p>
           </p:txBody>
         </p:sp>
         <p:sp>
           <p:nvSpPr>
-            <p:cNvPr id="19" name="object 19" descr=""/>
+            <p:cNvPr id="19" name="object 19"/>
             <p:cNvSpPr/>
             <p:nvPr/>
           </p:nvSpPr>
@@ -5533,13 +5704,15 @@
           <p:txBody>
             <a:bodyPr wrap="square" lIns="0" tIns="0" rIns="0" bIns="0" rtlCol="0"/>
             <a:lstStyle/>
-            <a:p/>
+            <a:p>
+              <a:endParaRPr/>
+            </a:p>
           </p:txBody>
         </p:sp>
       </p:grpSp>
       <p:sp>
         <p:nvSpPr>
-          <p:cNvPr id="20" name="object 20" descr=""/>
+          <p:cNvPr id="20" name="object 20"/>
           <p:cNvSpPr txBox="1"/>
           <p:nvPr/>
         </p:nvSpPr>
@@ -5553,7 +5726,7 @@
           </a:prstGeom>
         </p:spPr>
         <p:txBody>
-          <a:bodyPr wrap="square" lIns="0" tIns="57150" rIns="0" bIns="0" rtlCol="0" vert="horz">
+          <a:bodyPr vert="horz" wrap="square" lIns="0" tIns="57150" rIns="0" bIns="0" rtlCol="0">
             <a:spAutoFit/>
           </a:bodyPr>
           <a:lstStyle/>
@@ -5567,49 +5740,49 @@
               </a:spcBef>
             </a:pPr>
             <a:r>
-              <a:rPr dirty="0" sz="1300" b="1">
+              <a:rPr sz="1300" b="1" dirty="0">
                 <a:latin typeface="Times New Roman"/>
                 <a:cs typeface="Times New Roman"/>
               </a:rPr>
               <a:t>3.4</a:t>
             </a:r>
             <a:r>
-              <a:rPr dirty="0" sz="1300" spc="-35" b="1">
-                <a:latin typeface="Times New Roman"/>
-                <a:cs typeface="Times New Roman"/>
-              </a:rPr>
-              <a:t> </a:t>
-            </a:r>
-            <a:r>
-              <a:rPr dirty="0" sz="1300" b="1">
+              <a:rPr sz="1300" b="1" spc="-35" dirty="0">
+                <a:latin typeface="Times New Roman"/>
+                <a:cs typeface="Times New Roman"/>
+              </a:rPr>
+              <a:t> </a:t>
+            </a:r>
+            <a:r>
+              <a:rPr sz="1300" b="1" dirty="0">
                 <a:latin typeface="Times New Roman"/>
                 <a:cs typeface="Times New Roman"/>
               </a:rPr>
               <a:t>Prevent</a:t>
             </a:r>
             <a:r>
-              <a:rPr dirty="0" sz="1300" spc="-20" b="1">
-                <a:latin typeface="Times New Roman"/>
-                <a:cs typeface="Times New Roman"/>
-              </a:rPr>
-              <a:t> </a:t>
-            </a:r>
-            <a:r>
-              <a:rPr dirty="0" sz="1300" b="1">
+              <a:rPr sz="1300" b="1" spc="-20" dirty="0">
+                <a:latin typeface="Times New Roman"/>
+                <a:cs typeface="Times New Roman"/>
+              </a:rPr>
+              <a:t> </a:t>
+            </a:r>
+            <a:r>
+              <a:rPr sz="1300" b="1" dirty="0">
                 <a:latin typeface="Times New Roman"/>
                 <a:cs typeface="Times New Roman"/>
               </a:rPr>
               <a:t>Page</a:t>
             </a:r>
             <a:r>
-              <a:rPr dirty="0" sz="1300" spc="-35" b="1">
-                <a:latin typeface="Times New Roman"/>
-                <a:cs typeface="Times New Roman"/>
-              </a:rPr>
-              <a:t> </a:t>
-            </a:r>
-            <a:r>
-              <a:rPr dirty="0" sz="1300" spc="-10" b="1">
+              <a:rPr sz="1300" b="1" spc="-35" dirty="0">
+                <a:latin typeface="Times New Roman"/>
+                <a:cs typeface="Times New Roman"/>
+              </a:rPr>
+              <a:t> </a:t>
+            </a:r>
+            <a:r>
+              <a:rPr sz="1300" b="1" spc="-10" dirty="0">
                 <a:latin typeface="Times New Roman"/>
                 <a:cs typeface="Times New Roman"/>
               </a:rPr>
@@ -5630,189 +5803,189 @@
               </a:spcBef>
             </a:pPr>
             <a:r>
-              <a:rPr dirty="0" sz="1200" i="1">
+              <a:rPr sz="1200" i="1" dirty="0">
                 <a:latin typeface="Times New Roman"/>
                 <a:cs typeface="Times New Roman"/>
               </a:rPr>
               <a:t>(Use</a:t>
             </a:r>
             <a:r>
-              <a:rPr dirty="0" sz="1200" spc="-30" i="1">
-                <a:latin typeface="Times New Roman"/>
-                <a:cs typeface="Times New Roman"/>
-              </a:rPr>
-              <a:t> </a:t>
-            </a:r>
-            <a:r>
-              <a:rPr dirty="0" sz="1200" i="1">
+              <a:rPr sz="1200" i="1" spc="-30" dirty="0">
+                <a:latin typeface="Times New Roman"/>
+                <a:cs typeface="Times New Roman"/>
+              </a:rPr>
+              <a:t> </a:t>
+            </a:r>
+            <a:r>
+              <a:rPr sz="1200" i="1" dirty="0">
                 <a:latin typeface="Times New Roman"/>
                 <a:cs typeface="Times New Roman"/>
               </a:rPr>
               <a:t>JavaScript</a:t>
             </a:r>
             <a:r>
-              <a:rPr dirty="0" sz="1200" spc="-20" i="1">
-                <a:latin typeface="Times New Roman"/>
-                <a:cs typeface="Times New Roman"/>
-              </a:rPr>
-              <a:t> </a:t>
-            </a:r>
-            <a:r>
-              <a:rPr dirty="0" sz="1200" i="1">
+              <a:rPr sz="1200" i="1" spc="-20" dirty="0">
+                <a:latin typeface="Times New Roman"/>
+                <a:cs typeface="Times New Roman"/>
+              </a:rPr>
+              <a:t> </a:t>
+            </a:r>
+            <a:r>
+              <a:rPr sz="1200" i="1" dirty="0">
                 <a:latin typeface="Times New Roman"/>
                 <a:cs typeface="Times New Roman"/>
               </a:rPr>
               <a:t>to</a:t>
             </a:r>
             <a:r>
-              <a:rPr dirty="0" sz="1200" spc="-25" i="1">
-                <a:latin typeface="Times New Roman"/>
-                <a:cs typeface="Times New Roman"/>
-              </a:rPr>
-              <a:t> </a:t>
-            </a:r>
-            <a:r>
-              <a:rPr dirty="0" sz="1200" i="1">
+              <a:rPr sz="1200" i="1" spc="-25" dirty="0">
+                <a:latin typeface="Times New Roman"/>
+                <a:cs typeface="Times New Roman"/>
+              </a:rPr>
+              <a:t> </a:t>
+            </a:r>
+            <a:r>
+              <a:rPr sz="1200" i="1" dirty="0">
                 <a:latin typeface="Times New Roman"/>
                 <a:cs typeface="Times New Roman"/>
               </a:rPr>
               <a:t>prevent</a:t>
             </a:r>
             <a:r>
-              <a:rPr dirty="0" sz="1200" spc="-25" i="1">
-                <a:latin typeface="Times New Roman"/>
-                <a:cs typeface="Times New Roman"/>
-              </a:rPr>
-              <a:t> </a:t>
-            </a:r>
-            <a:r>
-              <a:rPr dirty="0" sz="1200" i="1">
+              <a:rPr sz="1200" i="1" spc="-25" dirty="0">
+                <a:latin typeface="Times New Roman"/>
+                <a:cs typeface="Times New Roman"/>
+              </a:rPr>
+              <a:t> </a:t>
+            </a:r>
+            <a:r>
+              <a:rPr sz="1200" i="1" dirty="0">
                 <a:latin typeface="Times New Roman"/>
                 <a:cs typeface="Times New Roman"/>
               </a:rPr>
               <a:t>the</a:t>
             </a:r>
             <a:r>
-              <a:rPr dirty="0" sz="1200" spc="-30" i="1">
-                <a:latin typeface="Times New Roman"/>
-                <a:cs typeface="Times New Roman"/>
-              </a:rPr>
-              <a:t> </a:t>
-            </a:r>
-            <a:r>
-              <a:rPr dirty="0" sz="1200" i="1">
+              <a:rPr sz="1200" i="1" spc="-30" dirty="0">
+                <a:latin typeface="Times New Roman"/>
+                <a:cs typeface="Times New Roman"/>
+              </a:rPr>
+              <a:t> </a:t>
+            </a:r>
+            <a:r>
+              <a:rPr sz="1200" i="1" dirty="0">
                 <a:latin typeface="Times New Roman"/>
                 <a:cs typeface="Times New Roman"/>
               </a:rPr>
               <a:t>default</a:t>
             </a:r>
             <a:r>
-              <a:rPr dirty="0" sz="1200" spc="-25" i="1">
-                <a:latin typeface="Times New Roman"/>
-                <a:cs typeface="Times New Roman"/>
-              </a:rPr>
-              <a:t> </a:t>
-            </a:r>
-            <a:r>
-              <a:rPr dirty="0" sz="1200" i="1">
+              <a:rPr sz="1200" i="1" spc="-25" dirty="0">
+                <a:latin typeface="Times New Roman"/>
+                <a:cs typeface="Times New Roman"/>
+              </a:rPr>
+              <a:t> </a:t>
+            </a:r>
+            <a:r>
+              <a:rPr sz="1200" i="1" dirty="0">
                 <a:latin typeface="Times New Roman"/>
                 <a:cs typeface="Times New Roman"/>
               </a:rPr>
               <a:t>form</a:t>
             </a:r>
             <a:r>
-              <a:rPr dirty="0" sz="1200" spc="-30" i="1">
-                <a:latin typeface="Times New Roman"/>
-                <a:cs typeface="Times New Roman"/>
-              </a:rPr>
-              <a:t> </a:t>
-            </a:r>
-            <a:r>
-              <a:rPr dirty="0" sz="1200" i="1">
+              <a:rPr sz="1200" i="1" spc="-30" dirty="0">
+                <a:latin typeface="Times New Roman"/>
+                <a:cs typeface="Times New Roman"/>
+              </a:rPr>
+              <a:t> </a:t>
+            </a:r>
+            <a:r>
+              <a:rPr sz="1200" i="1" dirty="0">
                 <a:latin typeface="Times New Roman"/>
                 <a:cs typeface="Times New Roman"/>
               </a:rPr>
               <a:t>submission</a:t>
             </a:r>
             <a:r>
-              <a:rPr dirty="0" sz="1200" spc="-25" i="1">
-                <a:latin typeface="Times New Roman"/>
-                <a:cs typeface="Times New Roman"/>
-              </a:rPr>
-              <a:t> </a:t>
-            </a:r>
-            <a:r>
-              <a:rPr dirty="0" sz="1200" i="1">
+              <a:rPr sz="1200" i="1" spc="-25" dirty="0">
+                <a:latin typeface="Times New Roman"/>
+                <a:cs typeface="Times New Roman"/>
+              </a:rPr>
+              <a:t> </a:t>
+            </a:r>
+            <a:r>
+              <a:rPr sz="1200" i="1" dirty="0">
                 <a:latin typeface="Times New Roman"/>
                 <a:cs typeface="Times New Roman"/>
               </a:rPr>
               <a:t>behavior</a:t>
             </a:r>
             <a:r>
-              <a:rPr dirty="0" sz="1200" spc="-25" i="1">
-                <a:latin typeface="Times New Roman"/>
-                <a:cs typeface="Times New Roman"/>
-              </a:rPr>
-              <a:t> </a:t>
-            </a:r>
-            <a:r>
-              <a:rPr dirty="0" sz="1200" i="1">
+              <a:rPr sz="1200" i="1" spc="-25" dirty="0">
+                <a:latin typeface="Times New Roman"/>
+                <a:cs typeface="Times New Roman"/>
+              </a:rPr>
+              <a:t> </a:t>
+            </a:r>
+            <a:r>
+              <a:rPr sz="1200" i="1" dirty="0">
                 <a:latin typeface="Times New Roman"/>
                 <a:cs typeface="Times New Roman"/>
               </a:rPr>
               <a:t>and</a:t>
             </a:r>
             <a:r>
-              <a:rPr dirty="0" sz="1200" spc="-25" i="1">
-                <a:latin typeface="Times New Roman"/>
-                <a:cs typeface="Times New Roman"/>
-              </a:rPr>
-              <a:t> </a:t>
-            </a:r>
-            <a:r>
-              <a:rPr dirty="0" sz="1200" i="1">
+              <a:rPr sz="1200" i="1" spc="-25" dirty="0">
+                <a:latin typeface="Times New Roman"/>
+                <a:cs typeface="Times New Roman"/>
+              </a:rPr>
+              <a:t> </a:t>
+            </a:r>
+            <a:r>
+              <a:rPr sz="1200" i="1" dirty="0">
                 <a:latin typeface="Times New Roman"/>
                 <a:cs typeface="Times New Roman"/>
               </a:rPr>
               <a:t>update</a:t>
             </a:r>
             <a:r>
-              <a:rPr dirty="0" sz="1200" spc="-25" i="1">
-                <a:latin typeface="Times New Roman"/>
-                <a:cs typeface="Times New Roman"/>
-              </a:rPr>
-              <a:t> </a:t>
-            </a:r>
-            <a:r>
-              <a:rPr dirty="0" sz="1200" i="1">
+              <a:rPr sz="1200" i="1" spc="-25" dirty="0">
+                <a:latin typeface="Times New Roman"/>
+                <a:cs typeface="Times New Roman"/>
+              </a:rPr>
+              <a:t> </a:t>
+            </a:r>
+            <a:r>
+              <a:rPr sz="1200" i="1" dirty="0">
                 <a:latin typeface="Times New Roman"/>
                 <a:cs typeface="Times New Roman"/>
               </a:rPr>
               <a:t>the</a:t>
             </a:r>
             <a:r>
-              <a:rPr dirty="0" sz="1200" spc="-30" i="1">
-                <a:latin typeface="Times New Roman"/>
-                <a:cs typeface="Times New Roman"/>
-              </a:rPr>
-              <a:t> </a:t>
-            </a:r>
-            <a:r>
-              <a:rPr dirty="0" sz="1200" i="1">
+              <a:rPr sz="1200" i="1" spc="-30" dirty="0">
+                <a:latin typeface="Times New Roman"/>
+                <a:cs typeface="Times New Roman"/>
+              </a:rPr>
+              <a:t> </a:t>
+            </a:r>
+            <a:r>
+              <a:rPr sz="1200" i="1" dirty="0">
                 <a:latin typeface="Times New Roman"/>
                 <a:cs typeface="Times New Roman"/>
               </a:rPr>
               <a:t>page</a:t>
             </a:r>
             <a:r>
-              <a:rPr dirty="0" sz="1200" spc="-30" i="1">
-                <a:latin typeface="Times New Roman"/>
-                <a:cs typeface="Times New Roman"/>
-              </a:rPr>
-              <a:t> </a:t>
-            </a:r>
-            <a:r>
-              <a:rPr dirty="0" sz="1200" spc="-10" i="1">
+              <a:rPr sz="1200" i="1" spc="-30" dirty="0">
+                <a:latin typeface="Times New Roman"/>
+                <a:cs typeface="Times New Roman"/>
+              </a:rPr>
+              <a:t> </a:t>
+            </a:r>
+            <a:r>
+              <a:rPr sz="1200" i="1" spc="-10" dirty="0">
                 <a:latin typeface="Times New Roman"/>
                 <a:cs typeface="Times New Roman"/>
               </a:rPr>
@@ -5827,7 +6000,7 @@
       </p:sp>
       <p:grpSp>
         <p:nvGrpSpPr>
-          <p:cNvPr id="21" name="object 21" descr=""/>
+          <p:cNvPr id="21" name="object 21"/>
           <p:cNvGrpSpPr/>
           <p:nvPr/>
         </p:nvGrpSpPr>
@@ -5841,7 +6014,7 @@
         </p:grpSpPr>
         <p:sp>
           <p:nvSpPr>
-            <p:cNvPr id="22" name="object 22" descr=""/>
+            <p:cNvPr id="22" name="object 22"/>
             <p:cNvSpPr/>
             <p:nvPr/>
           </p:nvSpPr>
@@ -5884,12 +6057,14 @@
           <p:txBody>
             <a:bodyPr wrap="square" lIns="0" tIns="0" rIns="0" bIns="0" rtlCol="0"/>
             <a:lstStyle/>
-            <a:p/>
+            <a:p>
+              <a:endParaRPr/>
+            </a:p>
           </p:txBody>
         </p:sp>
         <p:sp>
           <p:nvSpPr>
-            <p:cNvPr id="23" name="object 23" descr=""/>
+            <p:cNvPr id="23" name="object 23"/>
             <p:cNvSpPr/>
             <p:nvPr/>
           </p:nvSpPr>
@@ -5932,12 +6107,14 @@
           <p:txBody>
             <a:bodyPr wrap="square" lIns="0" tIns="0" rIns="0" bIns="0" rtlCol="0"/>
             <a:lstStyle/>
-            <a:p/>
+            <a:p>
+              <a:endParaRPr/>
+            </a:p>
           </p:txBody>
         </p:sp>
         <p:sp>
           <p:nvSpPr>
-            <p:cNvPr id="24" name="object 24" descr=""/>
+            <p:cNvPr id="24" name="object 24"/>
             <p:cNvSpPr/>
             <p:nvPr/>
           </p:nvSpPr>
@@ -5998,12 +6175,14 @@
           <p:txBody>
             <a:bodyPr wrap="square" lIns="0" tIns="0" rIns="0" bIns="0" rtlCol="0"/>
             <a:lstStyle/>
-            <a:p/>
+            <a:p>
+              <a:endParaRPr/>
+            </a:p>
           </p:txBody>
         </p:sp>
         <p:sp>
           <p:nvSpPr>
-            <p:cNvPr id="25" name="object 25" descr=""/>
+            <p:cNvPr id="25" name="object 25"/>
             <p:cNvSpPr/>
             <p:nvPr/>
           </p:nvSpPr>
@@ -6046,12 +6225,14 @@
           <p:txBody>
             <a:bodyPr wrap="square" lIns="0" tIns="0" rIns="0" bIns="0" rtlCol="0"/>
             <a:lstStyle/>
-            <a:p/>
+            <a:p>
+              <a:endParaRPr/>
+            </a:p>
           </p:txBody>
         </p:sp>
         <p:sp>
           <p:nvSpPr>
-            <p:cNvPr id="26" name="object 26" descr=""/>
+            <p:cNvPr id="26" name="object 26"/>
             <p:cNvSpPr/>
             <p:nvPr/>
           </p:nvSpPr>
@@ -6094,12 +6275,14 @@
           <p:txBody>
             <a:bodyPr wrap="square" lIns="0" tIns="0" rIns="0" bIns="0" rtlCol="0"/>
             <a:lstStyle/>
-            <a:p/>
+            <a:p>
+              <a:endParaRPr/>
+            </a:p>
           </p:txBody>
         </p:sp>
         <p:sp>
           <p:nvSpPr>
-            <p:cNvPr id="27" name="object 27" descr=""/>
+            <p:cNvPr id="27" name="object 27"/>
             <p:cNvSpPr/>
             <p:nvPr/>
           </p:nvSpPr>
@@ -6154,13 +6337,15 @@
           <p:txBody>
             <a:bodyPr wrap="square" lIns="0" tIns="0" rIns="0" bIns="0" rtlCol="0"/>
             <a:lstStyle/>
-            <a:p/>
+            <a:p>
+              <a:endParaRPr/>
+            </a:p>
           </p:txBody>
         </p:sp>
       </p:grpSp>
       <p:sp>
         <p:nvSpPr>
-          <p:cNvPr id="28" name="object 28" descr=""/>
+          <p:cNvPr id="28" name="object 28"/>
           <p:cNvSpPr txBox="1"/>
           <p:nvPr/>
         </p:nvSpPr>
@@ -6174,7 +6359,7 @@
           </a:prstGeom>
         </p:spPr>
         <p:txBody>
-          <a:bodyPr wrap="square" lIns="0" tIns="12065" rIns="0" bIns="0" rtlCol="0" vert="horz">
+          <a:bodyPr vert="horz" wrap="square" lIns="0" tIns="12065" rIns="0" bIns="0" rtlCol="0">
             <a:spAutoFit/>
           </a:bodyPr>
           <a:lstStyle/>
@@ -6188,77 +6373,77 @@
               </a:spcBef>
             </a:pPr>
             <a:r>
-              <a:rPr dirty="0" sz="1300" b="1">
+              <a:rPr sz="1300" b="1" dirty="0">
                 <a:latin typeface="Times New Roman"/>
                 <a:cs typeface="Times New Roman"/>
               </a:rPr>
               <a:t>3.5</a:t>
             </a:r>
             <a:r>
-              <a:rPr dirty="0" sz="1300" spc="265" b="1">
-                <a:latin typeface="Times New Roman"/>
-                <a:cs typeface="Times New Roman"/>
-              </a:rPr>
-              <a:t> </a:t>
-            </a:r>
-            <a:r>
-              <a:rPr dirty="0" sz="1300" b="1">
+              <a:rPr sz="1300" b="1" spc="265" dirty="0">
+                <a:latin typeface="Times New Roman"/>
+                <a:cs typeface="Times New Roman"/>
+              </a:rPr>
+              <a:t> </a:t>
+            </a:r>
+            <a:r>
+              <a:rPr sz="1300" b="1" dirty="0">
                 <a:latin typeface="Times New Roman"/>
                 <a:cs typeface="Times New Roman"/>
               </a:rPr>
               <a:t>Clear</a:t>
             </a:r>
             <a:r>
-              <a:rPr dirty="0" sz="1300" spc="-15" b="1">
-                <a:latin typeface="Times New Roman"/>
-                <a:cs typeface="Times New Roman"/>
-              </a:rPr>
-              <a:t> </a:t>
-            </a:r>
-            <a:r>
-              <a:rPr dirty="0" sz="1300" b="1">
+              <a:rPr sz="1300" b="1" spc="-15" dirty="0">
+                <a:latin typeface="Times New Roman"/>
+                <a:cs typeface="Times New Roman"/>
+              </a:rPr>
+              <a:t> </a:t>
+            </a:r>
+            <a:r>
+              <a:rPr sz="1300" b="1" dirty="0">
                 <a:latin typeface="Times New Roman"/>
                 <a:cs typeface="Times New Roman"/>
               </a:rPr>
               <a:t>Form</a:t>
             </a:r>
             <a:r>
-              <a:rPr dirty="0" sz="1300" spc="-15" b="1">
-                <a:latin typeface="Times New Roman"/>
-                <a:cs typeface="Times New Roman"/>
-              </a:rPr>
-              <a:t> </a:t>
-            </a:r>
-            <a:r>
-              <a:rPr dirty="0" sz="1300" b="1">
+              <a:rPr sz="1300" b="1" spc="-15" dirty="0">
+                <a:latin typeface="Times New Roman"/>
+                <a:cs typeface="Times New Roman"/>
+              </a:rPr>
+              <a:t> </a:t>
+            </a:r>
+            <a:r>
+              <a:rPr sz="1300" b="1" dirty="0">
                 <a:latin typeface="Times New Roman"/>
                 <a:cs typeface="Times New Roman"/>
               </a:rPr>
               <a:t>After</a:t>
             </a:r>
             <a:r>
-              <a:rPr dirty="0" sz="1300" spc="-15" b="1">
-                <a:latin typeface="Times New Roman"/>
-                <a:cs typeface="Times New Roman"/>
-              </a:rPr>
-              <a:t> </a:t>
-            </a:r>
-            <a:r>
-              <a:rPr dirty="0" sz="1300" b="1">
+              <a:rPr sz="1300" b="1" spc="-15" dirty="0">
+                <a:latin typeface="Times New Roman"/>
+                <a:cs typeface="Times New Roman"/>
+              </a:rPr>
+              <a:t> </a:t>
+            </a:r>
+            <a:r>
+              <a:rPr sz="1300" b="1" dirty="0">
                 <a:latin typeface="Times New Roman"/>
                 <a:cs typeface="Times New Roman"/>
               </a:rPr>
               <a:t>Successful</a:t>
             </a:r>
             <a:r>
-              <a:rPr dirty="0" sz="1300" spc="-30" b="1">
-                <a:latin typeface="Times New Roman"/>
-                <a:cs typeface="Times New Roman"/>
-              </a:rPr>
-              <a:t> </a:t>
-            </a:r>
-            <a:r>
-              <a:rPr dirty="0" sz="1300" spc="-10" b="1">
+              <a:rPr sz="1300" b="1" spc="-30" dirty="0">
+                <a:latin typeface="Times New Roman"/>
+                <a:cs typeface="Times New Roman"/>
+              </a:rPr>
+              <a:t> </a:t>
+            </a:r>
+            <a:r>
+              <a:rPr sz="1300" b="1" spc="-10" dirty="0">
                 <a:latin typeface="Times New Roman"/>
                 <a:cs typeface="Times New Roman"/>
               </a:rPr>
@@ -6279,189 +6464,189 @@
               </a:spcBef>
             </a:pPr>
             <a:r>
-              <a:rPr dirty="0" sz="1200" spc="-10" i="1">
+              <a:rPr sz="1200" i="1" spc="-10" dirty="0">
                 <a:latin typeface="Times New Roman"/>
                 <a:cs typeface="Times New Roman"/>
               </a:rPr>
               <a:t>(Automatically</a:t>
             </a:r>
             <a:r>
-              <a:rPr dirty="0" sz="1200" spc="-30" i="1">
-                <a:latin typeface="Times New Roman"/>
-                <a:cs typeface="Times New Roman"/>
-              </a:rPr>
-              <a:t> </a:t>
-            </a:r>
-            <a:r>
-              <a:rPr dirty="0" sz="1200" i="1">
+              <a:rPr sz="1200" i="1" spc="-30" dirty="0">
+                <a:latin typeface="Times New Roman"/>
+                <a:cs typeface="Times New Roman"/>
+              </a:rPr>
+              <a:t> </a:t>
+            </a:r>
+            <a:r>
+              <a:rPr sz="1200" i="1" dirty="0">
                 <a:latin typeface="Times New Roman"/>
                 <a:cs typeface="Times New Roman"/>
               </a:rPr>
               <a:t>reset</a:t>
             </a:r>
             <a:r>
-              <a:rPr dirty="0" sz="1200" spc="-20" i="1">
-                <a:latin typeface="Times New Roman"/>
-                <a:cs typeface="Times New Roman"/>
-              </a:rPr>
-              <a:t> </a:t>
-            </a:r>
-            <a:r>
-              <a:rPr dirty="0" sz="1200" i="1">
+              <a:rPr sz="1200" i="1" spc="-20" dirty="0">
+                <a:latin typeface="Times New Roman"/>
+                <a:cs typeface="Times New Roman"/>
+              </a:rPr>
+              <a:t> </a:t>
+            </a:r>
+            <a:r>
+              <a:rPr sz="1200" i="1" dirty="0">
                 <a:latin typeface="Times New Roman"/>
                 <a:cs typeface="Times New Roman"/>
               </a:rPr>
               <a:t>the</a:t>
             </a:r>
             <a:r>
-              <a:rPr dirty="0" sz="1200" spc="-30" i="1">
-                <a:latin typeface="Times New Roman"/>
-                <a:cs typeface="Times New Roman"/>
-              </a:rPr>
-              <a:t> </a:t>
-            </a:r>
-            <a:r>
-              <a:rPr dirty="0" sz="1200" i="1">
+              <a:rPr sz="1200" i="1" spc="-30" dirty="0">
+                <a:latin typeface="Times New Roman"/>
+                <a:cs typeface="Times New Roman"/>
+              </a:rPr>
+              <a:t> </a:t>
+            </a:r>
+            <a:r>
+              <a:rPr sz="1200" i="1" dirty="0">
                 <a:latin typeface="Times New Roman"/>
                 <a:cs typeface="Times New Roman"/>
               </a:rPr>
               <a:t>form</a:t>
             </a:r>
             <a:r>
-              <a:rPr dirty="0" sz="1200" spc="-25" i="1">
-                <a:latin typeface="Times New Roman"/>
-                <a:cs typeface="Times New Roman"/>
-              </a:rPr>
-              <a:t> </a:t>
-            </a:r>
-            <a:r>
-              <a:rPr dirty="0" sz="1200" i="1">
+              <a:rPr sz="1200" i="1" spc="-25" dirty="0">
+                <a:latin typeface="Times New Roman"/>
+                <a:cs typeface="Times New Roman"/>
+              </a:rPr>
+              <a:t> </a:t>
+            </a:r>
+            <a:r>
+              <a:rPr sz="1200" i="1" dirty="0">
                 <a:latin typeface="Times New Roman"/>
                 <a:cs typeface="Times New Roman"/>
               </a:rPr>
               <a:t>fields</a:t>
             </a:r>
             <a:r>
-              <a:rPr dirty="0" sz="1200" spc="-30" i="1">
-                <a:latin typeface="Times New Roman"/>
-                <a:cs typeface="Times New Roman"/>
-              </a:rPr>
-              <a:t> </a:t>
-            </a:r>
-            <a:r>
-              <a:rPr dirty="0" sz="1200" i="1">
+              <a:rPr sz="1200" i="1" spc="-30" dirty="0">
+                <a:latin typeface="Times New Roman"/>
+                <a:cs typeface="Times New Roman"/>
+              </a:rPr>
+              <a:t> </a:t>
+            </a:r>
+            <a:r>
+              <a:rPr sz="1200" i="1" dirty="0">
                 <a:latin typeface="Times New Roman"/>
                 <a:cs typeface="Times New Roman"/>
               </a:rPr>
               <a:t>after</a:t>
             </a:r>
             <a:r>
-              <a:rPr dirty="0" sz="1200" spc="-25" i="1">
-                <a:latin typeface="Times New Roman"/>
-                <a:cs typeface="Times New Roman"/>
-              </a:rPr>
-              <a:t> </a:t>
-            </a:r>
-            <a:r>
-              <a:rPr dirty="0" sz="1200" i="1">
+              <a:rPr sz="1200" i="1" spc="-25" dirty="0">
+                <a:latin typeface="Times New Roman"/>
+                <a:cs typeface="Times New Roman"/>
+              </a:rPr>
+              <a:t> </a:t>
+            </a:r>
+            <a:r>
+              <a:rPr sz="1200" i="1" dirty="0">
                 <a:latin typeface="Times New Roman"/>
                 <a:cs typeface="Times New Roman"/>
               </a:rPr>
               <a:t>successful</a:t>
             </a:r>
             <a:r>
-              <a:rPr dirty="0" sz="1200" spc="-20" i="1">
-                <a:latin typeface="Times New Roman"/>
-                <a:cs typeface="Times New Roman"/>
-              </a:rPr>
-              <a:t> </a:t>
-            </a:r>
-            <a:r>
-              <a:rPr dirty="0" sz="1200" i="1">
+              <a:rPr sz="1200" i="1" spc="-20" dirty="0">
+                <a:latin typeface="Times New Roman"/>
+                <a:cs typeface="Times New Roman"/>
+              </a:rPr>
+              <a:t> </a:t>
+            </a:r>
+            <a:r>
+              <a:rPr sz="1200" i="1" dirty="0">
                 <a:latin typeface="Times New Roman"/>
                 <a:cs typeface="Times New Roman"/>
               </a:rPr>
               <a:t>registration</a:t>
             </a:r>
             <a:r>
-              <a:rPr dirty="0" sz="1200" spc="-25" i="1">
-                <a:latin typeface="Times New Roman"/>
-                <a:cs typeface="Times New Roman"/>
-              </a:rPr>
-              <a:t> </a:t>
-            </a:r>
-            <a:r>
-              <a:rPr dirty="0" sz="1200" i="1">
+              <a:rPr sz="1200" i="1" spc="-25" dirty="0">
+                <a:latin typeface="Times New Roman"/>
+                <a:cs typeface="Times New Roman"/>
+              </a:rPr>
+              <a:t> </a:t>
+            </a:r>
+            <a:r>
+              <a:rPr sz="1200" i="1" dirty="0">
                 <a:latin typeface="Times New Roman"/>
                 <a:cs typeface="Times New Roman"/>
               </a:rPr>
               <a:t>while</a:t>
             </a:r>
             <a:r>
-              <a:rPr dirty="0" sz="1200" spc="-20" i="1">
-                <a:latin typeface="Times New Roman"/>
-                <a:cs typeface="Times New Roman"/>
-              </a:rPr>
-              <a:t> </a:t>
-            </a:r>
-            <a:r>
-              <a:rPr dirty="0" sz="1200" i="1">
+              <a:rPr sz="1200" i="1" spc="-20" dirty="0">
+                <a:latin typeface="Times New Roman"/>
+                <a:cs typeface="Times New Roman"/>
+              </a:rPr>
+              <a:t> </a:t>
+            </a:r>
+            <a:r>
+              <a:rPr sz="1200" i="1" dirty="0">
                 <a:latin typeface="Times New Roman"/>
                 <a:cs typeface="Times New Roman"/>
               </a:rPr>
               <a:t>keeping</a:t>
             </a:r>
             <a:r>
-              <a:rPr dirty="0" sz="1200" spc="-25" i="1">
-                <a:latin typeface="Times New Roman"/>
-                <a:cs typeface="Times New Roman"/>
-              </a:rPr>
-              <a:t> </a:t>
-            </a:r>
-            <a:r>
-              <a:rPr dirty="0" sz="1200" i="1">
+              <a:rPr sz="1200" i="1" spc="-25" dirty="0">
+                <a:latin typeface="Times New Roman"/>
+                <a:cs typeface="Times New Roman"/>
+              </a:rPr>
+              <a:t> </a:t>
+            </a:r>
+            <a:r>
+              <a:rPr sz="1200" i="1" dirty="0">
                 <a:latin typeface="Times New Roman"/>
                 <a:cs typeface="Times New Roman"/>
               </a:rPr>
               <a:t>the</a:t>
             </a:r>
             <a:r>
-              <a:rPr dirty="0" sz="1200" spc="-20" i="1">
-                <a:latin typeface="Times New Roman"/>
-                <a:cs typeface="Times New Roman"/>
-              </a:rPr>
-              <a:t> </a:t>
-            </a:r>
-            <a:r>
-              <a:rPr dirty="0" sz="1200" i="1">
+              <a:rPr sz="1200" i="1" spc="-20" dirty="0">
+                <a:latin typeface="Times New Roman"/>
+                <a:cs typeface="Times New Roman"/>
+              </a:rPr>
+              <a:t> </a:t>
+            </a:r>
+            <a:r>
+              <a:rPr sz="1200" i="1" dirty="0">
                 <a:latin typeface="Times New Roman"/>
                 <a:cs typeface="Times New Roman"/>
               </a:rPr>
               <a:t>table</a:t>
             </a:r>
             <a:r>
-              <a:rPr dirty="0" sz="1200" spc="-25" i="1">
-                <a:latin typeface="Times New Roman"/>
-                <a:cs typeface="Times New Roman"/>
-              </a:rPr>
-              <a:t> </a:t>
-            </a:r>
-            <a:r>
-              <a:rPr dirty="0" sz="1200" i="1">
+              <a:rPr sz="1200" i="1" spc="-25" dirty="0">
+                <a:latin typeface="Times New Roman"/>
+                <a:cs typeface="Times New Roman"/>
+              </a:rPr>
+              <a:t> </a:t>
+            </a:r>
+            <a:r>
+              <a:rPr sz="1200" i="1" dirty="0">
                 <a:latin typeface="Times New Roman"/>
                 <a:cs typeface="Times New Roman"/>
               </a:rPr>
               <a:t>data</a:t>
             </a:r>
             <a:r>
-              <a:rPr dirty="0" sz="1200" spc="-20" i="1">
-                <a:latin typeface="Times New Roman"/>
-                <a:cs typeface="Times New Roman"/>
-              </a:rPr>
-              <a:t> </a:t>
-            </a:r>
-            <a:r>
-              <a:rPr dirty="0" sz="1200" spc="-10" i="1">
+              <a:rPr sz="1200" i="1" spc="-20" dirty="0">
+                <a:latin typeface="Times New Roman"/>
+                <a:cs typeface="Times New Roman"/>
+              </a:rPr>
+              <a:t> </a:t>
+            </a:r>
+            <a:r>
+              <a:rPr sz="1200" i="1" spc="-10" dirty="0">
                 <a:latin typeface="Times New Roman"/>
                 <a:cs typeface="Times New Roman"/>
               </a:rPr>
@@ -6476,7 +6661,7 @@
       </p:sp>
       <p:grpSp>
         <p:nvGrpSpPr>
-          <p:cNvPr id="29" name="object 29" descr=""/>
+          <p:cNvPr id="29" name="object 29"/>
           <p:cNvGrpSpPr/>
           <p:nvPr/>
         </p:nvGrpSpPr>
@@ -6490,7 +6675,7 @@
         </p:grpSpPr>
         <p:sp>
           <p:nvSpPr>
-            <p:cNvPr id="30" name="object 30" descr=""/>
+            <p:cNvPr id="30" name="object 30"/>
             <p:cNvSpPr/>
             <p:nvPr/>
           </p:nvSpPr>
@@ -6533,12 +6718,14 @@
           <p:txBody>
             <a:bodyPr wrap="square" lIns="0" tIns="0" rIns="0" bIns="0" rtlCol="0"/>
             <a:lstStyle/>
-            <a:p/>
+            <a:p>
+              <a:endParaRPr/>
+            </a:p>
           </p:txBody>
         </p:sp>
         <p:sp>
           <p:nvSpPr>
-            <p:cNvPr id="31" name="object 31" descr=""/>
+            <p:cNvPr id="31" name="object 31"/>
             <p:cNvSpPr/>
             <p:nvPr/>
           </p:nvSpPr>
@@ -6581,12 +6768,14 @@
           <p:txBody>
             <a:bodyPr wrap="square" lIns="0" tIns="0" rIns="0" bIns="0" rtlCol="0"/>
             <a:lstStyle/>
-            <a:p/>
+            <a:p>
+              <a:endParaRPr/>
+            </a:p>
           </p:txBody>
         </p:sp>
         <p:sp>
           <p:nvSpPr>
-            <p:cNvPr id="32" name="object 32" descr=""/>
+            <p:cNvPr id="32" name="object 32"/>
             <p:cNvSpPr/>
             <p:nvPr/>
           </p:nvSpPr>
@@ -6647,12 +6836,14 @@
           <p:txBody>
             <a:bodyPr wrap="square" lIns="0" tIns="0" rIns="0" bIns="0" rtlCol="0"/>
             <a:lstStyle/>
-            <a:p/>
+            <a:p>
+              <a:endParaRPr/>
+            </a:p>
           </p:txBody>
         </p:sp>
         <p:sp>
           <p:nvSpPr>
-            <p:cNvPr id="33" name="object 33" descr=""/>
+            <p:cNvPr id="33" name="object 33"/>
             <p:cNvSpPr/>
             <p:nvPr/>
           </p:nvSpPr>
@@ -6695,12 +6886,14 @@
           <p:txBody>
             <a:bodyPr wrap="square" lIns="0" tIns="0" rIns="0" bIns="0" rtlCol="0"/>
             <a:lstStyle/>
-            <a:p/>
+            <a:p>
+              <a:endParaRPr/>
+            </a:p>
           </p:txBody>
         </p:sp>
         <p:sp>
           <p:nvSpPr>
-            <p:cNvPr id="34" name="object 34" descr=""/>
+            <p:cNvPr id="34" name="object 34"/>
             <p:cNvSpPr/>
             <p:nvPr/>
           </p:nvSpPr>
@@ -6743,12 +6936,14 @@
           <p:txBody>
             <a:bodyPr wrap="square" lIns="0" tIns="0" rIns="0" bIns="0" rtlCol="0"/>
             <a:lstStyle/>
-            <a:p/>
+            <a:p>
+              <a:endParaRPr/>
+            </a:p>
           </p:txBody>
         </p:sp>
         <p:sp>
           <p:nvSpPr>
-            <p:cNvPr id="35" name="object 35" descr=""/>
+            <p:cNvPr id="35" name="object 35"/>
             <p:cNvSpPr/>
             <p:nvPr/>
           </p:nvSpPr>
@@ -6803,13 +6998,15 @@
           <p:txBody>
             <a:bodyPr wrap="square" lIns="0" tIns="0" rIns="0" bIns="0" rtlCol="0"/>
             <a:lstStyle/>
-            <a:p/>
+            <a:p>
+              <a:endParaRPr/>
+            </a:p>
           </p:txBody>
         </p:sp>
       </p:grpSp>
       <p:sp>
         <p:nvSpPr>
-          <p:cNvPr id="36" name="object 36" descr=""/>
+          <p:cNvPr id="36" name="object 36"/>
           <p:cNvSpPr txBox="1"/>
           <p:nvPr/>
         </p:nvSpPr>
@@ -6823,7 +7020,7 @@
           </a:prstGeom>
         </p:spPr>
         <p:txBody>
-          <a:bodyPr wrap="square" lIns="0" tIns="12065" rIns="0" bIns="0" rtlCol="0" vert="horz">
+          <a:bodyPr vert="horz" wrap="square" lIns="0" tIns="12065" rIns="0" bIns="0" rtlCol="0">
             <a:spAutoFit/>
           </a:bodyPr>
           <a:lstStyle/>
@@ -6837,49 +7034,49 @@
               </a:spcBef>
             </a:pPr>
             <a:r>
-              <a:rPr dirty="0" sz="1300" b="1">
+              <a:rPr sz="1300" b="1" dirty="0">
                 <a:latin typeface="Times New Roman"/>
                 <a:cs typeface="Times New Roman"/>
               </a:rPr>
               <a:t>3.6</a:t>
             </a:r>
             <a:r>
-              <a:rPr dirty="0" sz="1300" spc="-30" b="1">
-                <a:latin typeface="Times New Roman"/>
-                <a:cs typeface="Times New Roman"/>
-              </a:rPr>
-              <a:t> </a:t>
-            </a:r>
-            <a:r>
-              <a:rPr dirty="0" sz="1300" b="1">
+              <a:rPr sz="1300" b="1" spc="-30" dirty="0">
+                <a:latin typeface="Times New Roman"/>
+                <a:cs typeface="Times New Roman"/>
+              </a:rPr>
+              <a:t> </a:t>
+            </a:r>
+            <a:r>
+              <a:rPr sz="1300" b="1" dirty="0">
                 <a:latin typeface="Times New Roman"/>
                 <a:cs typeface="Times New Roman"/>
               </a:rPr>
               <a:t>Display</a:t>
             </a:r>
             <a:r>
-              <a:rPr dirty="0" sz="1300" spc="-25" b="1">
-                <a:latin typeface="Times New Roman"/>
-                <a:cs typeface="Times New Roman"/>
-              </a:rPr>
-              <a:t> </a:t>
-            </a:r>
-            <a:r>
-              <a:rPr dirty="0" sz="1300" b="1">
+              <a:rPr sz="1300" b="1" spc="-25" dirty="0">
+                <a:latin typeface="Times New Roman"/>
+                <a:cs typeface="Times New Roman"/>
+              </a:rPr>
+              <a:t> </a:t>
+            </a:r>
+            <a:r>
+              <a:rPr sz="1300" b="1" dirty="0">
                 <a:latin typeface="Times New Roman"/>
                 <a:cs typeface="Times New Roman"/>
               </a:rPr>
               <a:t>Success</a:t>
             </a:r>
             <a:r>
-              <a:rPr dirty="0" sz="1300" spc="-25" b="1">
-                <a:latin typeface="Times New Roman"/>
-                <a:cs typeface="Times New Roman"/>
-              </a:rPr>
-              <a:t> </a:t>
-            </a:r>
-            <a:r>
-              <a:rPr dirty="0" sz="1300" spc="-10" b="1">
+              <a:rPr sz="1300" b="1" spc="-25" dirty="0">
+                <a:latin typeface="Times New Roman"/>
+                <a:cs typeface="Times New Roman"/>
+              </a:rPr>
+              <a:t> </a:t>
+            </a:r>
+            <a:r>
+              <a:rPr sz="1300" b="1" spc="-10" dirty="0">
                 <a:latin typeface="Times New Roman"/>
                 <a:cs typeface="Times New Roman"/>
               </a:rPr>
@@ -6900,196 +7097,196 @@
               </a:spcBef>
             </a:pPr>
             <a:r>
-              <a:rPr dirty="0" sz="1200" i="1">
+              <a:rPr sz="1200" i="1" dirty="0">
                 <a:latin typeface="Times New Roman"/>
                 <a:cs typeface="Times New Roman"/>
               </a:rPr>
               <a:t>(Show</a:t>
             </a:r>
             <a:r>
-              <a:rPr dirty="0" sz="1200" spc="-20" i="1">
-                <a:latin typeface="Times New Roman"/>
-                <a:cs typeface="Times New Roman"/>
-              </a:rPr>
-              <a:t> </a:t>
-            </a:r>
-            <a:r>
-              <a:rPr dirty="0" sz="1200" i="1">
+              <a:rPr sz="1200" i="1" spc="-20" dirty="0">
+                <a:latin typeface="Times New Roman"/>
+                <a:cs typeface="Times New Roman"/>
+              </a:rPr>
+              <a:t> </a:t>
+            </a:r>
+            <a:r>
+              <a:rPr sz="1200" i="1" dirty="0">
                 <a:latin typeface="Times New Roman"/>
                 <a:cs typeface="Times New Roman"/>
               </a:rPr>
               <a:t>a</a:t>
             </a:r>
             <a:r>
-              <a:rPr dirty="0" sz="1200" spc="-15" i="1">
-                <a:latin typeface="Times New Roman"/>
-                <a:cs typeface="Times New Roman"/>
-              </a:rPr>
-              <a:t> </a:t>
-            </a:r>
-            <a:r>
-              <a:rPr dirty="0" sz="1200" i="1">
+              <a:rPr sz="1200" i="1" spc="-15" dirty="0">
+                <a:latin typeface="Times New Roman"/>
+                <a:cs typeface="Times New Roman"/>
+              </a:rPr>
+              <a:t> </a:t>
+            </a:r>
+            <a:r>
+              <a:rPr sz="1200" i="1" dirty="0">
                 <a:latin typeface="Times New Roman"/>
                 <a:cs typeface="Times New Roman"/>
               </a:rPr>
               <a:t>confirmation</a:t>
             </a:r>
             <a:r>
-              <a:rPr dirty="0" sz="1200" spc="-15" i="1">
-                <a:latin typeface="Times New Roman"/>
-                <a:cs typeface="Times New Roman"/>
-              </a:rPr>
-              <a:t> </a:t>
-            </a:r>
-            <a:r>
-              <a:rPr dirty="0" sz="1200" i="1">
+              <a:rPr sz="1200" i="1" spc="-15" dirty="0">
+                <a:latin typeface="Times New Roman"/>
+                <a:cs typeface="Times New Roman"/>
+              </a:rPr>
+              <a:t> </a:t>
+            </a:r>
+            <a:r>
+              <a:rPr sz="1200" i="1" dirty="0">
                 <a:latin typeface="Times New Roman"/>
                 <a:cs typeface="Times New Roman"/>
               </a:rPr>
               <a:t>message</a:t>
             </a:r>
             <a:r>
-              <a:rPr dirty="0" sz="1200" spc="-15" i="1">
-                <a:latin typeface="Times New Roman"/>
-                <a:cs typeface="Times New Roman"/>
-              </a:rPr>
-              <a:t> </a:t>
-            </a:r>
-            <a:r>
-              <a:rPr dirty="0" sz="1200" i="1">
+              <a:rPr sz="1200" i="1" spc="-15" dirty="0">
+                <a:latin typeface="Times New Roman"/>
+                <a:cs typeface="Times New Roman"/>
+              </a:rPr>
+              <a:t> </a:t>
+            </a:r>
+            <a:r>
+              <a:rPr sz="1200" i="1" dirty="0">
                 <a:latin typeface="Times New Roman"/>
                 <a:cs typeface="Times New Roman"/>
               </a:rPr>
               <a:t>after</a:t>
             </a:r>
             <a:r>
-              <a:rPr dirty="0" sz="1200" spc="-20" i="1">
-                <a:latin typeface="Times New Roman"/>
-                <a:cs typeface="Times New Roman"/>
-              </a:rPr>
-              <a:t> </a:t>
-            </a:r>
-            <a:r>
-              <a:rPr dirty="0" sz="1200" i="1">
+              <a:rPr sz="1200" i="1" spc="-20" dirty="0">
+                <a:latin typeface="Times New Roman"/>
+                <a:cs typeface="Times New Roman"/>
+              </a:rPr>
+              <a:t> </a:t>
+            </a:r>
+            <a:r>
+              <a:rPr sz="1200" i="1" dirty="0">
                 <a:latin typeface="Times New Roman"/>
                 <a:cs typeface="Times New Roman"/>
               </a:rPr>
               <a:t>successful</a:t>
             </a:r>
             <a:r>
-              <a:rPr dirty="0" sz="1200" spc="-15" i="1">
-                <a:latin typeface="Times New Roman"/>
-                <a:cs typeface="Times New Roman"/>
-              </a:rPr>
-              <a:t> </a:t>
-            </a:r>
-            <a:r>
-              <a:rPr dirty="0" sz="1200" i="1">
+              <a:rPr sz="1200" i="1" spc="-15" dirty="0">
+                <a:latin typeface="Times New Roman"/>
+                <a:cs typeface="Times New Roman"/>
+              </a:rPr>
+              <a:t> </a:t>
+            </a:r>
+            <a:r>
+              <a:rPr sz="1200" i="1" dirty="0">
                 <a:latin typeface="Times New Roman"/>
                 <a:cs typeface="Times New Roman"/>
               </a:rPr>
               <a:t>registration</a:t>
             </a:r>
             <a:r>
-              <a:rPr dirty="0" sz="1200" spc="-15" i="1">
-                <a:latin typeface="Times New Roman"/>
-                <a:cs typeface="Times New Roman"/>
-              </a:rPr>
-              <a:t> </a:t>
-            </a:r>
-            <a:r>
-              <a:rPr dirty="0" sz="1200" i="1">
+              <a:rPr sz="1200" i="1" spc="-15" dirty="0">
+                <a:latin typeface="Times New Roman"/>
+                <a:cs typeface="Times New Roman"/>
+              </a:rPr>
+              <a:t> </a:t>
+            </a:r>
+            <a:r>
+              <a:rPr sz="1200" i="1" dirty="0">
                 <a:latin typeface="Times New Roman"/>
                 <a:cs typeface="Times New Roman"/>
               </a:rPr>
               <a:t>and</a:t>
             </a:r>
             <a:r>
-              <a:rPr dirty="0" sz="1200" spc="-15" i="1">
-                <a:latin typeface="Times New Roman"/>
-                <a:cs typeface="Times New Roman"/>
-              </a:rPr>
-              <a:t> </a:t>
-            </a:r>
-            <a:r>
-              <a:rPr dirty="0" sz="1200" i="1">
+              <a:rPr sz="1200" i="1" spc="-15" dirty="0">
+                <a:latin typeface="Times New Roman"/>
+                <a:cs typeface="Times New Roman"/>
+              </a:rPr>
+              <a:t> </a:t>
+            </a:r>
+            <a:r>
+              <a:rPr sz="1200" i="1" dirty="0">
                 <a:latin typeface="Times New Roman"/>
                 <a:cs typeface="Times New Roman"/>
               </a:rPr>
               <a:t>remove</a:t>
             </a:r>
             <a:r>
-              <a:rPr dirty="0" sz="1200" spc="-20" i="1">
-                <a:latin typeface="Times New Roman"/>
-                <a:cs typeface="Times New Roman"/>
-              </a:rPr>
-              <a:t> </a:t>
-            </a:r>
-            <a:r>
-              <a:rPr dirty="0" sz="1200" i="1">
+              <a:rPr sz="1200" i="1" spc="-20" dirty="0">
+                <a:latin typeface="Times New Roman"/>
+                <a:cs typeface="Times New Roman"/>
+              </a:rPr>
+              <a:t> </a:t>
+            </a:r>
+            <a:r>
+              <a:rPr sz="1200" i="1" dirty="0">
                 <a:latin typeface="Times New Roman"/>
                 <a:cs typeface="Times New Roman"/>
               </a:rPr>
               <a:t>it</a:t>
             </a:r>
             <a:r>
-              <a:rPr dirty="0" sz="1200" spc="-15" i="1">
-                <a:latin typeface="Times New Roman"/>
-                <a:cs typeface="Times New Roman"/>
-              </a:rPr>
-              <a:t> </a:t>
-            </a:r>
-            <a:r>
-              <a:rPr dirty="0" sz="1200" spc="-10" i="1">
+              <a:rPr sz="1200" i="1" spc="-15" dirty="0">
+                <a:latin typeface="Times New Roman"/>
+                <a:cs typeface="Times New Roman"/>
+              </a:rPr>
+              <a:t> </a:t>
+            </a:r>
+            <a:r>
+              <a:rPr sz="1200" i="1" spc="-10" dirty="0">
                 <a:latin typeface="Times New Roman"/>
                 <a:cs typeface="Times New Roman"/>
               </a:rPr>
               <a:t>automatically</a:t>
             </a:r>
             <a:r>
-              <a:rPr dirty="0" sz="1200" spc="-20" i="1">
-                <a:latin typeface="Times New Roman"/>
-                <a:cs typeface="Times New Roman"/>
-              </a:rPr>
-              <a:t> </a:t>
-            </a:r>
-            <a:r>
-              <a:rPr dirty="0" sz="1200" i="1">
+              <a:rPr sz="1200" i="1" spc="-20" dirty="0">
+                <a:latin typeface="Times New Roman"/>
+                <a:cs typeface="Times New Roman"/>
+              </a:rPr>
+              <a:t> </a:t>
+            </a:r>
+            <a:r>
+              <a:rPr sz="1200" i="1" dirty="0">
                 <a:latin typeface="Times New Roman"/>
                 <a:cs typeface="Times New Roman"/>
               </a:rPr>
               <a:t>after</a:t>
             </a:r>
             <a:r>
-              <a:rPr dirty="0" sz="1200" spc="-20" i="1">
-                <a:latin typeface="Times New Roman"/>
-                <a:cs typeface="Times New Roman"/>
-              </a:rPr>
-              <a:t> </a:t>
-            </a:r>
-            <a:r>
-              <a:rPr dirty="0" sz="1200" i="1">
+              <a:rPr sz="1200" i="1" spc="-20" dirty="0">
+                <a:latin typeface="Times New Roman"/>
+                <a:cs typeface="Times New Roman"/>
+              </a:rPr>
+              <a:t> </a:t>
+            </a:r>
+            <a:r>
+              <a:rPr sz="1200" i="1" dirty="0">
                 <a:latin typeface="Times New Roman"/>
                 <a:cs typeface="Times New Roman"/>
               </a:rPr>
               <a:t>a</a:t>
             </a:r>
             <a:r>
-              <a:rPr dirty="0" sz="1200" spc="-15" i="1">
-                <a:latin typeface="Times New Roman"/>
-                <a:cs typeface="Times New Roman"/>
-              </a:rPr>
-              <a:t> </a:t>
-            </a:r>
-            <a:r>
-              <a:rPr dirty="0" sz="1200" spc="-25" i="1">
+              <a:rPr sz="1200" i="1" spc="-15" dirty="0">
+                <a:latin typeface="Times New Roman"/>
+                <a:cs typeface="Times New Roman"/>
+              </a:rPr>
+              <a:t> </a:t>
+            </a:r>
+            <a:r>
+              <a:rPr sz="1200" i="1" spc="-25" dirty="0">
                 <a:latin typeface="Times New Roman"/>
                 <a:cs typeface="Times New Roman"/>
               </a:rPr>
               <a:t>few </a:t>
             </a:r>
             <a:r>
-              <a:rPr dirty="0" sz="1200" spc="-10" i="1">
+              <a:rPr sz="1200" i="1" spc="-10" dirty="0">
                 <a:latin typeface="Times New Roman"/>
                 <a:cs typeface="Times New Roman"/>
               </a:rPr>
@@ -7104,7 +7301,7 @@
       </p:sp>
       <p:grpSp>
         <p:nvGrpSpPr>
-          <p:cNvPr id="37" name="object 37" descr=""/>
+          <p:cNvPr id="37" name="object 37"/>
           <p:cNvGrpSpPr/>
           <p:nvPr/>
         </p:nvGrpSpPr>
@@ -7118,7 +7315,7 @@
         </p:grpSpPr>
         <p:sp>
           <p:nvSpPr>
-            <p:cNvPr id="38" name="object 38" descr=""/>
+            <p:cNvPr id="38" name="object 38"/>
             <p:cNvSpPr/>
             <p:nvPr/>
           </p:nvSpPr>
@@ -7161,12 +7358,14 @@
           <p:txBody>
             <a:bodyPr wrap="square" lIns="0" tIns="0" rIns="0" bIns="0" rtlCol="0"/>
             <a:lstStyle/>
-            <a:p/>
+            <a:p>
+              <a:endParaRPr/>
+            </a:p>
           </p:txBody>
         </p:sp>
         <p:sp>
           <p:nvSpPr>
-            <p:cNvPr id="39" name="object 39" descr=""/>
+            <p:cNvPr id="39" name="object 39"/>
             <p:cNvSpPr/>
             <p:nvPr/>
           </p:nvSpPr>
@@ -7209,12 +7408,14 @@
           <p:txBody>
             <a:bodyPr wrap="square" lIns="0" tIns="0" rIns="0" bIns="0" rtlCol="0"/>
             <a:lstStyle/>
-            <a:p/>
+            <a:p>
+              <a:endParaRPr/>
+            </a:p>
           </p:txBody>
         </p:sp>
         <p:sp>
           <p:nvSpPr>
-            <p:cNvPr id="40" name="object 40" descr=""/>
+            <p:cNvPr id="40" name="object 40"/>
             <p:cNvSpPr/>
             <p:nvPr/>
           </p:nvSpPr>
@@ -7275,12 +7476,14 @@
           <p:txBody>
             <a:bodyPr wrap="square" lIns="0" tIns="0" rIns="0" bIns="0" rtlCol="0"/>
             <a:lstStyle/>
-            <a:p/>
+            <a:p>
+              <a:endParaRPr/>
+            </a:p>
           </p:txBody>
         </p:sp>
         <p:sp>
           <p:nvSpPr>
-            <p:cNvPr id="41" name="object 41" descr=""/>
+            <p:cNvPr id="41" name="object 41"/>
             <p:cNvSpPr/>
             <p:nvPr/>
           </p:nvSpPr>
@@ -7323,12 +7526,14 @@
           <p:txBody>
             <a:bodyPr wrap="square" lIns="0" tIns="0" rIns="0" bIns="0" rtlCol="0"/>
             <a:lstStyle/>
-            <a:p/>
+            <a:p>
+              <a:endParaRPr/>
+            </a:p>
           </p:txBody>
         </p:sp>
         <p:sp>
           <p:nvSpPr>
-            <p:cNvPr id="42" name="object 42" descr=""/>
+            <p:cNvPr id="42" name="object 42"/>
             <p:cNvSpPr/>
             <p:nvPr/>
           </p:nvSpPr>
@@ -7371,12 +7576,14 @@
           <p:txBody>
             <a:bodyPr wrap="square" lIns="0" tIns="0" rIns="0" bIns="0" rtlCol="0"/>
             <a:lstStyle/>
-            <a:p/>
+            <a:p>
+              <a:endParaRPr/>
+            </a:p>
           </p:txBody>
         </p:sp>
         <p:sp>
           <p:nvSpPr>
-            <p:cNvPr id="43" name="object 43" descr=""/>
+            <p:cNvPr id="43" name="object 43"/>
             <p:cNvSpPr/>
             <p:nvPr/>
           </p:nvSpPr>
@@ -7431,13 +7638,15 @@
           <p:txBody>
             <a:bodyPr wrap="square" lIns="0" tIns="0" rIns="0" bIns="0" rtlCol="0"/>
             <a:lstStyle/>
-            <a:p/>
+            <a:p>
+              <a:endParaRPr/>
+            </a:p>
           </p:txBody>
         </p:sp>
       </p:grpSp>
       <p:sp>
         <p:nvSpPr>
-          <p:cNvPr id="44" name="object 44" descr=""/>
+          <p:cNvPr id="44" name="object 44"/>
           <p:cNvSpPr txBox="1"/>
           <p:nvPr/>
         </p:nvSpPr>
@@ -7451,7 +7660,7 @@
           </a:prstGeom>
         </p:spPr>
         <p:txBody>
-          <a:bodyPr wrap="square" lIns="0" tIns="12065" rIns="0" bIns="0" rtlCol="0" vert="horz">
+          <a:bodyPr vert="horz" wrap="square" lIns="0" tIns="12065" rIns="0" bIns="0" rtlCol="0">
             <a:spAutoFit/>
           </a:bodyPr>
           <a:lstStyle/>
@@ -7465,49 +7674,49 @@
               </a:spcBef>
             </a:pPr>
             <a:r>
-              <a:rPr dirty="0" sz="1300" b="1">
+              <a:rPr sz="1300" b="1" dirty="0">
                 <a:latin typeface="Times New Roman"/>
                 <a:cs typeface="Times New Roman"/>
               </a:rPr>
               <a:t>3.7</a:t>
             </a:r>
             <a:r>
-              <a:rPr dirty="0" sz="1300" spc="-55" b="1">
-                <a:latin typeface="Times New Roman"/>
-                <a:cs typeface="Times New Roman"/>
-              </a:rPr>
-              <a:t> </a:t>
-            </a:r>
-            <a:r>
-              <a:rPr dirty="0" sz="1300" b="1">
+              <a:rPr sz="1300" b="1" spc="-55" dirty="0">
+                <a:latin typeface="Times New Roman"/>
+                <a:cs typeface="Times New Roman"/>
+              </a:rPr>
+              <a:t> </a:t>
+            </a:r>
+            <a:r>
+              <a:rPr sz="1300" b="1" dirty="0">
                 <a:latin typeface="Times New Roman"/>
                 <a:cs typeface="Times New Roman"/>
               </a:rPr>
               <a:t>Input</a:t>
             </a:r>
             <a:r>
-              <a:rPr dirty="0" sz="1300" spc="-40" b="1">
-                <a:latin typeface="Times New Roman"/>
-                <a:cs typeface="Times New Roman"/>
-              </a:rPr>
-              <a:t> </a:t>
-            </a:r>
-            <a:r>
-              <a:rPr dirty="0" sz="1300" b="1">
+              <a:rPr sz="1300" b="1" spc="-40" dirty="0">
+                <a:latin typeface="Times New Roman"/>
+                <a:cs typeface="Times New Roman"/>
+              </a:rPr>
+              <a:t> </a:t>
+            </a:r>
+            <a:r>
+              <a:rPr sz="1300" b="1" dirty="0">
                 <a:latin typeface="Times New Roman"/>
                 <a:cs typeface="Times New Roman"/>
               </a:rPr>
               <a:t>Field</a:t>
             </a:r>
             <a:r>
-              <a:rPr dirty="0" sz="1300" spc="-30" b="1">
-                <a:latin typeface="Times New Roman"/>
-                <a:cs typeface="Times New Roman"/>
-              </a:rPr>
-              <a:t> </a:t>
-            </a:r>
-            <a:r>
-              <a:rPr dirty="0" sz="1300" spc="-10" b="1">
+              <a:rPr sz="1300" b="1" spc="-30" dirty="0">
+                <a:latin typeface="Times New Roman"/>
+                <a:cs typeface="Times New Roman"/>
+              </a:rPr>
+              <a:t> </a:t>
+            </a:r>
+            <a:r>
+              <a:rPr sz="1300" b="1" spc="-10" dirty="0">
                 <a:latin typeface="Times New Roman"/>
                 <a:cs typeface="Times New Roman"/>
               </a:rPr>
@@ -7528,189 +7737,189 @@
               </a:spcBef>
             </a:pPr>
             <a:r>
-              <a:rPr dirty="0" sz="1200" i="1">
+              <a:rPr sz="1200" i="1" dirty="0">
                 <a:latin typeface="Times New Roman"/>
                 <a:cs typeface="Times New Roman"/>
               </a:rPr>
               <a:t>(Provide</a:t>
             </a:r>
             <a:r>
-              <a:rPr dirty="0" sz="1200" spc="-35" i="1">
-                <a:latin typeface="Times New Roman"/>
-                <a:cs typeface="Times New Roman"/>
-              </a:rPr>
-              <a:t> </a:t>
-            </a:r>
-            <a:r>
-              <a:rPr dirty="0" sz="1200" i="1">
+              <a:rPr sz="1200" i="1" spc="-35" dirty="0">
+                <a:latin typeface="Times New Roman"/>
+                <a:cs typeface="Times New Roman"/>
+              </a:rPr>
+              <a:t> </a:t>
+            </a:r>
+            <a:r>
+              <a:rPr sz="1200" i="1" dirty="0">
                 <a:latin typeface="Times New Roman"/>
                 <a:cs typeface="Times New Roman"/>
               </a:rPr>
               <a:t>visual</a:t>
             </a:r>
             <a:r>
-              <a:rPr dirty="0" sz="1200" spc="-25" i="1">
-                <a:latin typeface="Times New Roman"/>
-                <a:cs typeface="Times New Roman"/>
-              </a:rPr>
-              <a:t> </a:t>
-            </a:r>
-            <a:r>
-              <a:rPr dirty="0" sz="1200" i="1">
+              <a:rPr sz="1200" i="1" spc="-25" dirty="0">
+                <a:latin typeface="Times New Roman"/>
+                <a:cs typeface="Times New Roman"/>
+              </a:rPr>
+              <a:t> </a:t>
+            </a:r>
+            <a:r>
+              <a:rPr sz="1200" i="1" dirty="0">
                 <a:latin typeface="Times New Roman"/>
                 <a:cs typeface="Times New Roman"/>
               </a:rPr>
               <a:t>feedback</a:t>
             </a:r>
             <a:r>
-              <a:rPr dirty="0" sz="1200" spc="-25" i="1">
-                <a:latin typeface="Times New Roman"/>
-                <a:cs typeface="Times New Roman"/>
-              </a:rPr>
-              <a:t> </a:t>
-            </a:r>
-            <a:r>
-              <a:rPr dirty="0" sz="1200" i="1">
+              <a:rPr sz="1200" i="1" spc="-25" dirty="0">
+                <a:latin typeface="Times New Roman"/>
+                <a:cs typeface="Times New Roman"/>
+              </a:rPr>
+              <a:t> </a:t>
+            </a:r>
+            <a:r>
+              <a:rPr sz="1200" i="1" dirty="0">
                 <a:latin typeface="Times New Roman"/>
                 <a:cs typeface="Times New Roman"/>
               </a:rPr>
               <a:t>by</a:t>
             </a:r>
             <a:r>
-              <a:rPr dirty="0" sz="1200" spc="-35" i="1">
-                <a:latin typeface="Times New Roman"/>
-                <a:cs typeface="Times New Roman"/>
-              </a:rPr>
-              <a:t> </a:t>
-            </a:r>
-            <a:r>
-              <a:rPr dirty="0" sz="1200" i="1">
+              <a:rPr sz="1200" i="1" spc="-35" dirty="0">
+                <a:latin typeface="Times New Roman"/>
+                <a:cs typeface="Times New Roman"/>
+              </a:rPr>
+              <a:t> </a:t>
+            </a:r>
+            <a:r>
+              <a:rPr sz="1200" i="1" dirty="0">
                 <a:latin typeface="Times New Roman"/>
                 <a:cs typeface="Times New Roman"/>
               </a:rPr>
               <a:t>highlighting</a:t>
             </a:r>
             <a:r>
-              <a:rPr dirty="0" sz="1200" spc="-30" i="1">
-                <a:latin typeface="Times New Roman"/>
-                <a:cs typeface="Times New Roman"/>
-              </a:rPr>
-              <a:t> </a:t>
-            </a:r>
-            <a:r>
-              <a:rPr dirty="0" sz="1200" i="1">
+              <a:rPr sz="1200" i="1" spc="-30" dirty="0">
+                <a:latin typeface="Times New Roman"/>
+                <a:cs typeface="Times New Roman"/>
+              </a:rPr>
+              <a:t> </a:t>
+            </a:r>
+            <a:r>
+              <a:rPr sz="1200" i="1" dirty="0">
                 <a:latin typeface="Times New Roman"/>
                 <a:cs typeface="Times New Roman"/>
               </a:rPr>
               <a:t>valid</a:t>
             </a:r>
             <a:r>
-              <a:rPr dirty="0" sz="1200" spc="-30" i="1">
-                <a:latin typeface="Times New Roman"/>
-                <a:cs typeface="Times New Roman"/>
-              </a:rPr>
-              <a:t> </a:t>
-            </a:r>
-            <a:r>
-              <a:rPr dirty="0" sz="1200" i="1">
+              <a:rPr sz="1200" i="1" spc="-30" dirty="0">
+                <a:latin typeface="Times New Roman"/>
+                <a:cs typeface="Times New Roman"/>
+              </a:rPr>
+              <a:t> </a:t>
+            </a:r>
+            <a:r>
+              <a:rPr sz="1200" i="1" dirty="0">
                 <a:latin typeface="Times New Roman"/>
                 <a:cs typeface="Times New Roman"/>
               </a:rPr>
               <a:t>fields</a:t>
             </a:r>
             <a:r>
-              <a:rPr dirty="0" sz="1200" spc="-35" i="1">
-                <a:latin typeface="Times New Roman"/>
-                <a:cs typeface="Times New Roman"/>
-              </a:rPr>
-              <a:t> </a:t>
-            </a:r>
-            <a:r>
-              <a:rPr dirty="0" sz="1200" i="1">
+              <a:rPr sz="1200" i="1" spc="-35" dirty="0">
+                <a:latin typeface="Times New Roman"/>
+                <a:cs typeface="Times New Roman"/>
+              </a:rPr>
+              <a:t> </a:t>
+            </a:r>
+            <a:r>
+              <a:rPr sz="1200" i="1" dirty="0">
                 <a:latin typeface="Times New Roman"/>
                 <a:cs typeface="Times New Roman"/>
               </a:rPr>
               <a:t>in</a:t>
             </a:r>
             <a:r>
-              <a:rPr dirty="0" sz="1200" spc="-30" i="1">
-                <a:latin typeface="Times New Roman"/>
-                <a:cs typeface="Times New Roman"/>
-              </a:rPr>
-              <a:t> </a:t>
-            </a:r>
-            <a:r>
-              <a:rPr dirty="0" sz="1200" i="1">
+              <a:rPr sz="1200" i="1" spc="-30" dirty="0">
+                <a:latin typeface="Times New Roman"/>
+                <a:cs typeface="Times New Roman"/>
+              </a:rPr>
+              <a:t> </a:t>
+            </a:r>
+            <a:r>
+              <a:rPr sz="1200" i="1" dirty="0">
                 <a:latin typeface="Times New Roman"/>
                 <a:cs typeface="Times New Roman"/>
               </a:rPr>
               <a:t>green</a:t>
             </a:r>
             <a:r>
-              <a:rPr dirty="0" sz="1200" spc="-30" i="1">
-                <a:latin typeface="Times New Roman"/>
-                <a:cs typeface="Times New Roman"/>
-              </a:rPr>
-              <a:t> </a:t>
-            </a:r>
-            <a:r>
-              <a:rPr dirty="0" sz="1200" i="1">
+              <a:rPr sz="1200" i="1" spc="-30" dirty="0">
+                <a:latin typeface="Times New Roman"/>
+                <a:cs typeface="Times New Roman"/>
+              </a:rPr>
+              <a:t> </a:t>
+            </a:r>
+            <a:r>
+              <a:rPr sz="1200" i="1" dirty="0">
                 <a:latin typeface="Times New Roman"/>
                 <a:cs typeface="Times New Roman"/>
               </a:rPr>
               <a:t>and</a:t>
             </a:r>
             <a:r>
-              <a:rPr dirty="0" sz="1200" spc="-30" i="1">
-                <a:latin typeface="Times New Roman"/>
-                <a:cs typeface="Times New Roman"/>
-              </a:rPr>
-              <a:t> </a:t>
-            </a:r>
-            <a:r>
-              <a:rPr dirty="0" sz="1200" i="1">
+              <a:rPr sz="1200" i="1" spc="-30" dirty="0">
+                <a:latin typeface="Times New Roman"/>
+                <a:cs typeface="Times New Roman"/>
+              </a:rPr>
+              <a:t> </a:t>
+            </a:r>
+            <a:r>
+              <a:rPr sz="1200" i="1" dirty="0">
                 <a:latin typeface="Times New Roman"/>
                 <a:cs typeface="Times New Roman"/>
               </a:rPr>
               <a:t>invalid</a:t>
             </a:r>
             <a:r>
-              <a:rPr dirty="0" sz="1200" spc="-30" i="1">
-                <a:latin typeface="Times New Roman"/>
-                <a:cs typeface="Times New Roman"/>
-              </a:rPr>
-              <a:t> </a:t>
-            </a:r>
-            <a:r>
-              <a:rPr dirty="0" sz="1200" i="1">
+              <a:rPr sz="1200" i="1" spc="-30" dirty="0">
+                <a:latin typeface="Times New Roman"/>
+                <a:cs typeface="Times New Roman"/>
+              </a:rPr>
+              <a:t> </a:t>
+            </a:r>
+            <a:r>
+              <a:rPr sz="1200" i="1" dirty="0">
                 <a:latin typeface="Times New Roman"/>
                 <a:cs typeface="Times New Roman"/>
               </a:rPr>
               <a:t>fields</a:t>
             </a:r>
             <a:r>
-              <a:rPr dirty="0" sz="1200" spc="-35" i="1">
-                <a:latin typeface="Times New Roman"/>
-                <a:cs typeface="Times New Roman"/>
-              </a:rPr>
-              <a:t> </a:t>
-            </a:r>
-            <a:r>
-              <a:rPr dirty="0" sz="1200" i="1">
+              <a:rPr sz="1200" i="1" spc="-35" dirty="0">
+                <a:latin typeface="Times New Roman"/>
+                <a:cs typeface="Times New Roman"/>
+              </a:rPr>
+              <a:t> </a:t>
+            </a:r>
+            <a:r>
+              <a:rPr sz="1200" i="1" dirty="0">
                 <a:latin typeface="Times New Roman"/>
                 <a:cs typeface="Times New Roman"/>
               </a:rPr>
               <a:t>in</a:t>
             </a:r>
             <a:r>
-              <a:rPr dirty="0" sz="1200" spc="-30" i="1">
-                <a:latin typeface="Times New Roman"/>
-                <a:cs typeface="Times New Roman"/>
-              </a:rPr>
-              <a:t> </a:t>
-            </a:r>
-            <a:r>
-              <a:rPr dirty="0" sz="1200" spc="-10" i="1">
+              <a:rPr sz="1200" i="1" spc="-30" dirty="0">
+                <a:latin typeface="Times New Roman"/>
+                <a:cs typeface="Times New Roman"/>
+              </a:rPr>
+              <a:t> </a:t>
+            </a:r>
+            <a:r>
+              <a:rPr sz="1200" i="1" spc="-10" dirty="0">
                 <a:latin typeface="Times New Roman"/>
                 <a:cs typeface="Times New Roman"/>
               </a:rPr>
@@ -7725,7 +7934,7 @@
       </p:sp>
       <p:grpSp>
         <p:nvGrpSpPr>
-          <p:cNvPr id="45" name="object 45" descr=""/>
+          <p:cNvPr id="45" name="object 45"/>
           <p:cNvGrpSpPr/>
           <p:nvPr/>
         </p:nvGrpSpPr>
@@ -7739,7 +7948,7 @@
         </p:grpSpPr>
         <p:sp>
           <p:nvSpPr>
-            <p:cNvPr id="46" name="object 46" descr=""/>
+            <p:cNvPr id="46" name="object 46"/>
             <p:cNvSpPr/>
             <p:nvPr/>
           </p:nvSpPr>
@@ -7782,12 +7991,14 @@
           <p:txBody>
             <a:bodyPr wrap="square" lIns="0" tIns="0" rIns="0" bIns="0" rtlCol="0"/>
             <a:lstStyle/>
-            <a:p/>
+            <a:p>
+              <a:endParaRPr/>
+            </a:p>
           </p:txBody>
         </p:sp>
         <p:sp>
           <p:nvSpPr>
-            <p:cNvPr id="47" name="object 47" descr=""/>
+            <p:cNvPr id="47" name="object 47"/>
             <p:cNvSpPr/>
             <p:nvPr/>
           </p:nvSpPr>
@@ -7830,12 +8041,14 @@
           <p:txBody>
             <a:bodyPr wrap="square" lIns="0" tIns="0" rIns="0" bIns="0" rtlCol="0"/>
             <a:lstStyle/>
-            <a:p/>
+            <a:p>
+              <a:endParaRPr/>
+            </a:p>
           </p:txBody>
         </p:sp>
         <p:sp>
           <p:nvSpPr>
-            <p:cNvPr id="48" name="object 48" descr=""/>
+            <p:cNvPr id="48" name="object 48"/>
             <p:cNvSpPr/>
             <p:nvPr/>
           </p:nvSpPr>
@@ -7896,12 +8109,14 @@
           <p:txBody>
             <a:bodyPr wrap="square" lIns="0" tIns="0" rIns="0" bIns="0" rtlCol="0"/>
             <a:lstStyle/>
-            <a:p/>
+            <a:p>
+              <a:endParaRPr/>
+            </a:p>
           </p:txBody>
         </p:sp>
         <p:sp>
           <p:nvSpPr>
-            <p:cNvPr id="49" name="object 49" descr=""/>
+            <p:cNvPr id="49" name="object 49"/>
             <p:cNvSpPr/>
             <p:nvPr/>
           </p:nvSpPr>
@@ -7944,12 +8159,14 @@
           <p:txBody>
             <a:bodyPr wrap="square" lIns="0" tIns="0" rIns="0" bIns="0" rtlCol="0"/>
             <a:lstStyle/>
-            <a:p/>
+            <a:p>
+              <a:endParaRPr/>
+            </a:p>
           </p:txBody>
         </p:sp>
         <p:sp>
           <p:nvSpPr>
-            <p:cNvPr id="50" name="object 50" descr=""/>
+            <p:cNvPr id="50" name="object 50"/>
             <p:cNvSpPr/>
             <p:nvPr/>
           </p:nvSpPr>
@@ -7992,12 +8209,14 @@
           <p:txBody>
             <a:bodyPr wrap="square" lIns="0" tIns="0" rIns="0" bIns="0" rtlCol="0"/>
             <a:lstStyle/>
-            <a:p/>
+            <a:p>
+              <a:endParaRPr/>
+            </a:p>
           </p:txBody>
         </p:sp>
         <p:sp>
           <p:nvSpPr>
-            <p:cNvPr id="51" name="object 51" descr=""/>
+            <p:cNvPr id="51" name="object 51"/>
             <p:cNvSpPr/>
             <p:nvPr/>
           </p:nvSpPr>
@@ -8052,13 +8271,15 @@
           <p:txBody>
             <a:bodyPr wrap="square" lIns="0" tIns="0" rIns="0" bIns="0" rtlCol="0"/>
             <a:lstStyle/>
-            <a:p/>
+            <a:p>
+              <a:endParaRPr/>
+            </a:p>
           </p:txBody>
         </p:sp>
       </p:grpSp>
       <p:pic>
         <p:nvPicPr>
-          <p:cNvPr id="52" name="object 52" descr=""/>
+          <p:cNvPr id="52" name="object 52"/>
           <p:cNvPicPr/>
           <p:nvPr/>
         </p:nvPicPr>
@@ -8080,7 +8301,7 @@
       </p:pic>
       <p:pic>
         <p:nvPicPr>
-          <p:cNvPr id="53" name="object 53" descr=""/>
+          <p:cNvPr id="53" name="object 53"/>
           <p:cNvPicPr/>
           <p:nvPr/>
         </p:nvPicPr>
@@ -8127,7 +8348,7 @@
       </p:grpSpPr>
       <p:pic>
         <p:nvPicPr>
-          <p:cNvPr id="2" name="object 2" descr=""/>
+          <p:cNvPr id="2" name="object 2"/>
           <p:cNvPicPr/>
           <p:nvPr/>
         </p:nvPicPr>
@@ -8149,7 +8370,7 @@
       </p:pic>
       <p:pic>
         <p:nvPicPr>
-          <p:cNvPr id="3" name="object 3" descr=""/>
+          <p:cNvPr id="3" name="object 3"/>
           <p:cNvPicPr/>
           <p:nvPr/>
         </p:nvPicPr>
@@ -8171,7 +8392,7 @@
       </p:pic>
       <p:sp>
         <p:nvSpPr>
-          <p:cNvPr id="4" name="object 4" descr=""/>
+          <p:cNvPr id="4" name="object 4"/>
           <p:cNvSpPr txBox="1"/>
           <p:nvPr/>
         </p:nvSpPr>
@@ -8185,7 +8406,7 @@
           </a:prstGeom>
         </p:spPr>
         <p:txBody>
-          <a:bodyPr wrap="square" lIns="0" tIns="12065" rIns="0" bIns="0" rtlCol="0" vert="horz">
+          <a:bodyPr vert="horz" wrap="square" lIns="0" tIns="12065" rIns="0" bIns="0" rtlCol="0">
             <a:spAutoFit/>
           </a:bodyPr>
           <a:lstStyle/>
@@ -8199,35 +8420,35 @@
               </a:spcBef>
             </a:pPr>
             <a:r>
-              <a:rPr dirty="0" sz="1300" b="1">
+              <a:rPr sz="1300" b="1" dirty="0">
                 <a:latin typeface="Times New Roman"/>
                 <a:cs typeface="Times New Roman"/>
               </a:rPr>
               <a:t>3.8</a:t>
             </a:r>
             <a:r>
-              <a:rPr dirty="0" sz="1300" spc="-35" b="1">
-                <a:latin typeface="Times New Roman"/>
-                <a:cs typeface="Times New Roman"/>
-              </a:rPr>
-              <a:t> </a:t>
-            </a:r>
-            <a:r>
-              <a:rPr dirty="0" sz="1300" b="1">
+              <a:rPr sz="1300" b="1" spc="-35" dirty="0">
+                <a:latin typeface="Times New Roman"/>
+                <a:cs typeface="Times New Roman"/>
+              </a:rPr>
+              <a:t> </a:t>
+            </a:r>
+            <a:r>
+              <a:rPr sz="1300" b="1" dirty="0">
                 <a:latin typeface="Times New Roman"/>
                 <a:cs typeface="Times New Roman"/>
               </a:rPr>
               <a:t>Optional</a:t>
             </a:r>
             <a:r>
-              <a:rPr dirty="0" sz="1300" spc="-35" b="1">
-                <a:latin typeface="Times New Roman"/>
-                <a:cs typeface="Times New Roman"/>
-              </a:rPr>
-              <a:t> </a:t>
-            </a:r>
-            <a:r>
-              <a:rPr dirty="0" sz="1300" spc="-10" b="1">
+              <a:rPr sz="1300" b="1" spc="-35" dirty="0">
+                <a:latin typeface="Times New Roman"/>
+                <a:cs typeface="Times New Roman"/>
+              </a:rPr>
+              <a:t> </a:t>
+            </a:r>
+            <a:r>
+              <a:rPr sz="1300" b="1" spc="-10" dirty="0">
                 <a:latin typeface="Times New Roman"/>
                 <a:cs typeface="Times New Roman"/>
               </a:rPr>
@@ -8248,224 +8469,224 @@
               </a:spcBef>
             </a:pPr>
             <a:r>
-              <a:rPr dirty="0" sz="1200" i="1">
+              <a:rPr sz="1200" i="1" dirty="0">
                 <a:latin typeface="Times New Roman"/>
                 <a:cs typeface="Times New Roman"/>
               </a:rPr>
               <a:t>(Implement</a:t>
             </a:r>
             <a:r>
-              <a:rPr dirty="0" sz="1200" spc="-35" i="1">
-                <a:latin typeface="Times New Roman"/>
-                <a:cs typeface="Times New Roman"/>
-              </a:rPr>
-              <a:t> </a:t>
-            </a:r>
-            <a:r>
-              <a:rPr dirty="0" sz="1200" i="1">
+              <a:rPr sz="1200" i="1" spc="-35" dirty="0">
+                <a:latin typeface="Times New Roman"/>
+                <a:cs typeface="Times New Roman"/>
+              </a:rPr>
+              <a:t> </a:t>
+            </a:r>
+            <a:r>
+              <a:rPr sz="1200" i="1" dirty="0">
                 <a:latin typeface="Times New Roman"/>
                 <a:cs typeface="Times New Roman"/>
               </a:rPr>
               <a:t>additional</a:t>
             </a:r>
             <a:r>
-              <a:rPr dirty="0" sz="1200" spc="-35" i="1">
-                <a:latin typeface="Times New Roman"/>
-                <a:cs typeface="Times New Roman"/>
-              </a:rPr>
-              <a:t> </a:t>
-            </a:r>
-            <a:r>
-              <a:rPr dirty="0" sz="1200" i="1">
+              <a:rPr sz="1200" i="1" spc="-35" dirty="0">
+                <a:latin typeface="Times New Roman"/>
+                <a:cs typeface="Times New Roman"/>
+              </a:rPr>
+              <a:t> </a:t>
+            </a:r>
+            <a:r>
+              <a:rPr sz="1200" i="1" dirty="0">
                 <a:latin typeface="Times New Roman"/>
                 <a:cs typeface="Times New Roman"/>
               </a:rPr>
               <a:t>features</a:t>
             </a:r>
             <a:r>
-              <a:rPr dirty="0" sz="1200" spc="-40" i="1">
-                <a:latin typeface="Times New Roman"/>
-                <a:cs typeface="Times New Roman"/>
-              </a:rPr>
-              <a:t> </a:t>
-            </a:r>
-            <a:r>
-              <a:rPr dirty="0" sz="1200" i="1">
+              <a:rPr sz="1200" i="1" spc="-40" dirty="0">
+                <a:latin typeface="Times New Roman"/>
+                <a:cs typeface="Times New Roman"/>
+              </a:rPr>
+              <a:t> </a:t>
+            </a:r>
+            <a:r>
+              <a:rPr sz="1200" i="1" dirty="0">
                 <a:latin typeface="Times New Roman"/>
                 <a:cs typeface="Times New Roman"/>
               </a:rPr>
               <a:t>such</a:t>
             </a:r>
             <a:r>
-              <a:rPr dirty="0" sz="1200" spc="-30" i="1">
-                <a:latin typeface="Times New Roman"/>
-                <a:cs typeface="Times New Roman"/>
-              </a:rPr>
-              <a:t> </a:t>
-            </a:r>
-            <a:r>
-              <a:rPr dirty="0" sz="1200" i="1">
+              <a:rPr sz="1200" i="1" spc="-30" dirty="0">
+                <a:latin typeface="Times New Roman"/>
+                <a:cs typeface="Times New Roman"/>
+              </a:rPr>
+              <a:t> </a:t>
+            </a:r>
+            <a:r>
+              <a:rPr sz="1200" i="1" dirty="0">
                 <a:latin typeface="Times New Roman"/>
                 <a:cs typeface="Times New Roman"/>
               </a:rPr>
               <a:t>as</a:t>
             </a:r>
             <a:r>
-              <a:rPr dirty="0" sz="1200" spc="-40" i="1">
-                <a:latin typeface="Times New Roman"/>
-                <a:cs typeface="Times New Roman"/>
-              </a:rPr>
-              <a:t> </a:t>
-            </a:r>
-            <a:r>
-              <a:rPr dirty="0" sz="1200" i="1">
+              <a:rPr sz="1200" i="1" spc="-40" dirty="0">
+                <a:latin typeface="Times New Roman"/>
+                <a:cs typeface="Times New Roman"/>
+              </a:rPr>
+              <a:t> </a:t>
+            </a:r>
+            <a:r>
+              <a:rPr sz="1200" i="1" dirty="0">
                 <a:latin typeface="Times New Roman"/>
                 <a:cs typeface="Times New Roman"/>
               </a:rPr>
               <a:t>participant</a:t>
             </a:r>
             <a:r>
-              <a:rPr dirty="0" sz="1200" spc="-35" i="1">
-                <a:latin typeface="Times New Roman"/>
-                <a:cs typeface="Times New Roman"/>
-              </a:rPr>
-              <a:t> </a:t>
-            </a:r>
-            <a:r>
-              <a:rPr dirty="0" sz="1200" i="1">
+              <a:rPr sz="1200" i="1" spc="-35" dirty="0">
+                <a:latin typeface="Times New Roman"/>
+                <a:cs typeface="Times New Roman"/>
+              </a:rPr>
+              <a:t> </a:t>
+            </a:r>
+            <a:r>
+              <a:rPr sz="1200" i="1" dirty="0">
                 <a:latin typeface="Times New Roman"/>
                 <a:cs typeface="Times New Roman"/>
               </a:rPr>
               <a:t>count,</a:t>
             </a:r>
             <a:r>
-              <a:rPr dirty="0" sz="1200" spc="-30" i="1">
-                <a:latin typeface="Times New Roman"/>
-                <a:cs typeface="Times New Roman"/>
-              </a:rPr>
-              <a:t> </a:t>
-            </a:r>
-            <a:r>
-              <a:rPr dirty="0" sz="1200" i="1">
+              <a:rPr sz="1200" i="1" spc="-30" dirty="0">
+                <a:latin typeface="Times New Roman"/>
+                <a:cs typeface="Times New Roman"/>
+              </a:rPr>
+              <a:t> </a:t>
+            </a:r>
+            <a:r>
+              <a:rPr sz="1200" i="1" dirty="0">
                 <a:latin typeface="Times New Roman"/>
                 <a:cs typeface="Times New Roman"/>
               </a:rPr>
               <a:t>delete</a:t>
             </a:r>
             <a:r>
-              <a:rPr dirty="0" sz="1200" spc="-40" i="1">
-                <a:latin typeface="Times New Roman"/>
-                <a:cs typeface="Times New Roman"/>
-              </a:rPr>
-              <a:t> </a:t>
-            </a:r>
-            <a:r>
-              <a:rPr dirty="0" sz="1200" i="1">
+              <a:rPr sz="1200" i="1" spc="-40" dirty="0">
+                <a:latin typeface="Times New Roman"/>
+                <a:cs typeface="Times New Roman"/>
+              </a:rPr>
+              <a:t> </a:t>
+            </a:r>
+            <a:r>
+              <a:rPr sz="1200" i="1" dirty="0">
                 <a:latin typeface="Times New Roman"/>
                 <a:cs typeface="Times New Roman"/>
               </a:rPr>
               <a:t>row</a:t>
             </a:r>
             <a:r>
-              <a:rPr dirty="0" sz="1200" spc="-35" i="1">
-                <a:latin typeface="Times New Roman"/>
-                <a:cs typeface="Times New Roman"/>
-              </a:rPr>
-              <a:t> </a:t>
-            </a:r>
-            <a:r>
-              <a:rPr dirty="0" sz="1200" i="1">
+              <a:rPr sz="1200" i="1" spc="-35" dirty="0">
+                <a:latin typeface="Times New Roman"/>
+                <a:cs typeface="Times New Roman"/>
+              </a:rPr>
+              <a:t> </a:t>
+            </a:r>
+            <a:r>
+              <a:rPr sz="1200" i="1" dirty="0">
                 <a:latin typeface="Times New Roman"/>
                 <a:cs typeface="Times New Roman"/>
               </a:rPr>
               <a:t>option,</a:t>
             </a:r>
             <a:r>
-              <a:rPr dirty="0" sz="1200" spc="-35" i="1">
-                <a:latin typeface="Times New Roman"/>
-                <a:cs typeface="Times New Roman"/>
-              </a:rPr>
-              <a:t> </a:t>
-            </a:r>
-            <a:r>
-              <a:rPr dirty="0" sz="1200" i="1">
+              <a:rPr sz="1200" i="1" spc="-35" dirty="0">
+                <a:latin typeface="Times New Roman"/>
+                <a:cs typeface="Times New Roman"/>
+              </a:rPr>
+              <a:t> </a:t>
+            </a:r>
+            <a:r>
+              <a:rPr sz="1200" i="1" dirty="0">
                 <a:latin typeface="Times New Roman"/>
                 <a:cs typeface="Times New Roman"/>
               </a:rPr>
               <a:t>duplicate</a:t>
             </a:r>
             <a:r>
-              <a:rPr dirty="0" sz="1200" spc="-30" i="1">
-                <a:latin typeface="Times New Roman"/>
-                <a:cs typeface="Times New Roman"/>
-              </a:rPr>
-              <a:t> </a:t>
-            </a:r>
-            <a:r>
-              <a:rPr dirty="0" sz="1200" spc="-10" i="1">
+              <a:rPr sz="1200" i="1" spc="-30" dirty="0">
+                <a:latin typeface="Times New Roman"/>
+                <a:cs typeface="Times New Roman"/>
+              </a:rPr>
+              <a:t> </a:t>
+            </a:r>
+            <a:r>
+              <a:rPr sz="1200" i="1" spc="-10" dirty="0">
                 <a:latin typeface="Times New Roman"/>
                 <a:cs typeface="Times New Roman"/>
               </a:rPr>
               <a:t>email </a:t>
             </a:r>
             <a:r>
-              <a:rPr dirty="0" sz="1200" i="1">
+              <a:rPr sz="1200" i="1" dirty="0">
                 <a:latin typeface="Times New Roman"/>
                 <a:cs typeface="Times New Roman"/>
               </a:rPr>
               <a:t>prevention,</a:t>
             </a:r>
             <a:r>
-              <a:rPr dirty="0" sz="1200" spc="-25" i="1">
-                <a:latin typeface="Times New Roman"/>
-                <a:cs typeface="Times New Roman"/>
-              </a:rPr>
-              <a:t> </a:t>
-            </a:r>
-            <a:r>
-              <a:rPr dirty="0" sz="1200" i="1">
+              <a:rPr sz="1200" i="1" spc="-25" dirty="0">
+                <a:latin typeface="Times New Roman"/>
+                <a:cs typeface="Times New Roman"/>
+              </a:rPr>
+              <a:t> </a:t>
+            </a:r>
+            <a:r>
+              <a:rPr sz="1200" i="1" dirty="0">
                 <a:latin typeface="Times New Roman"/>
                 <a:cs typeface="Times New Roman"/>
               </a:rPr>
               <a:t>or</a:t>
             </a:r>
             <a:r>
-              <a:rPr dirty="0" sz="1200" spc="-30" i="1">
-                <a:latin typeface="Times New Roman"/>
-                <a:cs typeface="Times New Roman"/>
-              </a:rPr>
-              <a:t> </a:t>
-            </a:r>
-            <a:r>
-              <a:rPr dirty="0" sz="1200" i="1">
+              <a:rPr sz="1200" i="1" spc="-30" dirty="0">
+                <a:latin typeface="Times New Roman"/>
+                <a:cs typeface="Times New Roman"/>
+              </a:rPr>
+              <a:t> </a:t>
+            </a:r>
+            <a:r>
+              <a:rPr sz="1200" i="1" dirty="0">
                 <a:latin typeface="Times New Roman"/>
                 <a:cs typeface="Times New Roman"/>
               </a:rPr>
               <a:t>event</a:t>
             </a:r>
             <a:r>
-              <a:rPr dirty="0" sz="1200" spc="-20" i="1">
-                <a:latin typeface="Times New Roman"/>
-                <a:cs typeface="Times New Roman"/>
-              </a:rPr>
-              <a:t> </a:t>
-            </a:r>
-            <a:r>
-              <a:rPr dirty="0" sz="1200" i="1">
+              <a:rPr sz="1200" i="1" spc="-20" dirty="0">
+                <a:latin typeface="Times New Roman"/>
+                <a:cs typeface="Times New Roman"/>
+              </a:rPr>
+              <a:t> </a:t>
+            </a:r>
+            <a:r>
+              <a:rPr sz="1200" i="1" dirty="0">
                 <a:latin typeface="Times New Roman"/>
                 <a:cs typeface="Times New Roman"/>
               </a:rPr>
               <a:t>summary</a:t>
             </a:r>
             <a:r>
-              <a:rPr dirty="0" sz="1200" spc="-30" i="1">
-                <a:latin typeface="Times New Roman"/>
-                <a:cs typeface="Times New Roman"/>
-              </a:rPr>
-              <a:t> </a:t>
-            </a:r>
-            <a:r>
-              <a:rPr dirty="0" sz="1200" spc="-10" i="1">
+              <a:rPr sz="1200" i="1" spc="-30" dirty="0">
+                <a:latin typeface="Times New Roman"/>
+                <a:cs typeface="Times New Roman"/>
+              </a:rPr>
+              <a:t> </a:t>
+            </a:r>
+            <a:r>
+              <a:rPr sz="1200" i="1" spc="-10" dirty="0">
                 <a:latin typeface="Times New Roman"/>
                 <a:cs typeface="Times New Roman"/>
               </a:rPr>
@@ -8480,7 +8701,7 @@
       </p:sp>
       <p:grpSp>
         <p:nvGrpSpPr>
-          <p:cNvPr id="5" name="object 5" descr=""/>
+          <p:cNvPr id="5" name="object 5"/>
           <p:cNvGrpSpPr/>
           <p:nvPr/>
         </p:nvGrpSpPr>
@@ -8494,7 +8715,7 @@
         </p:grpSpPr>
         <p:sp>
           <p:nvSpPr>
-            <p:cNvPr id="6" name="object 6" descr=""/>
+            <p:cNvPr id="6" name="object 6"/>
             <p:cNvSpPr/>
             <p:nvPr/>
           </p:nvSpPr>
@@ -8537,12 +8758,14 @@
           <p:txBody>
             <a:bodyPr wrap="square" lIns="0" tIns="0" rIns="0" bIns="0" rtlCol="0"/>
             <a:lstStyle/>
-            <a:p/>
+            <a:p>
+              <a:endParaRPr/>
+            </a:p>
           </p:txBody>
         </p:sp>
         <p:sp>
           <p:nvSpPr>
-            <p:cNvPr id="7" name="object 7" descr=""/>
+            <p:cNvPr id="7" name="object 7"/>
             <p:cNvSpPr/>
             <p:nvPr/>
           </p:nvSpPr>
@@ -8585,12 +8808,14 @@
           <p:txBody>
             <a:bodyPr wrap="square" lIns="0" tIns="0" rIns="0" bIns="0" rtlCol="0"/>
             <a:lstStyle/>
-            <a:p/>
+            <a:p>
+              <a:endParaRPr/>
+            </a:p>
           </p:txBody>
         </p:sp>
         <p:sp>
           <p:nvSpPr>
-            <p:cNvPr id="8" name="object 8" descr=""/>
+            <p:cNvPr id="8" name="object 8"/>
             <p:cNvSpPr/>
             <p:nvPr/>
           </p:nvSpPr>
@@ -8651,12 +8876,14 @@
           <p:txBody>
             <a:bodyPr wrap="square" lIns="0" tIns="0" rIns="0" bIns="0" rtlCol="0"/>
             <a:lstStyle/>
-            <a:p/>
+            <a:p>
+              <a:endParaRPr/>
+            </a:p>
           </p:txBody>
         </p:sp>
         <p:sp>
           <p:nvSpPr>
-            <p:cNvPr id="9" name="object 9" descr=""/>
+            <p:cNvPr id="9" name="object 9"/>
             <p:cNvSpPr/>
             <p:nvPr/>
           </p:nvSpPr>
@@ -8699,12 +8926,14 @@
           <p:txBody>
             <a:bodyPr wrap="square" lIns="0" tIns="0" rIns="0" bIns="0" rtlCol="0"/>
             <a:lstStyle/>
-            <a:p/>
+            <a:p>
+              <a:endParaRPr/>
+            </a:p>
           </p:txBody>
         </p:sp>
         <p:sp>
           <p:nvSpPr>
-            <p:cNvPr id="10" name="object 10" descr=""/>
+            <p:cNvPr id="10" name="object 10"/>
             <p:cNvSpPr/>
             <p:nvPr/>
           </p:nvSpPr>
@@ -8747,12 +8976,14 @@
           <p:txBody>
             <a:bodyPr wrap="square" lIns="0" tIns="0" rIns="0" bIns="0" rtlCol="0"/>
             <a:lstStyle/>
-            <a:p/>
+            <a:p>
+              <a:endParaRPr/>
+            </a:p>
           </p:txBody>
         </p:sp>
         <p:sp>
           <p:nvSpPr>
-            <p:cNvPr id="11" name="object 11" descr=""/>
+            <p:cNvPr id="11" name="object 11"/>
             <p:cNvSpPr/>
             <p:nvPr/>
           </p:nvSpPr>
@@ -8807,13 +9038,15 @@
           <p:txBody>
             <a:bodyPr wrap="square" lIns="0" tIns="0" rIns="0" bIns="0" rtlCol="0"/>
             <a:lstStyle/>
-            <a:p/>
+            <a:p>
+              <a:endParaRPr/>
+            </a:p>
           </p:txBody>
         </p:sp>
       </p:grpSp>
       <p:sp>
         <p:nvSpPr>
-          <p:cNvPr id="12" name="object 12" descr=""/>
+          <p:cNvPr id="12" name="object 12"/>
           <p:cNvSpPr txBox="1"/>
           <p:nvPr/>
         </p:nvSpPr>
@@ -8827,7 +9060,7 @@
           </a:prstGeom>
         </p:spPr>
         <p:txBody>
-          <a:bodyPr wrap="square" lIns="0" tIns="12700" rIns="0" bIns="0" rtlCol="0" vert="horz">
+          <a:bodyPr vert="horz" wrap="square" lIns="0" tIns="12700" rIns="0" bIns="0" rtlCol="0">
             <a:spAutoFit/>
           </a:bodyPr>
           <a:lstStyle/>
@@ -8841,7 +9074,7 @@
               </a:spcBef>
             </a:pPr>
             <a:r>
-              <a:rPr dirty="0" sz="1400" b="1">
+              <a:rPr sz="1400" b="1" dirty="0">
                 <a:solidFill>
                   <a:srgbClr val="3B78D7"/>
                 </a:solidFill>
@@ -8851,7 +9084,7 @@
               <a:t>4.JavaScript</a:t>
             </a:r>
             <a:r>
-              <a:rPr dirty="0" sz="1400" spc="-45" b="1">
+              <a:rPr sz="1400" b="1" spc="-45" dirty="0">
                 <a:solidFill>
                   <a:srgbClr val="3B78D7"/>
                 </a:solidFill>
@@ -8861,7 +9094,7 @@
               <a:t> </a:t>
             </a:r>
             <a:r>
-              <a:rPr dirty="0" sz="1400" b="1">
+              <a:rPr sz="1400" b="1" dirty="0">
                 <a:solidFill>
                   <a:srgbClr val="3B78D7"/>
                 </a:solidFill>
@@ -8871,7 +9104,7 @@
               <a:t>Concepts</a:t>
             </a:r>
             <a:r>
-              <a:rPr dirty="0" sz="1400" spc="-50" b="1">
+              <a:rPr sz="1400" b="1" spc="-50" dirty="0">
                 <a:solidFill>
                   <a:srgbClr val="3B78D7"/>
                 </a:solidFill>
@@ -8881,7 +9114,7 @@
               <a:t> </a:t>
             </a:r>
             <a:r>
-              <a:rPr dirty="0" sz="1400" spc="-20" b="1">
+              <a:rPr sz="1400" b="1" spc="-20" dirty="0">
                 <a:solidFill>
                   <a:srgbClr val="3B78D7"/>
                 </a:solidFill>
@@ -8905,308 +9138,308 @@
               </a:spcBef>
             </a:pPr>
             <a:r>
-              <a:rPr dirty="0" sz="1200" i="1">
+              <a:rPr sz="1200" i="1" dirty="0">
                 <a:latin typeface="Times New Roman"/>
                 <a:cs typeface="Times New Roman"/>
               </a:rPr>
               <a:t>(Mention</a:t>
             </a:r>
             <a:r>
-              <a:rPr dirty="0" sz="1200" spc="-35" i="1">
-                <a:latin typeface="Times New Roman"/>
-                <a:cs typeface="Times New Roman"/>
-              </a:rPr>
-              <a:t> </a:t>
-            </a:r>
-            <a:r>
-              <a:rPr dirty="0" sz="1200" i="1">
+              <a:rPr sz="1200" i="1" spc="-35" dirty="0">
+                <a:latin typeface="Times New Roman"/>
+                <a:cs typeface="Times New Roman"/>
+              </a:rPr>
+              <a:t> </a:t>
+            </a:r>
+            <a:r>
+              <a:rPr sz="1200" i="1" dirty="0">
                 <a:latin typeface="Times New Roman"/>
                 <a:cs typeface="Times New Roman"/>
               </a:rPr>
               <a:t>the</a:t>
             </a:r>
             <a:r>
-              <a:rPr dirty="0" sz="1200" spc="-30" i="1">
-                <a:latin typeface="Times New Roman"/>
-                <a:cs typeface="Times New Roman"/>
-              </a:rPr>
-              <a:t> </a:t>
-            </a:r>
-            <a:r>
-              <a:rPr dirty="0" sz="1200" i="1">
+              <a:rPr sz="1200" i="1" spc="-30" dirty="0">
+                <a:latin typeface="Times New Roman"/>
+                <a:cs typeface="Times New Roman"/>
+              </a:rPr>
+              <a:t> </a:t>
+            </a:r>
+            <a:r>
+              <a:rPr sz="1200" i="1" dirty="0">
                 <a:latin typeface="Times New Roman"/>
                 <a:cs typeface="Times New Roman"/>
               </a:rPr>
               <a:t>JavaScript</a:t>
             </a:r>
             <a:r>
-              <a:rPr dirty="0" sz="1200" spc="-25" i="1">
-                <a:latin typeface="Times New Roman"/>
-                <a:cs typeface="Times New Roman"/>
-              </a:rPr>
-              <a:t> </a:t>
-            </a:r>
-            <a:r>
-              <a:rPr dirty="0" sz="1200" i="1">
+              <a:rPr sz="1200" i="1" spc="-25" dirty="0">
+                <a:latin typeface="Times New Roman"/>
+                <a:cs typeface="Times New Roman"/>
+              </a:rPr>
+              <a:t> </a:t>
+            </a:r>
+            <a:r>
+              <a:rPr sz="1200" i="1" dirty="0">
                 <a:latin typeface="Times New Roman"/>
                 <a:cs typeface="Times New Roman"/>
               </a:rPr>
               <a:t>concepts</a:t>
             </a:r>
             <a:r>
-              <a:rPr dirty="0" sz="1200" spc="-35" i="1">
-                <a:latin typeface="Times New Roman"/>
-                <a:cs typeface="Times New Roman"/>
-              </a:rPr>
-              <a:t> </a:t>
-            </a:r>
-            <a:r>
-              <a:rPr dirty="0" sz="1200" i="1">
+              <a:rPr sz="1200" i="1" spc="-35" dirty="0">
+                <a:latin typeface="Times New Roman"/>
+                <a:cs typeface="Times New Roman"/>
+              </a:rPr>
+              <a:t> </a:t>
+            </a:r>
+            <a:r>
+              <a:rPr sz="1200" i="1" dirty="0">
                 <a:latin typeface="Times New Roman"/>
                 <a:cs typeface="Times New Roman"/>
               </a:rPr>
               <a:t>applied</a:t>
             </a:r>
             <a:r>
-              <a:rPr dirty="0" sz="1200" spc="-30" i="1">
-                <a:latin typeface="Times New Roman"/>
-                <a:cs typeface="Times New Roman"/>
-              </a:rPr>
-              <a:t> </a:t>
-            </a:r>
-            <a:r>
-              <a:rPr dirty="0" sz="1200" i="1">
+              <a:rPr sz="1200" i="1" spc="-30" dirty="0">
+                <a:latin typeface="Times New Roman"/>
+                <a:cs typeface="Times New Roman"/>
+              </a:rPr>
+              <a:t> </a:t>
+            </a:r>
+            <a:r>
+              <a:rPr sz="1200" i="1" dirty="0">
                 <a:latin typeface="Times New Roman"/>
                 <a:cs typeface="Times New Roman"/>
               </a:rPr>
               <a:t>in</a:t>
             </a:r>
             <a:r>
-              <a:rPr dirty="0" sz="1200" spc="-30" i="1">
-                <a:latin typeface="Times New Roman"/>
-                <a:cs typeface="Times New Roman"/>
-              </a:rPr>
-              <a:t> </a:t>
-            </a:r>
-            <a:r>
-              <a:rPr dirty="0" sz="1200" i="1">
+              <a:rPr sz="1200" i="1" spc="-30" dirty="0">
+                <a:latin typeface="Times New Roman"/>
+                <a:cs typeface="Times New Roman"/>
+              </a:rPr>
+              <a:t> </a:t>
+            </a:r>
+            <a:r>
+              <a:rPr sz="1200" i="1" dirty="0">
                 <a:latin typeface="Times New Roman"/>
                 <a:cs typeface="Times New Roman"/>
               </a:rPr>
               <a:t>this</a:t>
             </a:r>
             <a:r>
-              <a:rPr dirty="0" sz="1200" spc="-35" i="1">
-                <a:latin typeface="Times New Roman"/>
-                <a:cs typeface="Times New Roman"/>
-              </a:rPr>
-              <a:t> </a:t>
-            </a:r>
-            <a:r>
-              <a:rPr dirty="0" sz="1200" i="1">
+              <a:rPr sz="1200" i="1" spc="-35" dirty="0">
+                <a:latin typeface="Times New Roman"/>
+                <a:cs typeface="Times New Roman"/>
+              </a:rPr>
+              <a:t> </a:t>
+            </a:r>
+            <a:r>
+              <a:rPr sz="1200" i="1" dirty="0">
                 <a:latin typeface="Times New Roman"/>
                 <a:cs typeface="Times New Roman"/>
               </a:rPr>
               <a:t>assignment,</a:t>
             </a:r>
             <a:r>
-              <a:rPr dirty="0" sz="1200" spc="-30" i="1">
-                <a:latin typeface="Times New Roman"/>
-                <a:cs typeface="Times New Roman"/>
-              </a:rPr>
-              <a:t> </a:t>
-            </a:r>
-            <a:r>
-              <a:rPr dirty="0" sz="1200" i="1">
+              <a:rPr sz="1200" i="1" spc="-30" dirty="0">
+                <a:latin typeface="Times New Roman"/>
+                <a:cs typeface="Times New Roman"/>
+              </a:rPr>
+              <a:t> </a:t>
+            </a:r>
+            <a:r>
+              <a:rPr sz="1200" i="1" dirty="0">
                 <a:latin typeface="Times New Roman"/>
                 <a:cs typeface="Times New Roman"/>
               </a:rPr>
               <a:t>such</a:t>
             </a:r>
             <a:r>
-              <a:rPr dirty="0" sz="1200" spc="-30" i="1">
-                <a:latin typeface="Times New Roman"/>
-                <a:cs typeface="Times New Roman"/>
-              </a:rPr>
-              <a:t> </a:t>
-            </a:r>
-            <a:r>
-              <a:rPr dirty="0" sz="1200" i="1">
+              <a:rPr sz="1200" i="1" spc="-30" dirty="0">
+                <a:latin typeface="Times New Roman"/>
+                <a:cs typeface="Times New Roman"/>
+              </a:rPr>
+              <a:t> </a:t>
+            </a:r>
+            <a:r>
+              <a:rPr sz="1200" i="1" dirty="0">
                 <a:latin typeface="Times New Roman"/>
                 <a:cs typeface="Times New Roman"/>
               </a:rPr>
               <a:t>as</a:t>
             </a:r>
             <a:r>
-              <a:rPr dirty="0" sz="1200" spc="-35" i="1">
-                <a:latin typeface="Times New Roman"/>
-                <a:cs typeface="Times New Roman"/>
-              </a:rPr>
-              <a:t> </a:t>
-            </a:r>
-            <a:r>
-              <a:rPr dirty="0" sz="1200" i="1">
+              <a:rPr sz="1200" i="1" spc="-35" dirty="0">
+                <a:latin typeface="Times New Roman"/>
+                <a:cs typeface="Times New Roman"/>
+              </a:rPr>
+              <a:t> </a:t>
+            </a:r>
+            <a:r>
+              <a:rPr sz="1200" i="1" dirty="0">
                 <a:latin typeface="Times New Roman"/>
                 <a:cs typeface="Times New Roman"/>
               </a:rPr>
               <a:t>DOM</a:t>
             </a:r>
             <a:r>
-              <a:rPr dirty="0" sz="1200" spc="-25" i="1">
-                <a:latin typeface="Times New Roman"/>
-                <a:cs typeface="Times New Roman"/>
-              </a:rPr>
-              <a:t> </a:t>
-            </a:r>
-            <a:r>
-              <a:rPr dirty="0" sz="1200" i="1">
+              <a:rPr sz="1200" i="1" spc="-25" dirty="0">
+                <a:latin typeface="Times New Roman"/>
+                <a:cs typeface="Times New Roman"/>
+              </a:rPr>
+              <a:t> </a:t>
+            </a:r>
+            <a:r>
+              <a:rPr sz="1200" i="1" dirty="0">
                 <a:latin typeface="Times New Roman"/>
                 <a:cs typeface="Times New Roman"/>
               </a:rPr>
               <a:t>selection,</a:t>
             </a:r>
             <a:r>
-              <a:rPr dirty="0" sz="1200" spc="-30" i="1">
-                <a:latin typeface="Times New Roman"/>
-                <a:cs typeface="Times New Roman"/>
-              </a:rPr>
-              <a:t> </a:t>
-            </a:r>
-            <a:r>
-              <a:rPr dirty="0" sz="1200" i="1">
+              <a:rPr sz="1200" i="1" spc="-30" dirty="0">
+                <a:latin typeface="Times New Roman"/>
+                <a:cs typeface="Times New Roman"/>
+              </a:rPr>
+              <a:t> </a:t>
+            </a:r>
+            <a:r>
+              <a:rPr sz="1200" i="1" dirty="0">
                 <a:latin typeface="Times New Roman"/>
                 <a:cs typeface="Times New Roman"/>
               </a:rPr>
               <a:t>event</a:t>
             </a:r>
             <a:r>
-              <a:rPr dirty="0" sz="1200" spc="-30" i="1">
-                <a:latin typeface="Times New Roman"/>
-                <a:cs typeface="Times New Roman"/>
-              </a:rPr>
-              <a:t> </a:t>
-            </a:r>
-            <a:r>
-              <a:rPr dirty="0" sz="1200" spc="-10" i="1">
+              <a:rPr sz="1200" i="1" spc="-30" dirty="0">
+                <a:latin typeface="Times New Roman"/>
+                <a:cs typeface="Times New Roman"/>
+              </a:rPr>
+              <a:t> </a:t>
+            </a:r>
+            <a:r>
+              <a:rPr sz="1200" i="1" spc="-10" dirty="0">
                 <a:latin typeface="Times New Roman"/>
                 <a:cs typeface="Times New Roman"/>
               </a:rPr>
               <a:t>handling, </a:t>
             </a:r>
             <a:r>
-              <a:rPr dirty="0" sz="1200" i="1">
+              <a:rPr sz="1200" i="1" dirty="0">
                 <a:latin typeface="Times New Roman"/>
                 <a:cs typeface="Times New Roman"/>
               </a:rPr>
               <a:t>validation</a:t>
             </a:r>
             <a:r>
-              <a:rPr dirty="0" sz="1200" spc="-40" i="1">
-                <a:latin typeface="Times New Roman"/>
-                <a:cs typeface="Times New Roman"/>
-              </a:rPr>
-              <a:t> </a:t>
-            </a:r>
-            <a:r>
-              <a:rPr dirty="0" sz="1200" i="1">
+              <a:rPr sz="1200" i="1" spc="-40" dirty="0">
+                <a:latin typeface="Times New Roman"/>
+                <a:cs typeface="Times New Roman"/>
+              </a:rPr>
+              <a:t> </a:t>
+            </a:r>
+            <a:r>
+              <a:rPr sz="1200" i="1" dirty="0">
                 <a:latin typeface="Times New Roman"/>
                 <a:cs typeface="Times New Roman"/>
               </a:rPr>
               <a:t>logic,</a:t>
             </a:r>
             <a:r>
-              <a:rPr dirty="0" sz="1200" spc="-40" i="1">
-                <a:latin typeface="Times New Roman"/>
-                <a:cs typeface="Times New Roman"/>
-              </a:rPr>
-              <a:t> </a:t>
-            </a:r>
-            <a:r>
-              <a:rPr dirty="0" sz="1200" i="1">
+              <a:rPr sz="1200" i="1" spc="-40" dirty="0">
+                <a:latin typeface="Times New Roman"/>
+                <a:cs typeface="Times New Roman"/>
+              </a:rPr>
+              <a:t> </a:t>
+            </a:r>
+            <a:r>
+              <a:rPr sz="1200" i="1" dirty="0">
                 <a:latin typeface="Times New Roman"/>
                 <a:cs typeface="Times New Roman"/>
               </a:rPr>
               <a:t>dynamic</a:t>
             </a:r>
             <a:r>
-              <a:rPr dirty="0" sz="1200" spc="-45" i="1">
-                <a:latin typeface="Times New Roman"/>
-                <a:cs typeface="Times New Roman"/>
-              </a:rPr>
-              <a:t> </a:t>
-            </a:r>
-            <a:r>
-              <a:rPr dirty="0" sz="1200" i="1">
+              <a:rPr sz="1200" i="1" spc="-45" dirty="0">
+                <a:latin typeface="Times New Roman"/>
+                <a:cs typeface="Times New Roman"/>
+              </a:rPr>
+              <a:t> </a:t>
+            </a:r>
+            <a:r>
+              <a:rPr sz="1200" i="1" dirty="0">
                 <a:latin typeface="Times New Roman"/>
                 <a:cs typeface="Times New Roman"/>
               </a:rPr>
               <a:t>element</a:t>
             </a:r>
             <a:r>
-              <a:rPr dirty="0" sz="1200" spc="-40" i="1">
-                <a:latin typeface="Times New Roman"/>
-                <a:cs typeface="Times New Roman"/>
-              </a:rPr>
-              <a:t> </a:t>
-            </a:r>
-            <a:r>
-              <a:rPr dirty="0" sz="1200" i="1">
+              <a:rPr sz="1200" i="1" spc="-40" dirty="0">
+                <a:latin typeface="Times New Roman"/>
+                <a:cs typeface="Times New Roman"/>
+              </a:rPr>
+              <a:t> </a:t>
+            </a:r>
+            <a:r>
+              <a:rPr sz="1200" i="1" dirty="0">
                 <a:latin typeface="Times New Roman"/>
                 <a:cs typeface="Times New Roman"/>
               </a:rPr>
               <a:t>creation,</a:t>
             </a:r>
             <a:r>
-              <a:rPr dirty="0" sz="1200" spc="-40" i="1">
-                <a:latin typeface="Times New Roman"/>
-                <a:cs typeface="Times New Roman"/>
-              </a:rPr>
-              <a:t> </a:t>
-            </a:r>
-            <a:r>
-              <a:rPr dirty="0" sz="1200" i="1">
+              <a:rPr sz="1200" i="1" spc="-40" dirty="0">
+                <a:latin typeface="Times New Roman"/>
+                <a:cs typeface="Times New Roman"/>
+              </a:rPr>
+              <a:t> </a:t>
+            </a:r>
+            <a:r>
+              <a:rPr sz="1200" i="1" dirty="0">
                 <a:latin typeface="Times New Roman"/>
                 <a:cs typeface="Times New Roman"/>
               </a:rPr>
               <a:t>conditional</a:t>
             </a:r>
             <a:r>
-              <a:rPr dirty="0" sz="1200" spc="-40" i="1">
-                <a:latin typeface="Times New Roman"/>
-                <a:cs typeface="Times New Roman"/>
-              </a:rPr>
-              <a:t> </a:t>
-            </a:r>
-            <a:r>
-              <a:rPr dirty="0" sz="1200" i="1">
+              <a:rPr sz="1200" i="1" spc="-40" dirty="0">
+                <a:latin typeface="Times New Roman"/>
+                <a:cs typeface="Times New Roman"/>
+              </a:rPr>
+              <a:t> </a:t>
+            </a:r>
+            <a:r>
+              <a:rPr sz="1200" i="1" dirty="0">
                 <a:latin typeface="Times New Roman"/>
                 <a:cs typeface="Times New Roman"/>
               </a:rPr>
               <a:t>statements,</a:t>
             </a:r>
             <a:r>
-              <a:rPr dirty="0" sz="1200" spc="-40" i="1">
-                <a:latin typeface="Times New Roman"/>
-                <a:cs typeface="Times New Roman"/>
-              </a:rPr>
-              <a:t> </a:t>
-            </a:r>
-            <a:r>
-              <a:rPr dirty="0" sz="1200" i="1">
+              <a:rPr sz="1200" i="1" spc="-40" dirty="0">
+                <a:latin typeface="Times New Roman"/>
+                <a:cs typeface="Times New Roman"/>
+              </a:rPr>
+              <a:t> </a:t>
+            </a:r>
+            <a:r>
+              <a:rPr sz="1200" i="1" dirty="0">
                 <a:latin typeface="Times New Roman"/>
                 <a:cs typeface="Times New Roman"/>
               </a:rPr>
               <a:t>and</a:t>
             </a:r>
             <a:r>
-              <a:rPr dirty="0" sz="1200" spc="-40" i="1">
-                <a:latin typeface="Times New Roman"/>
-                <a:cs typeface="Times New Roman"/>
-              </a:rPr>
-              <a:t> </a:t>
-            </a:r>
-            <a:r>
-              <a:rPr dirty="0" sz="1200" spc="-10" i="1">
+              <a:rPr sz="1200" i="1" spc="-40" dirty="0">
+                <a:latin typeface="Times New Roman"/>
+                <a:cs typeface="Times New Roman"/>
+              </a:rPr>
+              <a:t> </a:t>
+            </a:r>
+            <a:r>
+              <a:rPr sz="1200" i="1" spc="-10" dirty="0">
                 <a:latin typeface="Times New Roman"/>
                 <a:cs typeface="Times New Roman"/>
               </a:rPr>
@@ -9221,7 +9454,7 @@
       </p:sp>
       <p:grpSp>
         <p:nvGrpSpPr>
-          <p:cNvPr id="13" name="object 13" descr=""/>
+          <p:cNvPr id="13" name="object 13"/>
           <p:cNvGrpSpPr/>
           <p:nvPr/>
         </p:nvGrpSpPr>
@@ -9235,7 +9468,7 @@
         </p:grpSpPr>
         <p:sp>
           <p:nvSpPr>
-            <p:cNvPr id="14" name="object 14" descr=""/>
+            <p:cNvPr id="14" name="object 14"/>
             <p:cNvSpPr/>
             <p:nvPr/>
           </p:nvSpPr>
@@ -9278,12 +9511,14 @@
           <p:txBody>
             <a:bodyPr wrap="square" lIns="0" tIns="0" rIns="0" bIns="0" rtlCol="0"/>
             <a:lstStyle/>
-            <a:p/>
+            <a:p>
+              <a:endParaRPr/>
+            </a:p>
           </p:txBody>
         </p:sp>
         <p:sp>
           <p:nvSpPr>
-            <p:cNvPr id="15" name="object 15" descr=""/>
+            <p:cNvPr id="15" name="object 15"/>
             <p:cNvSpPr/>
             <p:nvPr/>
           </p:nvSpPr>
@@ -9326,12 +9561,14 @@
           <p:txBody>
             <a:bodyPr wrap="square" lIns="0" tIns="0" rIns="0" bIns="0" rtlCol="0"/>
             <a:lstStyle/>
-            <a:p/>
+            <a:p>
+              <a:endParaRPr/>
+            </a:p>
           </p:txBody>
         </p:sp>
         <p:sp>
           <p:nvSpPr>
-            <p:cNvPr id="16" name="object 16" descr=""/>
+            <p:cNvPr id="16" name="object 16"/>
             <p:cNvSpPr/>
             <p:nvPr/>
           </p:nvSpPr>
@@ -9392,12 +9629,14 @@
           <p:txBody>
             <a:bodyPr wrap="square" lIns="0" tIns="0" rIns="0" bIns="0" rtlCol="0"/>
             <a:lstStyle/>
-            <a:p/>
+            <a:p>
+              <a:endParaRPr/>
+            </a:p>
           </p:txBody>
         </p:sp>
         <p:sp>
           <p:nvSpPr>
-            <p:cNvPr id="17" name="object 17" descr=""/>
+            <p:cNvPr id="17" name="object 17"/>
             <p:cNvSpPr/>
             <p:nvPr/>
           </p:nvSpPr>
@@ -9440,12 +9679,14 @@
           <p:txBody>
             <a:bodyPr wrap="square" lIns="0" tIns="0" rIns="0" bIns="0" rtlCol="0"/>
             <a:lstStyle/>
-            <a:p/>
+            <a:p>
+              <a:endParaRPr/>
+            </a:p>
           </p:txBody>
         </p:sp>
         <p:sp>
           <p:nvSpPr>
-            <p:cNvPr id="18" name="object 18" descr=""/>
+            <p:cNvPr id="18" name="object 18"/>
             <p:cNvSpPr/>
             <p:nvPr/>
           </p:nvSpPr>
@@ -9488,12 +9729,14 @@
           <p:txBody>
             <a:bodyPr wrap="square" lIns="0" tIns="0" rIns="0" bIns="0" rtlCol="0"/>
             <a:lstStyle/>
-            <a:p/>
+            <a:p>
+              <a:endParaRPr/>
+            </a:p>
           </p:txBody>
         </p:sp>
         <p:sp>
           <p:nvSpPr>
-            <p:cNvPr id="19" name="object 19" descr=""/>
+            <p:cNvPr id="19" name="object 19"/>
             <p:cNvSpPr/>
             <p:nvPr/>
           </p:nvSpPr>
@@ -9548,13 +9791,15 @@
           <p:txBody>
             <a:bodyPr wrap="square" lIns="0" tIns="0" rIns="0" bIns="0" rtlCol="0"/>
             <a:lstStyle/>
-            <a:p/>
+            <a:p>
+              <a:endParaRPr/>
+            </a:p>
           </p:txBody>
         </p:sp>
       </p:grpSp>
       <p:sp>
         <p:nvSpPr>
-          <p:cNvPr id="20" name="object 20" descr=""/>
+          <p:cNvPr id="20" name="object 20"/>
           <p:cNvSpPr txBox="1"/>
           <p:nvPr/>
         </p:nvSpPr>
@@ -9568,7 +9813,7 @@
           </a:prstGeom>
         </p:spPr>
         <p:txBody>
-          <a:bodyPr wrap="square" lIns="0" tIns="13335" rIns="0" bIns="0" rtlCol="0" vert="horz">
+          <a:bodyPr vert="horz" wrap="square" lIns="0" tIns="13335" rIns="0" bIns="0" rtlCol="0">
             <a:spAutoFit/>
           </a:bodyPr>
           <a:lstStyle/>
@@ -9582,7 +9827,7 @@
               </a:spcBef>
             </a:pPr>
             <a:r>
-              <a:rPr dirty="0" sz="1400" b="1">
+              <a:rPr sz="1400" b="1" dirty="0">
                 <a:solidFill>
                   <a:srgbClr val="3B78D7"/>
                 </a:solidFill>
@@ -9592,7 +9837,7 @@
               <a:t>5.</a:t>
             </a:r>
             <a:r>
-              <a:rPr dirty="0" sz="1400" spc="-35" b="1">
+              <a:rPr sz="1400" b="1" spc="-35" dirty="0">
                 <a:solidFill>
                   <a:srgbClr val="3B78D7"/>
                 </a:solidFill>
@@ -9602,7 +9847,7 @@
               <a:t> </a:t>
             </a:r>
             <a:r>
-              <a:rPr dirty="0" sz="1400" b="1">
+              <a:rPr sz="1400" b="1" dirty="0">
                 <a:solidFill>
                   <a:srgbClr val="3B78D7"/>
                 </a:solidFill>
@@ -9612,7 +9857,7 @@
               <a:t>Implementation</a:t>
             </a:r>
             <a:r>
-              <a:rPr dirty="0" sz="1400" spc="-30" b="1">
+              <a:rPr sz="1400" b="1" spc="-30" dirty="0">
                 <a:solidFill>
                   <a:srgbClr val="3B78D7"/>
                 </a:solidFill>
@@ -9622,7 +9867,7 @@
               <a:t> </a:t>
             </a:r>
             <a:r>
-              <a:rPr dirty="0" sz="1400" spc="-10" b="1">
+              <a:rPr sz="1400" b="1" spc="-10" dirty="0">
                 <a:solidFill>
                   <a:srgbClr val="3B78D7"/>
                 </a:solidFill>
@@ -9646,182 +9891,182 @@
               </a:spcBef>
             </a:pPr>
             <a:r>
-              <a:rPr dirty="0" sz="1200" i="1">
+              <a:rPr sz="1200" i="1" dirty="0">
                 <a:latin typeface="Times New Roman"/>
                 <a:cs typeface="Times New Roman"/>
               </a:rPr>
               <a:t>(Explain</a:t>
             </a:r>
             <a:r>
-              <a:rPr dirty="0" sz="1200" spc="-30" i="1">
-                <a:latin typeface="Times New Roman"/>
-                <a:cs typeface="Times New Roman"/>
-              </a:rPr>
-              <a:t> </a:t>
-            </a:r>
-            <a:r>
-              <a:rPr dirty="0" sz="1200" i="1">
+              <a:rPr sz="1200" i="1" spc="-30" dirty="0">
+                <a:latin typeface="Times New Roman"/>
+                <a:cs typeface="Times New Roman"/>
+              </a:rPr>
+              <a:t> </a:t>
+            </a:r>
+            <a:r>
+              <a:rPr sz="1200" i="1" dirty="0">
                 <a:latin typeface="Times New Roman"/>
                 <a:cs typeface="Times New Roman"/>
               </a:rPr>
               <a:t>the</a:t>
             </a:r>
             <a:r>
-              <a:rPr dirty="0" sz="1200" spc="-25" i="1">
-                <a:latin typeface="Times New Roman"/>
-                <a:cs typeface="Times New Roman"/>
-              </a:rPr>
-              <a:t> </a:t>
-            </a:r>
-            <a:r>
-              <a:rPr dirty="0" sz="1200" spc="-10" i="1">
+              <a:rPr sz="1200" i="1" spc="-25" dirty="0">
+                <a:latin typeface="Times New Roman"/>
+                <a:cs typeface="Times New Roman"/>
+              </a:rPr>
+              <a:t> </a:t>
+            </a:r>
+            <a:r>
+              <a:rPr sz="1200" i="1" spc="-10" dirty="0">
                 <a:latin typeface="Times New Roman"/>
                 <a:cs typeface="Times New Roman"/>
               </a:rPr>
               <a:t>step-by-</a:t>
             </a:r>
             <a:r>
-              <a:rPr dirty="0" sz="1200" i="1">
+              <a:rPr sz="1200" i="1" dirty="0">
                 <a:latin typeface="Times New Roman"/>
                 <a:cs typeface="Times New Roman"/>
               </a:rPr>
               <a:t>step</a:t>
             </a:r>
             <a:r>
-              <a:rPr dirty="0" sz="1200" spc="-25" i="1">
-                <a:latin typeface="Times New Roman"/>
-                <a:cs typeface="Times New Roman"/>
-              </a:rPr>
-              <a:t> </a:t>
-            </a:r>
-            <a:r>
-              <a:rPr dirty="0" sz="1200" i="1">
+              <a:rPr sz="1200" i="1" spc="-25" dirty="0">
+                <a:latin typeface="Times New Roman"/>
+                <a:cs typeface="Times New Roman"/>
+              </a:rPr>
+              <a:t> </a:t>
+            </a:r>
+            <a:r>
+              <a:rPr sz="1200" i="1" dirty="0">
                 <a:latin typeface="Times New Roman"/>
                 <a:cs typeface="Times New Roman"/>
               </a:rPr>
               <a:t>process</a:t>
             </a:r>
             <a:r>
-              <a:rPr dirty="0" sz="1200" spc="-35" i="1">
-                <a:latin typeface="Times New Roman"/>
-                <a:cs typeface="Times New Roman"/>
-              </a:rPr>
-              <a:t> </a:t>
-            </a:r>
-            <a:r>
-              <a:rPr dirty="0" sz="1200" i="1">
+              <a:rPr sz="1200" i="1" spc="-35" dirty="0">
+                <a:latin typeface="Times New Roman"/>
+                <a:cs typeface="Times New Roman"/>
+              </a:rPr>
+              <a:t> </a:t>
+            </a:r>
+            <a:r>
+              <a:rPr sz="1200" i="1" dirty="0">
                 <a:latin typeface="Times New Roman"/>
                 <a:cs typeface="Times New Roman"/>
               </a:rPr>
               <a:t>followed</a:t>
             </a:r>
             <a:r>
-              <a:rPr dirty="0" sz="1200" spc="-25" i="1">
-                <a:latin typeface="Times New Roman"/>
-                <a:cs typeface="Times New Roman"/>
-              </a:rPr>
-              <a:t> </a:t>
-            </a:r>
-            <a:r>
-              <a:rPr dirty="0" sz="1200" i="1">
+              <a:rPr sz="1200" i="1" spc="-25" dirty="0">
+                <a:latin typeface="Times New Roman"/>
+                <a:cs typeface="Times New Roman"/>
+              </a:rPr>
+              <a:t> </a:t>
+            </a:r>
+            <a:r>
+              <a:rPr sz="1200" i="1" dirty="0">
                 <a:latin typeface="Times New Roman"/>
                 <a:cs typeface="Times New Roman"/>
               </a:rPr>
               <a:t>to</a:t>
             </a:r>
             <a:r>
-              <a:rPr dirty="0" sz="1200" spc="-25" i="1">
-                <a:latin typeface="Times New Roman"/>
-                <a:cs typeface="Times New Roman"/>
-              </a:rPr>
-              <a:t> </a:t>
-            </a:r>
-            <a:r>
-              <a:rPr dirty="0" sz="1200" i="1">
+              <a:rPr sz="1200" i="1" spc="-25" dirty="0">
+                <a:latin typeface="Times New Roman"/>
+                <a:cs typeface="Times New Roman"/>
+              </a:rPr>
+              <a:t> </a:t>
+            </a:r>
+            <a:r>
+              <a:rPr sz="1200" i="1" dirty="0">
                 <a:latin typeface="Times New Roman"/>
                 <a:cs typeface="Times New Roman"/>
               </a:rPr>
               <a:t>add</a:t>
             </a:r>
             <a:r>
-              <a:rPr dirty="0" sz="1200" spc="-30" i="1">
-                <a:latin typeface="Times New Roman"/>
-                <a:cs typeface="Times New Roman"/>
-              </a:rPr>
-              <a:t> </a:t>
-            </a:r>
-            <a:r>
-              <a:rPr dirty="0" sz="1200" i="1">
+              <a:rPr sz="1200" i="1" spc="-30" dirty="0">
+                <a:latin typeface="Times New Roman"/>
+                <a:cs typeface="Times New Roman"/>
+              </a:rPr>
+              <a:t> </a:t>
+            </a:r>
+            <a:r>
+              <a:rPr sz="1200" i="1" dirty="0">
                 <a:latin typeface="Times New Roman"/>
                 <a:cs typeface="Times New Roman"/>
               </a:rPr>
               <a:t>JavaScript</a:t>
             </a:r>
             <a:r>
-              <a:rPr dirty="0" sz="1200" spc="-20" i="1">
-                <a:latin typeface="Times New Roman"/>
-                <a:cs typeface="Times New Roman"/>
-              </a:rPr>
-              <a:t> </a:t>
-            </a:r>
-            <a:r>
-              <a:rPr dirty="0" sz="1200" i="1">
+              <a:rPr sz="1200" i="1" spc="-20" dirty="0">
+                <a:latin typeface="Times New Roman"/>
+                <a:cs typeface="Times New Roman"/>
+              </a:rPr>
+              <a:t> </a:t>
+            </a:r>
+            <a:r>
+              <a:rPr sz="1200" i="1" dirty="0">
                 <a:latin typeface="Times New Roman"/>
                 <a:cs typeface="Times New Roman"/>
               </a:rPr>
               <a:t>functionality</a:t>
             </a:r>
             <a:r>
-              <a:rPr dirty="0" sz="1200" spc="-30" i="1">
-                <a:latin typeface="Times New Roman"/>
-                <a:cs typeface="Times New Roman"/>
-              </a:rPr>
-              <a:t> </a:t>
-            </a:r>
-            <a:r>
-              <a:rPr dirty="0" sz="1200" i="1">
+              <a:rPr sz="1200" i="1" spc="-30" dirty="0">
+                <a:latin typeface="Times New Roman"/>
+                <a:cs typeface="Times New Roman"/>
+              </a:rPr>
+              <a:t> </a:t>
+            </a:r>
+            <a:r>
+              <a:rPr sz="1200" i="1" dirty="0">
                 <a:latin typeface="Times New Roman"/>
                 <a:cs typeface="Times New Roman"/>
               </a:rPr>
               <a:t>to</a:t>
             </a:r>
             <a:r>
-              <a:rPr dirty="0" sz="1200" spc="-30" i="1">
-                <a:latin typeface="Times New Roman"/>
-                <a:cs typeface="Times New Roman"/>
-              </a:rPr>
-              <a:t> </a:t>
-            </a:r>
-            <a:r>
-              <a:rPr dirty="0" sz="1200" i="1">
+              <a:rPr sz="1200" i="1" spc="-30" dirty="0">
+                <a:latin typeface="Times New Roman"/>
+                <a:cs typeface="Times New Roman"/>
+              </a:rPr>
+              <a:t> </a:t>
+            </a:r>
+            <a:r>
+              <a:rPr sz="1200" i="1" dirty="0">
                 <a:latin typeface="Times New Roman"/>
                 <a:cs typeface="Times New Roman"/>
               </a:rPr>
               <a:t>the</a:t>
             </a:r>
             <a:r>
-              <a:rPr dirty="0" sz="1200" spc="-30" i="1">
-                <a:latin typeface="Times New Roman"/>
-                <a:cs typeface="Times New Roman"/>
-              </a:rPr>
-              <a:t> </a:t>
-            </a:r>
-            <a:r>
-              <a:rPr dirty="0" sz="1200" i="1">
+              <a:rPr sz="1200" i="1" spc="-30" dirty="0">
+                <a:latin typeface="Times New Roman"/>
+                <a:cs typeface="Times New Roman"/>
+              </a:rPr>
+              <a:t> </a:t>
+            </a:r>
+            <a:r>
+              <a:rPr sz="1200" i="1" dirty="0">
                 <a:latin typeface="Times New Roman"/>
                 <a:cs typeface="Times New Roman"/>
               </a:rPr>
               <a:t>registration</a:t>
             </a:r>
             <a:r>
-              <a:rPr dirty="0" sz="1200" spc="-40" i="1">
-                <a:latin typeface="Times New Roman"/>
-                <a:cs typeface="Times New Roman"/>
-              </a:rPr>
-              <a:t> </a:t>
-            </a:r>
-            <a:r>
-              <a:rPr dirty="0" sz="1200" spc="-10" i="1">
+              <a:rPr sz="1200" i="1" spc="-40" dirty="0">
+                <a:latin typeface="Times New Roman"/>
+                <a:cs typeface="Times New Roman"/>
+              </a:rPr>
+              <a:t> </a:t>
+            </a:r>
+            <a:r>
+              <a:rPr sz="1200" i="1" spc="-10" dirty="0">
                 <a:latin typeface="Times New Roman"/>
                 <a:cs typeface="Times New Roman"/>
               </a:rPr>
@@ -9836,7 +10081,7 @@
       </p:sp>
       <p:grpSp>
         <p:nvGrpSpPr>
-          <p:cNvPr id="21" name="object 21" descr=""/>
+          <p:cNvPr id="21" name="object 21"/>
           <p:cNvGrpSpPr/>
           <p:nvPr/>
         </p:nvGrpSpPr>
@@ -9850,7 +10095,7 @@
         </p:grpSpPr>
         <p:sp>
           <p:nvSpPr>
-            <p:cNvPr id="22" name="object 22" descr=""/>
+            <p:cNvPr id="22" name="object 22"/>
             <p:cNvSpPr/>
             <p:nvPr/>
           </p:nvSpPr>
@@ -9893,12 +10138,14 @@
           <p:txBody>
             <a:bodyPr wrap="square" lIns="0" tIns="0" rIns="0" bIns="0" rtlCol="0"/>
             <a:lstStyle/>
-            <a:p/>
+            <a:p>
+              <a:endParaRPr/>
+            </a:p>
           </p:txBody>
         </p:sp>
         <p:sp>
           <p:nvSpPr>
-            <p:cNvPr id="23" name="object 23" descr=""/>
+            <p:cNvPr id="23" name="object 23"/>
             <p:cNvSpPr/>
             <p:nvPr/>
           </p:nvSpPr>
@@ -9941,12 +10188,14 @@
           <p:txBody>
             <a:bodyPr wrap="square" lIns="0" tIns="0" rIns="0" bIns="0" rtlCol="0"/>
             <a:lstStyle/>
-            <a:p/>
+            <a:p>
+              <a:endParaRPr/>
+            </a:p>
           </p:txBody>
         </p:sp>
         <p:sp>
           <p:nvSpPr>
-            <p:cNvPr id="24" name="object 24" descr=""/>
+            <p:cNvPr id="24" name="object 24"/>
             <p:cNvSpPr/>
             <p:nvPr/>
           </p:nvSpPr>
@@ -10007,12 +10256,14 @@
           <p:txBody>
             <a:bodyPr wrap="square" lIns="0" tIns="0" rIns="0" bIns="0" rtlCol="0"/>
             <a:lstStyle/>
-            <a:p/>
+            <a:p>
+              <a:endParaRPr/>
+            </a:p>
           </p:txBody>
         </p:sp>
         <p:sp>
           <p:nvSpPr>
-            <p:cNvPr id="25" name="object 25" descr=""/>
+            <p:cNvPr id="25" name="object 25"/>
             <p:cNvSpPr/>
             <p:nvPr/>
           </p:nvSpPr>
@@ -10055,12 +10306,14 @@
           <p:txBody>
             <a:bodyPr wrap="square" lIns="0" tIns="0" rIns="0" bIns="0" rtlCol="0"/>
             <a:lstStyle/>
-            <a:p/>
+            <a:p>
+              <a:endParaRPr/>
+            </a:p>
           </p:txBody>
         </p:sp>
         <p:sp>
           <p:nvSpPr>
-            <p:cNvPr id="26" name="object 26" descr=""/>
+            <p:cNvPr id="26" name="object 26"/>
             <p:cNvSpPr/>
             <p:nvPr/>
           </p:nvSpPr>
@@ -10103,12 +10356,14 @@
           <p:txBody>
             <a:bodyPr wrap="square" lIns="0" tIns="0" rIns="0" bIns="0" rtlCol="0"/>
             <a:lstStyle/>
-            <a:p/>
+            <a:p>
+              <a:endParaRPr/>
+            </a:p>
           </p:txBody>
         </p:sp>
         <p:sp>
           <p:nvSpPr>
-            <p:cNvPr id="27" name="object 27" descr=""/>
+            <p:cNvPr id="27" name="object 27"/>
             <p:cNvSpPr/>
             <p:nvPr/>
           </p:nvSpPr>
@@ -10163,13 +10418,15 @@
           <p:txBody>
             <a:bodyPr wrap="square" lIns="0" tIns="0" rIns="0" bIns="0" rtlCol="0"/>
             <a:lstStyle/>
-            <a:p/>
+            <a:p>
+              <a:endParaRPr/>
+            </a:p>
           </p:txBody>
         </p:sp>
       </p:grpSp>
       <p:sp>
         <p:nvSpPr>
-          <p:cNvPr id="28" name="object 28" descr=""/>
+          <p:cNvPr id="28" name="object 28"/>
           <p:cNvSpPr txBox="1"/>
           <p:nvPr/>
         </p:nvSpPr>
@@ -10183,7 +10440,7 @@
           </a:prstGeom>
         </p:spPr>
         <p:txBody>
-          <a:bodyPr wrap="square" lIns="0" tIns="13335" rIns="0" bIns="0" rtlCol="0" vert="horz">
+          <a:bodyPr vert="horz" wrap="square" lIns="0" tIns="13335" rIns="0" bIns="0" rtlCol="0">
             <a:spAutoFit/>
           </a:bodyPr>
           <a:lstStyle/>
@@ -10197,7 +10454,7 @@
               </a:spcBef>
             </a:pPr>
             <a:r>
-              <a:rPr dirty="0" sz="1400" spc="-10" b="1">
+              <a:rPr sz="1400" b="1" spc="-10" dirty="0">
                 <a:solidFill>
                   <a:srgbClr val="3B78D7"/>
                 </a:solidFill>
@@ -10221,168 +10478,168 @@
               </a:spcBef>
             </a:pPr>
             <a:r>
-              <a:rPr dirty="0" sz="1200" i="1">
+              <a:rPr sz="1200" i="1" dirty="0">
                 <a:latin typeface="Times New Roman"/>
                 <a:cs typeface="Times New Roman"/>
               </a:rPr>
               <a:t>(Attach</a:t>
             </a:r>
             <a:r>
-              <a:rPr dirty="0" sz="1200" spc="-30" i="1">
-                <a:latin typeface="Times New Roman"/>
-                <a:cs typeface="Times New Roman"/>
-              </a:rPr>
-              <a:t> </a:t>
-            </a:r>
-            <a:r>
-              <a:rPr dirty="0" sz="1200" i="1">
+              <a:rPr sz="1200" i="1" spc="-30" dirty="0">
+                <a:latin typeface="Times New Roman"/>
+                <a:cs typeface="Times New Roman"/>
+              </a:rPr>
+              <a:t> </a:t>
+            </a:r>
+            <a:r>
+              <a:rPr sz="1200" i="1" dirty="0">
                 <a:latin typeface="Times New Roman"/>
                 <a:cs typeface="Times New Roman"/>
               </a:rPr>
               <a:t>screenshots</a:t>
             </a:r>
             <a:r>
-              <a:rPr dirty="0" sz="1200" spc="-35" i="1">
-                <a:latin typeface="Times New Roman"/>
-                <a:cs typeface="Times New Roman"/>
-              </a:rPr>
-              <a:t> </a:t>
-            </a:r>
-            <a:r>
-              <a:rPr dirty="0" sz="1200" i="1">
+              <a:rPr sz="1200" i="1" spc="-35" dirty="0">
+                <a:latin typeface="Times New Roman"/>
+                <a:cs typeface="Times New Roman"/>
+              </a:rPr>
+              <a:t> </a:t>
+            </a:r>
+            <a:r>
+              <a:rPr sz="1200" i="1" dirty="0">
                 <a:latin typeface="Times New Roman"/>
                 <a:cs typeface="Times New Roman"/>
               </a:rPr>
               <a:t>showing</a:t>
             </a:r>
             <a:r>
-              <a:rPr dirty="0" sz="1200" spc="-30" i="1">
-                <a:latin typeface="Times New Roman"/>
-                <a:cs typeface="Times New Roman"/>
-              </a:rPr>
-              <a:t> </a:t>
-            </a:r>
-            <a:r>
-              <a:rPr dirty="0" sz="1200" i="1">
+              <a:rPr sz="1200" i="1" spc="-30" dirty="0">
+                <a:latin typeface="Times New Roman"/>
+                <a:cs typeface="Times New Roman"/>
+              </a:rPr>
+              <a:t> </a:t>
+            </a:r>
+            <a:r>
+              <a:rPr sz="1200" i="1" dirty="0">
                 <a:latin typeface="Times New Roman"/>
                 <a:cs typeface="Times New Roman"/>
               </a:rPr>
               <a:t>validation</a:t>
             </a:r>
             <a:r>
-              <a:rPr dirty="0" sz="1200" spc="-30" i="1">
-                <a:latin typeface="Times New Roman"/>
-                <a:cs typeface="Times New Roman"/>
-              </a:rPr>
-              <a:t> </a:t>
-            </a:r>
-            <a:r>
-              <a:rPr dirty="0" sz="1200" i="1">
+              <a:rPr sz="1200" i="1" spc="-30" dirty="0">
+                <a:latin typeface="Times New Roman"/>
+                <a:cs typeface="Times New Roman"/>
+              </a:rPr>
+              <a:t> </a:t>
+            </a:r>
+            <a:r>
+              <a:rPr sz="1200" i="1" dirty="0">
                 <a:latin typeface="Times New Roman"/>
                 <a:cs typeface="Times New Roman"/>
               </a:rPr>
               <a:t>messages,</a:t>
             </a:r>
             <a:r>
-              <a:rPr dirty="0" sz="1200" spc="-30" i="1">
-                <a:latin typeface="Times New Roman"/>
-                <a:cs typeface="Times New Roman"/>
-              </a:rPr>
-              <a:t> </a:t>
-            </a:r>
-            <a:r>
-              <a:rPr dirty="0" sz="1200" i="1">
+              <a:rPr sz="1200" i="1" spc="-30" dirty="0">
+                <a:latin typeface="Times New Roman"/>
+                <a:cs typeface="Times New Roman"/>
+              </a:rPr>
+              <a:t> </a:t>
+            </a:r>
+            <a:r>
+              <a:rPr sz="1200" i="1" dirty="0">
                 <a:latin typeface="Times New Roman"/>
                 <a:cs typeface="Times New Roman"/>
               </a:rPr>
               <a:t>successful</a:t>
             </a:r>
             <a:r>
-              <a:rPr dirty="0" sz="1200" spc="-30" i="1">
-                <a:latin typeface="Times New Roman"/>
-                <a:cs typeface="Times New Roman"/>
-              </a:rPr>
-              <a:t> </a:t>
-            </a:r>
-            <a:r>
-              <a:rPr dirty="0" sz="1200" i="1">
+              <a:rPr sz="1200" i="1" spc="-30" dirty="0">
+                <a:latin typeface="Times New Roman"/>
+                <a:cs typeface="Times New Roman"/>
+              </a:rPr>
+              <a:t> </a:t>
+            </a:r>
+            <a:r>
+              <a:rPr sz="1200" i="1" dirty="0">
                 <a:latin typeface="Times New Roman"/>
                 <a:cs typeface="Times New Roman"/>
               </a:rPr>
               <a:t>registration</a:t>
             </a:r>
             <a:r>
-              <a:rPr dirty="0" sz="1200" spc="-30" i="1">
-                <a:latin typeface="Times New Roman"/>
-                <a:cs typeface="Times New Roman"/>
-              </a:rPr>
-              <a:t> </a:t>
-            </a:r>
-            <a:r>
-              <a:rPr dirty="0" sz="1200" i="1">
+              <a:rPr sz="1200" i="1" spc="-30" dirty="0">
+                <a:latin typeface="Times New Roman"/>
+                <a:cs typeface="Times New Roman"/>
+              </a:rPr>
+              <a:t> </a:t>
+            </a:r>
+            <a:r>
+              <a:rPr sz="1200" i="1" dirty="0">
                 <a:latin typeface="Times New Roman"/>
                 <a:cs typeface="Times New Roman"/>
               </a:rPr>
               <a:t>message,</a:t>
             </a:r>
             <a:r>
-              <a:rPr dirty="0" sz="1200" spc="-30" i="1">
-                <a:latin typeface="Times New Roman"/>
-                <a:cs typeface="Times New Roman"/>
-              </a:rPr>
-              <a:t> </a:t>
-            </a:r>
-            <a:r>
-              <a:rPr dirty="0" sz="1200" i="1">
+              <a:rPr sz="1200" i="1" spc="-30" dirty="0">
+                <a:latin typeface="Times New Roman"/>
+                <a:cs typeface="Times New Roman"/>
+              </a:rPr>
+              <a:t> </a:t>
+            </a:r>
+            <a:r>
+              <a:rPr sz="1200" i="1" dirty="0">
                 <a:latin typeface="Times New Roman"/>
                 <a:cs typeface="Times New Roman"/>
               </a:rPr>
               <a:t>and</a:t>
             </a:r>
             <a:r>
-              <a:rPr dirty="0" sz="1200" spc="-30" i="1">
-                <a:latin typeface="Times New Roman"/>
-                <a:cs typeface="Times New Roman"/>
-              </a:rPr>
-              <a:t> </a:t>
-            </a:r>
-            <a:r>
-              <a:rPr dirty="0" sz="1200" spc="-10" i="1">
+              <a:rPr sz="1200" i="1" spc="-30" dirty="0">
+                <a:latin typeface="Times New Roman"/>
+                <a:cs typeface="Times New Roman"/>
+              </a:rPr>
+              <a:t> </a:t>
+            </a:r>
+            <a:r>
+              <a:rPr sz="1200" i="1" spc="-10" dirty="0">
                 <a:latin typeface="Times New Roman"/>
                 <a:cs typeface="Times New Roman"/>
               </a:rPr>
               <a:t>dynamically </a:t>
             </a:r>
             <a:r>
-              <a:rPr dirty="0" sz="1200" i="1">
+              <a:rPr sz="1200" i="1" dirty="0">
                 <a:latin typeface="Times New Roman"/>
                 <a:cs typeface="Times New Roman"/>
               </a:rPr>
               <a:t>updated</a:t>
             </a:r>
             <a:r>
-              <a:rPr dirty="0" sz="1200" spc="-50" i="1">
-                <a:latin typeface="Times New Roman"/>
-                <a:cs typeface="Times New Roman"/>
-              </a:rPr>
-              <a:t> </a:t>
-            </a:r>
-            <a:r>
-              <a:rPr dirty="0" sz="1200" i="1">
+              <a:rPr sz="1200" i="1" spc="-50" dirty="0">
+                <a:latin typeface="Times New Roman"/>
+                <a:cs typeface="Times New Roman"/>
+              </a:rPr>
+              <a:t> </a:t>
+            </a:r>
+            <a:r>
+              <a:rPr sz="1200" i="1" dirty="0">
                 <a:latin typeface="Times New Roman"/>
                 <a:cs typeface="Times New Roman"/>
               </a:rPr>
               <a:t>participants</a:t>
             </a:r>
             <a:r>
-              <a:rPr dirty="0" sz="1200" spc="-55" i="1">
-                <a:latin typeface="Times New Roman"/>
-                <a:cs typeface="Times New Roman"/>
-              </a:rPr>
-              <a:t> </a:t>
-            </a:r>
-            <a:r>
-              <a:rPr dirty="0" sz="1200" spc="-10" i="1">
+              <a:rPr sz="1200" i="1" spc="-55" dirty="0">
+                <a:latin typeface="Times New Roman"/>
+                <a:cs typeface="Times New Roman"/>
+              </a:rPr>
+              <a:t> </a:t>
+            </a:r>
+            <a:r>
+              <a:rPr sz="1200" i="1" spc="-10" dirty="0">
                 <a:latin typeface="Times New Roman"/>
                 <a:cs typeface="Times New Roman"/>
               </a:rPr>
@@ -10397,7 +10654,7 @@
       </p:sp>
       <p:grpSp>
         <p:nvGrpSpPr>
-          <p:cNvPr id="29" name="object 29" descr=""/>
+          <p:cNvPr id="29" name="object 29"/>
           <p:cNvGrpSpPr/>
           <p:nvPr/>
         </p:nvGrpSpPr>
@@ -10411,7 +10668,7 @@
         </p:grpSpPr>
         <p:sp>
           <p:nvSpPr>
-            <p:cNvPr id="30" name="object 30" descr=""/>
+            <p:cNvPr id="30" name="object 30"/>
             <p:cNvSpPr/>
             <p:nvPr/>
           </p:nvSpPr>
@@ -10454,12 +10711,14 @@
           <p:txBody>
             <a:bodyPr wrap="square" lIns="0" tIns="0" rIns="0" bIns="0" rtlCol="0"/>
             <a:lstStyle/>
-            <a:p/>
+            <a:p>
+              <a:endParaRPr/>
+            </a:p>
           </p:txBody>
         </p:sp>
         <p:sp>
           <p:nvSpPr>
-            <p:cNvPr id="31" name="object 31" descr=""/>
+            <p:cNvPr id="31" name="object 31"/>
             <p:cNvSpPr/>
             <p:nvPr/>
           </p:nvSpPr>
@@ -10502,12 +10761,14 @@
           <p:txBody>
             <a:bodyPr wrap="square" lIns="0" tIns="0" rIns="0" bIns="0" rtlCol="0"/>
             <a:lstStyle/>
-            <a:p/>
+            <a:p>
+              <a:endParaRPr/>
+            </a:p>
           </p:txBody>
         </p:sp>
         <p:sp>
           <p:nvSpPr>
-            <p:cNvPr id="32" name="object 32" descr=""/>
+            <p:cNvPr id="32" name="object 32"/>
             <p:cNvSpPr/>
             <p:nvPr/>
           </p:nvSpPr>
@@ -10568,12 +10829,14 @@
           <p:txBody>
             <a:bodyPr wrap="square" lIns="0" tIns="0" rIns="0" bIns="0" rtlCol="0"/>
             <a:lstStyle/>
-            <a:p/>
+            <a:p>
+              <a:endParaRPr/>
+            </a:p>
           </p:txBody>
         </p:sp>
         <p:sp>
           <p:nvSpPr>
-            <p:cNvPr id="33" name="object 33" descr=""/>
+            <p:cNvPr id="33" name="object 33"/>
             <p:cNvSpPr/>
             <p:nvPr/>
           </p:nvSpPr>
@@ -10616,12 +10879,14 @@
           <p:txBody>
             <a:bodyPr wrap="square" lIns="0" tIns="0" rIns="0" bIns="0" rtlCol="0"/>
             <a:lstStyle/>
-            <a:p/>
+            <a:p>
+              <a:endParaRPr/>
+            </a:p>
           </p:txBody>
         </p:sp>
         <p:sp>
           <p:nvSpPr>
-            <p:cNvPr id="34" name="object 34" descr=""/>
+            <p:cNvPr id="34" name="object 34"/>
             <p:cNvSpPr/>
             <p:nvPr/>
           </p:nvSpPr>
@@ -10664,12 +10929,14 @@
           <p:txBody>
             <a:bodyPr wrap="square" lIns="0" tIns="0" rIns="0" bIns="0" rtlCol="0"/>
             <a:lstStyle/>
-            <a:p/>
+            <a:p>
+              <a:endParaRPr/>
+            </a:p>
           </p:txBody>
         </p:sp>
         <p:sp>
           <p:nvSpPr>
-            <p:cNvPr id="35" name="object 35" descr=""/>
+            <p:cNvPr id="35" name="object 35"/>
             <p:cNvSpPr/>
             <p:nvPr/>
           </p:nvSpPr>
@@ -10724,13 +10991,15 @@
           <p:txBody>
             <a:bodyPr wrap="square" lIns="0" tIns="0" rIns="0" bIns="0" rtlCol="0"/>
             <a:lstStyle/>
-            <a:p/>
+            <a:p>
+              <a:endParaRPr/>
+            </a:p>
           </p:txBody>
         </p:sp>
       </p:grpSp>
       <p:sp>
         <p:nvSpPr>
-          <p:cNvPr id="36" name="object 36" descr=""/>
+          <p:cNvPr id="36" name="object 36"/>
           <p:cNvSpPr txBox="1"/>
           <p:nvPr/>
         </p:nvSpPr>
@@ -10744,7 +11013,7 @@
           </a:prstGeom>
         </p:spPr>
         <p:txBody>
-          <a:bodyPr wrap="square" lIns="0" tIns="13335" rIns="0" bIns="0" rtlCol="0" vert="horz">
+          <a:bodyPr vert="horz" wrap="square" lIns="0" tIns="13335" rIns="0" bIns="0" rtlCol="0">
             <a:spAutoFit/>
           </a:bodyPr>
           <a:lstStyle/>
@@ -10758,7 +11027,7 @@
               </a:spcBef>
             </a:pPr>
             <a:r>
-              <a:rPr dirty="0" sz="1400" b="1">
+              <a:rPr sz="1400" b="1" dirty="0">
                 <a:solidFill>
                   <a:srgbClr val="3B78D7"/>
                 </a:solidFill>
@@ -10768,7 +11037,7 @@
               <a:t>7.Learning</a:t>
             </a:r>
             <a:r>
-              <a:rPr dirty="0" sz="1400" spc="-45" b="1">
+              <a:rPr sz="1400" b="1" spc="-45" dirty="0">
                 <a:solidFill>
                   <a:srgbClr val="3B78D7"/>
                 </a:solidFill>
@@ -10778,7 +11047,7 @@
               <a:t> </a:t>
             </a:r>
             <a:r>
-              <a:rPr dirty="0" sz="1400" spc="-10" b="1">
+              <a:rPr sz="1400" b="1" spc="-10" dirty="0">
                 <a:solidFill>
                   <a:srgbClr val="3B78D7"/>
                 </a:solidFill>
@@ -10802,210 +11071,210 @@
               </a:spcBef>
             </a:pPr>
             <a:r>
-              <a:rPr dirty="0" sz="1200" i="1">
+              <a:rPr sz="1200" i="1" dirty="0">
                 <a:latin typeface="Times New Roman"/>
                 <a:cs typeface="Times New Roman"/>
               </a:rPr>
               <a:t>(Explain</a:t>
             </a:r>
             <a:r>
-              <a:rPr dirty="0" sz="1200" spc="-25" i="1">
-                <a:latin typeface="Times New Roman"/>
-                <a:cs typeface="Times New Roman"/>
-              </a:rPr>
-              <a:t> </a:t>
-            </a:r>
-            <a:r>
-              <a:rPr dirty="0" sz="1200" i="1">
+              <a:rPr sz="1200" i="1" spc="-25" dirty="0">
+                <a:latin typeface="Times New Roman"/>
+                <a:cs typeface="Times New Roman"/>
+              </a:rPr>
+              <a:t> </a:t>
+            </a:r>
+            <a:r>
+              <a:rPr sz="1200" i="1" dirty="0">
                 <a:latin typeface="Times New Roman"/>
                 <a:cs typeface="Times New Roman"/>
               </a:rPr>
               <a:t>the</a:t>
             </a:r>
             <a:r>
-              <a:rPr dirty="0" sz="1200" spc="-25" i="1">
-                <a:latin typeface="Times New Roman"/>
-                <a:cs typeface="Times New Roman"/>
-              </a:rPr>
-              <a:t> </a:t>
-            </a:r>
-            <a:r>
-              <a:rPr dirty="0" sz="1200" i="1">
+              <a:rPr sz="1200" i="1" spc="-25" dirty="0">
+                <a:latin typeface="Times New Roman"/>
+                <a:cs typeface="Times New Roman"/>
+              </a:rPr>
+              <a:t> </a:t>
+            </a:r>
+            <a:r>
+              <a:rPr sz="1200" i="1" dirty="0">
                 <a:latin typeface="Times New Roman"/>
                 <a:cs typeface="Times New Roman"/>
               </a:rPr>
               <a:t>skills</a:t>
             </a:r>
             <a:r>
-              <a:rPr dirty="0" sz="1200" spc="-30" i="1">
-                <a:latin typeface="Times New Roman"/>
-                <a:cs typeface="Times New Roman"/>
-              </a:rPr>
-              <a:t> </a:t>
-            </a:r>
-            <a:r>
-              <a:rPr dirty="0" sz="1200" i="1">
+              <a:rPr sz="1200" i="1" spc="-30" dirty="0">
+                <a:latin typeface="Times New Roman"/>
+                <a:cs typeface="Times New Roman"/>
+              </a:rPr>
+              <a:t> </a:t>
+            </a:r>
+            <a:r>
+              <a:rPr sz="1200" i="1" dirty="0">
                 <a:latin typeface="Times New Roman"/>
                 <a:cs typeface="Times New Roman"/>
               </a:rPr>
               <a:t>gained</a:t>
             </a:r>
             <a:r>
-              <a:rPr dirty="0" sz="1200" spc="-20" i="1">
-                <a:latin typeface="Times New Roman"/>
-                <a:cs typeface="Times New Roman"/>
-              </a:rPr>
-              <a:t> </a:t>
-            </a:r>
-            <a:r>
-              <a:rPr dirty="0" sz="1200" i="1">
+              <a:rPr sz="1200" i="1" spc="-20" dirty="0">
+                <a:latin typeface="Times New Roman"/>
+                <a:cs typeface="Times New Roman"/>
+              </a:rPr>
+              <a:t> </a:t>
+            </a:r>
+            <a:r>
+              <a:rPr sz="1200" i="1" dirty="0">
                 <a:latin typeface="Times New Roman"/>
                 <a:cs typeface="Times New Roman"/>
               </a:rPr>
               <a:t>in</a:t>
             </a:r>
             <a:r>
-              <a:rPr dirty="0" sz="1200" spc="-25" i="1">
-                <a:latin typeface="Times New Roman"/>
-                <a:cs typeface="Times New Roman"/>
-              </a:rPr>
-              <a:t> </a:t>
-            </a:r>
-            <a:r>
-              <a:rPr dirty="0" sz="1200" i="1">
+              <a:rPr sz="1200" i="1" spc="-25" dirty="0">
+                <a:latin typeface="Times New Roman"/>
+                <a:cs typeface="Times New Roman"/>
+              </a:rPr>
+              <a:t> </a:t>
+            </a:r>
+            <a:r>
+              <a:rPr sz="1200" i="1" dirty="0">
                 <a:latin typeface="Times New Roman"/>
                 <a:cs typeface="Times New Roman"/>
               </a:rPr>
               <a:t>DOM</a:t>
             </a:r>
             <a:r>
-              <a:rPr dirty="0" sz="1200" spc="-35" i="1">
-                <a:latin typeface="Times New Roman"/>
-                <a:cs typeface="Times New Roman"/>
-              </a:rPr>
-              <a:t> </a:t>
-            </a:r>
-            <a:r>
-              <a:rPr dirty="0" sz="1200" i="1">
+              <a:rPr sz="1200" i="1" spc="-35" dirty="0">
+                <a:latin typeface="Times New Roman"/>
+                <a:cs typeface="Times New Roman"/>
+              </a:rPr>
+              <a:t> </a:t>
+            </a:r>
+            <a:r>
+              <a:rPr sz="1200" i="1" dirty="0">
                 <a:latin typeface="Times New Roman"/>
                 <a:cs typeface="Times New Roman"/>
               </a:rPr>
               <a:t>manipulation,</a:t>
             </a:r>
             <a:r>
-              <a:rPr dirty="0" sz="1200" spc="-20" i="1">
-                <a:latin typeface="Times New Roman"/>
-                <a:cs typeface="Times New Roman"/>
-              </a:rPr>
-              <a:t> </a:t>
-            </a:r>
-            <a:r>
-              <a:rPr dirty="0" sz="1200" i="1">
+              <a:rPr sz="1200" i="1" spc="-20" dirty="0">
+                <a:latin typeface="Times New Roman"/>
+                <a:cs typeface="Times New Roman"/>
+              </a:rPr>
+              <a:t> </a:t>
+            </a:r>
+            <a:r>
+              <a:rPr sz="1200" i="1" dirty="0">
                 <a:latin typeface="Times New Roman"/>
                 <a:cs typeface="Times New Roman"/>
               </a:rPr>
               <a:t>form</a:t>
             </a:r>
             <a:r>
-              <a:rPr dirty="0" sz="1200" spc="-30" i="1">
-                <a:latin typeface="Times New Roman"/>
-                <a:cs typeface="Times New Roman"/>
-              </a:rPr>
-              <a:t> </a:t>
-            </a:r>
-            <a:r>
-              <a:rPr dirty="0" sz="1200" i="1">
+              <a:rPr sz="1200" i="1" spc="-30" dirty="0">
+                <a:latin typeface="Times New Roman"/>
+                <a:cs typeface="Times New Roman"/>
+              </a:rPr>
+              <a:t> </a:t>
+            </a:r>
+            <a:r>
+              <a:rPr sz="1200" i="1" dirty="0">
                 <a:latin typeface="Times New Roman"/>
                 <a:cs typeface="Times New Roman"/>
               </a:rPr>
               <a:t>validation,</a:t>
             </a:r>
             <a:r>
-              <a:rPr dirty="0" sz="1200" spc="-25" i="1">
-                <a:latin typeface="Times New Roman"/>
-                <a:cs typeface="Times New Roman"/>
-              </a:rPr>
-              <a:t> </a:t>
-            </a:r>
-            <a:r>
-              <a:rPr dirty="0" sz="1200" i="1">
+              <a:rPr sz="1200" i="1" spc="-25" dirty="0">
+                <a:latin typeface="Times New Roman"/>
+                <a:cs typeface="Times New Roman"/>
+              </a:rPr>
+              <a:t> </a:t>
+            </a:r>
+            <a:r>
+              <a:rPr sz="1200" i="1" dirty="0">
                 <a:latin typeface="Times New Roman"/>
                 <a:cs typeface="Times New Roman"/>
               </a:rPr>
               <a:t>and</a:t>
             </a:r>
             <a:r>
-              <a:rPr dirty="0" sz="1200" spc="-20" i="1">
-                <a:latin typeface="Times New Roman"/>
-                <a:cs typeface="Times New Roman"/>
-              </a:rPr>
-              <a:t> </a:t>
-            </a:r>
-            <a:r>
-              <a:rPr dirty="0" sz="1200" i="1">
+              <a:rPr sz="1200" i="1" spc="-20" dirty="0">
+                <a:latin typeface="Times New Roman"/>
+                <a:cs typeface="Times New Roman"/>
+              </a:rPr>
+              <a:t> </a:t>
+            </a:r>
+            <a:r>
+              <a:rPr sz="1200" i="1" dirty="0">
                 <a:latin typeface="Times New Roman"/>
                 <a:cs typeface="Times New Roman"/>
               </a:rPr>
               <a:t>building</a:t>
             </a:r>
             <a:r>
-              <a:rPr dirty="0" sz="1200" spc="-25" i="1">
-                <a:latin typeface="Times New Roman"/>
-                <a:cs typeface="Times New Roman"/>
-              </a:rPr>
-              <a:t> </a:t>
-            </a:r>
-            <a:r>
-              <a:rPr dirty="0" sz="1200" spc="-10" i="1">
+              <a:rPr sz="1200" i="1" spc="-25" dirty="0">
+                <a:latin typeface="Times New Roman"/>
+                <a:cs typeface="Times New Roman"/>
+              </a:rPr>
+              <a:t> </a:t>
+            </a:r>
+            <a:r>
+              <a:rPr sz="1200" i="1" spc="-10" dirty="0">
                 <a:latin typeface="Times New Roman"/>
                 <a:cs typeface="Times New Roman"/>
               </a:rPr>
               <a:t>interactive</a:t>
             </a:r>
             <a:r>
-              <a:rPr dirty="0" sz="1200" spc="-30" i="1">
-                <a:latin typeface="Times New Roman"/>
-                <a:cs typeface="Times New Roman"/>
-              </a:rPr>
-              <a:t> </a:t>
-            </a:r>
-            <a:r>
-              <a:rPr dirty="0" sz="1200" spc="-25" i="1">
+              <a:rPr sz="1200" i="1" spc="-30" dirty="0">
+                <a:latin typeface="Times New Roman"/>
+                <a:cs typeface="Times New Roman"/>
+              </a:rPr>
+              <a:t> </a:t>
+            </a:r>
+            <a:r>
+              <a:rPr sz="1200" i="1" spc="-25" dirty="0">
                 <a:latin typeface="Times New Roman"/>
                 <a:cs typeface="Times New Roman"/>
               </a:rPr>
               <a:t>web </a:t>
             </a:r>
             <a:r>
-              <a:rPr dirty="0" sz="1200" i="1">
+              <a:rPr sz="1200" i="1" dirty="0">
                 <a:latin typeface="Times New Roman"/>
                 <a:cs typeface="Times New Roman"/>
               </a:rPr>
               <a:t>applications</a:t>
             </a:r>
             <a:r>
-              <a:rPr dirty="0" sz="1200" spc="-35" i="1">
-                <a:latin typeface="Times New Roman"/>
-                <a:cs typeface="Times New Roman"/>
-              </a:rPr>
-              <a:t> </a:t>
-            </a:r>
-            <a:r>
-              <a:rPr dirty="0" sz="1200" i="1">
+              <a:rPr sz="1200" i="1" spc="-35" dirty="0">
+                <a:latin typeface="Times New Roman"/>
+                <a:cs typeface="Times New Roman"/>
+              </a:rPr>
+              <a:t> </a:t>
+            </a:r>
+            <a:r>
+              <a:rPr sz="1200" i="1" dirty="0">
                 <a:latin typeface="Times New Roman"/>
                 <a:cs typeface="Times New Roman"/>
               </a:rPr>
               <a:t>using</a:t>
             </a:r>
             <a:r>
-              <a:rPr dirty="0" sz="1200" spc="-30" i="1">
-                <a:latin typeface="Times New Roman"/>
-                <a:cs typeface="Times New Roman"/>
-              </a:rPr>
-              <a:t> </a:t>
-            </a:r>
-            <a:r>
-              <a:rPr dirty="0" sz="1200" spc="-10" i="1">
+              <a:rPr sz="1200" i="1" spc="-30" dirty="0">
+                <a:latin typeface="Times New Roman"/>
+                <a:cs typeface="Times New Roman"/>
+              </a:rPr>
+              <a:t> </a:t>
+            </a:r>
+            <a:r>
+              <a:rPr sz="1200" i="1" spc="-10" dirty="0">
                 <a:latin typeface="Times New Roman"/>
                 <a:cs typeface="Times New Roman"/>
               </a:rPr>
@@ -11020,7 +11289,7 @@
       </p:sp>
       <p:grpSp>
         <p:nvGrpSpPr>
-          <p:cNvPr id="37" name="object 37" descr=""/>
+          <p:cNvPr id="37" name="object 37"/>
           <p:cNvGrpSpPr/>
           <p:nvPr/>
         </p:nvGrpSpPr>
@@ -11034,7 +11303,7 @@
         </p:grpSpPr>
         <p:sp>
           <p:nvSpPr>
-            <p:cNvPr id="38" name="object 38" descr=""/>
+            <p:cNvPr id="38" name="object 38"/>
             <p:cNvSpPr/>
             <p:nvPr/>
           </p:nvSpPr>
@@ -11077,12 +11346,14 @@
           <p:txBody>
             <a:bodyPr wrap="square" lIns="0" tIns="0" rIns="0" bIns="0" rtlCol="0"/>
             <a:lstStyle/>
-            <a:p/>
+            <a:p>
+              <a:endParaRPr/>
+            </a:p>
           </p:txBody>
         </p:sp>
         <p:sp>
           <p:nvSpPr>
-            <p:cNvPr id="39" name="object 39" descr=""/>
+            <p:cNvPr id="39" name="object 39"/>
             <p:cNvSpPr/>
             <p:nvPr/>
           </p:nvSpPr>
@@ -11125,12 +11396,14 @@
           <p:txBody>
             <a:bodyPr wrap="square" lIns="0" tIns="0" rIns="0" bIns="0" rtlCol="0"/>
             <a:lstStyle/>
-            <a:p/>
+            <a:p>
+              <a:endParaRPr/>
+            </a:p>
           </p:txBody>
         </p:sp>
         <p:sp>
           <p:nvSpPr>
-            <p:cNvPr id="40" name="object 40" descr=""/>
+            <p:cNvPr id="40" name="object 40"/>
             <p:cNvSpPr/>
             <p:nvPr/>
           </p:nvSpPr>
@@ -11191,12 +11464,14 @@
           <p:txBody>
             <a:bodyPr wrap="square" lIns="0" tIns="0" rIns="0" bIns="0" rtlCol="0"/>
             <a:lstStyle/>
-            <a:p/>
+            <a:p>
+              <a:endParaRPr/>
+            </a:p>
           </p:txBody>
         </p:sp>
         <p:sp>
           <p:nvSpPr>
-            <p:cNvPr id="41" name="object 41" descr=""/>
+            <p:cNvPr id="41" name="object 41"/>
             <p:cNvSpPr/>
             <p:nvPr/>
           </p:nvSpPr>
@@ -11239,12 +11514,14 @@
           <p:txBody>
             <a:bodyPr wrap="square" lIns="0" tIns="0" rIns="0" bIns="0" rtlCol="0"/>
             <a:lstStyle/>
-            <a:p/>
+            <a:p>
+              <a:endParaRPr/>
+            </a:p>
           </p:txBody>
         </p:sp>
         <p:sp>
           <p:nvSpPr>
-            <p:cNvPr id="42" name="object 42" descr=""/>
+            <p:cNvPr id="42" name="object 42"/>
             <p:cNvSpPr/>
             <p:nvPr/>
           </p:nvSpPr>
@@ -11287,12 +11564,14 @@
           <p:txBody>
             <a:bodyPr wrap="square" lIns="0" tIns="0" rIns="0" bIns="0" rtlCol="0"/>
             <a:lstStyle/>
-            <a:p/>
+            <a:p>
+              <a:endParaRPr/>
+            </a:p>
           </p:txBody>
         </p:sp>
         <p:sp>
           <p:nvSpPr>
-            <p:cNvPr id="43" name="object 43" descr=""/>
+            <p:cNvPr id="43" name="object 43"/>
             <p:cNvSpPr/>
             <p:nvPr/>
           </p:nvSpPr>
@@ -11347,13 +11626,15 @@
           <p:txBody>
             <a:bodyPr wrap="square" lIns="0" tIns="0" rIns="0" bIns="0" rtlCol="0"/>
             <a:lstStyle/>
-            <a:p/>
+            <a:p>
+              <a:endParaRPr/>
+            </a:p>
           </p:txBody>
         </p:sp>
       </p:grpSp>
       <p:sp>
         <p:nvSpPr>
-          <p:cNvPr id="44" name="object 44" descr=""/>
+          <p:cNvPr id="44" name="object 44"/>
           <p:cNvSpPr txBox="1"/>
           <p:nvPr/>
         </p:nvSpPr>
@@ -11367,7 +11648,7 @@
           </a:prstGeom>
         </p:spPr>
         <p:txBody>
-          <a:bodyPr wrap="square" lIns="0" tIns="12700" rIns="0" bIns="0" rtlCol="0" vert="horz">
+          <a:bodyPr vert="horz" wrap="square" lIns="0" tIns="12700" rIns="0" bIns="0" rtlCol="0">
             <a:spAutoFit/>
           </a:bodyPr>
           <a:lstStyle/>
@@ -11381,7 +11662,7 @@
               </a:spcBef>
             </a:pPr>
             <a:r>
-              <a:rPr dirty="0" sz="1400" b="1">
+              <a:rPr sz="1400" b="1" dirty="0">
                 <a:solidFill>
                   <a:srgbClr val="3B78D7"/>
                 </a:solidFill>
@@ -11391,7 +11672,7 @@
               <a:t>8.</a:t>
             </a:r>
             <a:r>
-              <a:rPr dirty="0" sz="1400" spc="-5" b="1">
+              <a:rPr sz="1400" b="1" spc="-5" dirty="0">
                 <a:solidFill>
                   <a:srgbClr val="3B78D7"/>
                 </a:solidFill>
@@ -11401,7 +11682,7 @@
               <a:t> </a:t>
             </a:r>
             <a:r>
-              <a:rPr dirty="0" sz="1400" spc="-10" b="1">
+              <a:rPr sz="1400" b="1" spc="-10" dirty="0">
                 <a:solidFill>
                   <a:srgbClr val="3B78D7"/>
                 </a:solidFill>
@@ -11425,161 +11706,161 @@
               </a:spcBef>
             </a:pPr>
             <a:r>
-              <a:rPr dirty="0" sz="1200" i="1">
+              <a:rPr sz="1200" i="1" dirty="0">
                 <a:latin typeface="Times New Roman"/>
                 <a:cs typeface="Times New Roman"/>
               </a:rPr>
               <a:t>(Summarize</a:t>
             </a:r>
             <a:r>
-              <a:rPr dirty="0" sz="1200" spc="-25" i="1">
-                <a:latin typeface="Times New Roman"/>
-                <a:cs typeface="Times New Roman"/>
-              </a:rPr>
-              <a:t> </a:t>
-            </a:r>
-            <a:r>
-              <a:rPr dirty="0" sz="1200" i="1">
+              <a:rPr sz="1200" i="1" spc="-25" dirty="0">
+                <a:latin typeface="Times New Roman"/>
+                <a:cs typeface="Times New Roman"/>
+              </a:rPr>
+              <a:t> </a:t>
+            </a:r>
+            <a:r>
+              <a:rPr sz="1200" i="1" dirty="0">
                 <a:latin typeface="Times New Roman"/>
                 <a:cs typeface="Times New Roman"/>
               </a:rPr>
               <a:t>how</a:t>
             </a:r>
             <a:r>
-              <a:rPr dirty="0" sz="1200" spc="-20" i="1">
-                <a:latin typeface="Times New Roman"/>
-                <a:cs typeface="Times New Roman"/>
-              </a:rPr>
-              <a:t> </a:t>
-            </a:r>
-            <a:r>
-              <a:rPr dirty="0" sz="1200" i="1">
+              <a:rPr sz="1200" i="1" spc="-20" dirty="0">
+                <a:latin typeface="Times New Roman"/>
+                <a:cs typeface="Times New Roman"/>
+              </a:rPr>
+              <a:t> </a:t>
+            </a:r>
+            <a:r>
+              <a:rPr sz="1200" i="1" dirty="0">
                 <a:latin typeface="Times New Roman"/>
                 <a:cs typeface="Times New Roman"/>
               </a:rPr>
               <a:t>JavaScript</a:t>
             </a:r>
             <a:r>
-              <a:rPr dirty="0" sz="1200" spc="-25" i="1">
-                <a:latin typeface="Times New Roman"/>
-                <a:cs typeface="Times New Roman"/>
-              </a:rPr>
-              <a:t> </a:t>
-            </a:r>
-            <a:r>
-              <a:rPr dirty="0" sz="1200" i="1">
+              <a:rPr sz="1200" i="1" spc="-25" dirty="0">
+                <a:latin typeface="Times New Roman"/>
+                <a:cs typeface="Times New Roman"/>
+              </a:rPr>
+              <a:t> </a:t>
+            </a:r>
+            <a:r>
+              <a:rPr sz="1200" i="1" dirty="0">
                 <a:latin typeface="Times New Roman"/>
                 <a:cs typeface="Times New Roman"/>
               </a:rPr>
               <a:t>successfully</a:t>
             </a:r>
             <a:r>
-              <a:rPr dirty="0" sz="1200" spc="-25" i="1">
-                <a:latin typeface="Times New Roman"/>
-                <a:cs typeface="Times New Roman"/>
-              </a:rPr>
-              <a:t> </a:t>
-            </a:r>
-            <a:r>
-              <a:rPr dirty="0" sz="1200" i="1">
+              <a:rPr sz="1200" i="1" spc="-25" dirty="0">
+                <a:latin typeface="Times New Roman"/>
+                <a:cs typeface="Times New Roman"/>
+              </a:rPr>
+              <a:t> </a:t>
+            </a:r>
+            <a:r>
+              <a:rPr sz="1200" i="1" dirty="0">
                 <a:latin typeface="Times New Roman"/>
                 <a:cs typeface="Times New Roman"/>
               </a:rPr>
               <a:t>enhanced</a:t>
             </a:r>
             <a:r>
-              <a:rPr dirty="0" sz="1200" spc="-10" i="1">
-                <a:latin typeface="Times New Roman"/>
-                <a:cs typeface="Times New Roman"/>
-              </a:rPr>
-              <a:t> </a:t>
-            </a:r>
-            <a:r>
-              <a:rPr dirty="0" sz="1200" i="1">
+              <a:rPr sz="1200" i="1" spc="-10" dirty="0">
+                <a:latin typeface="Times New Roman"/>
+                <a:cs typeface="Times New Roman"/>
+              </a:rPr>
+              <a:t> </a:t>
+            </a:r>
+            <a:r>
+              <a:rPr sz="1200" i="1" dirty="0">
                 <a:latin typeface="Times New Roman"/>
                 <a:cs typeface="Times New Roman"/>
               </a:rPr>
               <a:t>the</a:t>
             </a:r>
             <a:r>
-              <a:rPr dirty="0" sz="1200" spc="-25" i="1">
-                <a:latin typeface="Times New Roman"/>
-                <a:cs typeface="Times New Roman"/>
-              </a:rPr>
-              <a:t> </a:t>
-            </a:r>
-            <a:r>
-              <a:rPr dirty="0" sz="1200" i="1">
+              <a:rPr sz="1200" i="1" spc="-25" dirty="0">
+                <a:latin typeface="Times New Roman"/>
+                <a:cs typeface="Times New Roman"/>
+              </a:rPr>
+              <a:t> </a:t>
+            </a:r>
+            <a:r>
+              <a:rPr sz="1200" i="1" dirty="0">
                 <a:latin typeface="Times New Roman"/>
                 <a:cs typeface="Times New Roman"/>
               </a:rPr>
               <a:t>application</a:t>
             </a:r>
             <a:r>
-              <a:rPr dirty="0" sz="1200" spc="-20" i="1">
-                <a:latin typeface="Times New Roman"/>
-                <a:cs typeface="Times New Roman"/>
-              </a:rPr>
-              <a:t> </a:t>
-            </a:r>
-            <a:r>
-              <a:rPr dirty="0" sz="1200" i="1">
+              <a:rPr sz="1200" i="1" spc="-20" dirty="0">
+                <a:latin typeface="Times New Roman"/>
+                <a:cs typeface="Times New Roman"/>
+              </a:rPr>
+              <a:t> </a:t>
+            </a:r>
+            <a:r>
+              <a:rPr sz="1200" i="1" dirty="0">
                 <a:latin typeface="Times New Roman"/>
                 <a:cs typeface="Times New Roman"/>
               </a:rPr>
               <a:t>by</a:t>
             </a:r>
             <a:r>
-              <a:rPr dirty="0" sz="1200" spc="-25" i="1">
-                <a:latin typeface="Times New Roman"/>
-                <a:cs typeface="Times New Roman"/>
-              </a:rPr>
-              <a:t> </a:t>
-            </a:r>
-            <a:r>
-              <a:rPr dirty="0" sz="1200" i="1">
+              <a:rPr sz="1200" i="1" spc="-25" dirty="0">
+                <a:latin typeface="Times New Roman"/>
+                <a:cs typeface="Times New Roman"/>
+              </a:rPr>
+              <a:t> </a:t>
+            </a:r>
+            <a:r>
+              <a:rPr sz="1200" i="1" dirty="0">
                 <a:latin typeface="Times New Roman"/>
                 <a:cs typeface="Times New Roman"/>
               </a:rPr>
               <a:t>adding</a:t>
             </a:r>
             <a:r>
-              <a:rPr dirty="0" sz="1200" spc="-20" i="1">
-                <a:latin typeface="Times New Roman"/>
-                <a:cs typeface="Times New Roman"/>
-              </a:rPr>
-              <a:t> </a:t>
-            </a:r>
-            <a:r>
-              <a:rPr dirty="0" sz="1200" spc="-10" i="1">
+              <a:rPr sz="1200" i="1" spc="-20" dirty="0">
+                <a:latin typeface="Times New Roman"/>
+                <a:cs typeface="Times New Roman"/>
+              </a:rPr>
+              <a:t> </a:t>
+            </a:r>
+            <a:r>
+              <a:rPr sz="1200" i="1" spc="-10" dirty="0">
                 <a:latin typeface="Times New Roman"/>
                 <a:cs typeface="Times New Roman"/>
               </a:rPr>
               <a:t>interactivity</a:t>
             </a:r>
             <a:r>
-              <a:rPr dirty="0" sz="1200" spc="-25" i="1">
-                <a:latin typeface="Times New Roman"/>
-                <a:cs typeface="Times New Roman"/>
-              </a:rPr>
-              <a:t> </a:t>
-            </a:r>
-            <a:r>
-              <a:rPr dirty="0" sz="1200" i="1">
+              <a:rPr sz="1200" i="1" spc="-25" dirty="0">
+                <a:latin typeface="Times New Roman"/>
+                <a:cs typeface="Times New Roman"/>
+              </a:rPr>
+              <a:t> </a:t>
+            </a:r>
+            <a:r>
+              <a:rPr sz="1200" i="1" dirty="0">
                 <a:latin typeface="Times New Roman"/>
                 <a:cs typeface="Times New Roman"/>
               </a:rPr>
               <a:t>and</a:t>
             </a:r>
             <a:r>
-              <a:rPr dirty="0" sz="1200" spc="-25" i="1">
-                <a:latin typeface="Times New Roman"/>
-                <a:cs typeface="Times New Roman"/>
-              </a:rPr>
-              <a:t> </a:t>
-            </a:r>
-            <a:r>
-              <a:rPr dirty="0" sz="1200" spc="-10" i="1">
+              <a:rPr sz="1200" i="1" spc="-25" dirty="0">
+                <a:latin typeface="Times New Roman"/>
+                <a:cs typeface="Times New Roman"/>
+              </a:rPr>
+              <a:t> </a:t>
+            </a:r>
+            <a:r>
+              <a:rPr sz="1200" i="1" spc="-10" dirty="0">
                 <a:latin typeface="Times New Roman"/>
                 <a:cs typeface="Times New Roman"/>
               </a:rPr>
@@ -11594,7 +11875,7 @@
       </p:sp>
       <p:pic>
         <p:nvPicPr>
-          <p:cNvPr id="45" name="object 45" descr=""/>
+          <p:cNvPr id="45" name="object 45"/>
           <p:cNvPicPr/>
           <p:nvPr/>
         </p:nvPicPr>
@@ -11616,7 +11897,7 @@
       </p:pic>
       <p:pic>
         <p:nvPicPr>
-          <p:cNvPr id="46" name="object 46" descr=""/>
+          <p:cNvPr id="46" name="object 46"/>
           <p:cNvPicPr/>
           <p:nvPr/>
         </p:nvPicPr>

--- a/ppt/FE Assignment Template-3.pptx
+++ b/ppt/FE Assignment Template-3.pptx
@@ -174,7 +174,7 @@
           <a:p>
             <a:fld id="{1D8BD707-D9CF-40AE-B4C6-C98DA3205C09}" type="datetimeFigureOut">
               <a:rPr lang="en-US"/>
-              <a:t>3/4/2026</a:t>
+              <a:t>3/5/2026</a:t>
             </a:fld>
             <a:endParaRPr lang="en-US"/>
           </a:p>
@@ -339,7 +339,7 @@
           <a:p>
             <a:fld id="{1D8BD707-D9CF-40AE-B4C6-C98DA3205C09}" type="datetimeFigureOut">
               <a:rPr lang="en-US"/>
-              <a:t>3/4/2026</a:t>
+              <a:t>3/5/2026</a:t>
             </a:fld>
             <a:endParaRPr lang="en-US"/>
           </a:p>
@@ -547,7 +547,7 @@
           <a:p>
             <a:fld id="{1D8BD707-D9CF-40AE-B4C6-C98DA3205C09}" type="datetimeFigureOut">
               <a:rPr lang="en-US"/>
-              <a:t>3/4/2026</a:t>
+              <a:t>3/5/2026</a:t>
             </a:fld>
             <a:endParaRPr lang="en-US"/>
           </a:p>
@@ -689,7 +689,7 @@
           <a:p>
             <a:fld id="{1D8BD707-D9CF-40AE-B4C6-C98DA3205C09}" type="datetimeFigureOut">
               <a:rPr lang="en-US"/>
-              <a:t>3/4/2026</a:t>
+              <a:t>3/5/2026</a:t>
             </a:fld>
             <a:endParaRPr lang="en-US"/>
           </a:p>
@@ -808,7 +808,7 @@
           <a:p>
             <a:fld id="{1D8BD707-D9CF-40AE-B4C6-C98DA3205C09}" type="datetimeFigureOut">
               <a:rPr lang="en-US"/>
-              <a:t>3/4/2026</a:t>
+              <a:t>3/5/2026</a:t>
             </a:fld>
             <a:endParaRPr lang="en-US"/>
           </a:p>
@@ -1021,7 +1021,7 @@
           <a:p>
             <a:fld id="{1D8BD707-D9CF-40AE-B4C6-C98DA3205C09}" type="datetimeFigureOut">
               <a:rPr lang="en-US"/>
-              <a:t>3/4/2026</a:t>
+              <a:t>3/5/2026</a:t>
             </a:fld>
             <a:endParaRPr lang="en-US"/>
           </a:p>
@@ -1728,30 +1728,23 @@
                 <a:latin typeface="Times New Roman"/>
                 <a:cs typeface="Times New Roman"/>
               </a:rPr>
-              <a:t> </a:t>
-            </a:r>
-            <a:r>
-              <a:rPr sz="1200" b="1" spc="-10" dirty="0" err="1">
-                <a:latin typeface="Times New Roman"/>
-                <a:cs typeface="Times New Roman"/>
-              </a:rPr>
-              <a:t>NAME:</a:t>
-            </a:r>
-            <a:r>
-              <a:rPr lang="en-US" sz="1200" b="1" spc="-10" dirty="0" err="1">
-                <a:latin typeface="Times New Roman"/>
-                <a:cs typeface="Times New Roman"/>
-              </a:rPr>
-              <a:t>Hariharan</a:t>
+              <a:t> NAME</a:t>
+            </a:r>
+            <a:r>
+              <a:rPr lang="en-IN" sz="1200" b="1" spc="-10" dirty="0">
+                <a:latin typeface="Times New Roman"/>
+                <a:cs typeface="Times New Roman"/>
+              </a:rPr>
+              <a:t>:</a:t>
             </a:r>
             <a:r>
               <a:rPr lang="en-US" sz="1200" b="1" spc="-10" dirty="0">
                 <a:latin typeface="Times New Roman"/>
                 <a:cs typeface="Times New Roman"/>
               </a:rPr>
-              <a:t> s</a:t>
-            </a:r>
-            <a:endParaRPr sz="1200" dirty="0">
+              <a:t> Hariharan S</a:t>
+            </a:r>
+            <a:endParaRPr lang="en-US" sz="1200" dirty="0">
               <a:latin typeface="Times New Roman"/>
               <a:cs typeface="Times New Roman"/>
             </a:endParaRPr>
@@ -1766,18 +1759,53 @@
               </a:spcBef>
             </a:pPr>
             <a:r>
+              <a:rPr lang="en-US" sz="1200" b="1" spc="-10" dirty="0">
+                <a:latin typeface="Times New Roman"/>
+                <a:cs typeface="Times New Roman"/>
+              </a:rPr>
+              <a:t>YEAR: II</a:t>
+            </a:r>
+            <a:endParaRPr lang="en-US" sz="1200" dirty="0">
+              <a:latin typeface="Times New Roman"/>
+              <a:cs typeface="Times New Roman"/>
+            </a:endParaRPr>
+          </a:p>
+          <a:p>
+            <a:pPr marL="301625">
+              <a:lnSpc>
+                <a:spcPct val="100000"/>
+              </a:lnSpc>
+              <a:spcBef>
+                <a:spcPts val="635"/>
+              </a:spcBef>
+            </a:pPr>
+            <a:r>
+              <a:rPr sz="1200" b="1" dirty="0">
+                <a:latin typeface="Times New Roman"/>
+                <a:cs typeface="Times New Roman"/>
+              </a:rPr>
+              <a:t>COLLEGE</a:t>
+            </a:r>
+            <a:r>
+              <a:rPr sz="1200" b="1" spc="-20" dirty="0">
+                <a:latin typeface="Times New Roman"/>
+                <a:cs typeface="Times New Roman"/>
+              </a:rPr>
+              <a:t> </a:t>
+            </a:r>
+            <a:r>
               <a:rPr sz="1200" b="1" spc="-10" dirty="0">
                 <a:latin typeface="Times New Roman"/>
                 <a:cs typeface="Times New Roman"/>
               </a:rPr>
-              <a:t>YEAR:</a:t>
+              <a:t>CODE:</a:t>
             </a:r>
             <a:r>
               <a:rPr lang="en-US" sz="1200" b="1" spc="-10" dirty="0">
                 <a:latin typeface="Times New Roman"/>
                 <a:cs typeface="Times New Roman"/>
               </a:rPr>
-              <a:t>2026</a:t>
+              <a:t>1455</a:t>
             </a:r>
             <a:endParaRPr sz="1200" dirty="0">
               <a:latin typeface="Times New Roman"/>
@@ -1805,21 +1833,112 @@
                 <a:latin typeface="Times New Roman"/>
                 <a:cs typeface="Times New Roman"/>
               </a:rPr>
-              <a:t> </a:t>
-            </a:r>
-            <a:r>
-              <a:rPr sz="1200" b="1" spc="-10">
-                <a:latin typeface="Times New Roman"/>
-                <a:cs typeface="Times New Roman"/>
-              </a:rPr>
-              <a:t>CODE:</a:t>
-            </a:r>
-            <a:r>
-              <a:rPr lang="en-US" sz="1200" b="1" spc="-10">
-                <a:latin typeface="Times New Roman"/>
-                <a:cs typeface="Times New Roman"/>
-              </a:rPr>
-              <a:t>1455</a:t>
+              <a:t> NAME:</a:t>
+            </a:r>
+            <a:r>
+              <a:rPr lang="en-US" sz="1200" b="1" spc="-20" dirty="0">
+                <a:latin typeface="Times New Roman"/>
+                <a:cs typeface="Times New Roman"/>
+              </a:rPr>
+              <a:t> Tagore College of Arts and </a:t>
+            </a:r>
+            <a:r>
+              <a:rPr lang="en-US" sz="1200" b="1" spc="-20" dirty="0" err="1">
+                <a:latin typeface="Times New Roman"/>
+                <a:cs typeface="Times New Roman"/>
+              </a:rPr>
+              <a:t>Science,Chrompet</a:t>
+            </a:r>
+            <a:endParaRPr sz="1200" dirty="0">
+              <a:latin typeface="Times New Roman"/>
+              <a:cs typeface="Times New Roman"/>
+            </a:endParaRPr>
+          </a:p>
+          <a:p>
+            <a:pPr marL="301625">
+              <a:lnSpc>
+                <a:spcPct val="100000"/>
+              </a:lnSpc>
+              <a:spcBef>
+                <a:spcPts val="650"/>
+              </a:spcBef>
+            </a:pPr>
+            <a:r>
+              <a:rPr sz="1200" b="1" spc="-10" dirty="0">
+                <a:latin typeface="Times New Roman"/>
+                <a:cs typeface="Times New Roman"/>
+              </a:rPr>
+              <a:t>DEPARTMENT:</a:t>
+            </a:r>
+            <a:r>
+              <a:rPr lang="en-US" sz="1200" b="1" spc="-10" dirty="0">
+                <a:latin typeface="Times New Roman"/>
+                <a:cs typeface="Times New Roman"/>
+              </a:rPr>
+              <a:t> Computer Science</a:t>
+            </a:r>
+            <a:endParaRPr sz="1200" dirty="0">
+              <a:latin typeface="Times New Roman"/>
+              <a:cs typeface="Times New Roman"/>
+            </a:endParaRPr>
+          </a:p>
+          <a:p>
+            <a:pPr marL="301625">
+              <a:lnSpc>
+                <a:spcPct val="100000"/>
+              </a:lnSpc>
+              <a:spcBef>
+                <a:spcPts val="925"/>
+              </a:spcBef>
+            </a:pPr>
+            <a:r>
+              <a:rPr sz="1200" b="1" spc="-10" dirty="0">
+                <a:latin typeface="Times New Roman"/>
+                <a:cs typeface="Times New Roman"/>
+              </a:rPr>
+              <a:t>SEMESTER:</a:t>
+            </a:r>
+            <a:r>
+              <a:rPr lang="en-US" sz="1200" b="1" spc="-10" dirty="0">
+                <a:latin typeface="Times New Roman"/>
+                <a:cs typeface="Times New Roman"/>
+              </a:rPr>
+              <a:t> IV</a:t>
+            </a:r>
+            <a:endParaRPr sz="1200" dirty="0">
+              <a:latin typeface="Times New Roman"/>
+              <a:cs typeface="Times New Roman"/>
+            </a:endParaRPr>
+          </a:p>
+          <a:p>
+            <a:pPr marL="301625">
+              <a:lnSpc>
+                <a:spcPct val="100000"/>
+              </a:lnSpc>
+              <a:spcBef>
+                <a:spcPts val="925"/>
+              </a:spcBef>
+            </a:pPr>
+            <a:r>
+              <a:rPr sz="1200" b="1" dirty="0">
+                <a:latin typeface="Times New Roman"/>
+                <a:cs typeface="Times New Roman"/>
+              </a:rPr>
+              <a:t>ROLL </a:t>
+            </a:r>
+            <a:r>
+              <a:rPr sz="1200" b="1" spc="-25" dirty="0">
+                <a:latin typeface="Times New Roman"/>
+                <a:cs typeface="Times New Roman"/>
+              </a:rPr>
+              <a:t>NO:</a:t>
+            </a:r>
+            <a:r>
+              <a:rPr lang="en-US" sz="1200" b="1" spc="-25" dirty="0">
+                <a:latin typeface="Times New Roman"/>
+                <a:cs typeface="Times New Roman"/>
+              </a:rPr>
+              <a:t> 222407723</a:t>
             </a:r>
             <a:endParaRPr sz="1200" dirty="0">
               <a:latin typeface="Times New Roman"/>
@@ -1836,104 +1955,6 @@
               </a:spcBef>
             </a:pPr>
             <a:r>
-              <a:rPr sz="1200" b="1" dirty="0">
-                <a:latin typeface="Times New Roman"/>
-                <a:cs typeface="Times New Roman"/>
-              </a:rPr>
-              <a:t>COLLEGE</a:t>
-            </a:r>
-            <a:r>
-              <a:rPr sz="1200" b="1" spc="-20" dirty="0">
-                <a:latin typeface="Times New Roman"/>
-                <a:cs typeface="Times New Roman"/>
-              </a:rPr>
-              <a:t> NAME:</a:t>
-            </a:r>
-            <a:endParaRPr sz="1200" dirty="0">
-              <a:latin typeface="Times New Roman"/>
-              <a:cs typeface="Times New Roman"/>
-            </a:endParaRPr>
-          </a:p>
-          <a:p>
-            <a:pPr marL="301625">
-              <a:lnSpc>
-                <a:spcPct val="100000"/>
-              </a:lnSpc>
-              <a:spcBef>
-                <a:spcPts val="650"/>
-              </a:spcBef>
-            </a:pPr>
-            <a:r>
-              <a:rPr sz="1200" b="1" spc="-10" dirty="0">
-                <a:latin typeface="Times New Roman"/>
-                <a:cs typeface="Times New Roman"/>
-              </a:rPr>
-              <a:t>DEPARTMENT:</a:t>
-            </a:r>
-            <a:endParaRPr sz="1200" dirty="0">
-              <a:latin typeface="Times New Roman"/>
-              <a:cs typeface="Times New Roman"/>
-            </a:endParaRPr>
-          </a:p>
-          <a:p>
-            <a:pPr marL="301625">
-              <a:lnSpc>
-                <a:spcPct val="100000"/>
-              </a:lnSpc>
-              <a:spcBef>
-                <a:spcPts val="925"/>
-              </a:spcBef>
-            </a:pPr>
-            <a:r>
-              <a:rPr sz="1200" b="1" spc="-10" dirty="0">
-                <a:latin typeface="Times New Roman"/>
-                <a:cs typeface="Times New Roman"/>
-              </a:rPr>
-              <a:t>SEMESTER:</a:t>
-            </a:r>
-            <a:endParaRPr sz="1200" dirty="0">
-              <a:latin typeface="Times New Roman"/>
-              <a:cs typeface="Times New Roman"/>
-            </a:endParaRPr>
-          </a:p>
-          <a:p>
-            <a:pPr marL="301625">
-              <a:lnSpc>
-                <a:spcPct val="100000"/>
-              </a:lnSpc>
-              <a:spcBef>
-                <a:spcPts val="925"/>
-              </a:spcBef>
-            </a:pPr>
-            <a:r>
-              <a:rPr sz="1200" b="1" dirty="0">
-                <a:latin typeface="Times New Roman"/>
-                <a:cs typeface="Times New Roman"/>
-              </a:rPr>
-              <a:t>ROLL </a:t>
-            </a:r>
-            <a:r>
-              <a:rPr sz="1200" b="1" spc="-25" dirty="0">
-                <a:latin typeface="Times New Roman"/>
-                <a:cs typeface="Times New Roman"/>
-              </a:rPr>
-              <a:t>NO:</a:t>
-            </a:r>
-            <a:endParaRPr sz="1200" dirty="0">
-              <a:latin typeface="Times New Roman"/>
-              <a:cs typeface="Times New Roman"/>
-            </a:endParaRPr>
-          </a:p>
-          <a:p>
-            <a:pPr marL="301625">
-              <a:lnSpc>
-                <a:spcPct val="100000"/>
-              </a:lnSpc>
-              <a:spcBef>
-                <a:spcPts val="635"/>
-              </a:spcBef>
-            </a:pPr>
-            <a:r>
               <a:rPr sz="1200" b="1" spc="-10" dirty="0">
                 <a:latin typeface="Times New Roman"/>
                 <a:cs typeface="Times New Roman"/>
@@ -1960,6 +1981,13 @@
                 <a:cs typeface="Times New Roman"/>
               </a:rPr>
               <a:t>DATE:</a:t>
+            </a:r>
+            <a:r>
+              <a:rPr lang="en-US" sz="1200" b="1" spc="-10" dirty="0">
+                <a:latin typeface="Times New Roman"/>
+                <a:cs typeface="Times New Roman"/>
+              </a:rPr>
+              <a:t> 06/03/2026</a:t>
             </a:r>
             <a:endParaRPr sz="1200" dirty="0">
               <a:latin typeface="Times New Roman"/>

--- a/ppt/FE Assignment Template-3.pptx
+++ b/ppt/FE Assignment Template-3.pptx
@@ -174,7 +174,7 @@
           <a:p>
             <a:fld id="{1D8BD707-D9CF-40AE-B4C6-C98DA3205C09}" type="datetimeFigureOut">
               <a:rPr lang="en-US"/>
-              <a:t>3/5/2026</a:t>
+              <a:t>3/6/2026</a:t>
             </a:fld>
             <a:endParaRPr lang="en-US"/>
           </a:p>
@@ -339,7 +339,7 @@
           <a:p>
             <a:fld id="{1D8BD707-D9CF-40AE-B4C6-C98DA3205C09}" type="datetimeFigureOut">
               <a:rPr lang="en-US"/>
-              <a:t>3/5/2026</a:t>
+              <a:t>3/6/2026</a:t>
             </a:fld>
             <a:endParaRPr lang="en-US"/>
           </a:p>
@@ -547,7 +547,7 @@
           <a:p>
             <a:fld id="{1D8BD707-D9CF-40AE-B4C6-C98DA3205C09}" type="datetimeFigureOut">
               <a:rPr lang="en-US"/>
-              <a:t>3/5/2026</a:t>
+              <a:t>3/6/2026</a:t>
             </a:fld>
             <a:endParaRPr lang="en-US"/>
           </a:p>
@@ -689,7 +689,7 @@
           <a:p>
             <a:fld id="{1D8BD707-D9CF-40AE-B4C6-C98DA3205C09}" type="datetimeFigureOut">
               <a:rPr lang="en-US"/>
-              <a:t>3/5/2026</a:t>
+              <a:t>3/6/2026</a:t>
             </a:fld>
             <a:endParaRPr lang="en-US"/>
           </a:p>
@@ -808,7 +808,7 @@
           <a:p>
             <a:fld id="{1D8BD707-D9CF-40AE-B4C6-C98DA3205C09}" type="datetimeFigureOut">
               <a:rPr lang="en-US"/>
-              <a:t>3/5/2026</a:t>
+              <a:t>3/6/2026</a:t>
             </a:fld>
             <a:endParaRPr lang="en-US"/>
           </a:p>
@@ -1021,7 +1021,7 @@
           <a:p>
             <a:fld id="{1D8BD707-D9CF-40AE-B4C6-C98DA3205C09}" type="datetimeFigureOut">
               <a:rPr lang="en-US"/>
-              <a:t>3/5/2026</a:t>
+              <a:t>3/6/2026</a:t>
             </a:fld>
             <a:endParaRPr lang="en-US"/>
           </a:p>
@@ -1955,11 +1955,18 @@
               </a:spcBef>
             </a:pPr>
             <a:r>
-              <a:rPr sz="1200" b="1" spc="-10" dirty="0">
+              <a:rPr sz="1200" b="1" spc="-10">
                 <a:latin typeface="Times New Roman"/>
                 <a:cs typeface="Times New Roman"/>
               </a:rPr>
               <a:t>NMID:</a:t>
+            </a:r>
+            <a:r>
+              <a:rPr lang="en-US" sz="1200" b="1" spc="-10">
+                <a:latin typeface="Times New Roman"/>
+                <a:cs typeface="Times New Roman"/>
+              </a:rPr>
+              <a:t> 614D89761591EB584744FC4BCEE6FE5F</a:t>
             </a:r>
             <a:endParaRPr sz="1200" dirty="0">
               <a:latin typeface="Times New Roman"/>

--- a/ppt/FE Assignment Template-3.pptx
+++ b/ppt/FE Assignment Template-3.pptx
@@ -8,6 +8,7 @@
     <p:sldId id="256" r:id="rId2"/>
     <p:sldId id="257" r:id="rId3"/>
     <p:sldId id="258" r:id="rId4"/>
+    <p:sldId id="259" r:id="rId5"/>
   </p:sldIdLst>
   <p:sldSz cx="7569200" cy="10699750"/>
   <p:notesSz cx="7569200" cy="10699750"/>
@@ -174,7 +175,7 @@
           <a:p>
             <a:fld id="{1D8BD707-D9CF-40AE-B4C6-C98DA3205C09}" type="datetimeFigureOut">
               <a:rPr lang="en-US"/>
-              <a:t>3/6/2026</a:t>
+              <a:t>3/10/2026</a:t>
             </a:fld>
             <a:endParaRPr lang="en-US"/>
           </a:p>
@@ -339,7 +340,7 @@
           <a:p>
             <a:fld id="{1D8BD707-D9CF-40AE-B4C6-C98DA3205C09}" type="datetimeFigureOut">
               <a:rPr lang="en-US"/>
-              <a:t>3/6/2026</a:t>
+              <a:t>3/10/2026</a:t>
             </a:fld>
             <a:endParaRPr lang="en-US"/>
           </a:p>
@@ -547,7 +548,7 @@
           <a:p>
             <a:fld id="{1D8BD707-D9CF-40AE-B4C6-C98DA3205C09}" type="datetimeFigureOut">
               <a:rPr lang="en-US"/>
-              <a:t>3/6/2026</a:t>
+              <a:t>3/10/2026</a:t>
             </a:fld>
             <a:endParaRPr lang="en-US"/>
           </a:p>
@@ -689,7 +690,7 @@
           <a:p>
             <a:fld id="{1D8BD707-D9CF-40AE-B4C6-C98DA3205C09}" type="datetimeFigureOut">
               <a:rPr lang="en-US"/>
-              <a:t>3/6/2026</a:t>
+              <a:t>3/10/2026</a:t>
             </a:fld>
             <a:endParaRPr lang="en-US"/>
           </a:p>
@@ -808,7 +809,7 @@
           <a:p>
             <a:fld id="{1D8BD707-D9CF-40AE-B4C6-C98DA3205C09}" type="datetimeFigureOut">
               <a:rPr lang="en-US"/>
-              <a:t>3/6/2026</a:t>
+              <a:t>3/10/2026</a:t>
             </a:fld>
             <a:endParaRPr lang="en-US"/>
           </a:p>
@@ -1021,7 +1022,7 @@
           <a:p>
             <a:fld id="{1D8BD707-D9CF-40AE-B4C6-C98DA3205C09}" type="datetimeFigureOut">
               <a:rPr lang="en-US"/>
-              <a:t>3/6/2026</a:t>
+              <a:t>3/10/2026</a:t>
             </a:fld>
             <a:endParaRPr lang="en-US"/>
           </a:p>
@@ -1248,7 +1249,7 @@
         </p:nvGrpSpPr>
         <p:grpSpPr>
           <a:xfrm>
-            <a:off x="801369" y="5121909"/>
+            <a:off x="789228" y="4968875"/>
             <a:ext cx="6402705" cy="20955"/>
             <a:chOff x="801369" y="5121909"/>
             <a:chExt cx="6402705" cy="20955"/>
@@ -1593,8 +1594,8 @@
         </p:nvSpPr>
         <p:spPr>
           <a:xfrm>
-            <a:off x="792276" y="1145793"/>
-            <a:ext cx="6301740" cy="4857115"/>
+            <a:off x="748080" y="1053451"/>
+            <a:ext cx="6301740" cy="5255285"/>
           </a:xfrm>
           <a:prstGeom prst="rect">
             <a:avLst/>
@@ -1840,14 +1841,7 @@
                 <a:latin typeface="Times New Roman"/>
                 <a:cs typeface="Times New Roman"/>
               </a:rPr>
-              <a:t> Tagore College of Arts and </a:t>
-            </a:r>
-            <a:r>
-              <a:rPr lang="en-US" sz="1200" b="1" spc="-20" dirty="0" err="1">
-                <a:latin typeface="Times New Roman"/>
-                <a:cs typeface="Times New Roman"/>
-              </a:rPr>
-              <a:t>Science,Chrompet</a:t>
+              <a:t> Tagore College of Arts and Science </a:t>
             </a:r>
             <a:endParaRPr sz="1200" dirty="0">
               <a:latin typeface="Times New Roman"/>
@@ -1938,7 +1932,7 @@
                 <a:latin typeface="Times New Roman"/>
                 <a:cs typeface="Times New Roman"/>
               </a:rPr>
-              <a:t> 222407723</a:t>
+              <a:t> unm1455222407723</a:t>
             </a:r>
             <a:endParaRPr sz="1200" dirty="0">
               <a:latin typeface="Times New Roman"/>
@@ -1955,14 +1949,14 @@
               </a:spcBef>
             </a:pPr>
             <a:r>
-              <a:rPr sz="1200" b="1" spc="-10">
+              <a:rPr sz="1200" b="1" spc="-10" dirty="0">
                 <a:latin typeface="Times New Roman"/>
                 <a:cs typeface="Times New Roman"/>
               </a:rPr>
               <a:t>NMID:</a:t>
             </a:r>
             <a:r>
-              <a:rPr lang="en-US" sz="1200" b="1" spc="-10">
+              <a:rPr lang="en-US" sz="1200" b="1" spc="-10" dirty="0">
                 <a:latin typeface="Times New Roman"/>
                 <a:cs typeface="Times New Roman"/>
               </a:rPr>
@@ -1994,7 +1988,7 @@
                 <a:latin typeface="Times New Roman"/>
                 <a:cs typeface="Times New Roman"/>
               </a:rPr>
-              <a:t> 06/03/2026</a:t>
+              <a:t> 10/03/2026</a:t>
             </a:r>
             <a:endParaRPr sz="1200" dirty="0">
               <a:latin typeface="Times New Roman"/>
@@ -2031,7 +2025,21 @@
               </a:rPr>
               <a:t>TITLE:</a:t>
             </a:r>
-            <a:endParaRPr sz="1200" dirty="0">
+            <a:r>
+              <a:rPr lang="en-US" sz="1200" b="1" spc="-10" dirty="0">
+                <a:latin typeface="Times New Roman"/>
+                <a:cs typeface="Times New Roman"/>
+              </a:rPr>
+              <a:t> </a:t>
+            </a:r>
+            <a:r>
+              <a:rPr lang="en-US" sz="1400" b="1" spc="-10" dirty="0">
+                <a:latin typeface="Times New Roman"/>
+                <a:cs typeface="Times New Roman"/>
+              </a:rPr>
+              <a:t>JavaScript Interactivity for Event Registration</a:t>
+            </a:r>
+            <a:endParaRPr sz="1400" b="1" dirty="0">
               <a:latin typeface="Times New Roman"/>
               <a:cs typeface="Times New Roman"/>
             </a:endParaRPr>
@@ -2042,6 +2050,13 @@
                 <a:spcPct val="100000"/>
               </a:lnSpc>
             </a:pPr>
+            <a:r>
+              <a:rPr lang="en-US" sz="1200" dirty="0">
+                <a:latin typeface="Times New Roman"/>
+                <a:cs typeface="Times New Roman"/>
+              </a:rPr>
+              <a:t> </a:t>
+            </a:r>
             <a:endParaRPr sz="1200" dirty="0">
               <a:latin typeface="Times New Roman"/>
               <a:cs typeface="Times New Roman"/>
@@ -2122,314 +2137,13 @@
               </a:spcBef>
             </a:pPr>
             <a:r>
-              <a:rPr sz="1200" i="1" dirty="0">
-                <a:latin typeface="Times New Roman"/>
-                <a:cs typeface="Times New Roman"/>
-              </a:rPr>
-              <a:t>(This</a:t>
-            </a:r>
-            <a:r>
-              <a:rPr sz="1200" i="1" spc="-25" dirty="0">
-                <a:latin typeface="Times New Roman"/>
-                <a:cs typeface="Times New Roman"/>
-              </a:rPr>
-              <a:t> </a:t>
-            </a:r>
-            <a:r>
-              <a:rPr sz="1200" i="1" dirty="0">
-                <a:latin typeface="Times New Roman"/>
-                <a:cs typeface="Times New Roman"/>
-              </a:rPr>
-              <a:t>section</a:t>
-            </a:r>
-            <a:r>
-              <a:rPr sz="1200" i="1" spc="-20" dirty="0">
-                <a:latin typeface="Times New Roman"/>
-                <a:cs typeface="Times New Roman"/>
-              </a:rPr>
-              <a:t> </a:t>
-            </a:r>
-            <a:r>
-              <a:rPr sz="1200" i="1" dirty="0">
-                <a:latin typeface="Times New Roman"/>
-                <a:cs typeface="Times New Roman"/>
-              </a:rPr>
-              <a:t>explains</a:t>
-            </a:r>
-            <a:r>
-              <a:rPr sz="1200" i="1" spc="-25" dirty="0">
-                <a:latin typeface="Times New Roman"/>
-                <a:cs typeface="Times New Roman"/>
-              </a:rPr>
-              <a:t> </a:t>
-            </a:r>
-            <a:r>
-              <a:rPr sz="1200" i="1" dirty="0">
-                <a:latin typeface="Times New Roman"/>
-                <a:cs typeface="Times New Roman"/>
-              </a:rPr>
-              <a:t>the</a:t>
-            </a:r>
-            <a:r>
-              <a:rPr sz="1200" i="1" spc="-25" dirty="0">
-                <a:latin typeface="Times New Roman"/>
-                <a:cs typeface="Times New Roman"/>
-              </a:rPr>
-              <a:t> </a:t>
-            </a:r>
-            <a:r>
-              <a:rPr sz="1200" i="1" dirty="0">
-                <a:latin typeface="Times New Roman"/>
-                <a:cs typeface="Times New Roman"/>
-              </a:rPr>
-              <a:t>need</a:t>
-            </a:r>
-            <a:r>
-              <a:rPr sz="1200" i="1" spc="-15" dirty="0">
-                <a:latin typeface="Times New Roman"/>
-                <a:cs typeface="Times New Roman"/>
-              </a:rPr>
-              <a:t> </a:t>
-            </a:r>
-            <a:r>
-              <a:rPr sz="1200" i="1" dirty="0">
-                <a:latin typeface="Times New Roman"/>
-                <a:cs typeface="Times New Roman"/>
-              </a:rPr>
-              <a:t>to</a:t>
-            </a:r>
-            <a:r>
-              <a:rPr sz="1200" i="1" spc="-20" dirty="0">
-                <a:latin typeface="Times New Roman"/>
-                <a:cs typeface="Times New Roman"/>
-              </a:rPr>
-              <a:t> </a:t>
-            </a:r>
-            <a:r>
-              <a:rPr sz="1200" i="1" dirty="0">
-                <a:latin typeface="Times New Roman"/>
-                <a:cs typeface="Times New Roman"/>
-              </a:rPr>
-              <a:t>make</a:t>
-            </a:r>
-            <a:r>
-              <a:rPr sz="1200" i="1" spc="-25" dirty="0">
-                <a:latin typeface="Times New Roman"/>
-                <a:cs typeface="Times New Roman"/>
-              </a:rPr>
-              <a:t> </a:t>
-            </a:r>
-            <a:r>
-              <a:rPr sz="1200" i="1" dirty="0">
-                <a:latin typeface="Times New Roman"/>
-                <a:cs typeface="Times New Roman"/>
-              </a:rPr>
-              <a:t>the</a:t>
-            </a:r>
-            <a:r>
-              <a:rPr sz="1200" i="1" spc="-20" dirty="0">
-                <a:latin typeface="Times New Roman"/>
-                <a:cs typeface="Times New Roman"/>
-              </a:rPr>
-              <a:t> </a:t>
-            </a:r>
-            <a:r>
-              <a:rPr sz="1200" i="1" dirty="0">
-                <a:latin typeface="Times New Roman"/>
-                <a:cs typeface="Times New Roman"/>
-              </a:rPr>
-              <a:t>previously</a:t>
-            </a:r>
-            <a:r>
-              <a:rPr sz="1200" i="1" spc="-20" dirty="0">
-                <a:latin typeface="Times New Roman"/>
-                <a:cs typeface="Times New Roman"/>
-              </a:rPr>
-              <a:t> </a:t>
-            </a:r>
-            <a:r>
-              <a:rPr sz="1200" i="1" dirty="0">
-                <a:latin typeface="Times New Roman"/>
-                <a:cs typeface="Times New Roman"/>
-              </a:rPr>
-              <a:t>created</a:t>
-            </a:r>
-            <a:r>
-              <a:rPr sz="1200" i="1" spc="-20" dirty="0">
-                <a:latin typeface="Times New Roman"/>
-                <a:cs typeface="Times New Roman"/>
-              </a:rPr>
-              <a:t> </a:t>
-            </a:r>
-            <a:r>
-              <a:rPr sz="1200" i="1" dirty="0">
-                <a:latin typeface="Times New Roman"/>
-                <a:cs typeface="Times New Roman"/>
-              </a:rPr>
-              <a:t>HTML</a:t>
-            </a:r>
-            <a:r>
-              <a:rPr sz="1200" i="1" spc="-15" dirty="0">
-                <a:latin typeface="Times New Roman"/>
-                <a:cs typeface="Times New Roman"/>
-              </a:rPr>
-              <a:t> </a:t>
-            </a:r>
-            <a:r>
-              <a:rPr sz="1200" i="1" dirty="0">
-                <a:latin typeface="Times New Roman"/>
-                <a:cs typeface="Times New Roman"/>
-              </a:rPr>
-              <a:t>and</a:t>
-            </a:r>
-            <a:r>
-              <a:rPr sz="1200" i="1" spc="-10" dirty="0">
-                <a:latin typeface="Times New Roman"/>
-                <a:cs typeface="Times New Roman"/>
-              </a:rPr>
-              <a:t> </a:t>
-            </a:r>
-            <a:r>
-              <a:rPr sz="1200" i="1" dirty="0">
-                <a:latin typeface="Times New Roman"/>
-                <a:cs typeface="Times New Roman"/>
-              </a:rPr>
-              <a:t>CSS</a:t>
-            </a:r>
-            <a:r>
-              <a:rPr sz="1200" i="1" spc="-20" dirty="0">
-                <a:latin typeface="Times New Roman"/>
-                <a:cs typeface="Times New Roman"/>
-              </a:rPr>
-              <a:t> </a:t>
-            </a:r>
-            <a:r>
-              <a:rPr sz="1200" i="1" dirty="0">
-                <a:latin typeface="Times New Roman"/>
-                <a:cs typeface="Times New Roman"/>
-              </a:rPr>
-              <a:t>page</a:t>
-            </a:r>
-            <a:r>
-              <a:rPr sz="1200" i="1" spc="-25" dirty="0">
-                <a:latin typeface="Times New Roman"/>
-                <a:cs typeface="Times New Roman"/>
-              </a:rPr>
-              <a:t> </a:t>
-            </a:r>
-            <a:r>
-              <a:rPr sz="1200" i="1" spc="-10" dirty="0">
-                <a:latin typeface="Times New Roman"/>
-                <a:cs typeface="Times New Roman"/>
-              </a:rPr>
-              <a:t>interactive</a:t>
-            </a:r>
-            <a:r>
-              <a:rPr sz="1200" i="1" spc="-25" dirty="0">
-                <a:latin typeface="Times New Roman"/>
-                <a:cs typeface="Times New Roman"/>
-              </a:rPr>
-              <a:t> </a:t>
-            </a:r>
-            <a:r>
-              <a:rPr sz="1200" i="1" spc="-10" dirty="0">
-                <a:latin typeface="Times New Roman"/>
-                <a:cs typeface="Times New Roman"/>
-              </a:rPr>
-              <a:t>using </a:t>
-            </a:r>
-            <a:r>
-              <a:rPr sz="1200" i="1" dirty="0">
-                <a:latin typeface="Times New Roman"/>
-                <a:cs typeface="Times New Roman"/>
-              </a:rPr>
-              <a:t>JavaScript</a:t>
-            </a:r>
-            <a:r>
-              <a:rPr sz="1200" i="1" spc="-30" dirty="0">
-                <a:latin typeface="Times New Roman"/>
-                <a:cs typeface="Times New Roman"/>
-              </a:rPr>
-              <a:t> </a:t>
-            </a:r>
-            <a:r>
-              <a:rPr sz="1200" i="1" dirty="0">
-                <a:latin typeface="Times New Roman"/>
-                <a:cs typeface="Times New Roman"/>
-              </a:rPr>
-              <a:t>for</a:t>
-            </a:r>
-            <a:r>
-              <a:rPr sz="1200" i="1" spc="-35" dirty="0">
-                <a:latin typeface="Times New Roman"/>
-                <a:cs typeface="Times New Roman"/>
-              </a:rPr>
-              <a:t> </a:t>
-            </a:r>
-            <a:r>
-              <a:rPr sz="1200" i="1" dirty="0">
-                <a:latin typeface="Times New Roman"/>
-                <a:cs typeface="Times New Roman"/>
-              </a:rPr>
-              <a:t>validation</a:t>
-            </a:r>
-            <a:r>
-              <a:rPr sz="1200" i="1" spc="-30" dirty="0">
-                <a:latin typeface="Times New Roman"/>
-                <a:cs typeface="Times New Roman"/>
-              </a:rPr>
-              <a:t> </a:t>
-            </a:r>
-            <a:r>
-              <a:rPr sz="1200" i="1" dirty="0">
-                <a:latin typeface="Times New Roman"/>
-                <a:cs typeface="Times New Roman"/>
-              </a:rPr>
-              <a:t>and</a:t>
-            </a:r>
-            <a:r>
-              <a:rPr sz="1200" i="1" spc="-30" dirty="0">
-                <a:latin typeface="Times New Roman"/>
-                <a:cs typeface="Times New Roman"/>
-              </a:rPr>
-              <a:t> </a:t>
-            </a:r>
-            <a:r>
-              <a:rPr sz="1200" i="1" dirty="0">
-                <a:latin typeface="Times New Roman"/>
-                <a:cs typeface="Times New Roman"/>
-              </a:rPr>
-              <a:t>dynamic</a:t>
-            </a:r>
-            <a:r>
-              <a:rPr sz="1200" i="1" spc="-35" dirty="0">
-                <a:latin typeface="Times New Roman"/>
-                <a:cs typeface="Times New Roman"/>
-              </a:rPr>
-              <a:t> </a:t>
-            </a:r>
-            <a:r>
-              <a:rPr sz="1200" i="1" dirty="0">
-                <a:latin typeface="Times New Roman"/>
-                <a:cs typeface="Times New Roman"/>
-              </a:rPr>
-              <a:t>data</a:t>
-            </a:r>
-            <a:r>
-              <a:rPr sz="1200" i="1" spc="-30" dirty="0">
-                <a:latin typeface="Times New Roman"/>
-                <a:cs typeface="Times New Roman"/>
-              </a:rPr>
-              <a:t> </a:t>
-            </a:r>
-            <a:r>
-              <a:rPr sz="1200" i="1" spc="-10" dirty="0">
-                <a:latin typeface="Times New Roman"/>
-                <a:cs typeface="Times New Roman"/>
-              </a:rPr>
-              <a:t>handling.)</a:t>
-            </a:r>
-            <a:endParaRPr sz="1200" dirty="0">
+              <a:rPr lang="en-US" sz="1300" dirty="0">
+                <a:latin typeface="Times New Roman"/>
+                <a:cs typeface="Times New Roman"/>
+              </a:rPr>
+              <a:t>Small event organizers need a way to ensure the data they collect is accurate and to see registrations update instantly without refreshing the page. While Assignment-2 focused on look and feel, this assignment adds functionality to validate user input and dynamically manage participant lists.</a:t>
+            </a:r>
+            <a:endParaRPr sz="1300" dirty="0">
               <a:latin typeface="Times New Roman"/>
               <a:cs typeface="Times New Roman"/>
             </a:endParaRPr>
@@ -2444,7 +2158,7 @@
         </p:nvGrpSpPr>
         <p:grpSpPr>
           <a:xfrm>
-            <a:off x="808990" y="6226809"/>
+            <a:off x="808087" y="6362317"/>
             <a:ext cx="6395085" cy="20955"/>
             <a:chOff x="808990" y="6226809"/>
             <a:chExt cx="6395085" cy="20955"/>
@@ -2790,7 +2504,7 @@
         <p:spPr>
           <a:xfrm>
             <a:off x="789228" y="6463664"/>
-            <a:ext cx="6288405" cy="716280"/>
+            <a:ext cx="6288405" cy="895758"/>
           </a:xfrm>
           <a:prstGeom prst="rect">
             <a:avLst/>
@@ -2840,7 +2554,7 @@
               </a:rPr>
               <a:t>Objective:</a:t>
             </a:r>
-            <a:endParaRPr sz="1400">
+            <a:endParaRPr sz="1400" dirty="0">
               <a:latin typeface="Times New Roman"/>
               <a:cs typeface="Times New Roman"/>
             </a:endParaRPr>
@@ -2855,279 +2569,13 @@
               </a:spcBef>
             </a:pPr>
             <a:r>
-              <a:rPr sz="1200" i="1" dirty="0">
-                <a:latin typeface="Times New Roman"/>
-                <a:cs typeface="Times New Roman"/>
-              </a:rPr>
-              <a:t>(This</a:t>
-            </a:r>
-            <a:r>
-              <a:rPr sz="1200" i="1" spc="-20" dirty="0">
-                <a:latin typeface="Times New Roman"/>
-                <a:cs typeface="Times New Roman"/>
-              </a:rPr>
-              <a:t> </a:t>
-            </a:r>
-            <a:r>
-              <a:rPr sz="1200" i="1" dirty="0">
-                <a:latin typeface="Times New Roman"/>
-                <a:cs typeface="Times New Roman"/>
-              </a:rPr>
-              <a:t>section</a:t>
-            </a:r>
-            <a:r>
-              <a:rPr sz="1200" i="1" spc="-10" dirty="0">
-                <a:latin typeface="Times New Roman"/>
-                <a:cs typeface="Times New Roman"/>
-              </a:rPr>
-              <a:t> </a:t>
-            </a:r>
-            <a:r>
-              <a:rPr sz="1200" i="1" dirty="0">
-                <a:latin typeface="Times New Roman"/>
-                <a:cs typeface="Times New Roman"/>
-              </a:rPr>
-              <a:t>describes</a:t>
-            </a:r>
-            <a:r>
-              <a:rPr sz="1200" i="1" spc="-15" dirty="0">
-                <a:latin typeface="Times New Roman"/>
-                <a:cs typeface="Times New Roman"/>
-              </a:rPr>
-              <a:t> </a:t>
-            </a:r>
-            <a:r>
-              <a:rPr sz="1200" i="1" dirty="0">
-                <a:latin typeface="Times New Roman"/>
-                <a:cs typeface="Times New Roman"/>
-              </a:rPr>
-              <a:t>the</a:t>
-            </a:r>
-            <a:r>
-              <a:rPr sz="1200" i="1" spc="-10" dirty="0">
-                <a:latin typeface="Times New Roman"/>
-                <a:cs typeface="Times New Roman"/>
-              </a:rPr>
-              <a:t> </a:t>
-            </a:r>
-            <a:r>
-              <a:rPr sz="1200" i="1" dirty="0">
-                <a:latin typeface="Times New Roman"/>
-                <a:cs typeface="Times New Roman"/>
-              </a:rPr>
-              <a:t>goal</a:t>
-            </a:r>
-            <a:r>
-              <a:rPr sz="1200" i="1" spc="-15" dirty="0">
-                <a:latin typeface="Times New Roman"/>
-                <a:cs typeface="Times New Roman"/>
-              </a:rPr>
-              <a:t> </a:t>
-            </a:r>
-            <a:r>
-              <a:rPr sz="1200" i="1" dirty="0">
-                <a:latin typeface="Times New Roman"/>
-                <a:cs typeface="Times New Roman"/>
-              </a:rPr>
-              <a:t>of</a:t>
-            </a:r>
-            <a:r>
-              <a:rPr sz="1200" i="1" spc="-10" dirty="0">
-                <a:latin typeface="Times New Roman"/>
-                <a:cs typeface="Times New Roman"/>
-              </a:rPr>
-              <a:t> </a:t>
-            </a:r>
-            <a:r>
-              <a:rPr sz="1200" i="1" dirty="0">
-                <a:latin typeface="Times New Roman"/>
-                <a:cs typeface="Times New Roman"/>
-              </a:rPr>
-              <a:t>the</a:t>
-            </a:r>
-            <a:r>
-              <a:rPr sz="1200" i="1" spc="-15" dirty="0">
-                <a:latin typeface="Times New Roman"/>
-                <a:cs typeface="Times New Roman"/>
-              </a:rPr>
-              <a:t> </a:t>
-            </a:r>
-            <a:r>
-              <a:rPr sz="1200" i="1" dirty="0">
-                <a:latin typeface="Times New Roman"/>
-                <a:cs typeface="Times New Roman"/>
-              </a:rPr>
-              <a:t>assignment,</a:t>
-            </a:r>
-            <a:r>
-              <a:rPr sz="1200" i="1" spc="-10" dirty="0">
-                <a:latin typeface="Times New Roman"/>
-                <a:cs typeface="Times New Roman"/>
-              </a:rPr>
-              <a:t> </a:t>
-            </a:r>
-            <a:r>
-              <a:rPr sz="1200" i="1" dirty="0">
-                <a:latin typeface="Times New Roman"/>
-                <a:cs typeface="Times New Roman"/>
-              </a:rPr>
-              <a:t>which</a:t>
-            </a:r>
-            <a:r>
-              <a:rPr sz="1200" i="1" spc="-15" dirty="0">
-                <a:latin typeface="Times New Roman"/>
-                <a:cs typeface="Times New Roman"/>
-              </a:rPr>
-              <a:t> </a:t>
-            </a:r>
-            <a:r>
-              <a:rPr sz="1200" i="1" dirty="0">
-                <a:latin typeface="Times New Roman"/>
-                <a:cs typeface="Times New Roman"/>
-              </a:rPr>
-              <a:t>is</a:t>
-            </a:r>
-            <a:r>
-              <a:rPr sz="1200" i="1" spc="-15" dirty="0">
-                <a:latin typeface="Times New Roman"/>
-                <a:cs typeface="Times New Roman"/>
-              </a:rPr>
-              <a:t> </a:t>
-            </a:r>
-            <a:r>
-              <a:rPr sz="1200" i="1" dirty="0">
-                <a:latin typeface="Times New Roman"/>
-                <a:cs typeface="Times New Roman"/>
-              </a:rPr>
-              <a:t>to</a:t>
-            </a:r>
-            <a:r>
-              <a:rPr sz="1200" i="1" spc="-10" dirty="0">
-                <a:latin typeface="Times New Roman"/>
-                <a:cs typeface="Times New Roman"/>
-              </a:rPr>
-              <a:t> implement client-</a:t>
-            </a:r>
-            <a:r>
-              <a:rPr sz="1200" i="1" dirty="0">
-                <a:latin typeface="Times New Roman"/>
-                <a:cs typeface="Times New Roman"/>
-              </a:rPr>
-              <a:t>side</a:t>
-            </a:r>
-            <a:r>
-              <a:rPr sz="1200" i="1" spc="-15" dirty="0">
-                <a:latin typeface="Times New Roman"/>
-                <a:cs typeface="Times New Roman"/>
-              </a:rPr>
-              <a:t> </a:t>
-            </a:r>
-            <a:r>
-              <a:rPr sz="1200" i="1" spc="-10" dirty="0">
-                <a:latin typeface="Times New Roman"/>
-                <a:cs typeface="Times New Roman"/>
-              </a:rPr>
-              <a:t>interactivity, </a:t>
-            </a:r>
-            <a:r>
-              <a:rPr sz="1200" i="1" spc="-20" dirty="0">
-                <a:latin typeface="Times New Roman"/>
-                <a:cs typeface="Times New Roman"/>
-              </a:rPr>
-              <a:t>form </a:t>
-            </a:r>
-            <a:r>
-              <a:rPr sz="1200" i="1" dirty="0">
-                <a:latin typeface="Times New Roman"/>
-                <a:cs typeface="Times New Roman"/>
-              </a:rPr>
-              <a:t>validation,</a:t>
-            </a:r>
-            <a:r>
-              <a:rPr sz="1200" i="1" spc="-35" dirty="0">
-                <a:latin typeface="Times New Roman"/>
-                <a:cs typeface="Times New Roman"/>
-              </a:rPr>
-              <a:t> </a:t>
-            </a:r>
-            <a:r>
-              <a:rPr sz="1200" i="1" dirty="0">
-                <a:latin typeface="Times New Roman"/>
-                <a:cs typeface="Times New Roman"/>
-              </a:rPr>
-              <a:t>and</a:t>
-            </a:r>
-            <a:r>
-              <a:rPr sz="1200" i="1" spc="-30" dirty="0">
-                <a:latin typeface="Times New Roman"/>
-                <a:cs typeface="Times New Roman"/>
-              </a:rPr>
-              <a:t> </a:t>
-            </a:r>
-            <a:r>
-              <a:rPr sz="1200" i="1" dirty="0">
-                <a:latin typeface="Times New Roman"/>
-                <a:cs typeface="Times New Roman"/>
-              </a:rPr>
-              <a:t>dynamic</a:t>
-            </a:r>
-            <a:r>
-              <a:rPr sz="1200" i="1" spc="-30" dirty="0">
-                <a:latin typeface="Times New Roman"/>
-                <a:cs typeface="Times New Roman"/>
-              </a:rPr>
-              <a:t> </a:t>
-            </a:r>
-            <a:r>
-              <a:rPr sz="1200" i="1" dirty="0">
-                <a:latin typeface="Times New Roman"/>
-                <a:cs typeface="Times New Roman"/>
-              </a:rPr>
-              <a:t>table</a:t>
-            </a:r>
-            <a:r>
-              <a:rPr sz="1200" i="1" spc="-35" dirty="0">
-                <a:latin typeface="Times New Roman"/>
-                <a:cs typeface="Times New Roman"/>
-              </a:rPr>
-              <a:t> </a:t>
-            </a:r>
-            <a:r>
-              <a:rPr sz="1200" i="1" dirty="0">
-                <a:latin typeface="Times New Roman"/>
-                <a:cs typeface="Times New Roman"/>
-              </a:rPr>
-              <a:t>updates</a:t>
-            </a:r>
-            <a:r>
-              <a:rPr sz="1200" i="1" spc="-35" dirty="0">
-                <a:latin typeface="Times New Roman"/>
-                <a:cs typeface="Times New Roman"/>
-              </a:rPr>
-              <a:t> </a:t>
-            </a:r>
-            <a:r>
-              <a:rPr sz="1200" i="1" dirty="0">
-                <a:latin typeface="Times New Roman"/>
-                <a:cs typeface="Times New Roman"/>
-              </a:rPr>
-              <a:t>using</a:t>
-            </a:r>
-            <a:r>
-              <a:rPr sz="1200" i="1" spc="-30" dirty="0">
-                <a:latin typeface="Times New Roman"/>
-                <a:cs typeface="Times New Roman"/>
-              </a:rPr>
-              <a:t> </a:t>
-            </a:r>
-            <a:r>
-              <a:rPr sz="1200" i="1" spc="-10" dirty="0">
-                <a:latin typeface="Times New Roman"/>
-                <a:cs typeface="Times New Roman"/>
-              </a:rPr>
-              <a:t>JavaScript.)</a:t>
-            </a:r>
-            <a:endParaRPr sz="1200">
+              <a:rPr lang="en-US" sz="1300" dirty="0">
+                <a:latin typeface="Times New Roman"/>
+                <a:cs typeface="Times New Roman"/>
+              </a:rPr>
+              <a:t>To implement JavaScript for client-side validation and DOM manipulation. The goal is to ensure only correct data is submitted and to provide immediate visual feedback by updating the "Registered Students" table automatically.</a:t>
+            </a:r>
+            <a:endParaRPr sz="1300" dirty="0">
               <a:latin typeface="Times New Roman"/>
               <a:cs typeface="Times New Roman"/>
             </a:endParaRPr>
@@ -3142,7 +2590,7 @@
         </p:nvGrpSpPr>
         <p:grpSpPr>
           <a:xfrm>
-            <a:off x="801369" y="7613650"/>
+            <a:off x="767035" y="7492810"/>
             <a:ext cx="6402705" cy="20955"/>
             <a:chOff x="801369" y="7613650"/>
             <a:chExt cx="6402705" cy="20955"/>
@@ -3487,8 +2935,8 @@
         </p:nvSpPr>
         <p:spPr>
           <a:xfrm>
-            <a:off x="748080" y="7689064"/>
-            <a:ext cx="5963285" cy="1390015"/>
+            <a:off x="748080" y="7564678"/>
+            <a:ext cx="6418485" cy="2230098"/>
           </a:xfrm>
           <a:prstGeom prst="rect">
             <a:avLst/>
@@ -3523,196 +2971,35 @@
               </a:rPr>
               <a:t>Requirements:</a:t>
             </a:r>
-            <a:endParaRPr sz="1400">
+            <a:endParaRPr lang="en-US" sz="1400" b="1" spc="-10" dirty="0">
+              <a:solidFill>
+                <a:srgbClr val="3B78D7"/>
+              </a:solidFill>
               <a:latin typeface="Times New Roman"/>
               <a:cs typeface="Times New Roman"/>
             </a:endParaRPr>
           </a:p>
           <a:p>
-            <a:pPr marL="60960">
+            <a:pPr marL="9525">
               <a:lnSpc>
                 <a:spcPct val="100000"/>
               </a:lnSpc>
               <a:spcBef>
-                <a:spcPts val="535"/>
+                <a:spcPts val="730"/>
               </a:spcBef>
+              <a:buSzPct val="92857"/>
+              <a:tabLst>
+                <a:tab pos="146050" algn="l"/>
+              </a:tabLst>
             </a:pPr>
             <a:r>
-              <a:rPr sz="1200" i="1" dirty="0">
-                <a:latin typeface="Times New Roman"/>
-                <a:cs typeface="Times New Roman"/>
-              </a:rPr>
-              <a:t>(This</a:t>
-            </a:r>
-            <a:r>
-              <a:rPr sz="1200" i="1" spc="-20" dirty="0">
-                <a:latin typeface="Times New Roman"/>
-                <a:cs typeface="Times New Roman"/>
-              </a:rPr>
-              <a:t> </a:t>
-            </a:r>
-            <a:r>
-              <a:rPr sz="1200" i="1" dirty="0">
-                <a:latin typeface="Times New Roman"/>
-                <a:cs typeface="Times New Roman"/>
-              </a:rPr>
-              <a:t>section</a:t>
-            </a:r>
-            <a:r>
-              <a:rPr sz="1200" i="1" spc="-10" dirty="0">
-                <a:latin typeface="Times New Roman"/>
-                <a:cs typeface="Times New Roman"/>
-              </a:rPr>
-              <a:t> </a:t>
-            </a:r>
-            <a:r>
-              <a:rPr sz="1200" i="1" dirty="0">
-                <a:latin typeface="Times New Roman"/>
-                <a:cs typeface="Times New Roman"/>
-              </a:rPr>
-              <a:t>lists</a:t>
-            </a:r>
-            <a:r>
-              <a:rPr sz="1200" i="1" spc="-10" dirty="0">
-                <a:latin typeface="Times New Roman"/>
-                <a:cs typeface="Times New Roman"/>
-              </a:rPr>
-              <a:t> </a:t>
-            </a:r>
-            <a:r>
-              <a:rPr sz="1200" i="1" dirty="0">
-                <a:latin typeface="Times New Roman"/>
-                <a:cs typeface="Times New Roman"/>
-              </a:rPr>
-              <a:t>the</a:t>
-            </a:r>
-            <a:r>
-              <a:rPr sz="1200" i="1" spc="-10" dirty="0">
-                <a:latin typeface="Times New Roman"/>
-                <a:cs typeface="Times New Roman"/>
-              </a:rPr>
-              <a:t> </a:t>
-            </a:r>
-            <a:r>
-              <a:rPr sz="1200" i="1" dirty="0">
-                <a:latin typeface="Times New Roman"/>
-                <a:cs typeface="Times New Roman"/>
-              </a:rPr>
-              <a:t>JavaScript</a:t>
-            </a:r>
-            <a:r>
-              <a:rPr sz="1200" i="1" spc="-5" dirty="0">
-                <a:latin typeface="Times New Roman"/>
-                <a:cs typeface="Times New Roman"/>
-              </a:rPr>
-              <a:t> </a:t>
-            </a:r>
-            <a:r>
-              <a:rPr sz="1200" i="1" spc="-10" dirty="0">
-                <a:latin typeface="Times New Roman"/>
-                <a:cs typeface="Times New Roman"/>
-              </a:rPr>
-              <a:t>functionalities</a:t>
-            </a:r>
-            <a:r>
-              <a:rPr sz="1200" i="1" spc="-15" dirty="0">
-                <a:latin typeface="Times New Roman"/>
-                <a:cs typeface="Times New Roman"/>
-              </a:rPr>
-              <a:t> </a:t>
-            </a:r>
-            <a:r>
-              <a:rPr sz="1200" i="1" dirty="0">
-                <a:latin typeface="Times New Roman"/>
-                <a:cs typeface="Times New Roman"/>
-              </a:rPr>
-              <a:t>that</a:t>
-            </a:r>
-            <a:r>
-              <a:rPr sz="1200" i="1" spc="-10" dirty="0">
-                <a:latin typeface="Times New Roman"/>
-                <a:cs typeface="Times New Roman"/>
-              </a:rPr>
-              <a:t> </a:t>
-            </a:r>
-            <a:r>
-              <a:rPr sz="1200" i="1" dirty="0">
-                <a:latin typeface="Times New Roman"/>
-                <a:cs typeface="Times New Roman"/>
-              </a:rPr>
-              <a:t>must</a:t>
-            </a:r>
-            <a:r>
-              <a:rPr sz="1200" i="1" spc="-15" dirty="0">
-                <a:latin typeface="Times New Roman"/>
-                <a:cs typeface="Times New Roman"/>
-              </a:rPr>
-              <a:t> </a:t>
-            </a:r>
-            <a:r>
-              <a:rPr sz="1200" i="1" dirty="0">
-                <a:latin typeface="Times New Roman"/>
-                <a:cs typeface="Times New Roman"/>
-              </a:rPr>
-              <a:t>be</a:t>
-            </a:r>
-            <a:r>
-              <a:rPr sz="1200" i="1" spc="-15" dirty="0">
-                <a:latin typeface="Times New Roman"/>
-                <a:cs typeface="Times New Roman"/>
-              </a:rPr>
-              <a:t> </a:t>
-            </a:r>
-            <a:r>
-              <a:rPr sz="1200" i="1" spc="-10" dirty="0">
-                <a:latin typeface="Times New Roman"/>
-                <a:cs typeface="Times New Roman"/>
-              </a:rPr>
-              <a:t>implemented </a:t>
-            </a:r>
-            <a:r>
-              <a:rPr sz="1200" i="1" dirty="0">
-                <a:latin typeface="Times New Roman"/>
-                <a:cs typeface="Times New Roman"/>
-              </a:rPr>
-              <a:t>in</a:t>
-            </a:r>
-            <a:r>
-              <a:rPr sz="1200" i="1" spc="-10" dirty="0">
-                <a:latin typeface="Times New Roman"/>
-                <a:cs typeface="Times New Roman"/>
-              </a:rPr>
-              <a:t> </a:t>
-            </a:r>
-            <a:r>
-              <a:rPr sz="1200" i="1" dirty="0">
-                <a:latin typeface="Times New Roman"/>
-                <a:cs typeface="Times New Roman"/>
-              </a:rPr>
-              <a:t>the</a:t>
-            </a:r>
-            <a:r>
-              <a:rPr sz="1200" i="1" spc="-10" dirty="0">
-                <a:latin typeface="Times New Roman"/>
-                <a:cs typeface="Times New Roman"/>
-              </a:rPr>
-              <a:t> project.)</a:t>
-            </a:r>
-            <a:endParaRPr sz="1200">
-              <a:latin typeface="Times New Roman"/>
-              <a:cs typeface="Times New Roman"/>
-            </a:endParaRPr>
-          </a:p>
-          <a:p>
-            <a:pPr>
-              <a:lnSpc>
-                <a:spcPct val="100000"/>
-              </a:lnSpc>
-              <a:spcBef>
-                <a:spcPts val="365"/>
-              </a:spcBef>
-            </a:pPr>
-            <a:endParaRPr sz="1200">
+              <a:rPr lang="en-US" sz="1300" dirty="0">
+                <a:latin typeface="Times New Roman"/>
+                <a:cs typeface="Times New Roman"/>
+              </a:rPr>
+              <a:t>This section details the functional requirements implemented to move the project from a static design to an interactive web application:</a:t>
+            </a:r>
+            <a:endParaRPr sz="1300" dirty="0">
               <a:latin typeface="Times New Roman"/>
               <a:cs typeface="Times New Roman"/>
             </a:endParaRPr>
@@ -3751,231 +3038,89 @@
               </a:rPr>
               <a:t>Validation:</a:t>
             </a:r>
-            <a:endParaRPr sz="1300">
+            <a:endParaRPr sz="1300" dirty="0">
               <a:latin typeface="Times New Roman"/>
               <a:cs typeface="Times New Roman"/>
             </a:endParaRPr>
           </a:p>
           <a:p>
-            <a:pPr marL="151130" marR="5080">
+            <a:pPr marL="322580" marR="5080" indent="-171450">
               <a:lnSpc>
                 <a:spcPts val="1380"/>
               </a:lnSpc>
               <a:spcBef>
                 <a:spcPts val="420"/>
               </a:spcBef>
+              <a:buFont typeface="Arial" panose="020B0604020202020204" pitchFamily="34" charset="0"/>
+              <a:buChar char="•"/>
             </a:pPr>
             <a:r>
-              <a:rPr sz="1200" i="1" dirty="0">
-                <a:latin typeface="Times New Roman"/>
-                <a:cs typeface="Times New Roman"/>
-              </a:rPr>
-              <a:t>(Validate</a:t>
-            </a:r>
-            <a:r>
-              <a:rPr sz="1200" i="1" spc="-30" dirty="0">
-                <a:latin typeface="Times New Roman"/>
-                <a:cs typeface="Times New Roman"/>
-              </a:rPr>
-              <a:t> </a:t>
-            </a:r>
-            <a:r>
-              <a:rPr sz="1200" i="1" dirty="0">
-                <a:latin typeface="Times New Roman"/>
-                <a:cs typeface="Times New Roman"/>
-              </a:rPr>
-              <a:t>all</a:t>
-            </a:r>
-            <a:r>
-              <a:rPr sz="1200" i="1" spc="-30" dirty="0">
-                <a:latin typeface="Times New Roman"/>
-                <a:cs typeface="Times New Roman"/>
-              </a:rPr>
-              <a:t> </a:t>
-            </a:r>
-            <a:r>
-              <a:rPr sz="1200" i="1" dirty="0">
-                <a:latin typeface="Times New Roman"/>
-                <a:cs typeface="Times New Roman"/>
-              </a:rPr>
-              <a:t>required</a:t>
-            </a:r>
-            <a:r>
-              <a:rPr sz="1200" i="1" spc="-25" dirty="0">
-                <a:latin typeface="Times New Roman"/>
-                <a:cs typeface="Times New Roman"/>
-              </a:rPr>
-              <a:t> </a:t>
-            </a:r>
-            <a:r>
-              <a:rPr sz="1200" i="1" dirty="0">
-                <a:latin typeface="Times New Roman"/>
-                <a:cs typeface="Times New Roman"/>
-              </a:rPr>
-              <a:t>fields</a:t>
-            </a:r>
-            <a:r>
-              <a:rPr sz="1200" i="1" spc="-35" dirty="0">
-                <a:latin typeface="Times New Roman"/>
-                <a:cs typeface="Times New Roman"/>
-              </a:rPr>
-              <a:t> </a:t>
-            </a:r>
-            <a:r>
-              <a:rPr sz="1200" i="1" dirty="0">
-                <a:latin typeface="Times New Roman"/>
-                <a:cs typeface="Times New Roman"/>
-              </a:rPr>
-              <a:t>using</a:t>
-            </a:r>
-            <a:r>
-              <a:rPr sz="1200" i="1" spc="-25" dirty="0">
-                <a:latin typeface="Times New Roman"/>
-                <a:cs typeface="Times New Roman"/>
-              </a:rPr>
-              <a:t> </a:t>
-            </a:r>
-            <a:r>
-              <a:rPr sz="1200" i="1" dirty="0">
-                <a:latin typeface="Times New Roman"/>
-                <a:cs typeface="Times New Roman"/>
-              </a:rPr>
-              <a:t>JavaScript</a:t>
-            </a:r>
-            <a:r>
-              <a:rPr sz="1200" i="1" spc="-25" dirty="0">
-                <a:latin typeface="Times New Roman"/>
-                <a:cs typeface="Times New Roman"/>
-              </a:rPr>
-              <a:t> </a:t>
-            </a:r>
-            <a:r>
-              <a:rPr sz="1200" i="1" dirty="0">
-                <a:latin typeface="Times New Roman"/>
-                <a:cs typeface="Times New Roman"/>
-              </a:rPr>
-              <a:t>and</a:t>
-            </a:r>
-            <a:r>
-              <a:rPr sz="1200" i="1" spc="-25" dirty="0">
-                <a:latin typeface="Times New Roman"/>
-                <a:cs typeface="Times New Roman"/>
-              </a:rPr>
-              <a:t> </a:t>
-            </a:r>
-            <a:r>
-              <a:rPr sz="1200" i="1" dirty="0">
-                <a:latin typeface="Times New Roman"/>
-                <a:cs typeface="Times New Roman"/>
-              </a:rPr>
-              <a:t>ensure</a:t>
-            </a:r>
-            <a:r>
-              <a:rPr sz="1200" i="1" spc="-30" dirty="0">
-                <a:latin typeface="Times New Roman"/>
-                <a:cs typeface="Times New Roman"/>
-              </a:rPr>
-              <a:t> </a:t>
-            </a:r>
-            <a:r>
-              <a:rPr sz="1200" i="1" dirty="0">
-                <a:latin typeface="Times New Roman"/>
-                <a:cs typeface="Times New Roman"/>
-              </a:rPr>
-              <a:t>that</a:t>
-            </a:r>
-            <a:r>
-              <a:rPr sz="1200" i="1" spc="-25" dirty="0">
-                <a:latin typeface="Times New Roman"/>
-                <a:cs typeface="Times New Roman"/>
-              </a:rPr>
-              <a:t> </a:t>
-            </a:r>
-            <a:r>
-              <a:rPr sz="1200" i="1" dirty="0">
-                <a:latin typeface="Times New Roman"/>
-                <a:cs typeface="Times New Roman"/>
-              </a:rPr>
-              <a:t>incorrect</a:t>
-            </a:r>
-            <a:r>
-              <a:rPr sz="1200" i="1" spc="-30" dirty="0">
-                <a:latin typeface="Times New Roman"/>
-                <a:cs typeface="Times New Roman"/>
-              </a:rPr>
-              <a:t> </a:t>
-            </a:r>
-            <a:r>
-              <a:rPr sz="1200" i="1" dirty="0">
-                <a:latin typeface="Times New Roman"/>
-                <a:cs typeface="Times New Roman"/>
-              </a:rPr>
-              <a:t>or</a:t>
-            </a:r>
-            <a:r>
-              <a:rPr sz="1200" i="1" spc="-30" dirty="0">
-                <a:latin typeface="Times New Roman"/>
-                <a:cs typeface="Times New Roman"/>
-              </a:rPr>
-              <a:t> </a:t>
-            </a:r>
-            <a:r>
-              <a:rPr sz="1200" i="1" dirty="0">
-                <a:latin typeface="Times New Roman"/>
-                <a:cs typeface="Times New Roman"/>
-              </a:rPr>
-              <a:t>empty</a:t>
-            </a:r>
-            <a:r>
-              <a:rPr sz="1200" i="1" spc="-35" dirty="0">
-                <a:latin typeface="Times New Roman"/>
-                <a:cs typeface="Times New Roman"/>
-              </a:rPr>
-              <a:t> </a:t>
-            </a:r>
-            <a:r>
-              <a:rPr sz="1200" i="1" dirty="0">
-                <a:latin typeface="Times New Roman"/>
-                <a:cs typeface="Times New Roman"/>
-              </a:rPr>
-              <a:t>inputs</a:t>
-            </a:r>
-            <a:r>
-              <a:rPr sz="1200" i="1" spc="-30" dirty="0">
-                <a:latin typeface="Times New Roman"/>
-                <a:cs typeface="Times New Roman"/>
-              </a:rPr>
-              <a:t> </a:t>
-            </a:r>
-            <a:r>
-              <a:rPr sz="1200" i="1" dirty="0">
-                <a:latin typeface="Times New Roman"/>
-                <a:cs typeface="Times New Roman"/>
-              </a:rPr>
-              <a:t>are</a:t>
-            </a:r>
-            <a:r>
-              <a:rPr sz="1200" i="1" spc="-30" dirty="0">
-                <a:latin typeface="Times New Roman"/>
-                <a:cs typeface="Times New Roman"/>
-              </a:rPr>
-              <a:t> </a:t>
-            </a:r>
-            <a:r>
-              <a:rPr sz="1200" i="1" spc="-25" dirty="0">
-                <a:latin typeface="Times New Roman"/>
-                <a:cs typeface="Times New Roman"/>
-              </a:rPr>
-              <a:t>not </a:t>
-            </a:r>
-            <a:r>
-              <a:rPr sz="1200" i="1" spc="-10" dirty="0">
-                <a:latin typeface="Times New Roman"/>
-                <a:cs typeface="Times New Roman"/>
-              </a:rPr>
-              <a:t>submitted.)</a:t>
-            </a:r>
-            <a:endParaRPr sz="1200">
+              <a:rPr lang="en-US" sz="1200" b="1" dirty="0">
+                <a:latin typeface="Times New Roman"/>
+                <a:cs typeface="Times New Roman"/>
+              </a:rPr>
+              <a:t>Mandatory Checks</a:t>
+            </a:r>
+            <a:r>
+              <a:rPr lang="en-US" sz="1200" dirty="0">
+                <a:latin typeface="Times New Roman"/>
+                <a:cs typeface="Times New Roman"/>
+              </a:rPr>
+              <a:t>: Wrote conditional logic in script.js to verify that Name, Date of Birth, and College fields are not empty.</a:t>
+            </a:r>
+          </a:p>
+          <a:p>
+            <a:pPr marL="322580" marR="5080" indent="-171450">
+              <a:lnSpc>
+                <a:spcPts val="1380"/>
+              </a:lnSpc>
+              <a:spcBef>
+                <a:spcPts val="420"/>
+              </a:spcBef>
+              <a:buFont typeface="Arial" panose="020B0604020202020204" pitchFamily="34" charset="0"/>
+              <a:buChar char="•"/>
+            </a:pPr>
+            <a:r>
+              <a:rPr lang="en-US" sz="1200" b="1" dirty="0">
+                <a:latin typeface="Times New Roman"/>
+                <a:cs typeface="Times New Roman"/>
+              </a:rPr>
+              <a:t>Format Verification</a:t>
+            </a:r>
+            <a:r>
+              <a:rPr lang="en-US" sz="1200" dirty="0">
+                <a:latin typeface="Times New Roman"/>
+                <a:cs typeface="Times New Roman"/>
+              </a:rPr>
+              <a:t>: Used string methods to check for the presence of the "@" symbol in the Email field and ensured the Phone number contains exactly 10 digits.</a:t>
+            </a:r>
+          </a:p>
+          <a:p>
+            <a:pPr marL="322580" marR="5080" indent="-171450">
+              <a:lnSpc>
+                <a:spcPts val="1380"/>
+              </a:lnSpc>
+              <a:spcBef>
+                <a:spcPts val="420"/>
+              </a:spcBef>
+              <a:buFont typeface="Arial" panose="020B0604020202020204" pitchFamily="34" charset="0"/>
+              <a:buChar char="•"/>
+            </a:pPr>
+            <a:r>
+              <a:rPr lang="en-US" sz="1200" b="1" dirty="0">
+                <a:latin typeface="Times New Roman"/>
+                <a:cs typeface="Times New Roman"/>
+              </a:rPr>
+              <a:t>Selection Logic</a:t>
+            </a:r>
+            <a:r>
+              <a:rPr lang="en-US" sz="1200" dirty="0">
+                <a:latin typeface="Times New Roman"/>
+                <a:cs typeface="Times New Roman"/>
+              </a:rPr>
+              <a:t>: Added checks to confirm that an event has been chosen from the dropdown and that both Gender and Mode radio buttons have a "checked" status.</a:t>
+            </a:r>
+            <a:endParaRPr sz="1200" dirty="0">
               <a:latin typeface="Times New Roman"/>
               <a:cs typeface="Times New Roman"/>
             </a:endParaRPr>
@@ -3990,7 +3135,7 @@
         </p:nvGrpSpPr>
         <p:grpSpPr>
           <a:xfrm>
-            <a:off x="806450" y="9537064"/>
+            <a:off x="789228" y="10144071"/>
             <a:ext cx="6399530" cy="21590"/>
             <a:chOff x="806450" y="9537064"/>
             <a:chExt cx="6399530" cy="21590"/>
@@ -4492,8 +3637,8 @@
         </p:nvSpPr>
         <p:spPr>
           <a:xfrm>
-            <a:off x="789228" y="1515224"/>
-            <a:ext cx="5196205" cy="492759"/>
+            <a:off x="789228" y="1223723"/>
+            <a:ext cx="6409843" cy="1073371"/>
           </a:xfrm>
           <a:prstGeom prst="rect">
             <a:avLst/>
@@ -4562,168 +3707,63 @@
               </a:rPr>
               <a:t>Validation:</a:t>
             </a:r>
-            <a:endParaRPr sz="1300">
+            <a:endParaRPr sz="1300" dirty="0">
               <a:latin typeface="Times New Roman"/>
               <a:cs typeface="Times New Roman"/>
             </a:endParaRPr>
           </a:p>
           <a:p>
-            <a:pPr marL="58419">
+            <a:pPr marL="229869" indent="-171450">
               <a:lnSpc>
                 <a:spcPct val="100000"/>
               </a:lnSpc>
               <a:spcBef>
                 <a:spcPts val="330"/>
               </a:spcBef>
+              <a:buFont typeface="Arial" panose="020B0604020202020204" pitchFamily="34" charset="0"/>
+              <a:buChar char="•"/>
             </a:pPr>
             <a:r>
-              <a:rPr sz="1200" i="1" dirty="0">
-                <a:latin typeface="Times New Roman"/>
-                <a:cs typeface="Times New Roman"/>
-              </a:rPr>
-              <a:t>(Ensure</a:t>
-            </a:r>
-            <a:r>
-              <a:rPr sz="1200" i="1" spc="-30" dirty="0">
-                <a:latin typeface="Times New Roman"/>
-                <a:cs typeface="Times New Roman"/>
-              </a:rPr>
-              <a:t> </a:t>
-            </a:r>
-            <a:r>
-              <a:rPr sz="1200" i="1" dirty="0">
-                <a:latin typeface="Times New Roman"/>
-                <a:cs typeface="Times New Roman"/>
-              </a:rPr>
-              <a:t>that</a:t>
-            </a:r>
-            <a:r>
-              <a:rPr sz="1200" i="1" spc="-25" dirty="0">
-                <a:latin typeface="Times New Roman"/>
-                <a:cs typeface="Times New Roman"/>
-              </a:rPr>
-              <a:t> </a:t>
-            </a:r>
-            <a:r>
-              <a:rPr sz="1200" i="1" dirty="0">
-                <a:latin typeface="Times New Roman"/>
-                <a:cs typeface="Times New Roman"/>
-              </a:rPr>
-              <a:t>the</a:t>
-            </a:r>
-            <a:r>
-              <a:rPr sz="1200" i="1" spc="-30" dirty="0">
-                <a:latin typeface="Times New Roman"/>
-                <a:cs typeface="Times New Roman"/>
-              </a:rPr>
-              <a:t> </a:t>
-            </a:r>
-            <a:r>
-              <a:rPr sz="1200" i="1" dirty="0">
-                <a:latin typeface="Times New Roman"/>
-                <a:cs typeface="Times New Roman"/>
-              </a:rPr>
-              <a:t>declaration</a:t>
-            </a:r>
-            <a:r>
-              <a:rPr sz="1200" i="1" spc="-25" dirty="0">
-                <a:latin typeface="Times New Roman"/>
-                <a:cs typeface="Times New Roman"/>
-              </a:rPr>
-              <a:t> </a:t>
-            </a:r>
-            <a:r>
-              <a:rPr sz="1200" i="1" dirty="0">
-                <a:latin typeface="Times New Roman"/>
-                <a:cs typeface="Times New Roman"/>
-              </a:rPr>
-              <a:t>checkbox</a:t>
-            </a:r>
-            <a:r>
-              <a:rPr sz="1200" i="1" spc="-35" dirty="0">
-                <a:latin typeface="Times New Roman"/>
-                <a:cs typeface="Times New Roman"/>
-              </a:rPr>
-              <a:t> </a:t>
-            </a:r>
-            <a:r>
-              <a:rPr sz="1200" i="1" dirty="0">
-                <a:latin typeface="Times New Roman"/>
-                <a:cs typeface="Times New Roman"/>
-              </a:rPr>
-              <a:t>is</a:t>
-            </a:r>
-            <a:r>
-              <a:rPr sz="1200" i="1" spc="-30" dirty="0">
-                <a:latin typeface="Times New Roman"/>
-                <a:cs typeface="Times New Roman"/>
-              </a:rPr>
-              <a:t> </a:t>
-            </a:r>
-            <a:r>
-              <a:rPr sz="1200" i="1" dirty="0">
-                <a:latin typeface="Times New Roman"/>
-                <a:cs typeface="Times New Roman"/>
-              </a:rPr>
-              <a:t>selected</a:t>
-            </a:r>
-            <a:r>
-              <a:rPr sz="1200" i="1" spc="-20" dirty="0">
-                <a:latin typeface="Times New Roman"/>
-                <a:cs typeface="Times New Roman"/>
-              </a:rPr>
-              <a:t> </a:t>
-            </a:r>
-            <a:r>
-              <a:rPr sz="1200" i="1" dirty="0">
-                <a:latin typeface="Times New Roman"/>
-                <a:cs typeface="Times New Roman"/>
-              </a:rPr>
-              <a:t>before</a:t>
-            </a:r>
-            <a:r>
-              <a:rPr sz="1200" i="1" spc="-25" dirty="0">
-                <a:latin typeface="Times New Roman"/>
-                <a:cs typeface="Times New Roman"/>
-              </a:rPr>
-              <a:t> </a:t>
-            </a:r>
-            <a:r>
-              <a:rPr sz="1200" i="1" dirty="0">
-                <a:latin typeface="Times New Roman"/>
-                <a:cs typeface="Times New Roman"/>
-              </a:rPr>
-              <a:t>allowing</a:t>
-            </a:r>
-            <a:r>
-              <a:rPr sz="1200" i="1" spc="-30" dirty="0">
-                <a:latin typeface="Times New Roman"/>
-                <a:cs typeface="Times New Roman"/>
-              </a:rPr>
-              <a:t> </a:t>
-            </a:r>
-            <a:r>
-              <a:rPr sz="1200" i="1" dirty="0">
-                <a:latin typeface="Times New Roman"/>
-                <a:cs typeface="Times New Roman"/>
-              </a:rPr>
-              <a:t>form</a:t>
-            </a:r>
-            <a:r>
-              <a:rPr sz="1200" i="1" spc="-30" dirty="0">
-                <a:latin typeface="Times New Roman"/>
-                <a:cs typeface="Times New Roman"/>
-              </a:rPr>
-              <a:t> </a:t>
-            </a:r>
-            <a:r>
-              <a:rPr sz="1200" i="1" spc="-10" dirty="0">
-                <a:latin typeface="Times New Roman"/>
-                <a:cs typeface="Times New Roman"/>
-              </a:rPr>
-              <a:t>submission.)</a:t>
-            </a:r>
-            <a:endParaRPr sz="1200">
+              <a:rPr lang="en-US" sz="1200" b="1" dirty="0">
+                <a:latin typeface="Times New Roman"/>
+                <a:cs typeface="Times New Roman"/>
+              </a:rPr>
+              <a:t>Prerequisite Check</a:t>
+            </a:r>
+            <a:r>
+              <a:rPr lang="en-US" sz="1200" dirty="0">
+                <a:latin typeface="Times New Roman"/>
+                <a:cs typeface="Times New Roman"/>
+              </a:rPr>
+              <a:t>: Implemented an if statement to check the .checked property of the declaration checkbox.</a:t>
+            </a:r>
+          </a:p>
+          <a:p>
+            <a:pPr marL="229869" indent="-171450">
+              <a:lnSpc>
+                <a:spcPct val="100000"/>
+              </a:lnSpc>
+              <a:spcBef>
+                <a:spcPts val="330"/>
+              </a:spcBef>
+              <a:buFont typeface="Arial" panose="020B0604020202020204" pitchFamily="34" charset="0"/>
+              <a:buChar char="•"/>
+            </a:pPr>
+            <a:r>
+              <a:rPr lang="en-US" sz="1200" b="1" dirty="0">
+                <a:latin typeface="Times New Roman"/>
+                <a:cs typeface="Times New Roman"/>
+              </a:rPr>
+              <a:t>Error Prevention</a:t>
+            </a:r>
+            <a:r>
+              <a:rPr lang="en-US" sz="1200" dirty="0">
+                <a:latin typeface="Times New Roman"/>
+                <a:cs typeface="Times New Roman"/>
+              </a:rPr>
+              <a:t>: If the checkbox is unselected, the script triggers a warning alert and halts the submission process to ensure user agreement.</a:t>
+            </a:r>
+            <a:endParaRPr sz="1200" dirty="0">
               <a:latin typeface="Times New Roman"/>
               <a:cs typeface="Times New Roman"/>
             </a:endParaRPr>
@@ -4738,7 +3778,7 @@
         </p:nvGrpSpPr>
         <p:grpSpPr>
           <a:xfrm>
-            <a:off x="801369" y="2490469"/>
+            <a:off x="800648" y="2335119"/>
             <a:ext cx="6402705" cy="20320"/>
             <a:chOff x="801369" y="2490469"/>
             <a:chExt cx="6402705" cy="20320"/>
@@ -5092,8 +4132,8 @@
         </p:nvSpPr>
         <p:spPr>
           <a:xfrm>
-            <a:off x="789228" y="2749041"/>
-            <a:ext cx="6048375" cy="725805"/>
+            <a:off x="796848" y="2545002"/>
+            <a:ext cx="6407225" cy="1238159"/>
           </a:xfrm>
           <a:prstGeom prst="rect">
             <a:avLst/>
@@ -5176,224 +4216,91 @@
               </a:rPr>
               <a:t>Participants:</a:t>
             </a:r>
-            <a:endParaRPr sz="1300">
+            <a:endParaRPr sz="1300" dirty="0">
               <a:latin typeface="Times New Roman"/>
               <a:cs typeface="Times New Roman"/>
             </a:endParaRPr>
           </a:p>
           <a:p>
-            <a:pPr marL="20320" marR="5080">
+            <a:pPr marL="306070" marR="5080" indent="-285750">
               <a:lnSpc>
                 <a:spcPts val="1380"/>
               </a:lnSpc>
               <a:spcBef>
                 <a:spcPts val="1225"/>
               </a:spcBef>
+              <a:buFont typeface="Arial" panose="020B0604020202020204" pitchFamily="34" charset="0"/>
+              <a:buChar char="•"/>
             </a:pPr>
             <a:r>
-              <a:rPr sz="1200" dirty="0">
-                <a:latin typeface="Times New Roman"/>
-                <a:cs typeface="Times New Roman"/>
-              </a:rPr>
-              <a:t>(</a:t>
-            </a:r>
-            <a:r>
-              <a:rPr sz="1200" i="1" dirty="0">
-                <a:latin typeface="Times New Roman"/>
-                <a:cs typeface="Times New Roman"/>
-              </a:rPr>
-              <a:t>Capture</a:t>
-            </a:r>
-            <a:r>
-              <a:rPr sz="1200" i="1" spc="-30" dirty="0">
-                <a:latin typeface="Times New Roman"/>
-                <a:cs typeface="Times New Roman"/>
-              </a:rPr>
-              <a:t> </a:t>
-            </a:r>
-            <a:r>
-              <a:rPr sz="1200" i="1" dirty="0">
-                <a:latin typeface="Times New Roman"/>
-                <a:cs typeface="Times New Roman"/>
-              </a:rPr>
-              <a:t>form</a:t>
-            </a:r>
-            <a:r>
-              <a:rPr sz="1200" i="1" spc="-30" dirty="0">
-                <a:latin typeface="Times New Roman"/>
-                <a:cs typeface="Times New Roman"/>
-              </a:rPr>
-              <a:t> </a:t>
-            </a:r>
-            <a:r>
-              <a:rPr sz="1200" i="1" dirty="0">
-                <a:latin typeface="Times New Roman"/>
-                <a:cs typeface="Times New Roman"/>
-              </a:rPr>
-              <a:t>data</a:t>
-            </a:r>
-            <a:r>
-              <a:rPr sz="1200" i="1" spc="-25" dirty="0">
-                <a:latin typeface="Times New Roman"/>
-                <a:cs typeface="Times New Roman"/>
-              </a:rPr>
-              <a:t> </a:t>
-            </a:r>
-            <a:r>
-              <a:rPr sz="1200" i="1" dirty="0">
-                <a:latin typeface="Times New Roman"/>
-                <a:cs typeface="Times New Roman"/>
-              </a:rPr>
-              <a:t>using</a:t>
-            </a:r>
-            <a:r>
-              <a:rPr sz="1200" i="1" spc="-20" dirty="0">
-                <a:latin typeface="Times New Roman"/>
-                <a:cs typeface="Times New Roman"/>
-              </a:rPr>
-              <a:t> </a:t>
-            </a:r>
-            <a:r>
-              <a:rPr sz="1200" i="1" dirty="0">
-                <a:latin typeface="Times New Roman"/>
-                <a:cs typeface="Times New Roman"/>
-              </a:rPr>
-              <a:t>JavaScript</a:t>
-            </a:r>
-            <a:r>
-              <a:rPr sz="1200" i="1" spc="-20" dirty="0">
-                <a:latin typeface="Times New Roman"/>
-                <a:cs typeface="Times New Roman"/>
-              </a:rPr>
-              <a:t> </a:t>
-            </a:r>
-            <a:r>
-              <a:rPr sz="1200" i="1" dirty="0">
-                <a:latin typeface="Times New Roman"/>
-                <a:cs typeface="Times New Roman"/>
-              </a:rPr>
-              <a:t>and</a:t>
-            </a:r>
-            <a:r>
-              <a:rPr sz="1200" i="1" spc="-25" dirty="0">
-                <a:latin typeface="Times New Roman"/>
-                <a:cs typeface="Times New Roman"/>
-              </a:rPr>
-              <a:t> </a:t>
-            </a:r>
-            <a:r>
-              <a:rPr sz="1200" i="1" dirty="0">
-                <a:latin typeface="Times New Roman"/>
-                <a:cs typeface="Times New Roman"/>
-              </a:rPr>
-              <a:t>dynamically</a:t>
-            </a:r>
-            <a:r>
-              <a:rPr sz="1200" i="1" spc="-30" dirty="0">
-                <a:latin typeface="Times New Roman"/>
-                <a:cs typeface="Times New Roman"/>
-              </a:rPr>
-              <a:t> </a:t>
-            </a:r>
-            <a:r>
-              <a:rPr sz="1200" i="1" dirty="0">
-                <a:latin typeface="Times New Roman"/>
-                <a:cs typeface="Times New Roman"/>
-              </a:rPr>
-              <a:t>add</a:t>
-            </a:r>
-            <a:r>
-              <a:rPr sz="1200" i="1" spc="-20" dirty="0">
-                <a:latin typeface="Times New Roman"/>
-                <a:cs typeface="Times New Roman"/>
-              </a:rPr>
-              <a:t> </a:t>
-            </a:r>
-            <a:r>
-              <a:rPr sz="1200" i="1" dirty="0">
-                <a:latin typeface="Times New Roman"/>
-                <a:cs typeface="Times New Roman"/>
-              </a:rPr>
-              <a:t>the</a:t>
-            </a:r>
-            <a:r>
-              <a:rPr sz="1200" i="1" spc="-25" dirty="0">
-                <a:latin typeface="Times New Roman"/>
-                <a:cs typeface="Times New Roman"/>
-              </a:rPr>
-              <a:t> </a:t>
-            </a:r>
-            <a:r>
-              <a:rPr sz="1200" i="1" dirty="0">
-                <a:latin typeface="Times New Roman"/>
-                <a:cs typeface="Times New Roman"/>
-              </a:rPr>
-              <a:t>submitted</a:t>
-            </a:r>
-            <a:r>
-              <a:rPr sz="1200" i="1" spc="-25" dirty="0">
-                <a:latin typeface="Times New Roman"/>
-                <a:cs typeface="Times New Roman"/>
-              </a:rPr>
-              <a:t> </a:t>
-            </a:r>
-            <a:r>
-              <a:rPr sz="1200" i="1" dirty="0">
-                <a:latin typeface="Times New Roman"/>
-                <a:cs typeface="Times New Roman"/>
-              </a:rPr>
-              <a:t>details</a:t>
-            </a:r>
-            <a:r>
-              <a:rPr sz="1200" i="1" spc="-30" dirty="0">
-                <a:latin typeface="Times New Roman"/>
-                <a:cs typeface="Times New Roman"/>
-              </a:rPr>
-              <a:t> </a:t>
-            </a:r>
-            <a:r>
-              <a:rPr sz="1200" i="1" dirty="0">
-                <a:latin typeface="Times New Roman"/>
-                <a:cs typeface="Times New Roman"/>
-              </a:rPr>
-              <a:t>to</a:t>
-            </a:r>
-            <a:r>
-              <a:rPr sz="1200" i="1" spc="-20" dirty="0">
-                <a:latin typeface="Times New Roman"/>
-                <a:cs typeface="Times New Roman"/>
-              </a:rPr>
-              <a:t> </a:t>
-            </a:r>
-            <a:r>
-              <a:rPr sz="1200" i="1" dirty="0">
-                <a:latin typeface="Times New Roman"/>
-                <a:cs typeface="Times New Roman"/>
-              </a:rPr>
-              <a:t>the</a:t>
-            </a:r>
-            <a:r>
-              <a:rPr sz="1200" i="1" spc="-25" dirty="0">
-                <a:latin typeface="Times New Roman"/>
-                <a:cs typeface="Times New Roman"/>
-              </a:rPr>
-              <a:t> </a:t>
-            </a:r>
-            <a:r>
-              <a:rPr sz="1200" i="1" spc="-10" dirty="0">
-                <a:latin typeface="Times New Roman"/>
-                <a:cs typeface="Times New Roman"/>
-              </a:rPr>
-              <a:t>participants table.</a:t>
-            </a:r>
-            <a:r>
-              <a:rPr sz="1200" spc="-10" dirty="0">
-                <a:latin typeface="Times New Roman"/>
-                <a:cs typeface="Times New Roman"/>
-              </a:rPr>
-              <a:t>)</a:t>
-            </a:r>
-            <a:endParaRPr sz="1200">
+              <a:rPr lang="en-US" sz="1300" b="1" dirty="0">
+                <a:latin typeface="Times New Roman"/>
+                <a:cs typeface="Times New Roman"/>
+              </a:rPr>
+              <a:t>Data Extraction</a:t>
+            </a:r>
+            <a:r>
+              <a:rPr lang="en-US" sz="1300" dirty="0">
+                <a:latin typeface="Times New Roman"/>
+                <a:cs typeface="Times New Roman"/>
+              </a:rPr>
+              <a:t>: Programmed the script to capture values from textboxes, selected radio buttons, and the dropdown menu simultaneously upon submission.</a:t>
+            </a:r>
+          </a:p>
+          <a:p>
+            <a:pPr marL="306070" marR="5080" indent="-285750">
+              <a:lnSpc>
+                <a:spcPts val="1380"/>
+              </a:lnSpc>
+              <a:spcBef>
+                <a:spcPts val="1225"/>
+              </a:spcBef>
+              <a:buFont typeface="Arial" panose="020B0604020202020204" pitchFamily="34" charset="0"/>
+              <a:buChar char="•"/>
+            </a:pPr>
+            <a:r>
+              <a:rPr lang="en-US" sz="1300" b="1" dirty="0">
+                <a:latin typeface="Times New Roman"/>
+                <a:cs typeface="Times New Roman"/>
+              </a:rPr>
+              <a:t>DOM Table Updates</a:t>
+            </a:r>
+            <a:r>
+              <a:rPr lang="en-US" sz="1300" dirty="0">
+                <a:latin typeface="Times New Roman"/>
+                <a:cs typeface="Times New Roman"/>
+              </a:rPr>
+              <a:t>: Used the </a:t>
+            </a:r>
+            <a:r>
+              <a:rPr lang="en-US" sz="1300" dirty="0" err="1">
+                <a:latin typeface="Times New Roman"/>
+                <a:cs typeface="Times New Roman"/>
+              </a:rPr>
+              <a:t>insertRow</a:t>
+            </a:r>
+            <a:r>
+              <a:rPr lang="en-US" sz="1300" dirty="0">
+                <a:latin typeface="Times New Roman"/>
+                <a:cs typeface="Times New Roman"/>
+              </a:rPr>
+              <a:t>() and </a:t>
+            </a:r>
+            <a:r>
+              <a:rPr lang="en-US" sz="1300" dirty="0" err="1">
+                <a:latin typeface="Times New Roman"/>
+                <a:cs typeface="Times New Roman"/>
+              </a:rPr>
+              <a:t>insertCell</a:t>
+            </a:r>
+            <a:r>
+              <a:rPr lang="en-US" sz="1300" dirty="0">
+                <a:latin typeface="Times New Roman"/>
+                <a:cs typeface="Times New Roman"/>
+              </a:rPr>
+              <a:t>() methods to create a new row at the bottom of the existing table for every successful registration.</a:t>
+            </a:r>
+            <a:endParaRPr sz="1300" dirty="0">
               <a:latin typeface="Times New Roman"/>
               <a:cs typeface="Times New Roman"/>
             </a:endParaRPr>
@@ -5753,8 +4660,8 @@
         </p:nvSpPr>
         <p:spPr>
           <a:xfrm>
-            <a:off x="789228" y="4132312"/>
-            <a:ext cx="5832475" cy="668020"/>
+            <a:off x="789228" y="4043425"/>
+            <a:ext cx="6414049" cy="1258037"/>
           </a:xfrm>
           <a:prstGeom prst="rect">
             <a:avLst/>
@@ -5823,210 +4730,91 @@
               </a:rPr>
               <a:t>Reload:</a:t>
             </a:r>
-            <a:endParaRPr sz="1300">
+            <a:endParaRPr sz="1300" dirty="0">
               <a:latin typeface="Times New Roman"/>
               <a:cs typeface="Times New Roman"/>
             </a:endParaRPr>
           </a:p>
           <a:p>
-            <a:pPr marL="109855" marR="5080">
+            <a:pPr marL="395605" marR="5080" indent="-285750">
               <a:lnSpc>
                 <a:spcPts val="1380"/>
               </a:lnSpc>
               <a:spcBef>
                 <a:spcPts val="425"/>
               </a:spcBef>
+              <a:buFont typeface="Arial" panose="020B0604020202020204" pitchFamily="34" charset="0"/>
+              <a:buChar char="•"/>
             </a:pPr>
             <a:r>
-              <a:rPr sz="1200" i="1" dirty="0">
-                <a:latin typeface="Times New Roman"/>
-                <a:cs typeface="Times New Roman"/>
-              </a:rPr>
-              <a:t>(Use</a:t>
-            </a:r>
-            <a:r>
-              <a:rPr sz="1200" i="1" spc="-30" dirty="0">
-                <a:latin typeface="Times New Roman"/>
-                <a:cs typeface="Times New Roman"/>
-              </a:rPr>
-              <a:t> </a:t>
-            </a:r>
-            <a:r>
-              <a:rPr sz="1200" i="1" dirty="0">
-                <a:latin typeface="Times New Roman"/>
-                <a:cs typeface="Times New Roman"/>
-              </a:rPr>
-              <a:t>JavaScript</a:t>
-            </a:r>
-            <a:r>
-              <a:rPr sz="1200" i="1" spc="-20" dirty="0">
-                <a:latin typeface="Times New Roman"/>
-                <a:cs typeface="Times New Roman"/>
-              </a:rPr>
-              <a:t> </a:t>
-            </a:r>
-            <a:r>
-              <a:rPr sz="1200" i="1" dirty="0">
-                <a:latin typeface="Times New Roman"/>
-                <a:cs typeface="Times New Roman"/>
-              </a:rPr>
-              <a:t>to</a:t>
-            </a:r>
-            <a:r>
-              <a:rPr sz="1200" i="1" spc="-25" dirty="0">
-                <a:latin typeface="Times New Roman"/>
-                <a:cs typeface="Times New Roman"/>
-              </a:rPr>
-              <a:t> </a:t>
-            </a:r>
-            <a:r>
-              <a:rPr sz="1200" i="1" dirty="0">
-                <a:latin typeface="Times New Roman"/>
-                <a:cs typeface="Times New Roman"/>
-              </a:rPr>
-              <a:t>prevent</a:t>
-            </a:r>
-            <a:r>
-              <a:rPr sz="1200" i="1" spc="-25" dirty="0">
-                <a:latin typeface="Times New Roman"/>
-                <a:cs typeface="Times New Roman"/>
-              </a:rPr>
-              <a:t> </a:t>
-            </a:r>
-            <a:r>
-              <a:rPr sz="1200" i="1" dirty="0">
-                <a:latin typeface="Times New Roman"/>
-                <a:cs typeface="Times New Roman"/>
-              </a:rPr>
-              <a:t>the</a:t>
-            </a:r>
-            <a:r>
-              <a:rPr sz="1200" i="1" spc="-30" dirty="0">
-                <a:latin typeface="Times New Roman"/>
-                <a:cs typeface="Times New Roman"/>
-              </a:rPr>
-              <a:t> </a:t>
-            </a:r>
-            <a:r>
-              <a:rPr sz="1200" i="1" dirty="0">
-                <a:latin typeface="Times New Roman"/>
-                <a:cs typeface="Times New Roman"/>
-              </a:rPr>
-              <a:t>default</a:t>
-            </a:r>
-            <a:r>
-              <a:rPr sz="1200" i="1" spc="-25" dirty="0">
-                <a:latin typeface="Times New Roman"/>
-                <a:cs typeface="Times New Roman"/>
-              </a:rPr>
-              <a:t> </a:t>
-            </a:r>
-            <a:r>
-              <a:rPr sz="1200" i="1" dirty="0">
-                <a:latin typeface="Times New Roman"/>
-                <a:cs typeface="Times New Roman"/>
-              </a:rPr>
-              <a:t>form</a:t>
-            </a:r>
-            <a:r>
-              <a:rPr sz="1200" i="1" spc="-30" dirty="0">
-                <a:latin typeface="Times New Roman"/>
-                <a:cs typeface="Times New Roman"/>
-              </a:rPr>
-              <a:t> </a:t>
-            </a:r>
-            <a:r>
-              <a:rPr sz="1200" i="1" dirty="0">
-                <a:latin typeface="Times New Roman"/>
-                <a:cs typeface="Times New Roman"/>
-              </a:rPr>
-              <a:t>submission</a:t>
-            </a:r>
-            <a:r>
-              <a:rPr sz="1200" i="1" spc="-25" dirty="0">
-                <a:latin typeface="Times New Roman"/>
-                <a:cs typeface="Times New Roman"/>
-              </a:rPr>
-              <a:t> </a:t>
-            </a:r>
-            <a:r>
-              <a:rPr sz="1200" i="1" dirty="0">
-                <a:latin typeface="Times New Roman"/>
-                <a:cs typeface="Times New Roman"/>
-              </a:rPr>
-              <a:t>behavior</a:t>
-            </a:r>
-            <a:r>
-              <a:rPr sz="1200" i="1" spc="-25" dirty="0">
-                <a:latin typeface="Times New Roman"/>
-                <a:cs typeface="Times New Roman"/>
-              </a:rPr>
-              <a:t> </a:t>
-            </a:r>
-            <a:r>
-              <a:rPr sz="1200" i="1" dirty="0">
-                <a:latin typeface="Times New Roman"/>
-                <a:cs typeface="Times New Roman"/>
-              </a:rPr>
-              <a:t>and</a:t>
-            </a:r>
-            <a:r>
-              <a:rPr sz="1200" i="1" spc="-25" dirty="0">
-                <a:latin typeface="Times New Roman"/>
-                <a:cs typeface="Times New Roman"/>
-              </a:rPr>
-              <a:t> </a:t>
-            </a:r>
-            <a:r>
-              <a:rPr sz="1200" i="1" dirty="0">
-                <a:latin typeface="Times New Roman"/>
-                <a:cs typeface="Times New Roman"/>
-              </a:rPr>
-              <a:t>update</a:t>
-            </a:r>
-            <a:r>
-              <a:rPr sz="1200" i="1" spc="-25" dirty="0">
-                <a:latin typeface="Times New Roman"/>
-                <a:cs typeface="Times New Roman"/>
-              </a:rPr>
-              <a:t> </a:t>
-            </a:r>
-            <a:r>
-              <a:rPr sz="1200" i="1" dirty="0">
-                <a:latin typeface="Times New Roman"/>
-                <a:cs typeface="Times New Roman"/>
-              </a:rPr>
-              <a:t>the</a:t>
-            </a:r>
-            <a:r>
-              <a:rPr sz="1200" i="1" spc="-30" dirty="0">
-                <a:latin typeface="Times New Roman"/>
-                <a:cs typeface="Times New Roman"/>
-              </a:rPr>
-              <a:t> </a:t>
-            </a:r>
-            <a:r>
-              <a:rPr sz="1200" i="1" dirty="0">
-                <a:latin typeface="Times New Roman"/>
-                <a:cs typeface="Times New Roman"/>
-              </a:rPr>
-              <a:t>page</a:t>
-            </a:r>
-            <a:r>
-              <a:rPr sz="1200" i="1" spc="-30" dirty="0">
-                <a:latin typeface="Times New Roman"/>
-                <a:cs typeface="Times New Roman"/>
-              </a:rPr>
-              <a:t> </a:t>
-            </a:r>
-            <a:r>
-              <a:rPr sz="1200" i="1" spc="-10" dirty="0">
-                <a:latin typeface="Times New Roman"/>
-                <a:cs typeface="Times New Roman"/>
-              </a:rPr>
-              <a:t>without refreshing.)</a:t>
-            </a:r>
-            <a:endParaRPr sz="1200">
+              <a:rPr lang="en-US" sz="1300" b="1" dirty="0">
+                <a:latin typeface="Times New Roman"/>
+                <a:cs typeface="Times New Roman"/>
+              </a:rPr>
+              <a:t>Event Interception</a:t>
+            </a:r>
+            <a:r>
+              <a:rPr lang="en-US" sz="1300" dirty="0">
+                <a:latin typeface="Times New Roman"/>
+                <a:cs typeface="Times New Roman"/>
+              </a:rPr>
+              <a:t>: Utilized the </a:t>
+            </a:r>
+            <a:r>
+              <a:rPr lang="en-US" sz="1300" dirty="0" err="1">
+                <a:latin typeface="Times New Roman"/>
+                <a:cs typeface="Times New Roman"/>
+              </a:rPr>
+              <a:t>e.preventDefault</a:t>
+            </a:r>
+            <a:r>
+              <a:rPr lang="en-US" sz="1300" dirty="0">
+                <a:latin typeface="Times New Roman"/>
+                <a:cs typeface="Times New Roman"/>
+              </a:rPr>
+              <a:t>() method within the form's </a:t>
+            </a:r>
+            <a:r>
+              <a:rPr lang="en-US" sz="1300" dirty="0" err="1">
+                <a:latin typeface="Times New Roman"/>
+                <a:cs typeface="Times New Roman"/>
+              </a:rPr>
+              <a:t>onsubmit</a:t>
+            </a:r>
+            <a:r>
+              <a:rPr lang="en-US" sz="1300" dirty="0">
+                <a:latin typeface="Times New Roman"/>
+                <a:cs typeface="Times New Roman"/>
+              </a:rPr>
+              <a:t> function.</a:t>
+            </a:r>
+          </a:p>
+          <a:p>
+            <a:pPr marL="395605" marR="5080" indent="-285750">
+              <a:lnSpc>
+                <a:spcPts val="1380"/>
+              </a:lnSpc>
+              <a:spcBef>
+                <a:spcPts val="425"/>
+              </a:spcBef>
+              <a:buFont typeface="Arial" panose="020B0604020202020204" pitchFamily="34" charset="0"/>
+              <a:buChar char="•"/>
+            </a:pPr>
+            <a:r>
+              <a:rPr lang="en-US" sz="1300" b="1" dirty="0">
+                <a:latin typeface="Times New Roman"/>
+                <a:cs typeface="Times New Roman"/>
+              </a:rPr>
+              <a:t>Seamless Experience</a:t>
+            </a:r>
+            <a:r>
+              <a:rPr lang="en-US" sz="1300" dirty="0">
+                <a:latin typeface="Times New Roman"/>
+                <a:cs typeface="Times New Roman"/>
+              </a:rPr>
+              <a:t>: This prevents the browser from refreshing or navigating away, allowing the participant table to update instantly while keeping all current session data intact.</a:t>
+            </a:r>
+            <a:endParaRPr sz="1300" dirty="0">
               <a:latin typeface="Times New Roman"/>
               <a:cs typeface="Times New Roman"/>
             </a:endParaRPr>
@@ -6386,8 +5174,8 @@
         </p:nvSpPr>
         <p:spPr>
           <a:xfrm>
-            <a:off x="796848" y="5599556"/>
-            <a:ext cx="6243955" cy="525780"/>
+            <a:off x="786221" y="5345652"/>
+            <a:ext cx="6243955" cy="1038105"/>
           </a:xfrm>
           <a:prstGeom prst="rect">
             <a:avLst/>
@@ -6484,210 +5272,91 @@
               </a:rPr>
               <a:t>Submission:</a:t>
             </a:r>
-            <a:endParaRPr sz="1300">
+            <a:endParaRPr lang="en-US" sz="1300" b="1" spc="-10" dirty="0">
               <a:latin typeface="Times New Roman"/>
               <a:cs typeface="Times New Roman"/>
             </a:endParaRPr>
           </a:p>
           <a:p>
-            <a:pPr marL="102235">
+            <a:pPr marL="298450" indent="-285750">
               <a:lnSpc>
                 <a:spcPct val="100000"/>
               </a:lnSpc>
               <a:spcBef>
-                <a:spcPts val="940"/>
+                <a:spcPts val="95"/>
               </a:spcBef>
+              <a:buFont typeface="Arial" panose="020B0604020202020204" pitchFamily="34" charset="0"/>
+              <a:buChar char="•"/>
             </a:pPr>
             <a:r>
-              <a:rPr sz="1200" i="1" spc="-10" dirty="0">
-                <a:latin typeface="Times New Roman"/>
-                <a:cs typeface="Times New Roman"/>
-              </a:rPr>
-              <a:t>(Automatically</a:t>
-            </a:r>
-            <a:r>
-              <a:rPr sz="1200" i="1" spc="-30" dirty="0">
-                <a:latin typeface="Times New Roman"/>
-                <a:cs typeface="Times New Roman"/>
-              </a:rPr>
-              <a:t> </a:t>
-            </a:r>
-            <a:r>
-              <a:rPr sz="1200" i="1" dirty="0">
-                <a:latin typeface="Times New Roman"/>
-                <a:cs typeface="Times New Roman"/>
-              </a:rPr>
-              <a:t>reset</a:t>
-            </a:r>
-            <a:r>
-              <a:rPr sz="1200" i="1" spc="-20" dirty="0">
-                <a:latin typeface="Times New Roman"/>
-                <a:cs typeface="Times New Roman"/>
-              </a:rPr>
-              <a:t> </a:t>
-            </a:r>
-            <a:r>
-              <a:rPr sz="1200" i="1" dirty="0">
-                <a:latin typeface="Times New Roman"/>
-                <a:cs typeface="Times New Roman"/>
-              </a:rPr>
-              <a:t>the</a:t>
-            </a:r>
-            <a:r>
-              <a:rPr sz="1200" i="1" spc="-30" dirty="0">
-                <a:latin typeface="Times New Roman"/>
-                <a:cs typeface="Times New Roman"/>
-              </a:rPr>
-              <a:t> </a:t>
-            </a:r>
-            <a:r>
-              <a:rPr sz="1200" i="1" dirty="0">
-                <a:latin typeface="Times New Roman"/>
-                <a:cs typeface="Times New Roman"/>
-              </a:rPr>
-              <a:t>form</a:t>
-            </a:r>
-            <a:r>
-              <a:rPr sz="1200" i="1" spc="-25" dirty="0">
-                <a:latin typeface="Times New Roman"/>
-                <a:cs typeface="Times New Roman"/>
-              </a:rPr>
-              <a:t> </a:t>
-            </a:r>
-            <a:r>
-              <a:rPr sz="1200" i="1" dirty="0">
-                <a:latin typeface="Times New Roman"/>
-                <a:cs typeface="Times New Roman"/>
-              </a:rPr>
-              <a:t>fields</a:t>
-            </a:r>
-            <a:r>
-              <a:rPr sz="1200" i="1" spc="-30" dirty="0">
-                <a:latin typeface="Times New Roman"/>
-                <a:cs typeface="Times New Roman"/>
-              </a:rPr>
-              <a:t> </a:t>
-            </a:r>
-            <a:r>
-              <a:rPr sz="1200" i="1" dirty="0">
-                <a:latin typeface="Times New Roman"/>
-                <a:cs typeface="Times New Roman"/>
-              </a:rPr>
-              <a:t>after</a:t>
-            </a:r>
-            <a:r>
-              <a:rPr sz="1200" i="1" spc="-25" dirty="0">
-                <a:latin typeface="Times New Roman"/>
-                <a:cs typeface="Times New Roman"/>
-              </a:rPr>
-              <a:t> </a:t>
-            </a:r>
-            <a:r>
-              <a:rPr sz="1200" i="1" dirty="0">
-                <a:latin typeface="Times New Roman"/>
-                <a:cs typeface="Times New Roman"/>
-              </a:rPr>
-              <a:t>successful</a:t>
-            </a:r>
-            <a:r>
-              <a:rPr sz="1200" i="1" spc="-20" dirty="0">
-                <a:latin typeface="Times New Roman"/>
-                <a:cs typeface="Times New Roman"/>
-              </a:rPr>
-              <a:t> </a:t>
-            </a:r>
-            <a:r>
-              <a:rPr sz="1200" i="1" dirty="0">
-                <a:latin typeface="Times New Roman"/>
-                <a:cs typeface="Times New Roman"/>
-              </a:rPr>
-              <a:t>registration</a:t>
-            </a:r>
-            <a:r>
-              <a:rPr sz="1200" i="1" spc="-25" dirty="0">
-                <a:latin typeface="Times New Roman"/>
-                <a:cs typeface="Times New Roman"/>
-              </a:rPr>
-              <a:t> </a:t>
-            </a:r>
-            <a:r>
-              <a:rPr sz="1200" i="1" dirty="0">
-                <a:latin typeface="Times New Roman"/>
-                <a:cs typeface="Times New Roman"/>
-              </a:rPr>
-              <a:t>while</a:t>
-            </a:r>
-            <a:r>
-              <a:rPr sz="1200" i="1" spc="-20" dirty="0">
-                <a:latin typeface="Times New Roman"/>
-                <a:cs typeface="Times New Roman"/>
-              </a:rPr>
-              <a:t> </a:t>
-            </a:r>
-            <a:r>
-              <a:rPr sz="1200" i="1" dirty="0">
-                <a:latin typeface="Times New Roman"/>
-                <a:cs typeface="Times New Roman"/>
-              </a:rPr>
-              <a:t>keeping</a:t>
-            </a:r>
-            <a:r>
-              <a:rPr sz="1200" i="1" spc="-25" dirty="0">
-                <a:latin typeface="Times New Roman"/>
-                <a:cs typeface="Times New Roman"/>
-              </a:rPr>
-              <a:t> </a:t>
-            </a:r>
-            <a:r>
-              <a:rPr sz="1200" i="1" dirty="0">
-                <a:latin typeface="Times New Roman"/>
-                <a:cs typeface="Times New Roman"/>
-              </a:rPr>
-              <a:t>the</a:t>
-            </a:r>
-            <a:r>
-              <a:rPr sz="1200" i="1" spc="-20" dirty="0">
-                <a:latin typeface="Times New Roman"/>
-                <a:cs typeface="Times New Roman"/>
-              </a:rPr>
-              <a:t> </a:t>
-            </a:r>
-            <a:r>
-              <a:rPr sz="1200" i="1" dirty="0">
-                <a:latin typeface="Times New Roman"/>
-                <a:cs typeface="Times New Roman"/>
-              </a:rPr>
-              <a:t>table</a:t>
-            </a:r>
-            <a:r>
-              <a:rPr sz="1200" i="1" spc="-25" dirty="0">
-                <a:latin typeface="Times New Roman"/>
-                <a:cs typeface="Times New Roman"/>
-              </a:rPr>
-              <a:t> </a:t>
-            </a:r>
-            <a:r>
-              <a:rPr sz="1200" i="1" dirty="0">
-                <a:latin typeface="Times New Roman"/>
-                <a:cs typeface="Times New Roman"/>
-              </a:rPr>
-              <a:t>data</a:t>
-            </a:r>
-            <a:r>
-              <a:rPr sz="1200" i="1" spc="-20" dirty="0">
-                <a:latin typeface="Times New Roman"/>
-                <a:cs typeface="Times New Roman"/>
-              </a:rPr>
-              <a:t> </a:t>
-            </a:r>
-            <a:r>
-              <a:rPr sz="1200" i="1" spc="-10" dirty="0">
-                <a:latin typeface="Times New Roman"/>
-                <a:cs typeface="Times New Roman"/>
-              </a:rPr>
-              <a:t>intact.)</a:t>
-            </a:r>
-            <a:endParaRPr sz="1200">
+              <a:rPr lang="en-US" sz="1300" b="1" dirty="0">
+                <a:latin typeface="Times New Roman"/>
+                <a:cs typeface="Times New Roman"/>
+              </a:rPr>
+              <a:t>State Reset</a:t>
+            </a:r>
+            <a:r>
+              <a:rPr lang="en-US" sz="1300" dirty="0">
+                <a:latin typeface="Times New Roman"/>
+                <a:cs typeface="Times New Roman"/>
+              </a:rPr>
+              <a:t>: Used the .reset() method on the form object to clear all input fields after the data has been safely moved to the table.</a:t>
+            </a:r>
+          </a:p>
+          <a:p>
+            <a:pPr marL="298450" indent="-285750">
+              <a:lnSpc>
+                <a:spcPct val="100000"/>
+              </a:lnSpc>
+              <a:spcBef>
+                <a:spcPts val="95"/>
+              </a:spcBef>
+              <a:buFont typeface="Arial" panose="020B0604020202020204" pitchFamily="34" charset="0"/>
+              <a:buChar char="•"/>
+            </a:pPr>
+            <a:r>
+              <a:rPr lang="en-US" sz="1300" b="1" dirty="0">
+                <a:latin typeface="Times New Roman"/>
+                <a:cs typeface="Times New Roman"/>
+              </a:rPr>
+              <a:t>Validation Cleanup:</a:t>
+            </a:r>
+            <a:r>
+              <a:rPr lang="en-US" sz="1300" dirty="0">
+                <a:latin typeface="Times New Roman"/>
+                <a:cs typeface="Times New Roman"/>
+              </a:rPr>
+              <a:t> Added a loop to remove "</a:t>
+            </a:r>
+            <a:r>
+              <a:rPr lang="en-US" sz="1300" dirty="0" err="1">
+                <a:latin typeface="Times New Roman"/>
+                <a:cs typeface="Times New Roman"/>
+              </a:rPr>
+              <a:t>redBorder</a:t>
+            </a:r>
+            <a:r>
+              <a:rPr lang="en-US" sz="1300" dirty="0">
+                <a:latin typeface="Times New Roman"/>
+                <a:cs typeface="Times New Roman"/>
+              </a:rPr>
+              <a:t>" or "</a:t>
+            </a:r>
+            <a:r>
+              <a:rPr lang="en-US" sz="1300" dirty="0" err="1">
+                <a:latin typeface="Times New Roman"/>
+                <a:cs typeface="Times New Roman"/>
+              </a:rPr>
+              <a:t>greenBorder</a:t>
+            </a:r>
+            <a:r>
+              <a:rPr lang="en-US" sz="1300" dirty="0">
+                <a:latin typeface="Times New Roman"/>
+                <a:cs typeface="Times New Roman"/>
+              </a:rPr>
+              <a:t>" CSS classes from all inputs, returning the form to its original blank state.</a:t>
+            </a:r>
+            <a:endParaRPr sz="1300" dirty="0">
               <a:latin typeface="Times New Roman"/>
               <a:cs typeface="Times New Roman"/>
             </a:endParaRPr>
@@ -7047,8 +5716,8 @@
         </p:nvSpPr>
         <p:spPr>
           <a:xfrm>
-            <a:off x="749604" y="6797420"/>
-            <a:ext cx="6219825" cy="572770"/>
+            <a:off x="738397" y="6680495"/>
+            <a:ext cx="6219825" cy="948337"/>
           </a:xfrm>
           <a:prstGeom prst="rect">
             <a:avLst/>
@@ -7117,217 +5786,95 @@
               </a:rPr>
               <a:t>Message:</a:t>
             </a:r>
-            <a:endParaRPr sz="1300">
+            <a:endParaRPr sz="1300" dirty="0">
               <a:latin typeface="Times New Roman"/>
               <a:cs typeface="Times New Roman"/>
             </a:endParaRPr>
           </a:p>
           <a:p>
-            <a:pPr marL="149225" marR="5080">
+            <a:pPr marL="434975" marR="5080" indent="-285750">
               <a:lnSpc>
                 <a:spcPts val="1380"/>
               </a:lnSpc>
               <a:spcBef>
                 <a:spcPts val="60"/>
               </a:spcBef>
+              <a:buFont typeface="Arial" panose="020B0604020202020204" pitchFamily="34" charset="0"/>
+              <a:buChar char="•"/>
             </a:pPr>
             <a:r>
-              <a:rPr sz="1200" i="1" dirty="0">
-                <a:latin typeface="Times New Roman"/>
-                <a:cs typeface="Times New Roman"/>
-              </a:rPr>
-              <a:t>(Show</a:t>
-            </a:r>
-            <a:r>
-              <a:rPr sz="1200" i="1" spc="-20" dirty="0">
-                <a:latin typeface="Times New Roman"/>
-                <a:cs typeface="Times New Roman"/>
-              </a:rPr>
-              <a:t> </a:t>
-            </a:r>
-            <a:r>
-              <a:rPr sz="1200" i="1" dirty="0">
-                <a:latin typeface="Times New Roman"/>
-                <a:cs typeface="Times New Roman"/>
-              </a:rPr>
-              <a:t>a</a:t>
-            </a:r>
-            <a:r>
-              <a:rPr sz="1200" i="1" spc="-15" dirty="0">
-                <a:latin typeface="Times New Roman"/>
-                <a:cs typeface="Times New Roman"/>
-              </a:rPr>
-              <a:t> </a:t>
-            </a:r>
-            <a:r>
-              <a:rPr sz="1200" i="1" dirty="0">
-                <a:latin typeface="Times New Roman"/>
-                <a:cs typeface="Times New Roman"/>
-              </a:rPr>
-              <a:t>confirmation</a:t>
-            </a:r>
-            <a:r>
-              <a:rPr sz="1200" i="1" spc="-15" dirty="0">
-                <a:latin typeface="Times New Roman"/>
-                <a:cs typeface="Times New Roman"/>
-              </a:rPr>
-              <a:t> </a:t>
-            </a:r>
-            <a:r>
-              <a:rPr sz="1200" i="1" dirty="0">
-                <a:latin typeface="Times New Roman"/>
-                <a:cs typeface="Times New Roman"/>
-              </a:rPr>
-              <a:t>message</a:t>
-            </a:r>
-            <a:r>
-              <a:rPr sz="1200" i="1" spc="-15" dirty="0">
-                <a:latin typeface="Times New Roman"/>
-                <a:cs typeface="Times New Roman"/>
-              </a:rPr>
-              <a:t> </a:t>
-            </a:r>
-            <a:r>
-              <a:rPr sz="1200" i="1" dirty="0">
-                <a:latin typeface="Times New Roman"/>
-                <a:cs typeface="Times New Roman"/>
-              </a:rPr>
-              <a:t>after</a:t>
-            </a:r>
-            <a:r>
-              <a:rPr sz="1200" i="1" spc="-20" dirty="0">
-                <a:latin typeface="Times New Roman"/>
-                <a:cs typeface="Times New Roman"/>
-              </a:rPr>
-              <a:t> </a:t>
-            </a:r>
-            <a:r>
-              <a:rPr sz="1200" i="1" dirty="0">
-                <a:latin typeface="Times New Roman"/>
-                <a:cs typeface="Times New Roman"/>
-              </a:rPr>
-              <a:t>successful</a:t>
-            </a:r>
-            <a:r>
-              <a:rPr sz="1200" i="1" spc="-15" dirty="0">
-                <a:latin typeface="Times New Roman"/>
-                <a:cs typeface="Times New Roman"/>
-              </a:rPr>
-              <a:t> </a:t>
-            </a:r>
-            <a:r>
-              <a:rPr sz="1200" i="1" dirty="0">
-                <a:latin typeface="Times New Roman"/>
-                <a:cs typeface="Times New Roman"/>
-              </a:rPr>
-              <a:t>registration</a:t>
-            </a:r>
-            <a:r>
-              <a:rPr sz="1200" i="1" spc="-15" dirty="0">
-                <a:latin typeface="Times New Roman"/>
-                <a:cs typeface="Times New Roman"/>
-              </a:rPr>
-              <a:t> </a:t>
-            </a:r>
-            <a:r>
-              <a:rPr sz="1200" i="1" dirty="0">
-                <a:latin typeface="Times New Roman"/>
-                <a:cs typeface="Times New Roman"/>
-              </a:rPr>
-              <a:t>and</a:t>
-            </a:r>
-            <a:r>
-              <a:rPr sz="1200" i="1" spc="-15" dirty="0">
-                <a:latin typeface="Times New Roman"/>
-                <a:cs typeface="Times New Roman"/>
-              </a:rPr>
-              <a:t> </a:t>
-            </a:r>
-            <a:r>
-              <a:rPr sz="1200" i="1" dirty="0">
-                <a:latin typeface="Times New Roman"/>
-                <a:cs typeface="Times New Roman"/>
-              </a:rPr>
-              <a:t>remove</a:t>
-            </a:r>
-            <a:r>
-              <a:rPr sz="1200" i="1" spc="-20" dirty="0">
-                <a:latin typeface="Times New Roman"/>
-                <a:cs typeface="Times New Roman"/>
-              </a:rPr>
-              <a:t> </a:t>
-            </a:r>
-            <a:r>
-              <a:rPr sz="1200" i="1" dirty="0">
-                <a:latin typeface="Times New Roman"/>
-                <a:cs typeface="Times New Roman"/>
-              </a:rPr>
-              <a:t>it</a:t>
-            </a:r>
-            <a:r>
-              <a:rPr sz="1200" i="1" spc="-15" dirty="0">
-                <a:latin typeface="Times New Roman"/>
-                <a:cs typeface="Times New Roman"/>
-              </a:rPr>
-              <a:t> </a:t>
-            </a:r>
-            <a:r>
-              <a:rPr sz="1200" i="1" spc="-10" dirty="0">
-                <a:latin typeface="Times New Roman"/>
-                <a:cs typeface="Times New Roman"/>
-              </a:rPr>
-              <a:t>automatically</a:t>
-            </a:r>
-            <a:r>
-              <a:rPr sz="1200" i="1" spc="-20" dirty="0">
-                <a:latin typeface="Times New Roman"/>
-                <a:cs typeface="Times New Roman"/>
-              </a:rPr>
-              <a:t> </a:t>
-            </a:r>
-            <a:r>
-              <a:rPr sz="1200" i="1" dirty="0">
-                <a:latin typeface="Times New Roman"/>
-                <a:cs typeface="Times New Roman"/>
-              </a:rPr>
-              <a:t>after</a:t>
-            </a:r>
-            <a:r>
-              <a:rPr sz="1200" i="1" spc="-20" dirty="0">
-                <a:latin typeface="Times New Roman"/>
-                <a:cs typeface="Times New Roman"/>
-              </a:rPr>
-              <a:t> </a:t>
-            </a:r>
-            <a:r>
-              <a:rPr sz="1200" i="1" dirty="0">
-                <a:latin typeface="Times New Roman"/>
-                <a:cs typeface="Times New Roman"/>
-              </a:rPr>
-              <a:t>a</a:t>
-            </a:r>
-            <a:r>
-              <a:rPr sz="1200" i="1" spc="-15" dirty="0">
-                <a:latin typeface="Times New Roman"/>
-                <a:cs typeface="Times New Roman"/>
-              </a:rPr>
-              <a:t> </a:t>
-            </a:r>
-            <a:r>
-              <a:rPr sz="1200" i="1" spc="-25" dirty="0">
-                <a:latin typeface="Times New Roman"/>
-                <a:cs typeface="Times New Roman"/>
-              </a:rPr>
-              <a:t>few </a:t>
-            </a:r>
-            <a:r>
-              <a:rPr sz="1200" i="1" spc="-10" dirty="0">
-                <a:latin typeface="Times New Roman"/>
-                <a:cs typeface="Times New Roman"/>
-              </a:rPr>
-              <a:t>seconds.)</a:t>
-            </a:r>
-            <a:endParaRPr sz="1200">
+              <a:rPr lang="en-US" sz="1300" b="1" dirty="0">
+                <a:latin typeface="Times New Roman"/>
+                <a:cs typeface="Times New Roman"/>
+              </a:rPr>
+              <a:t>Visual Confirmation: </a:t>
+            </a:r>
+            <a:r>
+              <a:rPr lang="en-US" sz="1300" dirty="0">
+                <a:latin typeface="Times New Roman"/>
+                <a:cs typeface="Times New Roman"/>
+              </a:rPr>
+              <a:t>Directed a "Registration Successful!" message to a dedicated </a:t>
+            </a:r>
+            <a:r>
+              <a:rPr lang="en-US" sz="1300" dirty="0" err="1">
+                <a:latin typeface="Times New Roman"/>
+                <a:cs typeface="Times New Roman"/>
+              </a:rPr>
+              <a:t>statusMsg</a:t>
+            </a:r>
+            <a:r>
+              <a:rPr lang="en-US" sz="1300" dirty="0">
+                <a:latin typeface="Times New Roman"/>
+                <a:cs typeface="Times New Roman"/>
+              </a:rPr>
+              <a:t> div with green text styling.</a:t>
+            </a:r>
+            <a:endParaRPr lang="en-US" sz="400" dirty="0">
+              <a:latin typeface="Times New Roman"/>
+              <a:cs typeface="Times New Roman"/>
+            </a:endParaRPr>
+          </a:p>
+          <a:p>
+            <a:pPr marL="434975" marR="5080" indent="-285750">
+              <a:lnSpc>
+                <a:spcPts val="1380"/>
+              </a:lnSpc>
+              <a:spcBef>
+                <a:spcPts val="60"/>
+              </a:spcBef>
+              <a:buFont typeface="Arial" panose="020B0604020202020204" pitchFamily="34" charset="0"/>
+              <a:buChar char="•"/>
+            </a:pPr>
+            <a:r>
+              <a:rPr lang="en-US" sz="1300" b="1" dirty="0">
+                <a:latin typeface="Times New Roman"/>
+                <a:cs typeface="Times New Roman"/>
+              </a:rPr>
+              <a:t>Auto-Removal</a:t>
+            </a:r>
+            <a:r>
+              <a:rPr lang="en-US" sz="1300" dirty="0">
+                <a:latin typeface="Times New Roman"/>
+                <a:cs typeface="Times New Roman"/>
+              </a:rPr>
+              <a:t>: Applied </a:t>
+            </a:r>
+            <a:r>
+              <a:rPr lang="en-US" sz="1300" dirty="0" err="1">
+                <a:latin typeface="Times New Roman"/>
+                <a:cs typeface="Times New Roman"/>
+              </a:rPr>
+              <a:t>setTimeout</a:t>
+            </a:r>
+            <a:r>
+              <a:rPr lang="en-US" sz="1300" dirty="0">
+                <a:latin typeface="Times New Roman"/>
+                <a:cs typeface="Times New Roman"/>
+              </a:rPr>
+              <a:t>() to automatically clear the success message after 3 seconds to keep the interface clean.</a:t>
+            </a:r>
+            <a:endParaRPr sz="1300" dirty="0">
               <a:latin typeface="Times New Roman"/>
               <a:cs typeface="Times New Roman"/>
             </a:endParaRPr>
@@ -7342,7 +5889,7 @@
         </p:nvGrpSpPr>
         <p:grpSpPr>
           <a:xfrm>
-            <a:off x="801369" y="7851775"/>
+            <a:off x="792796" y="7760911"/>
             <a:ext cx="6402705" cy="20955"/>
             <a:chOff x="801369" y="7851775"/>
             <a:chExt cx="6402705" cy="20955"/>
@@ -7687,8 +6234,8 @@
         </p:nvSpPr>
         <p:spPr>
           <a:xfrm>
-            <a:off x="796848" y="8129777"/>
-            <a:ext cx="5430520" cy="549910"/>
+            <a:off x="749604" y="7930032"/>
+            <a:ext cx="6280572" cy="1294585"/>
           </a:xfrm>
           <a:prstGeom prst="rect">
             <a:avLst/>
@@ -7757,210 +6304,91 @@
               </a:rPr>
               <a:t>Feedback:</a:t>
             </a:r>
-            <a:endParaRPr sz="1300">
+            <a:endParaRPr sz="1300" dirty="0">
               <a:latin typeface="Times New Roman"/>
               <a:cs typeface="Times New Roman"/>
             </a:endParaRPr>
           </a:p>
           <a:p>
-            <a:pPr marL="102235">
+            <a:pPr marL="387985" indent="-285750">
               <a:lnSpc>
                 <a:spcPct val="100000"/>
               </a:lnSpc>
               <a:spcBef>
                 <a:spcPts val="1130"/>
               </a:spcBef>
+              <a:buFont typeface="Arial" panose="020B0604020202020204" pitchFamily="34" charset="0"/>
+              <a:buChar char="•"/>
             </a:pPr>
             <a:r>
-              <a:rPr sz="1200" i="1" dirty="0">
-                <a:latin typeface="Times New Roman"/>
-                <a:cs typeface="Times New Roman"/>
-              </a:rPr>
-              <a:t>(Provide</a:t>
-            </a:r>
-            <a:r>
-              <a:rPr sz="1200" i="1" spc="-35" dirty="0">
-                <a:latin typeface="Times New Roman"/>
-                <a:cs typeface="Times New Roman"/>
-              </a:rPr>
-              <a:t> </a:t>
-            </a:r>
-            <a:r>
-              <a:rPr sz="1200" i="1" dirty="0">
-                <a:latin typeface="Times New Roman"/>
-                <a:cs typeface="Times New Roman"/>
-              </a:rPr>
-              <a:t>visual</a:t>
-            </a:r>
-            <a:r>
-              <a:rPr sz="1200" i="1" spc="-25" dirty="0">
-                <a:latin typeface="Times New Roman"/>
-                <a:cs typeface="Times New Roman"/>
-              </a:rPr>
-              <a:t> </a:t>
-            </a:r>
-            <a:r>
-              <a:rPr sz="1200" i="1" dirty="0">
-                <a:latin typeface="Times New Roman"/>
-                <a:cs typeface="Times New Roman"/>
-              </a:rPr>
-              <a:t>feedback</a:t>
-            </a:r>
-            <a:r>
-              <a:rPr sz="1200" i="1" spc="-25" dirty="0">
-                <a:latin typeface="Times New Roman"/>
-                <a:cs typeface="Times New Roman"/>
-              </a:rPr>
-              <a:t> </a:t>
-            </a:r>
-            <a:r>
-              <a:rPr sz="1200" i="1" dirty="0">
-                <a:latin typeface="Times New Roman"/>
-                <a:cs typeface="Times New Roman"/>
-              </a:rPr>
-              <a:t>by</a:t>
-            </a:r>
-            <a:r>
-              <a:rPr sz="1200" i="1" spc="-35" dirty="0">
-                <a:latin typeface="Times New Roman"/>
-                <a:cs typeface="Times New Roman"/>
-              </a:rPr>
-              <a:t> </a:t>
-            </a:r>
-            <a:r>
-              <a:rPr sz="1200" i="1" dirty="0">
-                <a:latin typeface="Times New Roman"/>
-                <a:cs typeface="Times New Roman"/>
-              </a:rPr>
-              <a:t>highlighting</a:t>
-            </a:r>
-            <a:r>
-              <a:rPr sz="1200" i="1" spc="-30" dirty="0">
-                <a:latin typeface="Times New Roman"/>
-                <a:cs typeface="Times New Roman"/>
-              </a:rPr>
-              <a:t> </a:t>
-            </a:r>
-            <a:r>
-              <a:rPr sz="1200" i="1" dirty="0">
-                <a:latin typeface="Times New Roman"/>
-                <a:cs typeface="Times New Roman"/>
-              </a:rPr>
-              <a:t>valid</a:t>
-            </a:r>
-            <a:r>
-              <a:rPr sz="1200" i="1" spc="-30" dirty="0">
-                <a:latin typeface="Times New Roman"/>
-                <a:cs typeface="Times New Roman"/>
-              </a:rPr>
-              <a:t> </a:t>
-            </a:r>
-            <a:r>
-              <a:rPr sz="1200" i="1" dirty="0">
-                <a:latin typeface="Times New Roman"/>
-                <a:cs typeface="Times New Roman"/>
-              </a:rPr>
-              <a:t>fields</a:t>
-            </a:r>
-            <a:r>
-              <a:rPr sz="1200" i="1" spc="-35" dirty="0">
-                <a:latin typeface="Times New Roman"/>
-                <a:cs typeface="Times New Roman"/>
-              </a:rPr>
-              <a:t> </a:t>
-            </a:r>
-            <a:r>
-              <a:rPr sz="1200" i="1" dirty="0">
-                <a:latin typeface="Times New Roman"/>
-                <a:cs typeface="Times New Roman"/>
-              </a:rPr>
-              <a:t>in</a:t>
-            </a:r>
-            <a:r>
-              <a:rPr sz="1200" i="1" spc="-30" dirty="0">
-                <a:latin typeface="Times New Roman"/>
-                <a:cs typeface="Times New Roman"/>
-              </a:rPr>
-              <a:t> </a:t>
-            </a:r>
-            <a:r>
-              <a:rPr sz="1200" i="1" dirty="0">
-                <a:latin typeface="Times New Roman"/>
-                <a:cs typeface="Times New Roman"/>
-              </a:rPr>
-              <a:t>green</a:t>
-            </a:r>
-            <a:r>
-              <a:rPr sz="1200" i="1" spc="-30" dirty="0">
-                <a:latin typeface="Times New Roman"/>
-                <a:cs typeface="Times New Roman"/>
-              </a:rPr>
-              <a:t> </a:t>
-            </a:r>
-            <a:r>
-              <a:rPr sz="1200" i="1" dirty="0">
-                <a:latin typeface="Times New Roman"/>
-                <a:cs typeface="Times New Roman"/>
-              </a:rPr>
-              <a:t>and</a:t>
-            </a:r>
-            <a:r>
-              <a:rPr sz="1200" i="1" spc="-30" dirty="0">
-                <a:latin typeface="Times New Roman"/>
-                <a:cs typeface="Times New Roman"/>
-              </a:rPr>
-              <a:t> </a:t>
-            </a:r>
-            <a:r>
-              <a:rPr sz="1200" i="1" dirty="0">
-                <a:latin typeface="Times New Roman"/>
-                <a:cs typeface="Times New Roman"/>
-              </a:rPr>
-              <a:t>invalid</a:t>
-            </a:r>
-            <a:r>
-              <a:rPr sz="1200" i="1" spc="-30" dirty="0">
-                <a:latin typeface="Times New Roman"/>
-                <a:cs typeface="Times New Roman"/>
-              </a:rPr>
-              <a:t> </a:t>
-            </a:r>
-            <a:r>
-              <a:rPr sz="1200" i="1" dirty="0">
-                <a:latin typeface="Times New Roman"/>
-                <a:cs typeface="Times New Roman"/>
-              </a:rPr>
-              <a:t>fields</a:t>
-            </a:r>
-            <a:r>
-              <a:rPr sz="1200" i="1" spc="-35" dirty="0">
-                <a:latin typeface="Times New Roman"/>
-                <a:cs typeface="Times New Roman"/>
-              </a:rPr>
-              <a:t> </a:t>
-            </a:r>
-            <a:r>
-              <a:rPr sz="1200" i="1" dirty="0">
-                <a:latin typeface="Times New Roman"/>
-                <a:cs typeface="Times New Roman"/>
-              </a:rPr>
-              <a:t>in</a:t>
-            </a:r>
-            <a:r>
-              <a:rPr sz="1200" i="1" spc="-30" dirty="0">
-                <a:latin typeface="Times New Roman"/>
-                <a:cs typeface="Times New Roman"/>
-              </a:rPr>
-              <a:t> </a:t>
-            </a:r>
-            <a:r>
-              <a:rPr sz="1200" i="1" spc="-10" dirty="0">
-                <a:latin typeface="Times New Roman"/>
-                <a:cs typeface="Times New Roman"/>
-              </a:rPr>
-              <a:t>red.)</a:t>
-            </a:r>
-            <a:endParaRPr sz="1200">
+              <a:rPr lang="en-US" sz="1300" b="1" dirty="0">
+                <a:latin typeface="Times New Roman"/>
+                <a:cs typeface="Times New Roman"/>
+              </a:rPr>
+              <a:t>Visual Cues</a:t>
+            </a:r>
+            <a:r>
+              <a:rPr lang="en-US" sz="1300" dirty="0">
+                <a:latin typeface="Times New Roman"/>
+                <a:cs typeface="Times New Roman"/>
+              </a:rPr>
+              <a:t>: Programmed the script to dynamically assign CSS classes (</a:t>
+            </a:r>
+            <a:r>
+              <a:rPr lang="en-US" sz="1300" dirty="0" err="1">
+                <a:latin typeface="Times New Roman"/>
+                <a:cs typeface="Times New Roman"/>
+              </a:rPr>
+              <a:t>redBorder</a:t>
+            </a:r>
+            <a:r>
+              <a:rPr lang="en-US" sz="1300" dirty="0">
+                <a:latin typeface="Times New Roman"/>
+                <a:cs typeface="Times New Roman"/>
+              </a:rPr>
+              <a:t> for errors or </a:t>
+            </a:r>
+            <a:r>
+              <a:rPr lang="en-US" sz="1300" dirty="0" err="1">
+                <a:latin typeface="Times New Roman"/>
+                <a:cs typeface="Times New Roman"/>
+              </a:rPr>
+              <a:t>greenBorder</a:t>
+            </a:r>
+            <a:r>
+              <a:rPr lang="en-US" sz="1300" dirty="0">
+                <a:latin typeface="Times New Roman"/>
+                <a:cs typeface="Times New Roman"/>
+              </a:rPr>
+              <a:t> for valid data) based on validation results.</a:t>
+            </a:r>
+          </a:p>
+          <a:p>
+            <a:pPr marL="387985" indent="-285750">
+              <a:lnSpc>
+                <a:spcPct val="100000"/>
+              </a:lnSpc>
+              <a:spcBef>
+                <a:spcPts val="1130"/>
+              </a:spcBef>
+              <a:buFont typeface="Arial" panose="020B0604020202020204" pitchFamily="34" charset="0"/>
+              <a:buChar char="•"/>
+            </a:pPr>
+            <a:r>
+              <a:rPr lang="en-US" sz="1300" b="1" dirty="0">
+                <a:latin typeface="Times New Roman"/>
+                <a:cs typeface="Times New Roman"/>
+              </a:rPr>
+              <a:t>Instant Correction</a:t>
+            </a:r>
+            <a:r>
+              <a:rPr lang="en-US" sz="1300" dirty="0">
+                <a:latin typeface="Times New Roman"/>
+                <a:cs typeface="Times New Roman"/>
+              </a:rPr>
+              <a:t>: This provides the user with immediate visual confirmation of which fields need correction before they can proceed.</a:t>
+            </a:r>
+            <a:endParaRPr sz="1300" dirty="0">
               <a:latin typeface="Times New Roman"/>
               <a:cs typeface="Times New Roman"/>
             </a:endParaRPr>
@@ -7975,7 +6403,7 @@
         </p:nvGrpSpPr>
         <p:grpSpPr>
           <a:xfrm>
-            <a:off x="801369" y="9290050"/>
+            <a:off x="791844" y="9453405"/>
             <a:ext cx="6402705" cy="21590"/>
             <a:chOff x="801369" y="9290050"/>
             <a:chExt cx="6402705" cy="21590"/>
@@ -8433,8 +6861,8 @@
         </p:nvSpPr>
         <p:spPr>
           <a:xfrm>
-            <a:off x="796848" y="1586229"/>
-            <a:ext cx="5748655" cy="697865"/>
+            <a:off x="771934" y="1284550"/>
+            <a:ext cx="6291580" cy="1186863"/>
           </a:xfrm>
           <a:prstGeom prst="rect">
             <a:avLst/>
@@ -8489,245 +6917,63 @@
               </a:rPr>
               <a:t>Enhancements:</a:t>
             </a:r>
-            <a:endParaRPr sz="1300">
+            <a:endParaRPr sz="1300" dirty="0">
               <a:latin typeface="Times New Roman"/>
               <a:cs typeface="Times New Roman"/>
             </a:endParaRPr>
           </a:p>
           <a:p>
-            <a:pPr marL="102235" marR="5080">
+            <a:pPr marL="387985" marR="5080" indent="-285750">
               <a:lnSpc>
                 <a:spcPts val="1380"/>
               </a:lnSpc>
               <a:spcBef>
                 <a:spcPts val="1010"/>
               </a:spcBef>
+              <a:buFont typeface="Arial" panose="020B0604020202020204" pitchFamily="34" charset="0"/>
+              <a:buChar char="•"/>
             </a:pPr>
             <a:r>
-              <a:rPr sz="1200" i="1" dirty="0">
-                <a:latin typeface="Times New Roman"/>
-                <a:cs typeface="Times New Roman"/>
-              </a:rPr>
-              <a:t>(Implement</a:t>
-            </a:r>
-            <a:r>
-              <a:rPr sz="1200" i="1" spc="-35" dirty="0">
-                <a:latin typeface="Times New Roman"/>
-                <a:cs typeface="Times New Roman"/>
-              </a:rPr>
-              <a:t> </a:t>
-            </a:r>
-            <a:r>
-              <a:rPr sz="1200" i="1" dirty="0">
-                <a:latin typeface="Times New Roman"/>
-                <a:cs typeface="Times New Roman"/>
-              </a:rPr>
-              <a:t>additional</a:t>
-            </a:r>
-            <a:r>
-              <a:rPr sz="1200" i="1" spc="-35" dirty="0">
-                <a:latin typeface="Times New Roman"/>
-                <a:cs typeface="Times New Roman"/>
-              </a:rPr>
-              <a:t> </a:t>
-            </a:r>
-            <a:r>
-              <a:rPr sz="1200" i="1" dirty="0">
-                <a:latin typeface="Times New Roman"/>
-                <a:cs typeface="Times New Roman"/>
-              </a:rPr>
-              <a:t>features</a:t>
-            </a:r>
-            <a:r>
-              <a:rPr sz="1200" i="1" spc="-40" dirty="0">
-                <a:latin typeface="Times New Roman"/>
-                <a:cs typeface="Times New Roman"/>
-              </a:rPr>
-              <a:t> </a:t>
-            </a:r>
-            <a:r>
-              <a:rPr sz="1200" i="1" dirty="0">
-                <a:latin typeface="Times New Roman"/>
-                <a:cs typeface="Times New Roman"/>
-              </a:rPr>
-              <a:t>such</a:t>
-            </a:r>
-            <a:r>
-              <a:rPr sz="1200" i="1" spc="-30" dirty="0">
-                <a:latin typeface="Times New Roman"/>
-                <a:cs typeface="Times New Roman"/>
-              </a:rPr>
-              <a:t> </a:t>
-            </a:r>
-            <a:r>
-              <a:rPr sz="1200" i="1" dirty="0">
-                <a:latin typeface="Times New Roman"/>
-                <a:cs typeface="Times New Roman"/>
-              </a:rPr>
-              <a:t>as</a:t>
-            </a:r>
-            <a:r>
-              <a:rPr sz="1200" i="1" spc="-40" dirty="0">
-                <a:latin typeface="Times New Roman"/>
-                <a:cs typeface="Times New Roman"/>
-              </a:rPr>
-              <a:t> </a:t>
-            </a:r>
-            <a:r>
-              <a:rPr sz="1200" i="1" dirty="0">
-                <a:latin typeface="Times New Roman"/>
-                <a:cs typeface="Times New Roman"/>
-              </a:rPr>
-              <a:t>participant</a:t>
-            </a:r>
-            <a:r>
-              <a:rPr sz="1200" i="1" spc="-35" dirty="0">
-                <a:latin typeface="Times New Roman"/>
-                <a:cs typeface="Times New Roman"/>
-              </a:rPr>
-              <a:t> </a:t>
-            </a:r>
-            <a:r>
-              <a:rPr sz="1200" i="1" dirty="0">
-                <a:latin typeface="Times New Roman"/>
-                <a:cs typeface="Times New Roman"/>
-              </a:rPr>
-              <a:t>count,</a:t>
-            </a:r>
-            <a:r>
-              <a:rPr sz="1200" i="1" spc="-30" dirty="0">
-                <a:latin typeface="Times New Roman"/>
-                <a:cs typeface="Times New Roman"/>
-              </a:rPr>
-              <a:t> </a:t>
-            </a:r>
-            <a:r>
-              <a:rPr sz="1200" i="1" dirty="0">
-                <a:latin typeface="Times New Roman"/>
-                <a:cs typeface="Times New Roman"/>
-              </a:rPr>
-              <a:t>delete</a:t>
-            </a:r>
-            <a:r>
-              <a:rPr sz="1200" i="1" spc="-40" dirty="0">
-                <a:latin typeface="Times New Roman"/>
-                <a:cs typeface="Times New Roman"/>
-              </a:rPr>
-              <a:t> </a:t>
-            </a:r>
-            <a:r>
-              <a:rPr sz="1200" i="1" dirty="0">
-                <a:latin typeface="Times New Roman"/>
-                <a:cs typeface="Times New Roman"/>
-              </a:rPr>
-              <a:t>row</a:t>
-            </a:r>
-            <a:r>
-              <a:rPr sz="1200" i="1" spc="-35" dirty="0">
-                <a:latin typeface="Times New Roman"/>
-                <a:cs typeface="Times New Roman"/>
-              </a:rPr>
-              <a:t> </a:t>
-            </a:r>
-            <a:r>
-              <a:rPr sz="1200" i="1" dirty="0">
-                <a:latin typeface="Times New Roman"/>
-                <a:cs typeface="Times New Roman"/>
-              </a:rPr>
-              <a:t>option,</a:t>
-            </a:r>
-            <a:r>
-              <a:rPr sz="1200" i="1" spc="-35" dirty="0">
-                <a:latin typeface="Times New Roman"/>
-                <a:cs typeface="Times New Roman"/>
-              </a:rPr>
-              <a:t> </a:t>
-            </a:r>
-            <a:r>
-              <a:rPr sz="1200" i="1" dirty="0">
-                <a:latin typeface="Times New Roman"/>
-                <a:cs typeface="Times New Roman"/>
-              </a:rPr>
-              <a:t>duplicate</a:t>
-            </a:r>
-            <a:r>
-              <a:rPr sz="1200" i="1" spc="-30" dirty="0">
-                <a:latin typeface="Times New Roman"/>
-                <a:cs typeface="Times New Roman"/>
-              </a:rPr>
-              <a:t> </a:t>
-            </a:r>
-            <a:r>
-              <a:rPr sz="1200" i="1" spc="-10" dirty="0">
-                <a:latin typeface="Times New Roman"/>
-                <a:cs typeface="Times New Roman"/>
-              </a:rPr>
-              <a:t>email </a:t>
-            </a:r>
-            <a:r>
-              <a:rPr sz="1200" i="1" dirty="0">
-                <a:latin typeface="Times New Roman"/>
-                <a:cs typeface="Times New Roman"/>
-              </a:rPr>
-              <a:t>prevention,</a:t>
-            </a:r>
-            <a:r>
-              <a:rPr sz="1200" i="1" spc="-25" dirty="0">
-                <a:latin typeface="Times New Roman"/>
-                <a:cs typeface="Times New Roman"/>
-              </a:rPr>
-              <a:t> </a:t>
-            </a:r>
-            <a:r>
-              <a:rPr sz="1200" i="1" dirty="0">
-                <a:latin typeface="Times New Roman"/>
-                <a:cs typeface="Times New Roman"/>
-              </a:rPr>
-              <a:t>or</a:t>
-            </a:r>
-            <a:r>
-              <a:rPr sz="1200" i="1" spc="-30" dirty="0">
-                <a:latin typeface="Times New Roman"/>
-                <a:cs typeface="Times New Roman"/>
-              </a:rPr>
-              <a:t> </a:t>
-            </a:r>
-            <a:r>
-              <a:rPr sz="1200" i="1" dirty="0">
-                <a:latin typeface="Times New Roman"/>
-                <a:cs typeface="Times New Roman"/>
-              </a:rPr>
-              <a:t>event</a:t>
-            </a:r>
-            <a:r>
-              <a:rPr sz="1200" i="1" spc="-20" dirty="0">
-                <a:latin typeface="Times New Roman"/>
-                <a:cs typeface="Times New Roman"/>
-              </a:rPr>
-              <a:t> </a:t>
-            </a:r>
-            <a:r>
-              <a:rPr sz="1200" i="1" dirty="0">
-                <a:latin typeface="Times New Roman"/>
-                <a:cs typeface="Times New Roman"/>
-              </a:rPr>
-              <a:t>summary</a:t>
-            </a:r>
-            <a:r>
-              <a:rPr sz="1200" i="1" spc="-30" dirty="0">
-                <a:latin typeface="Times New Roman"/>
-                <a:cs typeface="Times New Roman"/>
-              </a:rPr>
-              <a:t> </a:t>
-            </a:r>
-            <a:r>
-              <a:rPr sz="1200" i="1" spc="-10" dirty="0">
-                <a:latin typeface="Times New Roman"/>
-                <a:cs typeface="Times New Roman"/>
-              </a:rPr>
-              <a:t>display.)</a:t>
-            </a:r>
-            <a:endParaRPr sz="1200">
+              <a:rPr lang="en-US" sz="1300" b="1" dirty="0">
+                <a:latin typeface="Times New Roman"/>
+                <a:cs typeface="Times New Roman"/>
+              </a:rPr>
+              <a:t>File Upload Validation</a:t>
+            </a:r>
+            <a:r>
+              <a:rPr lang="en-US" sz="1300" dirty="0">
+                <a:latin typeface="Times New Roman"/>
+                <a:cs typeface="Times New Roman"/>
+              </a:rPr>
+              <a:t>: Included a check to ensure an ID proof file has been selected before the form is considered complete.</a:t>
+            </a:r>
+          </a:p>
+          <a:p>
+            <a:pPr marL="387985" marR="5080" indent="-285750">
+              <a:lnSpc>
+                <a:spcPts val="1380"/>
+              </a:lnSpc>
+              <a:spcBef>
+                <a:spcPts val="1010"/>
+              </a:spcBef>
+              <a:buFont typeface="Arial" panose="020B0604020202020204" pitchFamily="34" charset="0"/>
+              <a:buChar char="•"/>
+            </a:pPr>
+            <a:r>
+              <a:rPr lang="en-US" sz="1300" b="1" dirty="0">
+                <a:latin typeface="Times New Roman"/>
+                <a:cs typeface="Times New Roman"/>
+              </a:rPr>
+              <a:t>Consistent Formatting</a:t>
+            </a:r>
+            <a:r>
+              <a:rPr lang="en-US" sz="1300" dirty="0">
+                <a:latin typeface="Times New Roman"/>
+                <a:cs typeface="Times New Roman"/>
+              </a:rPr>
+              <a:t>: Ensured that the dynamically added data in the table maintains the same professional alignment and styling as the header row.</a:t>
+            </a:r>
+            <a:endParaRPr sz="1300" dirty="0">
               <a:latin typeface="Times New Roman"/>
               <a:cs typeface="Times New Roman"/>
             </a:endParaRPr>
@@ -8742,7 +6988,7 @@
         </p:nvGrpSpPr>
         <p:grpSpPr>
           <a:xfrm>
-            <a:off x="801369" y="2663824"/>
+            <a:off x="801370" y="2526792"/>
             <a:ext cx="6402705" cy="20320"/>
             <a:chOff x="801369" y="2663824"/>
             <a:chExt cx="6402705" cy="20320"/>
@@ -9087,8 +7333,8 @@
         </p:nvSpPr>
         <p:spPr>
           <a:xfrm>
-            <a:off x="748080" y="2995930"/>
-            <a:ext cx="6297930" cy="718185"/>
+            <a:off x="660810" y="2683305"/>
+            <a:ext cx="7016204" cy="1767150"/>
           </a:xfrm>
           <a:prstGeom prst="rect">
             <a:avLst/>
@@ -9158,329 +7404,173 @@
               </a:rPr>
               <a:t>Used:</a:t>
             </a:r>
-            <a:endParaRPr sz="1400">
+            <a:endParaRPr sz="1400" dirty="0">
               <a:latin typeface="Times New Roman"/>
               <a:cs typeface="Times New Roman"/>
             </a:endParaRPr>
           </a:p>
           <a:p>
-            <a:pPr marL="60960" marR="5080" indent="38100">
+            <a:pPr marL="346710" marR="5080" indent="-285750">
               <a:lnSpc>
                 <a:spcPts val="1390"/>
               </a:lnSpc>
               <a:spcBef>
                 <a:spcPts val="1025"/>
               </a:spcBef>
+              <a:buFont typeface="Arial" panose="020B0604020202020204" pitchFamily="34" charset="0"/>
+              <a:buChar char="•"/>
             </a:pPr>
             <a:r>
-              <a:rPr sz="1200" i="1" dirty="0">
-                <a:latin typeface="Times New Roman"/>
-                <a:cs typeface="Times New Roman"/>
-              </a:rPr>
-              <a:t>(Mention</a:t>
-            </a:r>
-            <a:r>
-              <a:rPr sz="1200" i="1" spc="-35" dirty="0">
-                <a:latin typeface="Times New Roman"/>
-                <a:cs typeface="Times New Roman"/>
-              </a:rPr>
-              <a:t> </a:t>
-            </a:r>
-            <a:r>
-              <a:rPr sz="1200" i="1" dirty="0">
-                <a:latin typeface="Times New Roman"/>
-                <a:cs typeface="Times New Roman"/>
-              </a:rPr>
-              <a:t>the</a:t>
-            </a:r>
-            <a:r>
-              <a:rPr sz="1200" i="1" spc="-30" dirty="0">
-                <a:latin typeface="Times New Roman"/>
-                <a:cs typeface="Times New Roman"/>
-              </a:rPr>
-              <a:t> </a:t>
-            </a:r>
-            <a:r>
-              <a:rPr sz="1200" i="1" dirty="0">
-                <a:latin typeface="Times New Roman"/>
-                <a:cs typeface="Times New Roman"/>
-              </a:rPr>
-              <a:t>JavaScript</a:t>
-            </a:r>
-            <a:r>
-              <a:rPr sz="1200" i="1" spc="-25" dirty="0">
-                <a:latin typeface="Times New Roman"/>
-                <a:cs typeface="Times New Roman"/>
-              </a:rPr>
-              <a:t> </a:t>
-            </a:r>
-            <a:r>
-              <a:rPr sz="1200" i="1" dirty="0">
-                <a:latin typeface="Times New Roman"/>
-                <a:cs typeface="Times New Roman"/>
-              </a:rPr>
-              <a:t>concepts</a:t>
-            </a:r>
-            <a:r>
-              <a:rPr sz="1200" i="1" spc="-35" dirty="0">
-                <a:latin typeface="Times New Roman"/>
-                <a:cs typeface="Times New Roman"/>
-              </a:rPr>
-              <a:t> </a:t>
-            </a:r>
-            <a:r>
-              <a:rPr sz="1200" i="1" dirty="0">
-                <a:latin typeface="Times New Roman"/>
-                <a:cs typeface="Times New Roman"/>
-              </a:rPr>
-              <a:t>applied</a:t>
-            </a:r>
-            <a:r>
-              <a:rPr sz="1200" i="1" spc="-30" dirty="0">
-                <a:latin typeface="Times New Roman"/>
-                <a:cs typeface="Times New Roman"/>
-              </a:rPr>
-              <a:t> </a:t>
-            </a:r>
-            <a:r>
-              <a:rPr sz="1200" i="1" dirty="0">
-                <a:latin typeface="Times New Roman"/>
-                <a:cs typeface="Times New Roman"/>
-              </a:rPr>
-              <a:t>in</a:t>
-            </a:r>
-            <a:r>
-              <a:rPr sz="1200" i="1" spc="-30" dirty="0">
-                <a:latin typeface="Times New Roman"/>
-                <a:cs typeface="Times New Roman"/>
-              </a:rPr>
-              <a:t> </a:t>
-            </a:r>
-            <a:r>
-              <a:rPr sz="1200" i="1" dirty="0">
-                <a:latin typeface="Times New Roman"/>
-                <a:cs typeface="Times New Roman"/>
-              </a:rPr>
-              <a:t>this</a:t>
-            </a:r>
-            <a:r>
-              <a:rPr sz="1200" i="1" spc="-35" dirty="0">
-                <a:latin typeface="Times New Roman"/>
-                <a:cs typeface="Times New Roman"/>
-              </a:rPr>
-              <a:t> </a:t>
-            </a:r>
-            <a:r>
-              <a:rPr sz="1200" i="1" dirty="0">
-                <a:latin typeface="Times New Roman"/>
-                <a:cs typeface="Times New Roman"/>
-              </a:rPr>
-              <a:t>assignment,</a:t>
-            </a:r>
-            <a:r>
-              <a:rPr sz="1200" i="1" spc="-30" dirty="0">
-                <a:latin typeface="Times New Roman"/>
-                <a:cs typeface="Times New Roman"/>
-              </a:rPr>
-              <a:t> </a:t>
-            </a:r>
-            <a:r>
-              <a:rPr sz="1200" i="1" dirty="0">
-                <a:latin typeface="Times New Roman"/>
-                <a:cs typeface="Times New Roman"/>
-              </a:rPr>
-              <a:t>such</a:t>
-            </a:r>
-            <a:r>
-              <a:rPr sz="1200" i="1" spc="-30" dirty="0">
-                <a:latin typeface="Times New Roman"/>
-                <a:cs typeface="Times New Roman"/>
-              </a:rPr>
-              <a:t> </a:t>
-            </a:r>
-            <a:r>
-              <a:rPr sz="1200" i="1" dirty="0">
-                <a:latin typeface="Times New Roman"/>
-                <a:cs typeface="Times New Roman"/>
-              </a:rPr>
-              <a:t>as</a:t>
-            </a:r>
-            <a:r>
-              <a:rPr sz="1200" i="1" spc="-35" dirty="0">
-                <a:latin typeface="Times New Roman"/>
-                <a:cs typeface="Times New Roman"/>
-              </a:rPr>
-              <a:t> </a:t>
-            </a:r>
-            <a:r>
-              <a:rPr sz="1200" i="1" dirty="0">
-                <a:latin typeface="Times New Roman"/>
-                <a:cs typeface="Times New Roman"/>
-              </a:rPr>
-              <a:t>DOM</a:t>
-            </a:r>
-            <a:r>
-              <a:rPr sz="1200" i="1" spc="-25" dirty="0">
-                <a:latin typeface="Times New Roman"/>
-                <a:cs typeface="Times New Roman"/>
-              </a:rPr>
-              <a:t> </a:t>
-            </a:r>
-            <a:r>
-              <a:rPr sz="1200" i="1" dirty="0">
-                <a:latin typeface="Times New Roman"/>
-                <a:cs typeface="Times New Roman"/>
-              </a:rPr>
-              <a:t>selection,</a:t>
-            </a:r>
-            <a:r>
-              <a:rPr sz="1200" i="1" spc="-30" dirty="0">
-                <a:latin typeface="Times New Roman"/>
-                <a:cs typeface="Times New Roman"/>
-              </a:rPr>
-              <a:t> </a:t>
-            </a:r>
-            <a:r>
-              <a:rPr sz="1200" i="1" dirty="0">
-                <a:latin typeface="Times New Roman"/>
-                <a:cs typeface="Times New Roman"/>
-              </a:rPr>
-              <a:t>event</a:t>
-            </a:r>
-            <a:r>
-              <a:rPr sz="1200" i="1" spc="-30" dirty="0">
-                <a:latin typeface="Times New Roman"/>
-                <a:cs typeface="Times New Roman"/>
-              </a:rPr>
-              <a:t> </a:t>
-            </a:r>
-            <a:r>
-              <a:rPr sz="1200" i="1" spc="-10" dirty="0">
-                <a:latin typeface="Times New Roman"/>
-                <a:cs typeface="Times New Roman"/>
-              </a:rPr>
-              <a:t>handling, </a:t>
-            </a:r>
-            <a:r>
-              <a:rPr sz="1200" i="1" dirty="0">
-                <a:latin typeface="Times New Roman"/>
-                <a:cs typeface="Times New Roman"/>
-              </a:rPr>
-              <a:t>validation</a:t>
-            </a:r>
-            <a:r>
-              <a:rPr sz="1200" i="1" spc="-40" dirty="0">
-                <a:latin typeface="Times New Roman"/>
-                <a:cs typeface="Times New Roman"/>
-              </a:rPr>
-              <a:t> </a:t>
-            </a:r>
-            <a:r>
-              <a:rPr sz="1200" i="1" dirty="0">
-                <a:latin typeface="Times New Roman"/>
-                <a:cs typeface="Times New Roman"/>
-              </a:rPr>
-              <a:t>logic,</a:t>
-            </a:r>
-            <a:r>
-              <a:rPr sz="1200" i="1" spc="-40" dirty="0">
-                <a:latin typeface="Times New Roman"/>
-                <a:cs typeface="Times New Roman"/>
-              </a:rPr>
-              <a:t> </a:t>
-            </a:r>
-            <a:r>
-              <a:rPr sz="1200" i="1" dirty="0">
-                <a:latin typeface="Times New Roman"/>
-                <a:cs typeface="Times New Roman"/>
-              </a:rPr>
-              <a:t>dynamic</a:t>
-            </a:r>
-            <a:r>
-              <a:rPr sz="1200" i="1" spc="-45" dirty="0">
-                <a:latin typeface="Times New Roman"/>
-                <a:cs typeface="Times New Roman"/>
-              </a:rPr>
-              <a:t> </a:t>
-            </a:r>
-            <a:r>
-              <a:rPr sz="1200" i="1" dirty="0">
-                <a:latin typeface="Times New Roman"/>
-                <a:cs typeface="Times New Roman"/>
-              </a:rPr>
-              <a:t>element</a:t>
-            </a:r>
-            <a:r>
-              <a:rPr sz="1200" i="1" spc="-40" dirty="0">
-                <a:latin typeface="Times New Roman"/>
-                <a:cs typeface="Times New Roman"/>
-              </a:rPr>
-              <a:t> </a:t>
-            </a:r>
-            <a:r>
-              <a:rPr sz="1200" i="1" dirty="0">
-                <a:latin typeface="Times New Roman"/>
-                <a:cs typeface="Times New Roman"/>
-              </a:rPr>
-              <a:t>creation,</a:t>
-            </a:r>
-            <a:r>
-              <a:rPr sz="1200" i="1" spc="-40" dirty="0">
-                <a:latin typeface="Times New Roman"/>
-                <a:cs typeface="Times New Roman"/>
-              </a:rPr>
-              <a:t> </a:t>
-            </a:r>
-            <a:r>
-              <a:rPr sz="1200" i="1" dirty="0">
-                <a:latin typeface="Times New Roman"/>
-                <a:cs typeface="Times New Roman"/>
-              </a:rPr>
-              <a:t>conditional</a:t>
-            </a:r>
-            <a:r>
-              <a:rPr sz="1200" i="1" spc="-40" dirty="0">
-                <a:latin typeface="Times New Roman"/>
-                <a:cs typeface="Times New Roman"/>
-              </a:rPr>
-              <a:t> </a:t>
-            </a:r>
-            <a:r>
-              <a:rPr sz="1200" i="1" dirty="0">
-                <a:latin typeface="Times New Roman"/>
-                <a:cs typeface="Times New Roman"/>
-              </a:rPr>
-              <a:t>statements,</a:t>
-            </a:r>
-            <a:r>
-              <a:rPr sz="1200" i="1" spc="-40" dirty="0">
-                <a:latin typeface="Times New Roman"/>
-                <a:cs typeface="Times New Roman"/>
-              </a:rPr>
-              <a:t> </a:t>
-            </a:r>
-            <a:r>
-              <a:rPr sz="1200" i="1" dirty="0">
-                <a:latin typeface="Times New Roman"/>
-                <a:cs typeface="Times New Roman"/>
-              </a:rPr>
-              <a:t>and</a:t>
-            </a:r>
-            <a:r>
-              <a:rPr sz="1200" i="1" spc="-40" dirty="0">
-                <a:latin typeface="Times New Roman"/>
-                <a:cs typeface="Times New Roman"/>
-              </a:rPr>
-              <a:t> </a:t>
-            </a:r>
-            <a:r>
-              <a:rPr sz="1200" i="1" spc="-10" dirty="0">
-                <a:latin typeface="Times New Roman"/>
-                <a:cs typeface="Times New Roman"/>
-              </a:rPr>
-              <a:t>setTimeout().)</a:t>
-            </a:r>
-            <a:endParaRPr sz="1200">
+              <a:rPr lang="en-US" sz="1300" b="1" dirty="0">
+                <a:latin typeface="Times New Roman"/>
+                <a:cs typeface="Times New Roman"/>
+              </a:rPr>
+              <a:t>DOM Selection</a:t>
+            </a:r>
+            <a:r>
+              <a:rPr lang="en-US" sz="1300" dirty="0">
+                <a:latin typeface="Times New Roman"/>
+                <a:cs typeface="Times New Roman"/>
+              </a:rPr>
+              <a:t>: Used </a:t>
+            </a:r>
+            <a:r>
+              <a:rPr lang="en-US" sz="1300" dirty="0" err="1">
+                <a:latin typeface="Times New Roman"/>
+                <a:cs typeface="Times New Roman"/>
+              </a:rPr>
+              <a:t>document.getElementById</a:t>
+            </a:r>
+            <a:r>
+              <a:rPr lang="en-US" sz="1300" dirty="0">
+                <a:latin typeface="Times New Roman"/>
+                <a:cs typeface="Times New Roman"/>
+              </a:rPr>
+              <a:t> to access form inputs and the table.</a:t>
+            </a:r>
+          </a:p>
+          <a:p>
+            <a:pPr marL="346710" marR="5080" indent="-285750">
+              <a:lnSpc>
+                <a:spcPts val="1390"/>
+              </a:lnSpc>
+              <a:spcBef>
+                <a:spcPts val="1025"/>
+              </a:spcBef>
+              <a:buFont typeface="Arial" panose="020B0604020202020204" pitchFamily="34" charset="0"/>
+              <a:buChar char="•"/>
+            </a:pPr>
+            <a:r>
+              <a:rPr lang="en-US" sz="1300" b="1" dirty="0">
+                <a:latin typeface="Times New Roman"/>
+                <a:cs typeface="Times New Roman"/>
+              </a:rPr>
+              <a:t>Event Listeners</a:t>
+            </a:r>
+            <a:r>
+              <a:rPr lang="en-US" sz="1300" dirty="0">
+                <a:latin typeface="Times New Roman"/>
+                <a:cs typeface="Times New Roman"/>
+              </a:rPr>
+              <a:t>: Applied .</a:t>
+            </a:r>
+            <a:r>
+              <a:rPr lang="en-US" sz="1300" dirty="0" err="1">
+                <a:latin typeface="Times New Roman"/>
+                <a:cs typeface="Times New Roman"/>
+              </a:rPr>
+              <a:t>addEventListener</a:t>
+            </a:r>
+            <a:r>
+              <a:rPr lang="en-US" sz="1300" dirty="0">
+                <a:latin typeface="Times New Roman"/>
+                <a:cs typeface="Times New Roman"/>
+              </a:rPr>
+              <a:t>('submit', ...) to handle user actions.</a:t>
+            </a:r>
+          </a:p>
+          <a:p>
+            <a:pPr marL="346710" marR="5080" indent="-285750">
+              <a:lnSpc>
+                <a:spcPts val="1390"/>
+              </a:lnSpc>
+              <a:spcBef>
+                <a:spcPts val="1025"/>
+              </a:spcBef>
+              <a:buFont typeface="Arial" panose="020B0604020202020204" pitchFamily="34" charset="0"/>
+              <a:buChar char="•"/>
+            </a:pPr>
+            <a:r>
+              <a:rPr lang="en-US" sz="1300" b="1" dirty="0">
+                <a:latin typeface="Times New Roman"/>
+                <a:cs typeface="Times New Roman"/>
+              </a:rPr>
+              <a:t>Conditional Logic</a:t>
+            </a:r>
+            <a:r>
+              <a:rPr lang="en-US" sz="1300" dirty="0">
+                <a:latin typeface="Times New Roman"/>
+                <a:cs typeface="Times New Roman"/>
+              </a:rPr>
+              <a:t>: Used if-else statements to check for valid input formats.</a:t>
+            </a:r>
+          </a:p>
+          <a:p>
+            <a:pPr marL="346710" marR="5080" indent="-285750">
+              <a:lnSpc>
+                <a:spcPts val="1390"/>
+              </a:lnSpc>
+              <a:spcBef>
+                <a:spcPts val="1025"/>
+              </a:spcBef>
+              <a:buFont typeface="Arial" panose="020B0604020202020204" pitchFamily="34" charset="0"/>
+              <a:buChar char="•"/>
+            </a:pPr>
+            <a:r>
+              <a:rPr lang="en-US" sz="1300" b="1" dirty="0">
+                <a:latin typeface="Times New Roman"/>
+                <a:cs typeface="Times New Roman"/>
+              </a:rPr>
+              <a:t>Array/Object Handling</a:t>
+            </a:r>
+            <a:r>
+              <a:rPr lang="en-US" sz="1300" dirty="0">
+                <a:latin typeface="Times New Roman"/>
+                <a:cs typeface="Times New Roman"/>
+              </a:rPr>
+              <a:t>: Captured form values into variables before inserting them into the table.</a:t>
+            </a:r>
+            <a:endParaRPr lang="en-US" sz="1300" b="1" dirty="0">
+              <a:latin typeface="Times New Roman"/>
+              <a:cs typeface="Times New Roman"/>
+            </a:endParaRPr>
+          </a:p>
+          <a:p>
+            <a:pPr marL="346710" marR="5080" indent="-285750">
+              <a:lnSpc>
+                <a:spcPts val="1390"/>
+              </a:lnSpc>
+              <a:spcBef>
+                <a:spcPts val="1025"/>
+              </a:spcBef>
+              <a:buFont typeface="Arial" panose="020B0604020202020204" pitchFamily="34" charset="0"/>
+              <a:buChar char="•"/>
+            </a:pPr>
+            <a:r>
+              <a:rPr lang="en-US" sz="1300" b="1" dirty="0">
+                <a:latin typeface="Times New Roman"/>
+                <a:cs typeface="Times New Roman"/>
+              </a:rPr>
+              <a:t>Function Definitions:</a:t>
+            </a:r>
+            <a:r>
+              <a:rPr lang="en-US" sz="1300" dirty="0">
+                <a:latin typeface="Times New Roman"/>
+                <a:cs typeface="Times New Roman"/>
+              </a:rPr>
+              <a:t> Created reusable functions for validation and table updates.</a:t>
+            </a:r>
+            <a:endParaRPr sz="1300" dirty="0">
               <a:latin typeface="Times New Roman"/>
               <a:cs typeface="Times New Roman"/>
             </a:endParaRPr>
@@ -9495,7 +7585,7 @@
         </p:nvGrpSpPr>
         <p:grpSpPr>
           <a:xfrm>
-            <a:off x="801369" y="4133214"/>
+            <a:off x="660809" y="4507732"/>
             <a:ext cx="6402705" cy="20320"/>
             <a:chOff x="801369" y="4133214"/>
             <a:chExt cx="6402705" cy="20320"/>
@@ -9840,8 +7930,8 @@
         </p:nvSpPr>
         <p:spPr>
           <a:xfrm>
-            <a:off x="789228" y="4335906"/>
-            <a:ext cx="6179185" cy="542290"/>
+            <a:off x="625885" y="4589025"/>
+            <a:ext cx="6575015" cy="2206373"/>
           </a:xfrm>
           <a:prstGeom prst="rect">
             <a:avLst/>
@@ -9911,7 +8001,7 @@
               </a:rPr>
               <a:t>Steps:</a:t>
             </a:r>
-            <a:endParaRPr sz="1400">
+            <a:endParaRPr sz="1400" dirty="0">
               <a:latin typeface="Times New Roman"/>
               <a:cs typeface="Times New Roman"/>
             </a:endParaRPr>
@@ -9926,188 +8016,144 @@
               </a:spcBef>
             </a:pPr>
             <a:r>
-              <a:rPr sz="1200" i="1" dirty="0">
-                <a:latin typeface="Times New Roman"/>
-                <a:cs typeface="Times New Roman"/>
-              </a:rPr>
-              <a:t>(Explain</a:t>
-            </a:r>
-            <a:r>
-              <a:rPr sz="1200" i="1" spc="-30" dirty="0">
-                <a:latin typeface="Times New Roman"/>
-                <a:cs typeface="Times New Roman"/>
-              </a:rPr>
-              <a:t> </a:t>
-            </a:r>
-            <a:r>
-              <a:rPr sz="1200" i="1" dirty="0">
-                <a:latin typeface="Times New Roman"/>
-                <a:cs typeface="Times New Roman"/>
-              </a:rPr>
-              <a:t>the</a:t>
-            </a:r>
-            <a:r>
-              <a:rPr sz="1200" i="1" spc="-25" dirty="0">
-                <a:latin typeface="Times New Roman"/>
-                <a:cs typeface="Times New Roman"/>
-              </a:rPr>
-              <a:t> </a:t>
-            </a:r>
-            <a:r>
-              <a:rPr sz="1200" i="1" spc="-10" dirty="0">
-                <a:latin typeface="Times New Roman"/>
-                <a:cs typeface="Times New Roman"/>
-              </a:rPr>
-              <a:t>step-by-</a:t>
-            </a:r>
-            <a:r>
-              <a:rPr sz="1200" i="1" dirty="0">
-                <a:latin typeface="Times New Roman"/>
-                <a:cs typeface="Times New Roman"/>
-              </a:rPr>
-              <a:t>step</a:t>
-            </a:r>
-            <a:r>
-              <a:rPr sz="1200" i="1" spc="-25" dirty="0">
-                <a:latin typeface="Times New Roman"/>
-                <a:cs typeface="Times New Roman"/>
-              </a:rPr>
-              <a:t> </a:t>
-            </a:r>
-            <a:r>
-              <a:rPr sz="1200" i="1" dirty="0">
-                <a:latin typeface="Times New Roman"/>
-                <a:cs typeface="Times New Roman"/>
-              </a:rPr>
-              <a:t>process</a:t>
-            </a:r>
-            <a:r>
-              <a:rPr sz="1200" i="1" spc="-35" dirty="0">
-                <a:latin typeface="Times New Roman"/>
-                <a:cs typeface="Times New Roman"/>
-              </a:rPr>
-              <a:t> </a:t>
-            </a:r>
-            <a:r>
-              <a:rPr sz="1200" i="1" dirty="0">
-                <a:latin typeface="Times New Roman"/>
-                <a:cs typeface="Times New Roman"/>
-              </a:rPr>
-              <a:t>followed</a:t>
-            </a:r>
-            <a:r>
-              <a:rPr sz="1200" i="1" spc="-25" dirty="0">
-                <a:latin typeface="Times New Roman"/>
-                <a:cs typeface="Times New Roman"/>
-              </a:rPr>
-              <a:t> </a:t>
-            </a:r>
-            <a:r>
-              <a:rPr sz="1200" i="1" dirty="0">
-                <a:latin typeface="Times New Roman"/>
-                <a:cs typeface="Times New Roman"/>
-              </a:rPr>
-              <a:t>to</a:t>
-            </a:r>
-            <a:r>
-              <a:rPr sz="1200" i="1" spc="-25" dirty="0">
-                <a:latin typeface="Times New Roman"/>
-                <a:cs typeface="Times New Roman"/>
-              </a:rPr>
-              <a:t> </a:t>
-            </a:r>
-            <a:r>
-              <a:rPr sz="1200" i="1" dirty="0">
-                <a:latin typeface="Times New Roman"/>
-                <a:cs typeface="Times New Roman"/>
-              </a:rPr>
-              <a:t>add</a:t>
-            </a:r>
-            <a:r>
-              <a:rPr sz="1200" i="1" spc="-30" dirty="0">
-                <a:latin typeface="Times New Roman"/>
-                <a:cs typeface="Times New Roman"/>
-              </a:rPr>
-              <a:t> </a:t>
-            </a:r>
-            <a:r>
-              <a:rPr sz="1200" i="1" dirty="0">
-                <a:latin typeface="Times New Roman"/>
-                <a:cs typeface="Times New Roman"/>
-              </a:rPr>
-              <a:t>JavaScript</a:t>
-            </a:r>
-            <a:r>
-              <a:rPr sz="1200" i="1" spc="-20" dirty="0">
-                <a:latin typeface="Times New Roman"/>
-                <a:cs typeface="Times New Roman"/>
-              </a:rPr>
-              <a:t> </a:t>
-            </a:r>
-            <a:r>
-              <a:rPr sz="1200" i="1" dirty="0">
-                <a:latin typeface="Times New Roman"/>
-                <a:cs typeface="Times New Roman"/>
-              </a:rPr>
-              <a:t>functionality</a:t>
-            </a:r>
-            <a:r>
-              <a:rPr sz="1200" i="1" spc="-30" dirty="0">
-                <a:latin typeface="Times New Roman"/>
-                <a:cs typeface="Times New Roman"/>
-              </a:rPr>
-              <a:t> </a:t>
-            </a:r>
-            <a:r>
-              <a:rPr sz="1200" i="1" dirty="0">
-                <a:latin typeface="Times New Roman"/>
-                <a:cs typeface="Times New Roman"/>
-              </a:rPr>
-              <a:t>to</a:t>
-            </a:r>
-            <a:r>
-              <a:rPr sz="1200" i="1" spc="-30" dirty="0">
-                <a:latin typeface="Times New Roman"/>
-                <a:cs typeface="Times New Roman"/>
-              </a:rPr>
-              <a:t> </a:t>
-            </a:r>
-            <a:r>
-              <a:rPr sz="1200" i="1" dirty="0">
-                <a:latin typeface="Times New Roman"/>
-                <a:cs typeface="Times New Roman"/>
-              </a:rPr>
-              <a:t>the</a:t>
-            </a:r>
-            <a:r>
-              <a:rPr sz="1200" i="1" spc="-30" dirty="0">
-                <a:latin typeface="Times New Roman"/>
-                <a:cs typeface="Times New Roman"/>
-              </a:rPr>
-              <a:t> </a:t>
-            </a:r>
-            <a:r>
-              <a:rPr sz="1200" i="1" dirty="0">
-                <a:latin typeface="Times New Roman"/>
-                <a:cs typeface="Times New Roman"/>
-              </a:rPr>
-              <a:t>registration</a:t>
-            </a:r>
-            <a:r>
-              <a:rPr sz="1200" i="1" spc="-40" dirty="0">
-                <a:latin typeface="Times New Roman"/>
-                <a:cs typeface="Times New Roman"/>
-              </a:rPr>
-              <a:t> </a:t>
-            </a:r>
-            <a:r>
-              <a:rPr sz="1200" i="1" spc="-10" dirty="0">
-                <a:latin typeface="Times New Roman"/>
-                <a:cs typeface="Times New Roman"/>
-              </a:rPr>
-              <a:t>page.)</a:t>
-            </a:r>
-            <a:endParaRPr sz="1200">
+              <a:rPr lang="en-US" sz="1300" b="1" dirty="0">
+                <a:latin typeface="Times New Roman"/>
+                <a:cs typeface="Times New Roman"/>
+              </a:rPr>
+              <a:t>Script Link</a:t>
+            </a:r>
+            <a:r>
+              <a:rPr lang="en-US" sz="1300" dirty="0">
+                <a:latin typeface="Times New Roman"/>
+                <a:cs typeface="Times New Roman"/>
+              </a:rPr>
+              <a:t>: Connected the external script.js to the HTML file.</a:t>
+            </a:r>
+          </a:p>
+          <a:p>
+            <a:pPr marL="93345">
+              <a:lnSpc>
+                <a:spcPct val="100000"/>
+              </a:lnSpc>
+              <a:spcBef>
+                <a:spcPts val="940"/>
+              </a:spcBef>
+            </a:pPr>
+            <a:r>
+              <a:rPr lang="en-US" sz="1300" b="1" dirty="0">
+                <a:latin typeface="Times New Roman"/>
+                <a:cs typeface="Times New Roman"/>
+              </a:rPr>
+              <a:t>Validation Logic</a:t>
+            </a:r>
+            <a:r>
+              <a:rPr lang="en-US" sz="1300" dirty="0">
+                <a:latin typeface="Times New Roman"/>
+                <a:cs typeface="Times New Roman"/>
+              </a:rPr>
+              <a:t>: Wrote functions to verify email patterns and phone number lengths.</a:t>
+            </a:r>
+          </a:p>
+          <a:p>
+            <a:pPr marL="93345">
+              <a:lnSpc>
+                <a:spcPct val="100000"/>
+              </a:lnSpc>
+              <a:spcBef>
+                <a:spcPts val="940"/>
+              </a:spcBef>
+            </a:pPr>
+            <a:r>
+              <a:rPr lang="en-US" sz="1300" b="1" dirty="0">
+                <a:latin typeface="Times New Roman"/>
+                <a:cs typeface="Times New Roman"/>
+              </a:rPr>
+              <a:t>Submission Handler</a:t>
+            </a:r>
+            <a:r>
+              <a:rPr lang="en-US" sz="1300" dirty="0">
+                <a:latin typeface="Times New Roman"/>
+                <a:cs typeface="Times New Roman"/>
+              </a:rPr>
+              <a:t>: Prevented the form's default reload behavior to keep the dynamic data visible.</a:t>
+            </a:r>
+          </a:p>
+          <a:p>
+            <a:pPr marL="93345">
+              <a:lnSpc>
+                <a:spcPct val="100000"/>
+              </a:lnSpc>
+              <a:spcBef>
+                <a:spcPts val="940"/>
+              </a:spcBef>
+            </a:pPr>
+            <a:r>
+              <a:rPr lang="en-US" sz="1300" b="1" dirty="0">
+                <a:latin typeface="Times New Roman"/>
+                <a:cs typeface="Times New Roman"/>
+              </a:rPr>
+              <a:t>Table Insertion</a:t>
+            </a:r>
+            <a:r>
+              <a:rPr lang="en-US" sz="1300" dirty="0">
+                <a:latin typeface="Times New Roman"/>
+                <a:cs typeface="Times New Roman"/>
+              </a:rPr>
+              <a:t>: Used </a:t>
+            </a:r>
+            <a:r>
+              <a:rPr lang="en-US" sz="1300" dirty="0" err="1">
+                <a:latin typeface="Times New Roman"/>
+                <a:cs typeface="Times New Roman"/>
+              </a:rPr>
+              <a:t>insertRow</a:t>
+            </a:r>
+            <a:r>
+              <a:rPr lang="en-US" sz="1300" dirty="0">
+                <a:latin typeface="Times New Roman"/>
+                <a:cs typeface="Times New Roman"/>
+              </a:rPr>
+              <a:t>() and </a:t>
+            </a:r>
+            <a:r>
+              <a:rPr lang="en-US" sz="1300" dirty="0" err="1">
+                <a:latin typeface="Times New Roman"/>
+                <a:cs typeface="Times New Roman"/>
+              </a:rPr>
+              <a:t>insertCell</a:t>
+            </a:r>
+            <a:r>
+              <a:rPr lang="en-US" sz="1300" dirty="0">
+                <a:latin typeface="Times New Roman"/>
+                <a:cs typeface="Times New Roman"/>
+              </a:rPr>
+              <a:t>() to add the new participant details to the bottom table.</a:t>
+            </a:r>
+          </a:p>
+          <a:p>
+            <a:pPr marL="93345">
+              <a:lnSpc>
+                <a:spcPct val="100000"/>
+              </a:lnSpc>
+              <a:spcBef>
+                <a:spcPts val="940"/>
+              </a:spcBef>
+            </a:pPr>
+            <a:r>
+              <a:rPr lang="en-US" sz="1300" b="1" dirty="0">
+                <a:latin typeface="Times New Roman"/>
+                <a:cs typeface="Times New Roman"/>
+              </a:rPr>
+              <a:t>Cleanup:</a:t>
+            </a:r>
+            <a:r>
+              <a:rPr lang="en-US" sz="1300" dirty="0">
+                <a:latin typeface="Times New Roman"/>
+                <a:cs typeface="Times New Roman"/>
+              </a:rPr>
+              <a:t> Triggered the reset() method to prepare the form for the next user</a:t>
+            </a:r>
+            <a:endParaRPr sz="1300" dirty="0">
               <a:latin typeface="Times New Roman"/>
               <a:cs typeface="Times New Roman"/>
             </a:endParaRPr>
@@ -10122,7 +8168,7 @@
         </p:nvGrpSpPr>
         <p:grpSpPr>
           <a:xfrm>
-            <a:off x="801369" y="5309869"/>
+            <a:off x="639218" y="6923808"/>
             <a:ext cx="6402705" cy="20320"/>
             <a:chOff x="801369" y="5309869"/>
             <a:chExt cx="6402705" cy="20320"/>
@@ -10467,8 +8513,8 @@
         </p:nvSpPr>
         <p:spPr>
           <a:xfrm>
-            <a:off x="792276" y="5337174"/>
-            <a:ext cx="6137275" cy="717550"/>
+            <a:off x="685710" y="7070125"/>
+            <a:ext cx="6137275" cy="228909"/>
           </a:xfrm>
           <a:prstGeom prst="rect">
             <a:avLst/>
@@ -10498,1410 +8544,7 @@
               </a:rPr>
               <a:t>6.Output:</a:t>
             </a:r>
-            <a:endParaRPr sz="1400">
-              <a:latin typeface="Times New Roman"/>
-              <a:cs typeface="Times New Roman"/>
-            </a:endParaRPr>
-          </a:p>
-          <a:p>
-            <a:pPr marL="17145" marR="5080">
-              <a:lnSpc>
-                <a:spcPts val="1380"/>
-              </a:lnSpc>
-              <a:spcBef>
-                <a:spcPts val="1040"/>
-              </a:spcBef>
-            </a:pPr>
-            <a:r>
-              <a:rPr sz="1200" i="1" dirty="0">
-                <a:latin typeface="Times New Roman"/>
-                <a:cs typeface="Times New Roman"/>
-              </a:rPr>
-              <a:t>(Attach</a:t>
-            </a:r>
-            <a:r>
-              <a:rPr sz="1200" i="1" spc="-30" dirty="0">
-                <a:latin typeface="Times New Roman"/>
-                <a:cs typeface="Times New Roman"/>
-              </a:rPr>
-              <a:t> </a:t>
-            </a:r>
-            <a:r>
-              <a:rPr sz="1200" i="1" dirty="0">
-                <a:latin typeface="Times New Roman"/>
-                <a:cs typeface="Times New Roman"/>
-              </a:rPr>
-              <a:t>screenshots</a:t>
-            </a:r>
-            <a:r>
-              <a:rPr sz="1200" i="1" spc="-35" dirty="0">
-                <a:latin typeface="Times New Roman"/>
-                <a:cs typeface="Times New Roman"/>
-              </a:rPr>
-              <a:t> </a:t>
-            </a:r>
-            <a:r>
-              <a:rPr sz="1200" i="1" dirty="0">
-                <a:latin typeface="Times New Roman"/>
-                <a:cs typeface="Times New Roman"/>
-              </a:rPr>
-              <a:t>showing</a:t>
-            </a:r>
-            <a:r>
-              <a:rPr sz="1200" i="1" spc="-30" dirty="0">
-                <a:latin typeface="Times New Roman"/>
-                <a:cs typeface="Times New Roman"/>
-              </a:rPr>
-              <a:t> </a:t>
-            </a:r>
-            <a:r>
-              <a:rPr sz="1200" i="1" dirty="0">
-                <a:latin typeface="Times New Roman"/>
-                <a:cs typeface="Times New Roman"/>
-              </a:rPr>
-              <a:t>validation</a:t>
-            </a:r>
-            <a:r>
-              <a:rPr sz="1200" i="1" spc="-30" dirty="0">
-                <a:latin typeface="Times New Roman"/>
-                <a:cs typeface="Times New Roman"/>
-              </a:rPr>
-              <a:t> </a:t>
-            </a:r>
-            <a:r>
-              <a:rPr sz="1200" i="1" dirty="0">
-                <a:latin typeface="Times New Roman"/>
-                <a:cs typeface="Times New Roman"/>
-              </a:rPr>
-              <a:t>messages,</a:t>
-            </a:r>
-            <a:r>
-              <a:rPr sz="1200" i="1" spc="-30" dirty="0">
-                <a:latin typeface="Times New Roman"/>
-                <a:cs typeface="Times New Roman"/>
-              </a:rPr>
-              <a:t> </a:t>
-            </a:r>
-            <a:r>
-              <a:rPr sz="1200" i="1" dirty="0">
-                <a:latin typeface="Times New Roman"/>
-                <a:cs typeface="Times New Roman"/>
-              </a:rPr>
-              <a:t>successful</a:t>
-            </a:r>
-            <a:r>
-              <a:rPr sz="1200" i="1" spc="-30" dirty="0">
-                <a:latin typeface="Times New Roman"/>
-                <a:cs typeface="Times New Roman"/>
-              </a:rPr>
-              <a:t> </a:t>
-            </a:r>
-            <a:r>
-              <a:rPr sz="1200" i="1" dirty="0">
-                <a:latin typeface="Times New Roman"/>
-                <a:cs typeface="Times New Roman"/>
-              </a:rPr>
-              <a:t>registration</a:t>
-            </a:r>
-            <a:r>
-              <a:rPr sz="1200" i="1" spc="-30" dirty="0">
-                <a:latin typeface="Times New Roman"/>
-                <a:cs typeface="Times New Roman"/>
-              </a:rPr>
-              <a:t> </a:t>
-            </a:r>
-            <a:r>
-              <a:rPr sz="1200" i="1" dirty="0">
-                <a:latin typeface="Times New Roman"/>
-                <a:cs typeface="Times New Roman"/>
-              </a:rPr>
-              <a:t>message,</a:t>
-            </a:r>
-            <a:r>
-              <a:rPr sz="1200" i="1" spc="-30" dirty="0">
-                <a:latin typeface="Times New Roman"/>
-                <a:cs typeface="Times New Roman"/>
-              </a:rPr>
-              <a:t> </a:t>
-            </a:r>
-            <a:r>
-              <a:rPr sz="1200" i="1" dirty="0">
-                <a:latin typeface="Times New Roman"/>
-                <a:cs typeface="Times New Roman"/>
-              </a:rPr>
-              <a:t>and</a:t>
-            </a:r>
-            <a:r>
-              <a:rPr sz="1200" i="1" spc="-30" dirty="0">
-                <a:latin typeface="Times New Roman"/>
-                <a:cs typeface="Times New Roman"/>
-              </a:rPr>
-              <a:t> </a:t>
-            </a:r>
-            <a:r>
-              <a:rPr sz="1200" i="1" spc="-10" dirty="0">
-                <a:latin typeface="Times New Roman"/>
-                <a:cs typeface="Times New Roman"/>
-              </a:rPr>
-              <a:t>dynamically </a:t>
-            </a:r>
-            <a:r>
-              <a:rPr sz="1200" i="1" dirty="0">
-                <a:latin typeface="Times New Roman"/>
-                <a:cs typeface="Times New Roman"/>
-              </a:rPr>
-              <a:t>updated</a:t>
-            </a:r>
-            <a:r>
-              <a:rPr sz="1200" i="1" spc="-50" dirty="0">
-                <a:latin typeface="Times New Roman"/>
-                <a:cs typeface="Times New Roman"/>
-              </a:rPr>
-              <a:t> </a:t>
-            </a:r>
-            <a:r>
-              <a:rPr sz="1200" i="1" dirty="0">
-                <a:latin typeface="Times New Roman"/>
-                <a:cs typeface="Times New Roman"/>
-              </a:rPr>
-              <a:t>participants</a:t>
-            </a:r>
-            <a:r>
-              <a:rPr sz="1200" i="1" spc="-55" dirty="0">
-                <a:latin typeface="Times New Roman"/>
-                <a:cs typeface="Times New Roman"/>
-              </a:rPr>
-              <a:t> </a:t>
-            </a:r>
-            <a:r>
-              <a:rPr sz="1200" i="1" spc="-10" dirty="0">
-                <a:latin typeface="Times New Roman"/>
-                <a:cs typeface="Times New Roman"/>
-              </a:rPr>
-              <a:t>table.)</a:t>
-            </a:r>
-            <a:endParaRPr sz="1200">
-              <a:latin typeface="Times New Roman"/>
-              <a:cs typeface="Times New Roman"/>
-            </a:endParaRPr>
-          </a:p>
-        </p:txBody>
-      </p:sp>
-      <p:grpSp>
-        <p:nvGrpSpPr>
-          <p:cNvPr id="29" name="object 29"/>
-          <p:cNvGrpSpPr/>
-          <p:nvPr/>
-        </p:nvGrpSpPr>
-        <p:grpSpPr>
-          <a:xfrm>
-            <a:off x="801369" y="6473824"/>
-            <a:ext cx="6402705" cy="20955"/>
-            <a:chOff x="801369" y="6473824"/>
-            <a:chExt cx="6402705" cy="20955"/>
-          </a:xfrm>
-        </p:grpSpPr>
-        <p:sp>
-          <p:nvSpPr>
-            <p:cNvPr id="30" name="object 30"/>
-            <p:cNvSpPr/>
-            <p:nvPr/>
-          </p:nvSpPr>
-          <p:spPr>
-            <a:xfrm>
-              <a:off x="801370" y="6473824"/>
-              <a:ext cx="6400800" cy="19685"/>
-            </a:xfrm>
-            <a:custGeom>
-              <a:avLst/>
-              <a:gdLst/>
-              <a:ahLst/>
-              <a:cxnLst/>
-              <a:rect l="l" t="t" r="r" b="b"/>
-              <a:pathLst>
-                <a:path w="6400800" h="19685">
-                  <a:moveTo>
-                    <a:pt x="6400800" y="0"/>
-                  </a:moveTo>
-                  <a:lnTo>
-                    <a:pt x="0" y="0"/>
-                  </a:lnTo>
-                  <a:lnTo>
-                    <a:pt x="0" y="19685"/>
-                  </a:lnTo>
-                  <a:lnTo>
-                    <a:pt x="6400800" y="19685"/>
-                  </a:lnTo>
-                  <a:lnTo>
-                    <a:pt x="6400800" y="0"/>
-                  </a:lnTo>
-                  <a:close/>
-                </a:path>
-              </a:pathLst>
-            </a:custGeom>
-            <a:solidFill>
-              <a:srgbClr val="9F9F9F"/>
-            </a:solidFill>
-          </p:spPr>
-          <p:txBody>
-            <a:bodyPr wrap="square" lIns="0" tIns="0" rIns="0" bIns="0" rtlCol="0"/>
-            <a:lstStyle/>
-            <a:p>
-              <a:endParaRPr/>
-            </a:p>
-          </p:txBody>
-        </p:sp>
-        <p:sp>
-          <p:nvSpPr>
-            <p:cNvPr id="31" name="object 31"/>
-            <p:cNvSpPr/>
-            <p:nvPr/>
-          </p:nvSpPr>
-          <p:spPr>
-            <a:xfrm>
-              <a:off x="7200899" y="6474840"/>
-              <a:ext cx="3175" cy="3175"/>
-            </a:xfrm>
-            <a:custGeom>
-              <a:avLst/>
-              <a:gdLst/>
-              <a:ahLst/>
-              <a:cxnLst/>
-              <a:rect l="l" t="t" r="r" b="b"/>
-              <a:pathLst>
-                <a:path w="3175" h="3175">
-                  <a:moveTo>
-                    <a:pt x="3047" y="0"/>
-                  </a:moveTo>
-                  <a:lnTo>
-                    <a:pt x="0" y="0"/>
-                  </a:lnTo>
-                  <a:lnTo>
-                    <a:pt x="0" y="3047"/>
-                  </a:lnTo>
-                  <a:lnTo>
-                    <a:pt x="3047" y="3047"/>
-                  </a:lnTo>
-                  <a:lnTo>
-                    <a:pt x="3047" y="0"/>
-                  </a:lnTo>
-                  <a:close/>
-                </a:path>
-              </a:pathLst>
-            </a:custGeom>
-            <a:solidFill>
-              <a:srgbClr val="E2E2E2"/>
-            </a:solidFill>
-          </p:spPr>
-          <p:txBody>
-            <a:bodyPr wrap="square" lIns="0" tIns="0" rIns="0" bIns="0" rtlCol="0"/>
-            <a:lstStyle/>
-            <a:p>
-              <a:endParaRPr/>
-            </a:p>
-          </p:txBody>
-        </p:sp>
-        <p:sp>
-          <p:nvSpPr>
-            <p:cNvPr id="32" name="object 32"/>
-            <p:cNvSpPr/>
-            <p:nvPr/>
-          </p:nvSpPr>
-          <p:spPr>
-            <a:xfrm>
-              <a:off x="801928" y="6474853"/>
-              <a:ext cx="6402070" cy="17145"/>
-            </a:xfrm>
-            <a:custGeom>
-              <a:avLst/>
-              <a:gdLst/>
-              <a:ahLst/>
-              <a:cxnLst/>
-              <a:rect l="l" t="t" r="r" b="b"/>
-              <a:pathLst>
-                <a:path w="6402070" h="17145">
-                  <a:moveTo>
-                    <a:pt x="3048" y="3048"/>
-                  </a:moveTo>
-                  <a:lnTo>
-                    <a:pt x="0" y="3048"/>
-                  </a:lnTo>
-                  <a:lnTo>
-                    <a:pt x="0" y="16751"/>
-                  </a:lnTo>
-                  <a:lnTo>
-                    <a:pt x="3048" y="16751"/>
-                  </a:lnTo>
-                  <a:lnTo>
-                    <a:pt x="3048" y="3048"/>
-                  </a:lnTo>
-                  <a:close/>
-                </a:path>
-                <a:path w="6402070" h="17145">
-                  <a:moveTo>
-                    <a:pt x="6402006" y="0"/>
-                  </a:moveTo>
-                  <a:lnTo>
-                    <a:pt x="6398971" y="0"/>
-                  </a:lnTo>
-                  <a:lnTo>
-                    <a:pt x="6398971" y="3035"/>
-                  </a:lnTo>
-                  <a:lnTo>
-                    <a:pt x="6402006" y="3035"/>
-                  </a:lnTo>
-                  <a:lnTo>
-                    <a:pt x="6402006" y="0"/>
-                  </a:lnTo>
-                  <a:close/>
-                </a:path>
-              </a:pathLst>
-            </a:custGeom>
-            <a:solidFill>
-              <a:srgbClr val="9F9F9F"/>
-            </a:solidFill>
-          </p:spPr>
-          <p:txBody>
-            <a:bodyPr wrap="square" lIns="0" tIns="0" rIns="0" bIns="0" rtlCol="0"/>
-            <a:lstStyle/>
-            <a:p>
-              <a:endParaRPr/>
-            </a:p>
-          </p:txBody>
-        </p:sp>
-        <p:sp>
-          <p:nvSpPr>
-            <p:cNvPr id="33" name="object 33"/>
-            <p:cNvSpPr/>
-            <p:nvPr/>
-          </p:nvSpPr>
-          <p:spPr>
-            <a:xfrm>
-              <a:off x="7200899" y="6477888"/>
-              <a:ext cx="3175" cy="13970"/>
-            </a:xfrm>
-            <a:custGeom>
-              <a:avLst/>
-              <a:gdLst/>
-              <a:ahLst/>
-              <a:cxnLst/>
-              <a:rect l="l" t="t" r="r" b="b"/>
-              <a:pathLst>
-                <a:path w="3175" h="13970">
-                  <a:moveTo>
-                    <a:pt x="3047" y="0"/>
-                  </a:moveTo>
-                  <a:lnTo>
-                    <a:pt x="0" y="0"/>
-                  </a:lnTo>
-                  <a:lnTo>
-                    <a:pt x="0" y="13715"/>
-                  </a:lnTo>
-                  <a:lnTo>
-                    <a:pt x="3047" y="13715"/>
-                  </a:lnTo>
-                  <a:lnTo>
-                    <a:pt x="3047" y="0"/>
-                  </a:lnTo>
-                  <a:close/>
-                </a:path>
-              </a:pathLst>
-            </a:custGeom>
-            <a:solidFill>
-              <a:srgbClr val="E2E2E2"/>
-            </a:solidFill>
-          </p:spPr>
-          <p:txBody>
-            <a:bodyPr wrap="square" lIns="0" tIns="0" rIns="0" bIns="0" rtlCol="0"/>
-            <a:lstStyle/>
-            <a:p>
-              <a:endParaRPr/>
-            </a:p>
-          </p:txBody>
-        </p:sp>
-        <p:sp>
-          <p:nvSpPr>
-            <p:cNvPr id="34" name="object 34"/>
-            <p:cNvSpPr/>
-            <p:nvPr/>
-          </p:nvSpPr>
-          <p:spPr>
-            <a:xfrm>
-              <a:off x="801928" y="6491604"/>
-              <a:ext cx="3175" cy="3175"/>
-            </a:xfrm>
-            <a:custGeom>
-              <a:avLst/>
-              <a:gdLst/>
-              <a:ahLst/>
-              <a:cxnLst/>
-              <a:rect l="l" t="t" r="r" b="b"/>
-              <a:pathLst>
-                <a:path w="3175" h="3175">
-                  <a:moveTo>
-                    <a:pt x="3048" y="0"/>
-                  </a:moveTo>
-                  <a:lnTo>
-                    <a:pt x="0" y="0"/>
-                  </a:lnTo>
-                  <a:lnTo>
-                    <a:pt x="0" y="3047"/>
-                  </a:lnTo>
-                  <a:lnTo>
-                    <a:pt x="3048" y="3047"/>
-                  </a:lnTo>
-                  <a:lnTo>
-                    <a:pt x="3048" y="0"/>
-                  </a:lnTo>
-                  <a:close/>
-                </a:path>
-              </a:pathLst>
-            </a:custGeom>
-            <a:solidFill>
-              <a:srgbClr val="9F9F9F"/>
-            </a:solidFill>
-          </p:spPr>
-          <p:txBody>
-            <a:bodyPr wrap="square" lIns="0" tIns="0" rIns="0" bIns="0" rtlCol="0"/>
-            <a:lstStyle/>
-            <a:p>
-              <a:endParaRPr/>
-            </a:p>
-          </p:txBody>
-        </p:sp>
-        <p:sp>
-          <p:nvSpPr>
-            <p:cNvPr id="35" name="object 35"/>
-            <p:cNvSpPr/>
-            <p:nvPr/>
-          </p:nvSpPr>
-          <p:spPr>
-            <a:xfrm>
-              <a:off x="801928" y="6491617"/>
-              <a:ext cx="6402070" cy="3175"/>
-            </a:xfrm>
-            <a:custGeom>
-              <a:avLst/>
-              <a:gdLst/>
-              <a:ahLst/>
-              <a:cxnLst/>
-              <a:rect l="l" t="t" r="r" b="b"/>
-              <a:pathLst>
-                <a:path w="6402070" h="3175">
-                  <a:moveTo>
-                    <a:pt x="6402006" y="0"/>
-                  </a:moveTo>
-                  <a:lnTo>
-                    <a:pt x="6399022" y="0"/>
-                  </a:lnTo>
-                  <a:lnTo>
-                    <a:pt x="3048" y="0"/>
-                  </a:lnTo>
-                  <a:lnTo>
-                    <a:pt x="0" y="0"/>
-                  </a:lnTo>
-                  <a:lnTo>
-                    <a:pt x="0" y="3035"/>
-                  </a:lnTo>
-                  <a:lnTo>
-                    <a:pt x="3048" y="3035"/>
-                  </a:lnTo>
-                  <a:lnTo>
-                    <a:pt x="6398971" y="3035"/>
-                  </a:lnTo>
-                  <a:lnTo>
-                    <a:pt x="6402006" y="3035"/>
-                  </a:lnTo>
-                  <a:lnTo>
-                    <a:pt x="6402006" y="0"/>
-                  </a:lnTo>
-                  <a:close/>
-                </a:path>
-              </a:pathLst>
-            </a:custGeom>
-            <a:solidFill>
-              <a:srgbClr val="E2E2E2"/>
-            </a:solidFill>
-          </p:spPr>
-          <p:txBody>
-            <a:bodyPr wrap="square" lIns="0" tIns="0" rIns="0" bIns="0" rtlCol="0"/>
-            <a:lstStyle/>
-            <a:p>
-              <a:endParaRPr/>
-            </a:p>
-          </p:txBody>
-        </p:sp>
-      </p:grpSp>
-      <p:sp>
-        <p:nvSpPr>
-          <p:cNvPr id="36" name="object 36"/>
-          <p:cNvSpPr txBox="1"/>
-          <p:nvPr/>
-        </p:nvSpPr>
-        <p:spPr>
-          <a:xfrm>
-            <a:off x="789228" y="6661784"/>
-            <a:ext cx="5911850" cy="716280"/>
-          </a:xfrm>
-          <a:prstGeom prst="rect">
-            <a:avLst/>
-          </a:prstGeom>
-        </p:spPr>
-        <p:txBody>
-          <a:bodyPr vert="horz" wrap="square" lIns="0" tIns="13335" rIns="0" bIns="0" rtlCol="0">
-            <a:spAutoFit/>
-          </a:bodyPr>
-          <a:lstStyle/>
-          <a:p>
-            <a:pPr marL="12700">
-              <a:lnSpc>
-                <a:spcPct val="100000"/>
-              </a:lnSpc>
-              <a:spcBef>
-                <a:spcPts val="105"/>
-              </a:spcBef>
-            </a:pPr>
-            <a:r>
-              <a:rPr sz="1400" b="1" dirty="0">
-                <a:solidFill>
-                  <a:srgbClr val="3B78D7"/>
-                </a:solidFill>
-                <a:latin typeface="Times New Roman"/>
-                <a:cs typeface="Times New Roman"/>
-              </a:rPr>
-              <a:t>7.Learning</a:t>
-            </a:r>
-            <a:r>
-              <a:rPr sz="1400" b="1" spc="-45" dirty="0">
-                <a:solidFill>
-                  <a:srgbClr val="3B78D7"/>
-                </a:solidFill>
-                <a:latin typeface="Times New Roman"/>
-                <a:cs typeface="Times New Roman"/>
-              </a:rPr>
-              <a:t> </a:t>
-            </a:r>
-            <a:r>
-              <a:rPr sz="1400" b="1" spc="-10" dirty="0">
-                <a:solidFill>
-                  <a:srgbClr val="3B78D7"/>
-                </a:solidFill>
-                <a:latin typeface="Times New Roman"/>
-                <a:cs typeface="Times New Roman"/>
-              </a:rPr>
-              <a:t>Outcome:</a:t>
-            </a:r>
-            <a:endParaRPr sz="1400">
-              <a:latin typeface="Times New Roman"/>
-              <a:cs typeface="Times New Roman"/>
-            </a:endParaRPr>
-          </a:p>
-          <a:p>
-            <a:pPr marL="109855" marR="5080">
-              <a:lnSpc>
-                <a:spcPts val="1380"/>
-              </a:lnSpc>
-              <a:spcBef>
-                <a:spcPts val="1025"/>
-              </a:spcBef>
-            </a:pPr>
-            <a:r>
-              <a:rPr sz="1200" i="1" dirty="0">
-                <a:latin typeface="Times New Roman"/>
-                <a:cs typeface="Times New Roman"/>
-              </a:rPr>
-              <a:t>(Explain</a:t>
-            </a:r>
-            <a:r>
-              <a:rPr sz="1200" i="1" spc="-25" dirty="0">
-                <a:latin typeface="Times New Roman"/>
-                <a:cs typeface="Times New Roman"/>
-              </a:rPr>
-              <a:t> </a:t>
-            </a:r>
-            <a:r>
-              <a:rPr sz="1200" i="1" dirty="0">
-                <a:latin typeface="Times New Roman"/>
-                <a:cs typeface="Times New Roman"/>
-              </a:rPr>
-              <a:t>the</a:t>
-            </a:r>
-            <a:r>
-              <a:rPr sz="1200" i="1" spc="-25" dirty="0">
-                <a:latin typeface="Times New Roman"/>
-                <a:cs typeface="Times New Roman"/>
-              </a:rPr>
-              <a:t> </a:t>
-            </a:r>
-            <a:r>
-              <a:rPr sz="1200" i="1" dirty="0">
-                <a:latin typeface="Times New Roman"/>
-                <a:cs typeface="Times New Roman"/>
-              </a:rPr>
-              <a:t>skills</a:t>
-            </a:r>
-            <a:r>
-              <a:rPr sz="1200" i="1" spc="-30" dirty="0">
-                <a:latin typeface="Times New Roman"/>
-                <a:cs typeface="Times New Roman"/>
-              </a:rPr>
-              <a:t> </a:t>
-            </a:r>
-            <a:r>
-              <a:rPr sz="1200" i="1" dirty="0">
-                <a:latin typeface="Times New Roman"/>
-                <a:cs typeface="Times New Roman"/>
-              </a:rPr>
-              <a:t>gained</a:t>
-            </a:r>
-            <a:r>
-              <a:rPr sz="1200" i="1" spc="-20" dirty="0">
-                <a:latin typeface="Times New Roman"/>
-                <a:cs typeface="Times New Roman"/>
-              </a:rPr>
-              <a:t> </a:t>
-            </a:r>
-            <a:r>
-              <a:rPr sz="1200" i="1" dirty="0">
-                <a:latin typeface="Times New Roman"/>
-                <a:cs typeface="Times New Roman"/>
-              </a:rPr>
-              <a:t>in</a:t>
-            </a:r>
-            <a:r>
-              <a:rPr sz="1200" i="1" spc="-25" dirty="0">
-                <a:latin typeface="Times New Roman"/>
-                <a:cs typeface="Times New Roman"/>
-              </a:rPr>
-              <a:t> </a:t>
-            </a:r>
-            <a:r>
-              <a:rPr sz="1200" i="1" dirty="0">
-                <a:latin typeface="Times New Roman"/>
-                <a:cs typeface="Times New Roman"/>
-              </a:rPr>
-              <a:t>DOM</a:t>
-            </a:r>
-            <a:r>
-              <a:rPr sz="1200" i="1" spc="-35" dirty="0">
-                <a:latin typeface="Times New Roman"/>
-                <a:cs typeface="Times New Roman"/>
-              </a:rPr>
-              <a:t> </a:t>
-            </a:r>
-            <a:r>
-              <a:rPr sz="1200" i="1" dirty="0">
-                <a:latin typeface="Times New Roman"/>
-                <a:cs typeface="Times New Roman"/>
-              </a:rPr>
-              <a:t>manipulation,</a:t>
-            </a:r>
-            <a:r>
-              <a:rPr sz="1200" i="1" spc="-20" dirty="0">
-                <a:latin typeface="Times New Roman"/>
-                <a:cs typeface="Times New Roman"/>
-              </a:rPr>
-              <a:t> </a:t>
-            </a:r>
-            <a:r>
-              <a:rPr sz="1200" i="1" dirty="0">
-                <a:latin typeface="Times New Roman"/>
-                <a:cs typeface="Times New Roman"/>
-              </a:rPr>
-              <a:t>form</a:t>
-            </a:r>
-            <a:r>
-              <a:rPr sz="1200" i="1" spc="-30" dirty="0">
-                <a:latin typeface="Times New Roman"/>
-                <a:cs typeface="Times New Roman"/>
-              </a:rPr>
-              <a:t> </a:t>
-            </a:r>
-            <a:r>
-              <a:rPr sz="1200" i="1" dirty="0">
-                <a:latin typeface="Times New Roman"/>
-                <a:cs typeface="Times New Roman"/>
-              </a:rPr>
-              <a:t>validation,</a:t>
-            </a:r>
-            <a:r>
-              <a:rPr sz="1200" i="1" spc="-25" dirty="0">
-                <a:latin typeface="Times New Roman"/>
-                <a:cs typeface="Times New Roman"/>
-              </a:rPr>
-              <a:t> </a:t>
-            </a:r>
-            <a:r>
-              <a:rPr sz="1200" i="1" dirty="0">
-                <a:latin typeface="Times New Roman"/>
-                <a:cs typeface="Times New Roman"/>
-              </a:rPr>
-              <a:t>and</a:t>
-            </a:r>
-            <a:r>
-              <a:rPr sz="1200" i="1" spc="-20" dirty="0">
-                <a:latin typeface="Times New Roman"/>
-                <a:cs typeface="Times New Roman"/>
-              </a:rPr>
-              <a:t> </a:t>
-            </a:r>
-            <a:r>
-              <a:rPr sz="1200" i="1" dirty="0">
-                <a:latin typeface="Times New Roman"/>
-                <a:cs typeface="Times New Roman"/>
-              </a:rPr>
-              <a:t>building</a:t>
-            </a:r>
-            <a:r>
-              <a:rPr sz="1200" i="1" spc="-25" dirty="0">
-                <a:latin typeface="Times New Roman"/>
-                <a:cs typeface="Times New Roman"/>
-              </a:rPr>
-              <a:t> </a:t>
-            </a:r>
-            <a:r>
-              <a:rPr sz="1200" i="1" spc="-10" dirty="0">
-                <a:latin typeface="Times New Roman"/>
-                <a:cs typeface="Times New Roman"/>
-              </a:rPr>
-              <a:t>interactive</a:t>
-            </a:r>
-            <a:r>
-              <a:rPr sz="1200" i="1" spc="-30" dirty="0">
-                <a:latin typeface="Times New Roman"/>
-                <a:cs typeface="Times New Roman"/>
-              </a:rPr>
-              <a:t> </a:t>
-            </a:r>
-            <a:r>
-              <a:rPr sz="1200" i="1" spc="-25" dirty="0">
-                <a:latin typeface="Times New Roman"/>
-                <a:cs typeface="Times New Roman"/>
-              </a:rPr>
-              <a:t>web </a:t>
-            </a:r>
-            <a:r>
-              <a:rPr sz="1200" i="1" dirty="0">
-                <a:latin typeface="Times New Roman"/>
-                <a:cs typeface="Times New Roman"/>
-              </a:rPr>
-              <a:t>applications</a:t>
-            </a:r>
-            <a:r>
-              <a:rPr sz="1200" i="1" spc="-35" dirty="0">
-                <a:latin typeface="Times New Roman"/>
-                <a:cs typeface="Times New Roman"/>
-              </a:rPr>
-              <a:t> </a:t>
-            </a:r>
-            <a:r>
-              <a:rPr sz="1200" i="1" dirty="0">
-                <a:latin typeface="Times New Roman"/>
-                <a:cs typeface="Times New Roman"/>
-              </a:rPr>
-              <a:t>using</a:t>
-            </a:r>
-            <a:r>
-              <a:rPr sz="1200" i="1" spc="-30" dirty="0">
-                <a:latin typeface="Times New Roman"/>
-                <a:cs typeface="Times New Roman"/>
-              </a:rPr>
-              <a:t> </a:t>
-            </a:r>
-            <a:r>
-              <a:rPr sz="1200" i="1" spc="-10" dirty="0">
-                <a:latin typeface="Times New Roman"/>
-                <a:cs typeface="Times New Roman"/>
-              </a:rPr>
-              <a:t>JavaScript.)</a:t>
-            </a:r>
-            <a:endParaRPr sz="1200">
-              <a:latin typeface="Times New Roman"/>
-              <a:cs typeface="Times New Roman"/>
-            </a:endParaRPr>
-          </a:p>
-        </p:txBody>
-      </p:sp>
-      <p:grpSp>
-        <p:nvGrpSpPr>
-          <p:cNvPr id="37" name="object 37"/>
-          <p:cNvGrpSpPr/>
-          <p:nvPr/>
-        </p:nvGrpSpPr>
-        <p:grpSpPr>
-          <a:xfrm>
-            <a:off x="801369" y="7811769"/>
-            <a:ext cx="6402705" cy="20955"/>
-            <a:chOff x="801369" y="7811769"/>
-            <a:chExt cx="6402705" cy="20955"/>
-          </a:xfrm>
-        </p:grpSpPr>
-        <p:sp>
-          <p:nvSpPr>
-            <p:cNvPr id="38" name="object 38"/>
-            <p:cNvSpPr/>
-            <p:nvPr/>
-          </p:nvSpPr>
-          <p:spPr>
-            <a:xfrm>
-              <a:off x="801370" y="7811769"/>
-              <a:ext cx="6400800" cy="20320"/>
-            </a:xfrm>
-            <a:custGeom>
-              <a:avLst/>
-              <a:gdLst/>
-              <a:ahLst/>
-              <a:cxnLst/>
-              <a:rect l="l" t="t" r="r" b="b"/>
-              <a:pathLst>
-                <a:path w="6400800" h="20320">
-                  <a:moveTo>
-                    <a:pt x="6400800" y="0"/>
-                  </a:moveTo>
-                  <a:lnTo>
-                    <a:pt x="0" y="0"/>
-                  </a:lnTo>
-                  <a:lnTo>
-                    <a:pt x="0" y="20320"/>
-                  </a:lnTo>
-                  <a:lnTo>
-                    <a:pt x="6400800" y="20320"/>
-                  </a:lnTo>
-                  <a:lnTo>
-                    <a:pt x="6400800" y="0"/>
-                  </a:lnTo>
-                  <a:close/>
-                </a:path>
-              </a:pathLst>
-            </a:custGeom>
-            <a:solidFill>
-              <a:srgbClr val="9F9F9F"/>
-            </a:solidFill>
-          </p:spPr>
-          <p:txBody>
-            <a:bodyPr wrap="square" lIns="0" tIns="0" rIns="0" bIns="0" rtlCol="0"/>
-            <a:lstStyle/>
-            <a:p>
-              <a:endParaRPr/>
-            </a:p>
-          </p:txBody>
-        </p:sp>
-        <p:sp>
-          <p:nvSpPr>
-            <p:cNvPr id="39" name="object 39"/>
-            <p:cNvSpPr/>
-            <p:nvPr/>
-          </p:nvSpPr>
-          <p:spPr>
-            <a:xfrm>
-              <a:off x="7200899" y="7812912"/>
-              <a:ext cx="3175" cy="3175"/>
-            </a:xfrm>
-            <a:custGeom>
-              <a:avLst/>
-              <a:gdLst/>
-              <a:ahLst/>
-              <a:cxnLst/>
-              <a:rect l="l" t="t" r="r" b="b"/>
-              <a:pathLst>
-                <a:path w="3175" h="3175">
-                  <a:moveTo>
-                    <a:pt x="3047" y="0"/>
-                  </a:moveTo>
-                  <a:lnTo>
-                    <a:pt x="0" y="0"/>
-                  </a:lnTo>
-                  <a:lnTo>
-                    <a:pt x="0" y="3047"/>
-                  </a:lnTo>
-                  <a:lnTo>
-                    <a:pt x="3047" y="3047"/>
-                  </a:lnTo>
-                  <a:lnTo>
-                    <a:pt x="3047" y="0"/>
-                  </a:lnTo>
-                  <a:close/>
-                </a:path>
-              </a:pathLst>
-            </a:custGeom>
-            <a:solidFill>
-              <a:srgbClr val="E2E2E2"/>
-            </a:solidFill>
-          </p:spPr>
-          <p:txBody>
-            <a:bodyPr wrap="square" lIns="0" tIns="0" rIns="0" bIns="0" rtlCol="0"/>
-            <a:lstStyle/>
-            <a:p>
-              <a:endParaRPr/>
-            </a:p>
-          </p:txBody>
-        </p:sp>
-        <p:sp>
-          <p:nvSpPr>
-            <p:cNvPr id="40" name="object 40"/>
-            <p:cNvSpPr/>
-            <p:nvPr/>
-          </p:nvSpPr>
-          <p:spPr>
-            <a:xfrm>
-              <a:off x="801928" y="7812925"/>
-              <a:ext cx="6402070" cy="17145"/>
-            </a:xfrm>
-            <a:custGeom>
-              <a:avLst/>
-              <a:gdLst/>
-              <a:ahLst/>
-              <a:cxnLst/>
-              <a:rect l="l" t="t" r="r" b="b"/>
-              <a:pathLst>
-                <a:path w="6402070" h="17145">
-                  <a:moveTo>
-                    <a:pt x="3048" y="3035"/>
-                  </a:moveTo>
-                  <a:lnTo>
-                    <a:pt x="0" y="3035"/>
-                  </a:lnTo>
-                  <a:lnTo>
-                    <a:pt x="0" y="16751"/>
-                  </a:lnTo>
-                  <a:lnTo>
-                    <a:pt x="3048" y="16751"/>
-                  </a:lnTo>
-                  <a:lnTo>
-                    <a:pt x="3048" y="3035"/>
-                  </a:lnTo>
-                  <a:close/>
-                </a:path>
-                <a:path w="6402070" h="17145">
-                  <a:moveTo>
-                    <a:pt x="6402006" y="0"/>
-                  </a:moveTo>
-                  <a:lnTo>
-                    <a:pt x="6398971" y="0"/>
-                  </a:lnTo>
-                  <a:lnTo>
-                    <a:pt x="6398971" y="3035"/>
-                  </a:lnTo>
-                  <a:lnTo>
-                    <a:pt x="6402006" y="3035"/>
-                  </a:lnTo>
-                  <a:lnTo>
-                    <a:pt x="6402006" y="0"/>
-                  </a:lnTo>
-                  <a:close/>
-                </a:path>
-              </a:pathLst>
-            </a:custGeom>
-            <a:solidFill>
-              <a:srgbClr val="9F9F9F"/>
-            </a:solidFill>
-          </p:spPr>
-          <p:txBody>
-            <a:bodyPr wrap="square" lIns="0" tIns="0" rIns="0" bIns="0" rtlCol="0"/>
-            <a:lstStyle/>
-            <a:p>
-              <a:endParaRPr/>
-            </a:p>
-          </p:txBody>
-        </p:sp>
-        <p:sp>
-          <p:nvSpPr>
-            <p:cNvPr id="41" name="object 41"/>
-            <p:cNvSpPr/>
-            <p:nvPr/>
-          </p:nvSpPr>
-          <p:spPr>
-            <a:xfrm>
-              <a:off x="7200899" y="7815960"/>
-              <a:ext cx="3175" cy="13970"/>
-            </a:xfrm>
-            <a:custGeom>
-              <a:avLst/>
-              <a:gdLst/>
-              <a:ahLst/>
-              <a:cxnLst/>
-              <a:rect l="l" t="t" r="r" b="b"/>
-              <a:pathLst>
-                <a:path w="3175" h="13970">
-                  <a:moveTo>
-                    <a:pt x="3047" y="0"/>
-                  </a:moveTo>
-                  <a:lnTo>
-                    <a:pt x="0" y="0"/>
-                  </a:lnTo>
-                  <a:lnTo>
-                    <a:pt x="0" y="13716"/>
-                  </a:lnTo>
-                  <a:lnTo>
-                    <a:pt x="3047" y="13716"/>
-                  </a:lnTo>
-                  <a:lnTo>
-                    <a:pt x="3047" y="0"/>
-                  </a:lnTo>
-                  <a:close/>
-                </a:path>
-              </a:pathLst>
-            </a:custGeom>
-            <a:solidFill>
-              <a:srgbClr val="E2E2E2"/>
-            </a:solidFill>
-          </p:spPr>
-          <p:txBody>
-            <a:bodyPr wrap="square" lIns="0" tIns="0" rIns="0" bIns="0" rtlCol="0"/>
-            <a:lstStyle/>
-            <a:p>
-              <a:endParaRPr/>
-            </a:p>
-          </p:txBody>
-        </p:sp>
-        <p:sp>
-          <p:nvSpPr>
-            <p:cNvPr id="42" name="object 42"/>
-            <p:cNvSpPr/>
-            <p:nvPr/>
-          </p:nvSpPr>
-          <p:spPr>
-            <a:xfrm>
-              <a:off x="801928" y="7829676"/>
-              <a:ext cx="3175" cy="3175"/>
-            </a:xfrm>
-            <a:custGeom>
-              <a:avLst/>
-              <a:gdLst/>
-              <a:ahLst/>
-              <a:cxnLst/>
-              <a:rect l="l" t="t" r="r" b="b"/>
-              <a:pathLst>
-                <a:path w="3175" h="3175">
-                  <a:moveTo>
-                    <a:pt x="3048" y="0"/>
-                  </a:moveTo>
-                  <a:lnTo>
-                    <a:pt x="0" y="0"/>
-                  </a:lnTo>
-                  <a:lnTo>
-                    <a:pt x="0" y="3047"/>
-                  </a:lnTo>
-                  <a:lnTo>
-                    <a:pt x="3048" y="3047"/>
-                  </a:lnTo>
-                  <a:lnTo>
-                    <a:pt x="3048" y="0"/>
-                  </a:lnTo>
-                  <a:close/>
-                </a:path>
-              </a:pathLst>
-            </a:custGeom>
-            <a:solidFill>
-              <a:srgbClr val="9F9F9F"/>
-            </a:solidFill>
-          </p:spPr>
-          <p:txBody>
-            <a:bodyPr wrap="square" lIns="0" tIns="0" rIns="0" bIns="0" rtlCol="0"/>
-            <a:lstStyle/>
-            <a:p>
-              <a:endParaRPr/>
-            </a:p>
-          </p:txBody>
-        </p:sp>
-        <p:sp>
-          <p:nvSpPr>
-            <p:cNvPr id="43" name="object 43"/>
-            <p:cNvSpPr/>
-            <p:nvPr/>
-          </p:nvSpPr>
-          <p:spPr>
-            <a:xfrm>
-              <a:off x="801928" y="7829689"/>
-              <a:ext cx="6402070" cy="3175"/>
-            </a:xfrm>
-            <a:custGeom>
-              <a:avLst/>
-              <a:gdLst/>
-              <a:ahLst/>
-              <a:cxnLst/>
-              <a:rect l="l" t="t" r="r" b="b"/>
-              <a:pathLst>
-                <a:path w="6402070" h="3175">
-                  <a:moveTo>
-                    <a:pt x="6402006" y="0"/>
-                  </a:moveTo>
-                  <a:lnTo>
-                    <a:pt x="6399022" y="0"/>
-                  </a:lnTo>
-                  <a:lnTo>
-                    <a:pt x="3048" y="0"/>
-                  </a:lnTo>
-                  <a:lnTo>
-                    <a:pt x="0" y="0"/>
-                  </a:lnTo>
-                  <a:lnTo>
-                    <a:pt x="0" y="3035"/>
-                  </a:lnTo>
-                  <a:lnTo>
-                    <a:pt x="3048" y="3035"/>
-                  </a:lnTo>
-                  <a:lnTo>
-                    <a:pt x="6398971" y="3035"/>
-                  </a:lnTo>
-                  <a:lnTo>
-                    <a:pt x="6402006" y="3035"/>
-                  </a:lnTo>
-                  <a:lnTo>
-                    <a:pt x="6402006" y="0"/>
-                  </a:lnTo>
-                  <a:close/>
-                </a:path>
-              </a:pathLst>
-            </a:custGeom>
-            <a:solidFill>
-              <a:srgbClr val="E2E2E2"/>
-            </a:solidFill>
-          </p:spPr>
-          <p:txBody>
-            <a:bodyPr wrap="square" lIns="0" tIns="0" rIns="0" bIns="0" rtlCol="0"/>
-            <a:lstStyle/>
-            <a:p>
-              <a:endParaRPr/>
-            </a:p>
-          </p:txBody>
-        </p:sp>
-      </p:grpSp>
-      <p:sp>
-        <p:nvSpPr>
-          <p:cNvPr id="44" name="object 44"/>
-          <p:cNvSpPr txBox="1"/>
-          <p:nvPr/>
-        </p:nvSpPr>
-        <p:spPr>
-          <a:xfrm>
-            <a:off x="792276" y="8018526"/>
-            <a:ext cx="6414135" cy="741680"/>
-          </a:xfrm>
-          <a:prstGeom prst="rect">
-            <a:avLst/>
-          </a:prstGeom>
-        </p:spPr>
-        <p:txBody>
-          <a:bodyPr vert="horz" wrap="square" lIns="0" tIns="12700" rIns="0" bIns="0" rtlCol="0">
-            <a:spAutoFit/>
-          </a:bodyPr>
-          <a:lstStyle/>
-          <a:p>
-            <a:pPr marL="12700">
-              <a:lnSpc>
-                <a:spcPct val="100000"/>
-              </a:lnSpc>
-              <a:spcBef>
-                <a:spcPts val="100"/>
-              </a:spcBef>
-            </a:pPr>
-            <a:r>
-              <a:rPr sz="1400" b="1" dirty="0">
-                <a:solidFill>
-                  <a:srgbClr val="3B78D7"/>
-                </a:solidFill>
-                <a:latin typeface="Times New Roman"/>
-                <a:cs typeface="Times New Roman"/>
-              </a:rPr>
-              <a:t>8.</a:t>
-            </a:r>
-            <a:r>
-              <a:rPr sz="1400" b="1" spc="-5" dirty="0">
-                <a:solidFill>
-                  <a:srgbClr val="3B78D7"/>
-                </a:solidFill>
-                <a:latin typeface="Times New Roman"/>
-                <a:cs typeface="Times New Roman"/>
-              </a:rPr>
-              <a:t> </a:t>
-            </a:r>
-            <a:r>
-              <a:rPr sz="1400" b="1" spc="-10" dirty="0">
-                <a:solidFill>
-                  <a:srgbClr val="3B78D7"/>
-                </a:solidFill>
-                <a:latin typeface="Times New Roman"/>
-                <a:cs typeface="Times New Roman"/>
-              </a:rPr>
-              <a:t>Conclusion:</a:t>
-            </a:r>
-            <a:endParaRPr sz="1400">
-              <a:latin typeface="Times New Roman"/>
-              <a:cs typeface="Times New Roman"/>
-            </a:endParaRPr>
-          </a:p>
-          <a:p>
-            <a:pPr marL="106680" marR="5080">
-              <a:lnSpc>
-                <a:spcPts val="1380"/>
-              </a:lnSpc>
-              <a:spcBef>
-                <a:spcPts val="1235"/>
-              </a:spcBef>
-            </a:pPr>
-            <a:r>
-              <a:rPr sz="1200" i="1" dirty="0">
-                <a:latin typeface="Times New Roman"/>
-                <a:cs typeface="Times New Roman"/>
-              </a:rPr>
-              <a:t>(Summarize</a:t>
-            </a:r>
-            <a:r>
-              <a:rPr sz="1200" i="1" spc="-25" dirty="0">
-                <a:latin typeface="Times New Roman"/>
-                <a:cs typeface="Times New Roman"/>
-              </a:rPr>
-              <a:t> </a:t>
-            </a:r>
-            <a:r>
-              <a:rPr sz="1200" i="1" dirty="0">
-                <a:latin typeface="Times New Roman"/>
-                <a:cs typeface="Times New Roman"/>
-              </a:rPr>
-              <a:t>how</a:t>
-            </a:r>
-            <a:r>
-              <a:rPr sz="1200" i="1" spc="-20" dirty="0">
-                <a:latin typeface="Times New Roman"/>
-                <a:cs typeface="Times New Roman"/>
-              </a:rPr>
-              <a:t> </a:t>
-            </a:r>
-            <a:r>
-              <a:rPr sz="1200" i="1" dirty="0">
-                <a:latin typeface="Times New Roman"/>
-                <a:cs typeface="Times New Roman"/>
-              </a:rPr>
-              <a:t>JavaScript</a:t>
-            </a:r>
-            <a:r>
-              <a:rPr sz="1200" i="1" spc="-25" dirty="0">
-                <a:latin typeface="Times New Roman"/>
-                <a:cs typeface="Times New Roman"/>
-              </a:rPr>
-              <a:t> </a:t>
-            </a:r>
-            <a:r>
-              <a:rPr sz="1200" i="1" dirty="0">
-                <a:latin typeface="Times New Roman"/>
-                <a:cs typeface="Times New Roman"/>
-              </a:rPr>
-              <a:t>successfully</a:t>
-            </a:r>
-            <a:r>
-              <a:rPr sz="1200" i="1" spc="-25" dirty="0">
-                <a:latin typeface="Times New Roman"/>
-                <a:cs typeface="Times New Roman"/>
-              </a:rPr>
-              <a:t> </a:t>
-            </a:r>
-            <a:r>
-              <a:rPr sz="1200" i="1" dirty="0">
-                <a:latin typeface="Times New Roman"/>
-                <a:cs typeface="Times New Roman"/>
-              </a:rPr>
-              <a:t>enhanced</a:t>
-            </a:r>
-            <a:r>
-              <a:rPr sz="1200" i="1" spc="-10" dirty="0">
-                <a:latin typeface="Times New Roman"/>
-                <a:cs typeface="Times New Roman"/>
-              </a:rPr>
-              <a:t> </a:t>
-            </a:r>
-            <a:r>
-              <a:rPr sz="1200" i="1" dirty="0">
-                <a:latin typeface="Times New Roman"/>
-                <a:cs typeface="Times New Roman"/>
-              </a:rPr>
-              <a:t>the</a:t>
-            </a:r>
-            <a:r>
-              <a:rPr sz="1200" i="1" spc="-25" dirty="0">
-                <a:latin typeface="Times New Roman"/>
-                <a:cs typeface="Times New Roman"/>
-              </a:rPr>
-              <a:t> </a:t>
-            </a:r>
-            <a:r>
-              <a:rPr sz="1200" i="1" dirty="0">
-                <a:latin typeface="Times New Roman"/>
-                <a:cs typeface="Times New Roman"/>
-              </a:rPr>
-              <a:t>application</a:t>
-            </a:r>
-            <a:r>
-              <a:rPr sz="1200" i="1" spc="-20" dirty="0">
-                <a:latin typeface="Times New Roman"/>
-                <a:cs typeface="Times New Roman"/>
-              </a:rPr>
-              <a:t> </a:t>
-            </a:r>
-            <a:r>
-              <a:rPr sz="1200" i="1" dirty="0">
-                <a:latin typeface="Times New Roman"/>
-                <a:cs typeface="Times New Roman"/>
-              </a:rPr>
-              <a:t>by</a:t>
-            </a:r>
-            <a:r>
-              <a:rPr sz="1200" i="1" spc="-25" dirty="0">
-                <a:latin typeface="Times New Roman"/>
-                <a:cs typeface="Times New Roman"/>
-              </a:rPr>
-              <a:t> </a:t>
-            </a:r>
-            <a:r>
-              <a:rPr sz="1200" i="1" dirty="0">
-                <a:latin typeface="Times New Roman"/>
-                <a:cs typeface="Times New Roman"/>
-              </a:rPr>
-              <a:t>adding</a:t>
-            </a:r>
-            <a:r>
-              <a:rPr sz="1200" i="1" spc="-20" dirty="0">
-                <a:latin typeface="Times New Roman"/>
-                <a:cs typeface="Times New Roman"/>
-              </a:rPr>
-              <a:t> </a:t>
-            </a:r>
-            <a:r>
-              <a:rPr sz="1200" i="1" spc="-10" dirty="0">
-                <a:latin typeface="Times New Roman"/>
-                <a:cs typeface="Times New Roman"/>
-              </a:rPr>
-              <a:t>interactivity</a:t>
-            </a:r>
-            <a:r>
-              <a:rPr sz="1200" i="1" spc="-25" dirty="0">
-                <a:latin typeface="Times New Roman"/>
-                <a:cs typeface="Times New Roman"/>
-              </a:rPr>
-              <a:t> </a:t>
-            </a:r>
-            <a:r>
-              <a:rPr sz="1200" i="1" dirty="0">
-                <a:latin typeface="Times New Roman"/>
-                <a:cs typeface="Times New Roman"/>
-              </a:rPr>
-              <a:t>and</a:t>
-            </a:r>
-            <a:r>
-              <a:rPr sz="1200" i="1" spc="-25" dirty="0">
-                <a:latin typeface="Times New Roman"/>
-                <a:cs typeface="Times New Roman"/>
-              </a:rPr>
-              <a:t> </a:t>
-            </a:r>
-            <a:r>
-              <a:rPr sz="1200" i="1" spc="-10" dirty="0">
-                <a:latin typeface="Times New Roman"/>
-                <a:cs typeface="Times New Roman"/>
-              </a:rPr>
-              <a:t>dynamic behavior.)</a:t>
-            </a:r>
-            <a:endParaRPr sz="1200">
+            <a:endParaRPr sz="1400" dirty="0">
               <a:latin typeface="Times New Roman"/>
               <a:cs typeface="Times New Roman"/>
             </a:endParaRPr>
@@ -11952,7 +8595,1436 @@
           </a:prstGeom>
         </p:spPr>
       </p:pic>
+      <p:pic>
+        <p:nvPicPr>
+          <p:cNvPr id="30" name="Picture 29">
+            <a:extLst>
+              <a:ext uri="{FF2B5EF4-FFF2-40B4-BE49-F238E27FC236}">
+                <a16:creationId xmlns:a16="http://schemas.microsoft.com/office/drawing/2014/main" id="{E39EB024-B0B1-2FC8-4946-3FFB52C6E4DB}"/>
+              </a:ext>
+            </a:extLst>
+          </p:cNvPr>
+          <p:cNvPicPr>
+            <a:picLocks noChangeAspect="1"/>
+          </p:cNvPicPr>
+          <p:nvPr/>
+        </p:nvPicPr>
+        <p:blipFill>
+          <a:blip r:embed="rId6">
+            <a:extLst>
+              <a:ext uri="{28A0092B-C50C-407E-A947-70E740481C1C}">
+                <a14:useLocalDpi xmlns:a14="http://schemas.microsoft.com/office/drawing/2010/main" val="0"/>
+              </a:ext>
+            </a:extLst>
+          </a:blip>
+          <a:srcRect l="11592" t="3590" r="6220"/>
+          <a:stretch>
+            <a:fillRect/>
+          </a:stretch>
+        </p:blipFill>
+        <p:spPr>
+          <a:xfrm>
+            <a:off x="57899" y="7288351"/>
+            <a:ext cx="3194050" cy="3384296"/>
+          </a:xfrm>
+          <a:prstGeom prst="rect">
+            <a:avLst/>
+          </a:prstGeom>
+        </p:spPr>
+      </p:pic>
+      <p:pic>
+        <p:nvPicPr>
+          <p:cNvPr id="32" name="Picture 31">
+            <a:extLst>
+              <a:ext uri="{FF2B5EF4-FFF2-40B4-BE49-F238E27FC236}">
+                <a16:creationId xmlns:a16="http://schemas.microsoft.com/office/drawing/2014/main" id="{D77C2844-B6D8-20A6-E3DE-5B5C2B1CDA33}"/>
+              </a:ext>
+            </a:extLst>
+          </p:cNvPr>
+          <p:cNvPicPr>
+            <a:picLocks noChangeAspect="1"/>
+          </p:cNvPicPr>
+          <p:nvPr/>
+        </p:nvPicPr>
+        <p:blipFill>
+          <a:blip r:embed="rId7">
+            <a:extLst>
+              <a:ext uri="{28A0092B-C50C-407E-A947-70E740481C1C}">
+                <a14:useLocalDpi xmlns:a14="http://schemas.microsoft.com/office/drawing/2010/main" val="0"/>
+              </a:ext>
+            </a:extLst>
+          </a:blip>
+          <a:srcRect l="5222" t="-1478" r="5164" b="1478"/>
+          <a:stretch>
+            <a:fillRect/>
+          </a:stretch>
+        </p:blipFill>
+        <p:spPr>
+          <a:xfrm>
+            <a:off x="3194050" y="7648276"/>
+            <a:ext cx="4351087" cy="3046596"/>
+          </a:xfrm>
+          <a:prstGeom prst="rect">
+            <a:avLst/>
+          </a:prstGeom>
+        </p:spPr>
+      </p:pic>
+      <p:sp>
+        <p:nvSpPr>
+          <p:cNvPr id="33" name="TextBox 32">
+            <a:extLst>
+              <a:ext uri="{FF2B5EF4-FFF2-40B4-BE49-F238E27FC236}">
+                <a16:creationId xmlns:a16="http://schemas.microsoft.com/office/drawing/2014/main" id="{627968FB-4570-BB83-F934-0CC4F00E077E}"/>
+              </a:ext>
+            </a:extLst>
+          </p:cNvPr>
+          <p:cNvSpPr txBox="1"/>
+          <p:nvPr/>
+        </p:nvSpPr>
+        <p:spPr>
+          <a:xfrm>
+            <a:off x="2908202" y="7232523"/>
+            <a:ext cx="1093569" cy="338554"/>
+          </a:xfrm>
+          <a:prstGeom prst="rect">
+            <a:avLst/>
+          </a:prstGeom>
+          <a:noFill/>
+        </p:spPr>
+        <p:txBody>
+          <a:bodyPr wrap="none" rtlCol="0">
+            <a:spAutoFit/>
+          </a:bodyPr>
+          <a:lstStyle/>
+          <a:p>
+            <a:r>
+              <a:rPr lang="en-US" sz="1600" dirty="0">
+                <a:latin typeface="Times New Roman" panose="02020603050405020304" pitchFamily="18" charset="0"/>
+                <a:cs typeface="Times New Roman" panose="02020603050405020304" pitchFamily="18" charset="0"/>
+              </a:rPr>
+              <a:t>Static page</a:t>
+            </a:r>
+          </a:p>
+        </p:txBody>
+      </p:sp>
     </p:spTree>
+  </p:cSld>
+  <p:clrMapOvr>
+    <a:masterClrMapping/>
+  </p:clrMapOvr>
+</p:sld>
+</file>
+
+<file path=ppt/slides/slide4.xml><?xml version="1.0" encoding="utf-8"?>
+<p:sld xmlns:a="http://schemas.openxmlformats.org/drawingml/2006/main" xmlns:r="http://schemas.openxmlformats.org/officeDocument/2006/relationships" xmlns:p="http://schemas.openxmlformats.org/presentationml/2006/main" showMasterSp="0">
+  <p:cSld>
+    <p:spTree>
+      <p:nvGrpSpPr>
+        <p:cNvPr id="1" name="">
+          <a:extLst>
+            <a:ext uri="{FF2B5EF4-FFF2-40B4-BE49-F238E27FC236}">
+              <a16:creationId xmlns:a16="http://schemas.microsoft.com/office/drawing/2014/main" id="{D73FE77E-7EE4-F4F4-D268-3DB849A7AB5B}"/>
+            </a:ext>
+          </a:extLst>
+        </p:cNvPr>
+        <p:cNvGrpSpPr/>
+        <p:nvPr/>
+      </p:nvGrpSpPr>
+      <p:grpSpPr>
+        <a:xfrm>
+          <a:off x="0" y="0"/>
+          <a:ext cx="0" cy="0"/>
+          <a:chOff x="0" y="0"/>
+          <a:chExt cx="0" cy="0"/>
+        </a:xfrm>
+      </p:grpSpPr>
+      <p:pic>
+        <p:nvPicPr>
+          <p:cNvPr id="2" name="object 2">
+            <a:extLst>
+              <a:ext uri="{FF2B5EF4-FFF2-40B4-BE49-F238E27FC236}">
+                <a16:creationId xmlns:a16="http://schemas.microsoft.com/office/drawing/2014/main" id="{668A265A-5D75-9E93-05F0-0A4991858BA7}"/>
+              </a:ext>
+            </a:extLst>
+          </p:cNvPr>
+          <p:cNvPicPr/>
+          <p:nvPr/>
+        </p:nvPicPr>
+        <p:blipFill>
+          <a:blip r:embed="rId2" cstate="print"/>
+          <a:stretch>
+            <a:fillRect/>
+          </a:stretch>
+        </p:blipFill>
+        <p:spPr>
+          <a:xfrm>
+            <a:off x="4416425" y="644562"/>
+            <a:ext cx="996314" cy="434174"/>
+          </a:xfrm>
+          <a:prstGeom prst="rect">
+            <a:avLst/>
+          </a:prstGeom>
+        </p:spPr>
+      </p:pic>
+      <p:pic>
+        <p:nvPicPr>
+          <p:cNvPr id="3" name="object 3">
+            <a:extLst>
+              <a:ext uri="{FF2B5EF4-FFF2-40B4-BE49-F238E27FC236}">
+                <a16:creationId xmlns:a16="http://schemas.microsoft.com/office/drawing/2014/main" id="{1AFAD15F-13D7-4028-B2D9-B86DB395AD71}"/>
+              </a:ext>
+            </a:extLst>
+          </p:cNvPr>
+          <p:cNvPicPr/>
+          <p:nvPr/>
+        </p:nvPicPr>
+        <p:blipFill>
+          <a:blip r:embed="rId3" cstate="print"/>
+          <a:stretch>
+            <a:fillRect/>
+          </a:stretch>
+        </p:blipFill>
+        <p:spPr>
+          <a:xfrm>
+            <a:off x="6073775" y="665479"/>
+            <a:ext cx="1074407" cy="401954"/>
+          </a:xfrm>
+          <a:prstGeom prst="rect">
+            <a:avLst/>
+          </a:prstGeom>
+        </p:spPr>
+      </p:pic>
+      <p:grpSp>
+        <p:nvGrpSpPr>
+          <p:cNvPr id="29" name="object 29">
+            <a:extLst>
+              <a:ext uri="{FF2B5EF4-FFF2-40B4-BE49-F238E27FC236}">
+                <a16:creationId xmlns:a16="http://schemas.microsoft.com/office/drawing/2014/main" id="{DCA6F22D-D77C-5273-0949-BE61BCD13369}"/>
+              </a:ext>
+            </a:extLst>
+          </p:cNvPr>
+          <p:cNvGrpSpPr/>
+          <p:nvPr/>
+        </p:nvGrpSpPr>
+        <p:grpSpPr>
+          <a:xfrm>
+            <a:off x="801369" y="6473824"/>
+            <a:ext cx="6402705" cy="20955"/>
+            <a:chOff x="801369" y="6473824"/>
+            <a:chExt cx="6402705" cy="20955"/>
+          </a:xfrm>
+        </p:grpSpPr>
+        <p:sp>
+          <p:nvSpPr>
+            <p:cNvPr id="30" name="object 30">
+              <a:extLst>
+                <a:ext uri="{FF2B5EF4-FFF2-40B4-BE49-F238E27FC236}">
+                  <a16:creationId xmlns:a16="http://schemas.microsoft.com/office/drawing/2014/main" id="{909C0050-DF1A-8B01-7227-DAB5A6C65112}"/>
+                </a:ext>
+              </a:extLst>
+            </p:cNvPr>
+            <p:cNvSpPr/>
+            <p:nvPr/>
+          </p:nvSpPr>
+          <p:spPr>
+            <a:xfrm>
+              <a:off x="801370" y="6473824"/>
+              <a:ext cx="6400800" cy="19685"/>
+            </a:xfrm>
+            <a:custGeom>
+              <a:avLst/>
+              <a:gdLst/>
+              <a:ahLst/>
+              <a:cxnLst/>
+              <a:rect l="l" t="t" r="r" b="b"/>
+              <a:pathLst>
+                <a:path w="6400800" h="19685">
+                  <a:moveTo>
+                    <a:pt x="6400800" y="0"/>
+                  </a:moveTo>
+                  <a:lnTo>
+                    <a:pt x="0" y="0"/>
+                  </a:lnTo>
+                  <a:lnTo>
+                    <a:pt x="0" y="19685"/>
+                  </a:lnTo>
+                  <a:lnTo>
+                    <a:pt x="6400800" y="19685"/>
+                  </a:lnTo>
+                  <a:lnTo>
+                    <a:pt x="6400800" y="0"/>
+                  </a:lnTo>
+                  <a:close/>
+                </a:path>
+              </a:pathLst>
+            </a:custGeom>
+            <a:solidFill>
+              <a:srgbClr val="9F9F9F"/>
+            </a:solidFill>
+          </p:spPr>
+          <p:txBody>
+            <a:bodyPr wrap="square" lIns="0" tIns="0" rIns="0" bIns="0" rtlCol="0"/>
+            <a:lstStyle/>
+            <a:p>
+              <a:endParaRPr/>
+            </a:p>
+          </p:txBody>
+        </p:sp>
+        <p:sp>
+          <p:nvSpPr>
+            <p:cNvPr id="31" name="object 31">
+              <a:extLst>
+                <a:ext uri="{FF2B5EF4-FFF2-40B4-BE49-F238E27FC236}">
+                  <a16:creationId xmlns:a16="http://schemas.microsoft.com/office/drawing/2014/main" id="{DC14D2F1-540D-A978-0F33-6394DD8544A0}"/>
+                </a:ext>
+              </a:extLst>
+            </p:cNvPr>
+            <p:cNvSpPr/>
+            <p:nvPr/>
+          </p:nvSpPr>
+          <p:spPr>
+            <a:xfrm>
+              <a:off x="7200899" y="6474840"/>
+              <a:ext cx="3175" cy="3175"/>
+            </a:xfrm>
+            <a:custGeom>
+              <a:avLst/>
+              <a:gdLst/>
+              <a:ahLst/>
+              <a:cxnLst/>
+              <a:rect l="l" t="t" r="r" b="b"/>
+              <a:pathLst>
+                <a:path w="3175" h="3175">
+                  <a:moveTo>
+                    <a:pt x="3047" y="0"/>
+                  </a:moveTo>
+                  <a:lnTo>
+                    <a:pt x="0" y="0"/>
+                  </a:lnTo>
+                  <a:lnTo>
+                    <a:pt x="0" y="3047"/>
+                  </a:lnTo>
+                  <a:lnTo>
+                    <a:pt x="3047" y="3047"/>
+                  </a:lnTo>
+                  <a:lnTo>
+                    <a:pt x="3047" y="0"/>
+                  </a:lnTo>
+                  <a:close/>
+                </a:path>
+              </a:pathLst>
+            </a:custGeom>
+            <a:solidFill>
+              <a:srgbClr val="E2E2E2"/>
+            </a:solidFill>
+          </p:spPr>
+          <p:txBody>
+            <a:bodyPr wrap="square" lIns="0" tIns="0" rIns="0" bIns="0" rtlCol="0"/>
+            <a:lstStyle/>
+            <a:p>
+              <a:endParaRPr/>
+            </a:p>
+          </p:txBody>
+        </p:sp>
+        <p:sp>
+          <p:nvSpPr>
+            <p:cNvPr id="32" name="object 32">
+              <a:extLst>
+                <a:ext uri="{FF2B5EF4-FFF2-40B4-BE49-F238E27FC236}">
+                  <a16:creationId xmlns:a16="http://schemas.microsoft.com/office/drawing/2014/main" id="{B4BF53A2-9AD3-61DB-03CB-189AF93F3632}"/>
+                </a:ext>
+              </a:extLst>
+            </p:cNvPr>
+            <p:cNvSpPr/>
+            <p:nvPr/>
+          </p:nvSpPr>
+          <p:spPr>
+            <a:xfrm>
+              <a:off x="801928" y="6474853"/>
+              <a:ext cx="6402070" cy="17145"/>
+            </a:xfrm>
+            <a:custGeom>
+              <a:avLst/>
+              <a:gdLst/>
+              <a:ahLst/>
+              <a:cxnLst/>
+              <a:rect l="l" t="t" r="r" b="b"/>
+              <a:pathLst>
+                <a:path w="6402070" h="17145">
+                  <a:moveTo>
+                    <a:pt x="3048" y="3048"/>
+                  </a:moveTo>
+                  <a:lnTo>
+                    <a:pt x="0" y="3048"/>
+                  </a:lnTo>
+                  <a:lnTo>
+                    <a:pt x="0" y="16751"/>
+                  </a:lnTo>
+                  <a:lnTo>
+                    <a:pt x="3048" y="16751"/>
+                  </a:lnTo>
+                  <a:lnTo>
+                    <a:pt x="3048" y="3048"/>
+                  </a:lnTo>
+                  <a:close/>
+                </a:path>
+                <a:path w="6402070" h="17145">
+                  <a:moveTo>
+                    <a:pt x="6402006" y="0"/>
+                  </a:moveTo>
+                  <a:lnTo>
+                    <a:pt x="6398971" y="0"/>
+                  </a:lnTo>
+                  <a:lnTo>
+                    <a:pt x="6398971" y="3035"/>
+                  </a:lnTo>
+                  <a:lnTo>
+                    <a:pt x="6402006" y="3035"/>
+                  </a:lnTo>
+                  <a:lnTo>
+                    <a:pt x="6402006" y="0"/>
+                  </a:lnTo>
+                  <a:close/>
+                </a:path>
+              </a:pathLst>
+            </a:custGeom>
+            <a:solidFill>
+              <a:srgbClr val="9F9F9F"/>
+            </a:solidFill>
+          </p:spPr>
+          <p:txBody>
+            <a:bodyPr wrap="square" lIns="0" tIns="0" rIns="0" bIns="0" rtlCol="0"/>
+            <a:lstStyle/>
+            <a:p>
+              <a:endParaRPr/>
+            </a:p>
+          </p:txBody>
+        </p:sp>
+        <p:sp>
+          <p:nvSpPr>
+            <p:cNvPr id="33" name="object 33">
+              <a:extLst>
+                <a:ext uri="{FF2B5EF4-FFF2-40B4-BE49-F238E27FC236}">
+                  <a16:creationId xmlns:a16="http://schemas.microsoft.com/office/drawing/2014/main" id="{0D499D1B-EA34-984D-D9F3-F881955FF615}"/>
+                </a:ext>
+              </a:extLst>
+            </p:cNvPr>
+            <p:cNvSpPr/>
+            <p:nvPr/>
+          </p:nvSpPr>
+          <p:spPr>
+            <a:xfrm>
+              <a:off x="7200899" y="6477888"/>
+              <a:ext cx="3175" cy="13970"/>
+            </a:xfrm>
+            <a:custGeom>
+              <a:avLst/>
+              <a:gdLst/>
+              <a:ahLst/>
+              <a:cxnLst/>
+              <a:rect l="l" t="t" r="r" b="b"/>
+              <a:pathLst>
+                <a:path w="3175" h="13970">
+                  <a:moveTo>
+                    <a:pt x="3047" y="0"/>
+                  </a:moveTo>
+                  <a:lnTo>
+                    <a:pt x="0" y="0"/>
+                  </a:lnTo>
+                  <a:lnTo>
+                    <a:pt x="0" y="13715"/>
+                  </a:lnTo>
+                  <a:lnTo>
+                    <a:pt x="3047" y="13715"/>
+                  </a:lnTo>
+                  <a:lnTo>
+                    <a:pt x="3047" y="0"/>
+                  </a:lnTo>
+                  <a:close/>
+                </a:path>
+              </a:pathLst>
+            </a:custGeom>
+            <a:solidFill>
+              <a:srgbClr val="E2E2E2"/>
+            </a:solidFill>
+          </p:spPr>
+          <p:txBody>
+            <a:bodyPr wrap="square" lIns="0" tIns="0" rIns="0" bIns="0" rtlCol="0"/>
+            <a:lstStyle/>
+            <a:p>
+              <a:endParaRPr/>
+            </a:p>
+          </p:txBody>
+        </p:sp>
+        <p:sp>
+          <p:nvSpPr>
+            <p:cNvPr id="34" name="object 34">
+              <a:extLst>
+                <a:ext uri="{FF2B5EF4-FFF2-40B4-BE49-F238E27FC236}">
+                  <a16:creationId xmlns:a16="http://schemas.microsoft.com/office/drawing/2014/main" id="{FC1370C6-0E18-BEC3-6A9E-25A57A75A21B}"/>
+                </a:ext>
+              </a:extLst>
+            </p:cNvPr>
+            <p:cNvSpPr/>
+            <p:nvPr/>
+          </p:nvSpPr>
+          <p:spPr>
+            <a:xfrm>
+              <a:off x="801928" y="6491604"/>
+              <a:ext cx="3175" cy="3175"/>
+            </a:xfrm>
+            <a:custGeom>
+              <a:avLst/>
+              <a:gdLst/>
+              <a:ahLst/>
+              <a:cxnLst/>
+              <a:rect l="l" t="t" r="r" b="b"/>
+              <a:pathLst>
+                <a:path w="3175" h="3175">
+                  <a:moveTo>
+                    <a:pt x="3048" y="0"/>
+                  </a:moveTo>
+                  <a:lnTo>
+                    <a:pt x="0" y="0"/>
+                  </a:lnTo>
+                  <a:lnTo>
+                    <a:pt x="0" y="3047"/>
+                  </a:lnTo>
+                  <a:lnTo>
+                    <a:pt x="3048" y="3047"/>
+                  </a:lnTo>
+                  <a:lnTo>
+                    <a:pt x="3048" y="0"/>
+                  </a:lnTo>
+                  <a:close/>
+                </a:path>
+              </a:pathLst>
+            </a:custGeom>
+            <a:solidFill>
+              <a:srgbClr val="9F9F9F"/>
+            </a:solidFill>
+          </p:spPr>
+          <p:txBody>
+            <a:bodyPr wrap="square" lIns="0" tIns="0" rIns="0" bIns="0" rtlCol="0"/>
+            <a:lstStyle/>
+            <a:p>
+              <a:endParaRPr/>
+            </a:p>
+          </p:txBody>
+        </p:sp>
+        <p:sp>
+          <p:nvSpPr>
+            <p:cNvPr id="35" name="object 35">
+              <a:extLst>
+                <a:ext uri="{FF2B5EF4-FFF2-40B4-BE49-F238E27FC236}">
+                  <a16:creationId xmlns:a16="http://schemas.microsoft.com/office/drawing/2014/main" id="{BB927645-12B5-283F-73E0-0B56C6709D9C}"/>
+                </a:ext>
+              </a:extLst>
+            </p:cNvPr>
+            <p:cNvSpPr/>
+            <p:nvPr/>
+          </p:nvSpPr>
+          <p:spPr>
+            <a:xfrm>
+              <a:off x="801928" y="6491617"/>
+              <a:ext cx="6402070" cy="3175"/>
+            </a:xfrm>
+            <a:custGeom>
+              <a:avLst/>
+              <a:gdLst/>
+              <a:ahLst/>
+              <a:cxnLst/>
+              <a:rect l="l" t="t" r="r" b="b"/>
+              <a:pathLst>
+                <a:path w="6402070" h="3175">
+                  <a:moveTo>
+                    <a:pt x="6402006" y="0"/>
+                  </a:moveTo>
+                  <a:lnTo>
+                    <a:pt x="6399022" y="0"/>
+                  </a:lnTo>
+                  <a:lnTo>
+                    <a:pt x="3048" y="0"/>
+                  </a:lnTo>
+                  <a:lnTo>
+                    <a:pt x="0" y="0"/>
+                  </a:lnTo>
+                  <a:lnTo>
+                    <a:pt x="0" y="3035"/>
+                  </a:lnTo>
+                  <a:lnTo>
+                    <a:pt x="3048" y="3035"/>
+                  </a:lnTo>
+                  <a:lnTo>
+                    <a:pt x="6398971" y="3035"/>
+                  </a:lnTo>
+                  <a:lnTo>
+                    <a:pt x="6402006" y="3035"/>
+                  </a:lnTo>
+                  <a:lnTo>
+                    <a:pt x="6402006" y="0"/>
+                  </a:lnTo>
+                  <a:close/>
+                </a:path>
+              </a:pathLst>
+            </a:custGeom>
+            <a:solidFill>
+              <a:srgbClr val="E2E2E2"/>
+            </a:solidFill>
+          </p:spPr>
+          <p:txBody>
+            <a:bodyPr wrap="square" lIns="0" tIns="0" rIns="0" bIns="0" rtlCol="0"/>
+            <a:lstStyle/>
+            <a:p>
+              <a:endParaRPr/>
+            </a:p>
+          </p:txBody>
+        </p:sp>
+      </p:grpSp>
+      <p:sp>
+        <p:nvSpPr>
+          <p:cNvPr id="36" name="object 36">
+            <a:extLst>
+              <a:ext uri="{FF2B5EF4-FFF2-40B4-BE49-F238E27FC236}">
+                <a16:creationId xmlns:a16="http://schemas.microsoft.com/office/drawing/2014/main" id="{C6F8C91A-DE82-E27A-9F35-97C92F7E9BB8}"/>
+              </a:ext>
+            </a:extLst>
+          </p:cNvPr>
+          <p:cNvSpPr txBox="1"/>
+          <p:nvPr/>
+        </p:nvSpPr>
+        <p:spPr>
+          <a:xfrm>
+            <a:off x="789228" y="6661784"/>
+            <a:ext cx="5911850" cy="1690847"/>
+          </a:xfrm>
+          <a:prstGeom prst="rect">
+            <a:avLst/>
+          </a:prstGeom>
+        </p:spPr>
+        <p:txBody>
+          <a:bodyPr vert="horz" wrap="square" lIns="0" tIns="13335" rIns="0" bIns="0" rtlCol="0">
+            <a:spAutoFit/>
+          </a:bodyPr>
+          <a:lstStyle/>
+          <a:p>
+            <a:pPr marL="12700">
+              <a:lnSpc>
+                <a:spcPct val="100000"/>
+              </a:lnSpc>
+              <a:spcBef>
+                <a:spcPts val="105"/>
+              </a:spcBef>
+            </a:pPr>
+            <a:r>
+              <a:rPr sz="1400" b="1" dirty="0">
+                <a:solidFill>
+                  <a:srgbClr val="3B78D7"/>
+                </a:solidFill>
+                <a:latin typeface="Times New Roman"/>
+                <a:cs typeface="Times New Roman"/>
+              </a:rPr>
+              <a:t>7.Learning</a:t>
+            </a:r>
+            <a:r>
+              <a:rPr sz="1400" b="1" spc="-45" dirty="0">
+                <a:solidFill>
+                  <a:srgbClr val="3B78D7"/>
+                </a:solidFill>
+                <a:latin typeface="Times New Roman"/>
+                <a:cs typeface="Times New Roman"/>
+              </a:rPr>
+              <a:t> </a:t>
+            </a:r>
+            <a:r>
+              <a:rPr sz="1400" b="1" spc="-10" dirty="0">
+                <a:solidFill>
+                  <a:srgbClr val="3B78D7"/>
+                </a:solidFill>
+                <a:latin typeface="Times New Roman"/>
+                <a:cs typeface="Times New Roman"/>
+              </a:rPr>
+              <a:t>Outcome:</a:t>
+            </a:r>
+            <a:endParaRPr sz="1400" dirty="0">
+              <a:latin typeface="Times New Roman"/>
+              <a:cs typeface="Times New Roman"/>
+            </a:endParaRPr>
+          </a:p>
+          <a:p>
+            <a:pPr marL="109855" marR="5080">
+              <a:lnSpc>
+                <a:spcPts val="1380"/>
+              </a:lnSpc>
+              <a:spcBef>
+                <a:spcPts val="1025"/>
+              </a:spcBef>
+            </a:pPr>
+            <a:r>
+              <a:rPr lang="en-US" sz="1300" b="1" dirty="0">
+                <a:latin typeface="Times New Roman"/>
+                <a:cs typeface="Times New Roman"/>
+              </a:rPr>
+              <a:t>Interactivity</a:t>
+            </a:r>
+            <a:r>
+              <a:rPr lang="en-US" sz="1300" dirty="0">
+                <a:latin typeface="Times New Roman"/>
+                <a:cs typeface="Times New Roman"/>
+              </a:rPr>
+              <a:t>: I learned how to move beyond static styling and create a functional web application using JavaScript.</a:t>
+            </a:r>
+          </a:p>
+          <a:p>
+            <a:pPr marL="109855" marR="5080">
+              <a:lnSpc>
+                <a:spcPts val="1380"/>
+              </a:lnSpc>
+              <a:spcBef>
+                <a:spcPts val="1025"/>
+              </a:spcBef>
+            </a:pPr>
+            <a:r>
+              <a:rPr lang="en-US" sz="1300" b="1" dirty="0">
+                <a:latin typeface="Times New Roman"/>
+                <a:cs typeface="Times New Roman"/>
+              </a:rPr>
+              <a:t>Data Integrity</a:t>
+            </a:r>
+            <a:r>
+              <a:rPr lang="en-US" sz="1300" dirty="0">
+                <a:latin typeface="Times New Roman"/>
+                <a:cs typeface="Times New Roman"/>
+              </a:rPr>
+              <a:t>: I understood how to enforce rules on user input to ensure the database (or table) only receives correctly formatted information.</a:t>
+            </a:r>
+          </a:p>
+          <a:p>
+            <a:pPr marL="109855" marR="5080">
+              <a:lnSpc>
+                <a:spcPts val="1380"/>
+              </a:lnSpc>
+              <a:spcBef>
+                <a:spcPts val="1025"/>
+              </a:spcBef>
+            </a:pPr>
+            <a:r>
+              <a:rPr lang="en-US" sz="1300" b="1" dirty="0">
+                <a:latin typeface="Times New Roman"/>
+                <a:cs typeface="Times New Roman"/>
+              </a:rPr>
+              <a:t>DOM Skills</a:t>
+            </a:r>
+            <a:r>
+              <a:rPr lang="en-US" sz="1300" dirty="0">
+                <a:latin typeface="Times New Roman"/>
+                <a:cs typeface="Times New Roman"/>
+              </a:rPr>
+              <a:t>: I gained confidence in manipulating the Document Object Model to change page content dynamically without a server.</a:t>
+            </a:r>
+            <a:endParaRPr sz="1300" dirty="0">
+              <a:latin typeface="Times New Roman"/>
+              <a:cs typeface="Times New Roman"/>
+            </a:endParaRPr>
+          </a:p>
+        </p:txBody>
+      </p:sp>
+      <p:grpSp>
+        <p:nvGrpSpPr>
+          <p:cNvPr id="37" name="object 37">
+            <a:extLst>
+              <a:ext uri="{FF2B5EF4-FFF2-40B4-BE49-F238E27FC236}">
+                <a16:creationId xmlns:a16="http://schemas.microsoft.com/office/drawing/2014/main" id="{F73209A1-B658-BB94-8DE9-97B9BAAF9651}"/>
+              </a:ext>
+            </a:extLst>
+          </p:cNvPr>
+          <p:cNvGrpSpPr/>
+          <p:nvPr/>
+        </p:nvGrpSpPr>
+        <p:grpSpPr>
+          <a:xfrm>
+            <a:off x="789228" y="8778875"/>
+            <a:ext cx="6402705" cy="20955"/>
+            <a:chOff x="801369" y="7811769"/>
+            <a:chExt cx="6402705" cy="20955"/>
+          </a:xfrm>
+        </p:grpSpPr>
+        <p:sp>
+          <p:nvSpPr>
+            <p:cNvPr id="38" name="object 38">
+              <a:extLst>
+                <a:ext uri="{FF2B5EF4-FFF2-40B4-BE49-F238E27FC236}">
+                  <a16:creationId xmlns:a16="http://schemas.microsoft.com/office/drawing/2014/main" id="{030DE98A-A045-F160-2CDB-9FED1A919A79}"/>
+                </a:ext>
+              </a:extLst>
+            </p:cNvPr>
+            <p:cNvSpPr/>
+            <p:nvPr/>
+          </p:nvSpPr>
+          <p:spPr>
+            <a:xfrm>
+              <a:off x="801370" y="7811769"/>
+              <a:ext cx="6400800" cy="20320"/>
+            </a:xfrm>
+            <a:custGeom>
+              <a:avLst/>
+              <a:gdLst/>
+              <a:ahLst/>
+              <a:cxnLst/>
+              <a:rect l="l" t="t" r="r" b="b"/>
+              <a:pathLst>
+                <a:path w="6400800" h="20320">
+                  <a:moveTo>
+                    <a:pt x="6400800" y="0"/>
+                  </a:moveTo>
+                  <a:lnTo>
+                    <a:pt x="0" y="0"/>
+                  </a:lnTo>
+                  <a:lnTo>
+                    <a:pt x="0" y="20320"/>
+                  </a:lnTo>
+                  <a:lnTo>
+                    <a:pt x="6400800" y="20320"/>
+                  </a:lnTo>
+                  <a:lnTo>
+                    <a:pt x="6400800" y="0"/>
+                  </a:lnTo>
+                  <a:close/>
+                </a:path>
+              </a:pathLst>
+            </a:custGeom>
+            <a:solidFill>
+              <a:srgbClr val="9F9F9F"/>
+            </a:solidFill>
+          </p:spPr>
+          <p:txBody>
+            <a:bodyPr wrap="square" lIns="0" tIns="0" rIns="0" bIns="0" rtlCol="0"/>
+            <a:lstStyle/>
+            <a:p>
+              <a:endParaRPr/>
+            </a:p>
+          </p:txBody>
+        </p:sp>
+        <p:sp>
+          <p:nvSpPr>
+            <p:cNvPr id="39" name="object 39">
+              <a:extLst>
+                <a:ext uri="{FF2B5EF4-FFF2-40B4-BE49-F238E27FC236}">
+                  <a16:creationId xmlns:a16="http://schemas.microsoft.com/office/drawing/2014/main" id="{1540B0B7-F66A-09A9-CEA7-C7BB52369222}"/>
+                </a:ext>
+              </a:extLst>
+            </p:cNvPr>
+            <p:cNvSpPr/>
+            <p:nvPr/>
+          </p:nvSpPr>
+          <p:spPr>
+            <a:xfrm>
+              <a:off x="7200899" y="7812912"/>
+              <a:ext cx="3175" cy="3175"/>
+            </a:xfrm>
+            <a:custGeom>
+              <a:avLst/>
+              <a:gdLst/>
+              <a:ahLst/>
+              <a:cxnLst/>
+              <a:rect l="l" t="t" r="r" b="b"/>
+              <a:pathLst>
+                <a:path w="3175" h="3175">
+                  <a:moveTo>
+                    <a:pt x="3047" y="0"/>
+                  </a:moveTo>
+                  <a:lnTo>
+                    <a:pt x="0" y="0"/>
+                  </a:lnTo>
+                  <a:lnTo>
+                    <a:pt x="0" y="3047"/>
+                  </a:lnTo>
+                  <a:lnTo>
+                    <a:pt x="3047" y="3047"/>
+                  </a:lnTo>
+                  <a:lnTo>
+                    <a:pt x="3047" y="0"/>
+                  </a:lnTo>
+                  <a:close/>
+                </a:path>
+              </a:pathLst>
+            </a:custGeom>
+            <a:solidFill>
+              <a:srgbClr val="E2E2E2"/>
+            </a:solidFill>
+          </p:spPr>
+          <p:txBody>
+            <a:bodyPr wrap="square" lIns="0" tIns="0" rIns="0" bIns="0" rtlCol="0"/>
+            <a:lstStyle/>
+            <a:p>
+              <a:endParaRPr/>
+            </a:p>
+          </p:txBody>
+        </p:sp>
+        <p:sp>
+          <p:nvSpPr>
+            <p:cNvPr id="40" name="object 40">
+              <a:extLst>
+                <a:ext uri="{FF2B5EF4-FFF2-40B4-BE49-F238E27FC236}">
+                  <a16:creationId xmlns:a16="http://schemas.microsoft.com/office/drawing/2014/main" id="{87BDBD3E-C8C7-D992-85CD-1D77F69529EA}"/>
+                </a:ext>
+              </a:extLst>
+            </p:cNvPr>
+            <p:cNvSpPr/>
+            <p:nvPr/>
+          </p:nvSpPr>
+          <p:spPr>
+            <a:xfrm>
+              <a:off x="801928" y="7812925"/>
+              <a:ext cx="6402070" cy="17145"/>
+            </a:xfrm>
+            <a:custGeom>
+              <a:avLst/>
+              <a:gdLst/>
+              <a:ahLst/>
+              <a:cxnLst/>
+              <a:rect l="l" t="t" r="r" b="b"/>
+              <a:pathLst>
+                <a:path w="6402070" h="17145">
+                  <a:moveTo>
+                    <a:pt x="3048" y="3035"/>
+                  </a:moveTo>
+                  <a:lnTo>
+                    <a:pt x="0" y="3035"/>
+                  </a:lnTo>
+                  <a:lnTo>
+                    <a:pt x="0" y="16751"/>
+                  </a:lnTo>
+                  <a:lnTo>
+                    <a:pt x="3048" y="16751"/>
+                  </a:lnTo>
+                  <a:lnTo>
+                    <a:pt x="3048" y="3035"/>
+                  </a:lnTo>
+                  <a:close/>
+                </a:path>
+                <a:path w="6402070" h="17145">
+                  <a:moveTo>
+                    <a:pt x="6402006" y="0"/>
+                  </a:moveTo>
+                  <a:lnTo>
+                    <a:pt x="6398971" y="0"/>
+                  </a:lnTo>
+                  <a:lnTo>
+                    <a:pt x="6398971" y="3035"/>
+                  </a:lnTo>
+                  <a:lnTo>
+                    <a:pt x="6402006" y="3035"/>
+                  </a:lnTo>
+                  <a:lnTo>
+                    <a:pt x="6402006" y="0"/>
+                  </a:lnTo>
+                  <a:close/>
+                </a:path>
+              </a:pathLst>
+            </a:custGeom>
+            <a:solidFill>
+              <a:srgbClr val="9F9F9F"/>
+            </a:solidFill>
+          </p:spPr>
+          <p:txBody>
+            <a:bodyPr wrap="square" lIns="0" tIns="0" rIns="0" bIns="0" rtlCol="0"/>
+            <a:lstStyle/>
+            <a:p>
+              <a:endParaRPr/>
+            </a:p>
+          </p:txBody>
+        </p:sp>
+        <p:sp>
+          <p:nvSpPr>
+            <p:cNvPr id="41" name="object 41">
+              <a:extLst>
+                <a:ext uri="{FF2B5EF4-FFF2-40B4-BE49-F238E27FC236}">
+                  <a16:creationId xmlns:a16="http://schemas.microsoft.com/office/drawing/2014/main" id="{1CB04381-D201-EF29-AD41-3AFB9B108ABB}"/>
+                </a:ext>
+              </a:extLst>
+            </p:cNvPr>
+            <p:cNvSpPr/>
+            <p:nvPr/>
+          </p:nvSpPr>
+          <p:spPr>
+            <a:xfrm>
+              <a:off x="7200899" y="7815960"/>
+              <a:ext cx="3175" cy="13970"/>
+            </a:xfrm>
+            <a:custGeom>
+              <a:avLst/>
+              <a:gdLst/>
+              <a:ahLst/>
+              <a:cxnLst/>
+              <a:rect l="l" t="t" r="r" b="b"/>
+              <a:pathLst>
+                <a:path w="3175" h="13970">
+                  <a:moveTo>
+                    <a:pt x="3047" y="0"/>
+                  </a:moveTo>
+                  <a:lnTo>
+                    <a:pt x="0" y="0"/>
+                  </a:lnTo>
+                  <a:lnTo>
+                    <a:pt x="0" y="13716"/>
+                  </a:lnTo>
+                  <a:lnTo>
+                    <a:pt x="3047" y="13716"/>
+                  </a:lnTo>
+                  <a:lnTo>
+                    <a:pt x="3047" y="0"/>
+                  </a:lnTo>
+                  <a:close/>
+                </a:path>
+              </a:pathLst>
+            </a:custGeom>
+            <a:solidFill>
+              <a:srgbClr val="E2E2E2"/>
+            </a:solidFill>
+          </p:spPr>
+          <p:txBody>
+            <a:bodyPr wrap="square" lIns="0" tIns="0" rIns="0" bIns="0" rtlCol="0"/>
+            <a:lstStyle/>
+            <a:p>
+              <a:endParaRPr/>
+            </a:p>
+          </p:txBody>
+        </p:sp>
+        <p:sp>
+          <p:nvSpPr>
+            <p:cNvPr id="42" name="object 42">
+              <a:extLst>
+                <a:ext uri="{FF2B5EF4-FFF2-40B4-BE49-F238E27FC236}">
+                  <a16:creationId xmlns:a16="http://schemas.microsoft.com/office/drawing/2014/main" id="{211F987A-1E45-144C-781C-439392BB5503}"/>
+                </a:ext>
+              </a:extLst>
+            </p:cNvPr>
+            <p:cNvSpPr/>
+            <p:nvPr/>
+          </p:nvSpPr>
+          <p:spPr>
+            <a:xfrm>
+              <a:off x="801928" y="7829676"/>
+              <a:ext cx="3175" cy="3175"/>
+            </a:xfrm>
+            <a:custGeom>
+              <a:avLst/>
+              <a:gdLst/>
+              <a:ahLst/>
+              <a:cxnLst/>
+              <a:rect l="l" t="t" r="r" b="b"/>
+              <a:pathLst>
+                <a:path w="3175" h="3175">
+                  <a:moveTo>
+                    <a:pt x="3048" y="0"/>
+                  </a:moveTo>
+                  <a:lnTo>
+                    <a:pt x="0" y="0"/>
+                  </a:lnTo>
+                  <a:lnTo>
+                    <a:pt x="0" y="3047"/>
+                  </a:lnTo>
+                  <a:lnTo>
+                    <a:pt x="3048" y="3047"/>
+                  </a:lnTo>
+                  <a:lnTo>
+                    <a:pt x="3048" y="0"/>
+                  </a:lnTo>
+                  <a:close/>
+                </a:path>
+              </a:pathLst>
+            </a:custGeom>
+            <a:solidFill>
+              <a:srgbClr val="9F9F9F"/>
+            </a:solidFill>
+          </p:spPr>
+          <p:txBody>
+            <a:bodyPr wrap="square" lIns="0" tIns="0" rIns="0" bIns="0" rtlCol="0"/>
+            <a:lstStyle/>
+            <a:p>
+              <a:endParaRPr/>
+            </a:p>
+          </p:txBody>
+        </p:sp>
+        <p:sp>
+          <p:nvSpPr>
+            <p:cNvPr id="43" name="object 43">
+              <a:extLst>
+                <a:ext uri="{FF2B5EF4-FFF2-40B4-BE49-F238E27FC236}">
+                  <a16:creationId xmlns:a16="http://schemas.microsoft.com/office/drawing/2014/main" id="{36F1915D-3794-8E80-8F51-6CFCAAD8563D}"/>
+                </a:ext>
+              </a:extLst>
+            </p:cNvPr>
+            <p:cNvSpPr/>
+            <p:nvPr/>
+          </p:nvSpPr>
+          <p:spPr>
+            <a:xfrm>
+              <a:off x="801928" y="7829689"/>
+              <a:ext cx="6402070" cy="3175"/>
+            </a:xfrm>
+            <a:custGeom>
+              <a:avLst/>
+              <a:gdLst/>
+              <a:ahLst/>
+              <a:cxnLst/>
+              <a:rect l="l" t="t" r="r" b="b"/>
+              <a:pathLst>
+                <a:path w="6402070" h="3175">
+                  <a:moveTo>
+                    <a:pt x="6402006" y="0"/>
+                  </a:moveTo>
+                  <a:lnTo>
+                    <a:pt x="6399022" y="0"/>
+                  </a:lnTo>
+                  <a:lnTo>
+                    <a:pt x="3048" y="0"/>
+                  </a:lnTo>
+                  <a:lnTo>
+                    <a:pt x="0" y="0"/>
+                  </a:lnTo>
+                  <a:lnTo>
+                    <a:pt x="0" y="3035"/>
+                  </a:lnTo>
+                  <a:lnTo>
+                    <a:pt x="3048" y="3035"/>
+                  </a:lnTo>
+                  <a:lnTo>
+                    <a:pt x="6398971" y="3035"/>
+                  </a:lnTo>
+                  <a:lnTo>
+                    <a:pt x="6402006" y="3035"/>
+                  </a:lnTo>
+                  <a:lnTo>
+                    <a:pt x="6402006" y="0"/>
+                  </a:lnTo>
+                  <a:close/>
+                </a:path>
+              </a:pathLst>
+            </a:custGeom>
+            <a:solidFill>
+              <a:srgbClr val="E2E2E2"/>
+            </a:solidFill>
+          </p:spPr>
+          <p:txBody>
+            <a:bodyPr wrap="square" lIns="0" tIns="0" rIns="0" bIns="0" rtlCol="0"/>
+            <a:lstStyle/>
+            <a:p>
+              <a:endParaRPr/>
+            </a:p>
+          </p:txBody>
+        </p:sp>
+      </p:grpSp>
+      <p:sp>
+        <p:nvSpPr>
+          <p:cNvPr id="44" name="object 44">
+            <a:extLst>
+              <a:ext uri="{FF2B5EF4-FFF2-40B4-BE49-F238E27FC236}">
+                <a16:creationId xmlns:a16="http://schemas.microsoft.com/office/drawing/2014/main" id="{A8350C30-62E4-4069-0527-5B936BEB3002}"/>
+              </a:ext>
+            </a:extLst>
+          </p:cNvPr>
+          <p:cNvSpPr txBox="1"/>
+          <p:nvPr/>
+        </p:nvSpPr>
+        <p:spPr>
+          <a:xfrm>
+            <a:off x="734047" y="8921270"/>
+            <a:ext cx="6414135" cy="1100301"/>
+          </a:xfrm>
+          <a:prstGeom prst="rect">
+            <a:avLst/>
+          </a:prstGeom>
+        </p:spPr>
+        <p:txBody>
+          <a:bodyPr vert="horz" wrap="square" lIns="0" tIns="12700" rIns="0" bIns="0" rtlCol="0">
+            <a:spAutoFit/>
+          </a:bodyPr>
+          <a:lstStyle/>
+          <a:p>
+            <a:pPr marL="12700">
+              <a:lnSpc>
+                <a:spcPct val="100000"/>
+              </a:lnSpc>
+              <a:spcBef>
+                <a:spcPts val="100"/>
+              </a:spcBef>
+            </a:pPr>
+            <a:r>
+              <a:rPr sz="1400" b="1" dirty="0">
+                <a:solidFill>
+                  <a:srgbClr val="3B78D7"/>
+                </a:solidFill>
+                <a:latin typeface="Times New Roman"/>
+                <a:cs typeface="Times New Roman"/>
+              </a:rPr>
+              <a:t>8.</a:t>
+            </a:r>
+            <a:r>
+              <a:rPr sz="1400" b="1" spc="-5" dirty="0">
+                <a:solidFill>
+                  <a:srgbClr val="3B78D7"/>
+                </a:solidFill>
+                <a:latin typeface="Times New Roman"/>
+                <a:cs typeface="Times New Roman"/>
+              </a:rPr>
+              <a:t> </a:t>
+            </a:r>
+            <a:r>
+              <a:rPr sz="1400" b="1" spc="-10" dirty="0">
+                <a:solidFill>
+                  <a:srgbClr val="3B78D7"/>
+                </a:solidFill>
+                <a:latin typeface="Times New Roman"/>
+                <a:cs typeface="Times New Roman"/>
+              </a:rPr>
+              <a:t>Conclusion:</a:t>
+            </a:r>
+            <a:endParaRPr sz="1400" dirty="0">
+              <a:latin typeface="Times New Roman"/>
+              <a:cs typeface="Times New Roman"/>
+            </a:endParaRPr>
+          </a:p>
+          <a:p>
+            <a:pPr marL="106680" marR="5080">
+              <a:lnSpc>
+                <a:spcPts val="1380"/>
+              </a:lnSpc>
+              <a:spcBef>
+                <a:spcPts val="1235"/>
+              </a:spcBef>
+            </a:pPr>
+            <a:r>
+              <a:rPr lang="en-US" sz="1300" dirty="0">
+                <a:latin typeface="Times New Roman"/>
+                <a:cs typeface="Times New Roman"/>
+              </a:rPr>
+              <a:t>The project successfully integrates HTML, CSS, and JavaScript to form a complete registration system. The validation logic ensures data quality, while the dynamic table update provides immediate satisfaction to the user, proving that client-side scripting is essential for a modern web experience.</a:t>
+            </a:r>
+            <a:endParaRPr sz="1300" dirty="0">
+              <a:latin typeface="Times New Roman"/>
+              <a:cs typeface="Times New Roman"/>
+            </a:endParaRPr>
+          </a:p>
+        </p:txBody>
+      </p:sp>
+      <p:pic>
+        <p:nvPicPr>
+          <p:cNvPr id="45" name="object 45">
+            <a:extLst>
+              <a:ext uri="{FF2B5EF4-FFF2-40B4-BE49-F238E27FC236}">
+                <a16:creationId xmlns:a16="http://schemas.microsoft.com/office/drawing/2014/main" id="{EBE6FF45-A380-CB68-3163-0588E2059FB0}"/>
+              </a:ext>
+            </a:extLst>
+          </p:cNvPr>
+          <p:cNvPicPr/>
+          <p:nvPr/>
+        </p:nvPicPr>
+        <p:blipFill>
+          <a:blip r:embed="rId4" cstate="print"/>
+          <a:stretch>
+            <a:fillRect/>
+          </a:stretch>
+        </p:blipFill>
+        <p:spPr>
+          <a:xfrm>
+            <a:off x="2749550" y="577849"/>
+            <a:ext cx="1004798" cy="566420"/>
+          </a:xfrm>
+          <a:prstGeom prst="rect">
+            <a:avLst/>
+          </a:prstGeom>
+        </p:spPr>
+      </p:pic>
+      <p:pic>
+        <p:nvPicPr>
+          <p:cNvPr id="46" name="object 46">
+            <a:extLst>
+              <a:ext uri="{FF2B5EF4-FFF2-40B4-BE49-F238E27FC236}">
+                <a16:creationId xmlns:a16="http://schemas.microsoft.com/office/drawing/2014/main" id="{0592D040-D651-8779-7850-B45BC49D5A27}"/>
+              </a:ext>
+            </a:extLst>
+          </p:cNvPr>
+          <p:cNvPicPr/>
+          <p:nvPr/>
+        </p:nvPicPr>
+        <p:blipFill>
+          <a:blip r:embed="rId5" cstate="print"/>
+          <a:stretch>
+            <a:fillRect/>
+          </a:stretch>
+        </p:blipFill>
+        <p:spPr>
+          <a:xfrm>
+            <a:off x="739775" y="615949"/>
+            <a:ext cx="1495933" cy="370204"/>
+          </a:xfrm>
+          <a:prstGeom prst="rect">
+            <a:avLst/>
+          </a:prstGeom>
+        </p:spPr>
+      </p:pic>
+      <p:pic>
+        <p:nvPicPr>
+          <p:cNvPr id="5" name="Picture 4">
+            <a:extLst>
+              <a:ext uri="{FF2B5EF4-FFF2-40B4-BE49-F238E27FC236}">
+                <a16:creationId xmlns:a16="http://schemas.microsoft.com/office/drawing/2014/main" id="{3E183A41-7022-1A96-B9FC-B2F9FAF9457C}"/>
+              </a:ext>
+            </a:extLst>
+          </p:cNvPr>
+          <p:cNvPicPr>
+            <a:picLocks noChangeAspect="1"/>
+          </p:cNvPicPr>
+          <p:nvPr/>
+        </p:nvPicPr>
+        <p:blipFill>
+          <a:blip r:embed="rId6">
+            <a:extLst>
+              <a:ext uri="{28A0092B-C50C-407E-A947-70E740481C1C}">
+                <a14:useLocalDpi xmlns:a14="http://schemas.microsoft.com/office/drawing/2010/main" val="0"/>
+              </a:ext>
+            </a:extLst>
+          </a:blip>
+          <a:stretch>
+            <a:fillRect/>
+          </a:stretch>
+        </p:blipFill>
+        <p:spPr>
+          <a:xfrm>
+            <a:off x="217829" y="1835281"/>
+            <a:ext cx="3041379" cy="2904994"/>
+          </a:xfrm>
+          <a:prstGeom prst="rect">
+            <a:avLst/>
+          </a:prstGeom>
+        </p:spPr>
+      </p:pic>
+      <p:pic>
+        <p:nvPicPr>
+          <p:cNvPr id="7" name="Picture 6">
+            <a:extLst>
+              <a:ext uri="{FF2B5EF4-FFF2-40B4-BE49-F238E27FC236}">
+                <a16:creationId xmlns:a16="http://schemas.microsoft.com/office/drawing/2014/main" id="{8D5180CA-F9E0-B35A-6A06-E1F76EAF7461}"/>
+              </a:ext>
+            </a:extLst>
+          </p:cNvPr>
+          <p:cNvPicPr>
+            <a:picLocks noChangeAspect="1"/>
+          </p:cNvPicPr>
+          <p:nvPr/>
+        </p:nvPicPr>
+        <p:blipFill>
+          <a:blip r:embed="rId7">
+            <a:extLst>
+              <a:ext uri="{28A0092B-C50C-407E-A947-70E740481C1C}">
+                <a14:useLocalDpi xmlns:a14="http://schemas.microsoft.com/office/drawing/2010/main" val="0"/>
+              </a:ext>
+            </a:extLst>
+          </a:blip>
+          <a:stretch>
+            <a:fillRect/>
+          </a:stretch>
+        </p:blipFill>
+        <p:spPr>
+          <a:xfrm>
+            <a:off x="3492195" y="3369187"/>
+            <a:ext cx="3668687" cy="3135752"/>
+          </a:xfrm>
+          <a:prstGeom prst="rect">
+            <a:avLst/>
+          </a:prstGeom>
+        </p:spPr>
+      </p:pic>
+      <p:sp>
+        <p:nvSpPr>
+          <p:cNvPr id="9" name="TextBox 8">
+            <a:extLst>
+              <a:ext uri="{FF2B5EF4-FFF2-40B4-BE49-F238E27FC236}">
+                <a16:creationId xmlns:a16="http://schemas.microsoft.com/office/drawing/2014/main" id="{B4FFF8F5-F465-EEAD-94F2-DFE71FD159EF}"/>
+              </a:ext>
+            </a:extLst>
+          </p:cNvPr>
+          <p:cNvSpPr txBox="1"/>
+          <p:nvPr/>
+        </p:nvSpPr>
+        <p:spPr>
+          <a:xfrm>
+            <a:off x="508000" y="4971988"/>
+            <a:ext cx="1356462" cy="615553"/>
+          </a:xfrm>
+          <a:prstGeom prst="rect">
+            <a:avLst/>
+          </a:prstGeom>
+          <a:noFill/>
+        </p:spPr>
+        <p:txBody>
+          <a:bodyPr wrap="none" rtlCol="0">
+            <a:spAutoFit/>
+          </a:bodyPr>
+          <a:lstStyle/>
+          <a:p>
+            <a:r>
+              <a:rPr lang="en-US" sz="1600" dirty="0">
+                <a:latin typeface="Times New Roman" panose="02020603050405020304" pitchFamily="18" charset="0"/>
+                <a:cs typeface="Times New Roman" panose="02020603050405020304" pitchFamily="18" charset="0"/>
+              </a:rPr>
+              <a:t>Before submit</a:t>
+            </a:r>
+          </a:p>
+          <a:p>
+            <a:endParaRPr lang="en-US" dirty="0"/>
+          </a:p>
+        </p:txBody>
+      </p:sp>
+      <p:sp>
+        <p:nvSpPr>
+          <p:cNvPr id="10" name="TextBox 9">
+            <a:extLst>
+              <a:ext uri="{FF2B5EF4-FFF2-40B4-BE49-F238E27FC236}">
+                <a16:creationId xmlns:a16="http://schemas.microsoft.com/office/drawing/2014/main" id="{B1C78DB6-42BB-7613-22CF-59752FF4090D}"/>
+              </a:ext>
+            </a:extLst>
+          </p:cNvPr>
+          <p:cNvSpPr txBox="1"/>
+          <p:nvPr/>
+        </p:nvSpPr>
+        <p:spPr>
+          <a:xfrm>
+            <a:off x="5080000" y="2463007"/>
+            <a:ext cx="1231427" cy="615553"/>
+          </a:xfrm>
+          <a:prstGeom prst="rect">
+            <a:avLst/>
+          </a:prstGeom>
+          <a:noFill/>
+        </p:spPr>
+        <p:txBody>
+          <a:bodyPr wrap="none" rtlCol="0">
+            <a:spAutoFit/>
+          </a:bodyPr>
+          <a:lstStyle/>
+          <a:p>
+            <a:r>
+              <a:rPr lang="en-US" sz="1600" dirty="0">
+                <a:latin typeface="Times New Roman" panose="02020603050405020304" pitchFamily="18" charset="0"/>
+                <a:cs typeface="Times New Roman" panose="02020603050405020304" pitchFamily="18" charset="0"/>
+              </a:rPr>
+              <a:t>After submit</a:t>
+            </a:r>
+          </a:p>
+          <a:p>
+            <a:endParaRPr lang="en-US" dirty="0"/>
+          </a:p>
+        </p:txBody>
+      </p:sp>
+    </p:spTree>
+    <p:extLst>
+      <p:ext uri="{BB962C8B-B14F-4D97-AF65-F5344CB8AC3E}">
+        <p14:creationId xmlns:p14="http://schemas.microsoft.com/office/powerpoint/2010/main" val="2896398324"/>
+      </p:ext>
+    </p:extLst>
   </p:cSld>
   <p:clrMapOvr>
     <a:masterClrMapping/>

--- a/ppt/FE Assignment Template-3.pptx
+++ b/ppt/FE Assignment Template-3.pptx
@@ -175,7 +175,7 @@
           <a:p>
             <a:fld id="{1D8BD707-D9CF-40AE-B4C6-C98DA3205C09}" type="datetimeFigureOut">
               <a:rPr lang="en-US"/>
-              <a:t>3/10/2026</a:t>
+              <a:t>3/11/2026</a:t>
             </a:fld>
             <a:endParaRPr lang="en-US"/>
           </a:p>
@@ -340,7 +340,7 @@
           <a:p>
             <a:fld id="{1D8BD707-D9CF-40AE-B4C6-C98DA3205C09}" type="datetimeFigureOut">
               <a:rPr lang="en-US"/>
-              <a:t>3/10/2026</a:t>
+              <a:t>3/11/2026</a:t>
             </a:fld>
             <a:endParaRPr lang="en-US"/>
           </a:p>
@@ -548,7 +548,7 @@
           <a:p>
             <a:fld id="{1D8BD707-D9CF-40AE-B4C6-C98DA3205C09}" type="datetimeFigureOut">
               <a:rPr lang="en-US"/>
-              <a:t>3/10/2026</a:t>
+              <a:t>3/11/2026</a:t>
             </a:fld>
             <a:endParaRPr lang="en-US"/>
           </a:p>
@@ -690,7 +690,7 @@
           <a:p>
             <a:fld id="{1D8BD707-D9CF-40AE-B4C6-C98DA3205C09}" type="datetimeFigureOut">
               <a:rPr lang="en-US"/>
-              <a:t>3/10/2026</a:t>
+              <a:t>3/11/2026</a:t>
             </a:fld>
             <a:endParaRPr lang="en-US"/>
           </a:p>
@@ -809,7 +809,7 @@
           <a:p>
             <a:fld id="{1D8BD707-D9CF-40AE-B4C6-C98DA3205C09}" type="datetimeFigureOut">
               <a:rPr lang="en-US"/>
-              <a:t>3/10/2026</a:t>
+              <a:t>3/11/2026</a:t>
             </a:fld>
             <a:endParaRPr lang="en-US"/>
           </a:p>
@@ -1022,7 +1022,7 @@
           <a:p>
             <a:fld id="{1D8BD707-D9CF-40AE-B4C6-C98DA3205C09}" type="datetimeFigureOut">
               <a:rPr lang="en-US"/>
-              <a:t>3/10/2026</a:t>
+              <a:t>3/11/2026</a:t>
             </a:fld>
             <a:endParaRPr lang="en-US"/>
           </a:p>
@@ -8597,10 +8597,10 @@
       </p:pic>
       <p:pic>
         <p:nvPicPr>
-          <p:cNvPr id="30" name="Picture 29">
+          <p:cNvPr id="31" name="Picture 30">
             <a:extLst>
               <a:ext uri="{FF2B5EF4-FFF2-40B4-BE49-F238E27FC236}">
-                <a16:creationId xmlns:a16="http://schemas.microsoft.com/office/drawing/2014/main" id="{E39EB024-B0B1-2FC8-4946-3FFB52C6E4DB}"/>
+                <a16:creationId xmlns:a16="http://schemas.microsoft.com/office/drawing/2014/main" id="{847A99CC-10FB-4904-9A92-EBC31BB73A2D}"/>
               </a:ext>
             </a:extLst>
           </p:cNvPr>
@@ -8617,15 +8617,14 @@
               </a:ext>
             </a:extLst>
           </a:blip>
-          <a:srcRect l="11592" t="3590" r="6220"/>
           <a:stretch>
             <a:fillRect/>
           </a:stretch>
         </p:blipFill>
         <p:spPr>
           <a:xfrm>
-            <a:off x="57899" y="7288351"/>
-            <a:ext cx="3194050" cy="3384296"/>
+            <a:off x="24063" y="7290576"/>
+            <a:ext cx="3404425" cy="3383280"/>
           </a:xfrm>
           <a:prstGeom prst="rect">
             <a:avLst/>
@@ -8634,10 +8633,10 @@
       </p:pic>
       <p:pic>
         <p:nvPicPr>
-          <p:cNvPr id="32" name="Picture 31">
+          <p:cNvPr id="35" name="Picture 34">
             <a:extLst>
               <a:ext uri="{FF2B5EF4-FFF2-40B4-BE49-F238E27FC236}">
-                <a16:creationId xmlns:a16="http://schemas.microsoft.com/office/drawing/2014/main" id="{D77C2844-B6D8-20A6-E3DE-5B5C2B1CDA33}"/>
+                <a16:creationId xmlns:a16="http://schemas.microsoft.com/office/drawing/2014/main" id="{A8F6F22F-55FE-727A-2989-E74CFCEB0ABE}"/>
               </a:ext>
             </a:extLst>
           </p:cNvPr>
@@ -8654,59 +8653,20 @@
               </a:ext>
             </a:extLst>
           </a:blip>
-          <a:srcRect l="5222" t="-1478" r="5164" b="1478"/>
           <a:stretch>
             <a:fillRect/>
           </a:stretch>
         </p:blipFill>
         <p:spPr>
           <a:xfrm>
-            <a:off x="3194050" y="7648276"/>
-            <a:ext cx="4351087" cy="3046596"/>
+            <a:off x="3192593" y="7233967"/>
+            <a:ext cx="4352544" cy="3485287"/>
           </a:xfrm>
           <a:prstGeom prst="rect">
             <a:avLst/>
           </a:prstGeom>
         </p:spPr>
       </p:pic>
-      <p:sp>
-        <p:nvSpPr>
-          <p:cNvPr id="33" name="TextBox 32">
-            <a:extLst>
-              <a:ext uri="{FF2B5EF4-FFF2-40B4-BE49-F238E27FC236}">
-                <a16:creationId xmlns:a16="http://schemas.microsoft.com/office/drawing/2014/main" id="{627968FB-4570-BB83-F934-0CC4F00E077E}"/>
-              </a:ext>
-            </a:extLst>
-          </p:cNvPr>
-          <p:cNvSpPr txBox="1"/>
-          <p:nvPr/>
-        </p:nvSpPr>
-        <p:spPr>
-          <a:xfrm>
-            <a:off x="2908202" y="7232523"/>
-            <a:ext cx="1093569" cy="338554"/>
-          </a:xfrm>
-          <a:prstGeom prst="rect">
-            <a:avLst/>
-          </a:prstGeom>
-          <a:noFill/>
-        </p:spPr>
-        <p:txBody>
-          <a:bodyPr wrap="none" rtlCol="0">
-            <a:spAutoFit/>
-          </a:bodyPr>
-          <a:lstStyle/>
-          <a:p>
-            <a:r>
-              <a:rPr lang="en-US" sz="1600" dirty="0">
-                <a:latin typeface="Times New Roman" panose="02020603050405020304" pitchFamily="18" charset="0"/>
-                <a:cs typeface="Times New Roman" panose="02020603050405020304" pitchFamily="18" charset="0"/>
-              </a:rPr>
-              <a:t>Static page</a:t>
-            </a:r>
-          </a:p>
-        </p:txBody>
-      </p:sp>
     </p:spTree>
   </p:cSld>
   <p:clrMapOvr>

--- a/ppt/FE Assignment Template-3.pptx
+++ b/ppt/FE Assignment Template-3.pptx
@@ -9,6 +9,7 @@
     <p:sldId id="257" r:id="rId3"/>
     <p:sldId id="258" r:id="rId4"/>
     <p:sldId id="259" r:id="rId5"/>
+    <p:sldId id="260" r:id="rId6"/>
   </p:sldIdLst>
   <p:sldSz cx="7569200" cy="10699750"/>
   <p:notesSz cx="7569200" cy="10699750"/>
@@ -175,7 +176,7 @@
           <a:p>
             <a:fld id="{1D8BD707-D9CF-40AE-B4C6-C98DA3205C09}" type="datetimeFigureOut">
               <a:rPr lang="en-US"/>
-              <a:t>3/11/2026</a:t>
+              <a:t>3/12/2026</a:t>
             </a:fld>
             <a:endParaRPr lang="en-US"/>
           </a:p>
@@ -340,7 +341,7 @@
           <a:p>
             <a:fld id="{1D8BD707-D9CF-40AE-B4C6-C98DA3205C09}" type="datetimeFigureOut">
               <a:rPr lang="en-US"/>
-              <a:t>3/11/2026</a:t>
+              <a:t>3/12/2026</a:t>
             </a:fld>
             <a:endParaRPr lang="en-US"/>
           </a:p>
@@ -548,7 +549,7 @@
           <a:p>
             <a:fld id="{1D8BD707-D9CF-40AE-B4C6-C98DA3205C09}" type="datetimeFigureOut">
               <a:rPr lang="en-US"/>
-              <a:t>3/11/2026</a:t>
+              <a:t>3/12/2026</a:t>
             </a:fld>
             <a:endParaRPr lang="en-US"/>
           </a:p>
@@ -690,7 +691,7 @@
           <a:p>
             <a:fld id="{1D8BD707-D9CF-40AE-B4C6-C98DA3205C09}" type="datetimeFigureOut">
               <a:rPr lang="en-US"/>
-              <a:t>3/11/2026</a:t>
+              <a:t>3/12/2026</a:t>
             </a:fld>
             <a:endParaRPr lang="en-US"/>
           </a:p>
@@ -809,7 +810,7 @@
           <a:p>
             <a:fld id="{1D8BD707-D9CF-40AE-B4C6-C98DA3205C09}" type="datetimeFigureOut">
               <a:rPr lang="en-US"/>
-              <a:t>3/11/2026</a:t>
+              <a:t>3/12/2026</a:t>
             </a:fld>
             <a:endParaRPr lang="en-US"/>
           </a:p>
@@ -1022,7 +1023,7 @@
           <a:p>
             <a:fld id="{1D8BD707-D9CF-40AE-B4C6-C98DA3205C09}" type="datetimeFigureOut">
               <a:rPr lang="en-US"/>
-              <a:t>3/11/2026</a:t>
+              <a:t>3/12/2026</a:t>
             </a:fld>
             <a:endParaRPr lang="en-US"/>
           </a:p>
@@ -8597,10 +8598,10 @@
       </p:pic>
       <p:pic>
         <p:nvPicPr>
-          <p:cNvPr id="31" name="Picture 30">
+          <p:cNvPr id="30" name="Picture 29">
             <a:extLst>
               <a:ext uri="{FF2B5EF4-FFF2-40B4-BE49-F238E27FC236}">
-                <a16:creationId xmlns:a16="http://schemas.microsoft.com/office/drawing/2014/main" id="{847A99CC-10FB-4904-9A92-EBC31BB73A2D}"/>
+                <a16:creationId xmlns:a16="http://schemas.microsoft.com/office/drawing/2014/main" id="{22D6C415-CA1F-290C-4700-B535ACB54700}"/>
               </a:ext>
             </a:extLst>
           </p:cNvPr>
@@ -8623,8 +8624,8 @@
         </p:blipFill>
         <p:spPr>
           <a:xfrm>
-            <a:off x="24063" y="7290576"/>
-            <a:ext cx="3404425" cy="3383280"/>
+            <a:off x="59436" y="7346465"/>
+            <a:ext cx="3950589" cy="3353285"/>
           </a:xfrm>
           <a:prstGeom prst="rect">
             <a:avLst/>
@@ -8633,10 +8634,10 @@
       </p:pic>
       <p:pic>
         <p:nvPicPr>
-          <p:cNvPr id="35" name="Picture 34">
+          <p:cNvPr id="33" name="Picture 32">
             <a:extLst>
               <a:ext uri="{FF2B5EF4-FFF2-40B4-BE49-F238E27FC236}">
-                <a16:creationId xmlns:a16="http://schemas.microsoft.com/office/drawing/2014/main" id="{A8F6F22F-55FE-727A-2989-E74CFCEB0ABE}"/>
+                <a16:creationId xmlns:a16="http://schemas.microsoft.com/office/drawing/2014/main" id="{0A9B348F-D6CD-AD19-046C-F640A5F324A7}"/>
               </a:ext>
             </a:extLst>
           </p:cNvPr>
@@ -8659,8 +8660,8 @@
         </p:blipFill>
         <p:spPr>
           <a:xfrm>
-            <a:off x="3192593" y="7233967"/>
-            <a:ext cx="4352544" cy="3485287"/>
+            <a:off x="3409338" y="7360435"/>
+            <a:ext cx="4159862" cy="3339315"/>
           </a:xfrm>
           <a:prstGeom prst="rect">
             <a:avLst/>
@@ -8754,1021 +8755,6 @@
           </a:prstGeom>
         </p:spPr>
       </p:pic>
-      <p:grpSp>
-        <p:nvGrpSpPr>
-          <p:cNvPr id="29" name="object 29">
-            <a:extLst>
-              <a:ext uri="{FF2B5EF4-FFF2-40B4-BE49-F238E27FC236}">
-                <a16:creationId xmlns:a16="http://schemas.microsoft.com/office/drawing/2014/main" id="{DCA6F22D-D77C-5273-0949-BE61BCD13369}"/>
-              </a:ext>
-            </a:extLst>
-          </p:cNvPr>
-          <p:cNvGrpSpPr/>
-          <p:nvPr/>
-        </p:nvGrpSpPr>
-        <p:grpSpPr>
-          <a:xfrm>
-            <a:off x="801369" y="6473824"/>
-            <a:ext cx="6402705" cy="20955"/>
-            <a:chOff x="801369" y="6473824"/>
-            <a:chExt cx="6402705" cy="20955"/>
-          </a:xfrm>
-        </p:grpSpPr>
-        <p:sp>
-          <p:nvSpPr>
-            <p:cNvPr id="30" name="object 30">
-              <a:extLst>
-                <a:ext uri="{FF2B5EF4-FFF2-40B4-BE49-F238E27FC236}">
-                  <a16:creationId xmlns:a16="http://schemas.microsoft.com/office/drawing/2014/main" id="{909C0050-DF1A-8B01-7227-DAB5A6C65112}"/>
-                </a:ext>
-              </a:extLst>
-            </p:cNvPr>
-            <p:cNvSpPr/>
-            <p:nvPr/>
-          </p:nvSpPr>
-          <p:spPr>
-            <a:xfrm>
-              <a:off x="801370" y="6473824"/>
-              <a:ext cx="6400800" cy="19685"/>
-            </a:xfrm>
-            <a:custGeom>
-              <a:avLst/>
-              <a:gdLst/>
-              <a:ahLst/>
-              <a:cxnLst/>
-              <a:rect l="l" t="t" r="r" b="b"/>
-              <a:pathLst>
-                <a:path w="6400800" h="19685">
-                  <a:moveTo>
-                    <a:pt x="6400800" y="0"/>
-                  </a:moveTo>
-                  <a:lnTo>
-                    <a:pt x="0" y="0"/>
-                  </a:lnTo>
-                  <a:lnTo>
-                    <a:pt x="0" y="19685"/>
-                  </a:lnTo>
-                  <a:lnTo>
-                    <a:pt x="6400800" y="19685"/>
-                  </a:lnTo>
-                  <a:lnTo>
-                    <a:pt x="6400800" y="0"/>
-                  </a:lnTo>
-                  <a:close/>
-                </a:path>
-              </a:pathLst>
-            </a:custGeom>
-            <a:solidFill>
-              <a:srgbClr val="9F9F9F"/>
-            </a:solidFill>
-          </p:spPr>
-          <p:txBody>
-            <a:bodyPr wrap="square" lIns="0" tIns="0" rIns="0" bIns="0" rtlCol="0"/>
-            <a:lstStyle/>
-            <a:p>
-              <a:endParaRPr/>
-            </a:p>
-          </p:txBody>
-        </p:sp>
-        <p:sp>
-          <p:nvSpPr>
-            <p:cNvPr id="31" name="object 31">
-              <a:extLst>
-                <a:ext uri="{FF2B5EF4-FFF2-40B4-BE49-F238E27FC236}">
-                  <a16:creationId xmlns:a16="http://schemas.microsoft.com/office/drawing/2014/main" id="{DC14D2F1-540D-A978-0F33-6394DD8544A0}"/>
-                </a:ext>
-              </a:extLst>
-            </p:cNvPr>
-            <p:cNvSpPr/>
-            <p:nvPr/>
-          </p:nvSpPr>
-          <p:spPr>
-            <a:xfrm>
-              <a:off x="7200899" y="6474840"/>
-              <a:ext cx="3175" cy="3175"/>
-            </a:xfrm>
-            <a:custGeom>
-              <a:avLst/>
-              <a:gdLst/>
-              <a:ahLst/>
-              <a:cxnLst/>
-              <a:rect l="l" t="t" r="r" b="b"/>
-              <a:pathLst>
-                <a:path w="3175" h="3175">
-                  <a:moveTo>
-                    <a:pt x="3047" y="0"/>
-                  </a:moveTo>
-                  <a:lnTo>
-                    <a:pt x="0" y="0"/>
-                  </a:lnTo>
-                  <a:lnTo>
-                    <a:pt x="0" y="3047"/>
-                  </a:lnTo>
-                  <a:lnTo>
-                    <a:pt x="3047" y="3047"/>
-                  </a:lnTo>
-                  <a:lnTo>
-                    <a:pt x="3047" y="0"/>
-                  </a:lnTo>
-                  <a:close/>
-                </a:path>
-              </a:pathLst>
-            </a:custGeom>
-            <a:solidFill>
-              <a:srgbClr val="E2E2E2"/>
-            </a:solidFill>
-          </p:spPr>
-          <p:txBody>
-            <a:bodyPr wrap="square" lIns="0" tIns="0" rIns="0" bIns="0" rtlCol="0"/>
-            <a:lstStyle/>
-            <a:p>
-              <a:endParaRPr/>
-            </a:p>
-          </p:txBody>
-        </p:sp>
-        <p:sp>
-          <p:nvSpPr>
-            <p:cNvPr id="32" name="object 32">
-              <a:extLst>
-                <a:ext uri="{FF2B5EF4-FFF2-40B4-BE49-F238E27FC236}">
-                  <a16:creationId xmlns:a16="http://schemas.microsoft.com/office/drawing/2014/main" id="{B4BF53A2-9AD3-61DB-03CB-189AF93F3632}"/>
-                </a:ext>
-              </a:extLst>
-            </p:cNvPr>
-            <p:cNvSpPr/>
-            <p:nvPr/>
-          </p:nvSpPr>
-          <p:spPr>
-            <a:xfrm>
-              <a:off x="801928" y="6474853"/>
-              <a:ext cx="6402070" cy="17145"/>
-            </a:xfrm>
-            <a:custGeom>
-              <a:avLst/>
-              <a:gdLst/>
-              <a:ahLst/>
-              <a:cxnLst/>
-              <a:rect l="l" t="t" r="r" b="b"/>
-              <a:pathLst>
-                <a:path w="6402070" h="17145">
-                  <a:moveTo>
-                    <a:pt x="3048" y="3048"/>
-                  </a:moveTo>
-                  <a:lnTo>
-                    <a:pt x="0" y="3048"/>
-                  </a:lnTo>
-                  <a:lnTo>
-                    <a:pt x="0" y="16751"/>
-                  </a:lnTo>
-                  <a:lnTo>
-                    <a:pt x="3048" y="16751"/>
-                  </a:lnTo>
-                  <a:lnTo>
-                    <a:pt x="3048" y="3048"/>
-                  </a:lnTo>
-                  <a:close/>
-                </a:path>
-                <a:path w="6402070" h="17145">
-                  <a:moveTo>
-                    <a:pt x="6402006" y="0"/>
-                  </a:moveTo>
-                  <a:lnTo>
-                    <a:pt x="6398971" y="0"/>
-                  </a:lnTo>
-                  <a:lnTo>
-                    <a:pt x="6398971" y="3035"/>
-                  </a:lnTo>
-                  <a:lnTo>
-                    <a:pt x="6402006" y="3035"/>
-                  </a:lnTo>
-                  <a:lnTo>
-                    <a:pt x="6402006" y="0"/>
-                  </a:lnTo>
-                  <a:close/>
-                </a:path>
-              </a:pathLst>
-            </a:custGeom>
-            <a:solidFill>
-              <a:srgbClr val="9F9F9F"/>
-            </a:solidFill>
-          </p:spPr>
-          <p:txBody>
-            <a:bodyPr wrap="square" lIns="0" tIns="0" rIns="0" bIns="0" rtlCol="0"/>
-            <a:lstStyle/>
-            <a:p>
-              <a:endParaRPr/>
-            </a:p>
-          </p:txBody>
-        </p:sp>
-        <p:sp>
-          <p:nvSpPr>
-            <p:cNvPr id="33" name="object 33">
-              <a:extLst>
-                <a:ext uri="{FF2B5EF4-FFF2-40B4-BE49-F238E27FC236}">
-                  <a16:creationId xmlns:a16="http://schemas.microsoft.com/office/drawing/2014/main" id="{0D499D1B-EA34-984D-D9F3-F881955FF615}"/>
-                </a:ext>
-              </a:extLst>
-            </p:cNvPr>
-            <p:cNvSpPr/>
-            <p:nvPr/>
-          </p:nvSpPr>
-          <p:spPr>
-            <a:xfrm>
-              <a:off x="7200899" y="6477888"/>
-              <a:ext cx="3175" cy="13970"/>
-            </a:xfrm>
-            <a:custGeom>
-              <a:avLst/>
-              <a:gdLst/>
-              <a:ahLst/>
-              <a:cxnLst/>
-              <a:rect l="l" t="t" r="r" b="b"/>
-              <a:pathLst>
-                <a:path w="3175" h="13970">
-                  <a:moveTo>
-                    <a:pt x="3047" y="0"/>
-                  </a:moveTo>
-                  <a:lnTo>
-                    <a:pt x="0" y="0"/>
-                  </a:lnTo>
-                  <a:lnTo>
-                    <a:pt x="0" y="13715"/>
-                  </a:lnTo>
-                  <a:lnTo>
-                    <a:pt x="3047" y="13715"/>
-                  </a:lnTo>
-                  <a:lnTo>
-                    <a:pt x="3047" y="0"/>
-                  </a:lnTo>
-                  <a:close/>
-                </a:path>
-              </a:pathLst>
-            </a:custGeom>
-            <a:solidFill>
-              <a:srgbClr val="E2E2E2"/>
-            </a:solidFill>
-          </p:spPr>
-          <p:txBody>
-            <a:bodyPr wrap="square" lIns="0" tIns="0" rIns="0" bIns="0" rtlCol="0"/>
-            <a:lstStyle/>
-            <a:p>
-              <a:endParaRPr/>
-            </a:p>
-          </p:txBody>
-        </p:sp>
-        <p:sp>
-          <p:nvSpPr>
-            <p:cNvPr id="34" name="object 34">
-              <a:extLst>
-                <a:ext uri="{FF2B5EF4-FFF2-40B4-BE49-F238E27FC236}">
-                  <a16:creationId xmlns:a16="http://schemas.microsoft.com/office/drawing/2014/main" id="{FC1370C6-0E18-BEC3-6A9E-25A57A75A21B}"/>
-                </a:ext>
-              </a:extLst>
-            </p:cNvPr>
-            <p:cNvSpPr/>
-            <p:nvPr/>
-          </p:nvSpPr>
-          <p:spPr>
-            <a:xfrm>
-              <a:off x="801928" y="6491604"/>
-              <a:ext cx="3175" cy="3175"/>
-            </a:xfrm>
-            <a:custGeom>
-              <a:avLst/>
-              <a:gdLst/>
-              <a:ahLst/>
-              <a:cxnLst/>
-              <a:rect l="l" t="t" r="r" b="b"/>
-              <a:pathLst>
-                <a:path w="3175" h="3175">
-                  <a:moveTo>
-                    <a:pt x="3048" y="0"/>
-                  </a:moveTo>
-                  <a:lnTo>
-                    <a:pt x="0" y="0"/>
-                  </a:lnTo>
-                  <a:lnTo>
-                    <a:pt x="0" y="3047"/>
-                  </a:lnTo>
-                  <a:lnTo>
-                    <a:pt x="3048" y="3047"/>
-                  </a:lnTo>
-                  <a:lnTo>
-                    <a:pt x="3048" y="0"/>
-                  </a:lnTo>
-                  <a:close/>
-                </a:path>
-              </a:pathLst>
-            </a:custGeom>
-            <a:solidFill>
-              <a:srgbClr val="9F9F9F"/>
-            </a:solidFill>
-          </p:spPr>
-          <p:txBody>
-            <a:bodyPr wrap="square" lIns="0" tIns="0" rIns="0" bIns="0" rtlCol="0"/>
-            <a:lstStyle/>
-            <a:p>
-              <a:endParaRPr/>
-            </a:p>
-          </p:txBody>
-        </p:sp>
-        <p:sp>
-          <p:nvSpPr>
-            <p:cNvPr id="35" name="object 35">
-              <a:extLst>
-                <a:ext uri="{FF2B5EF4-FFF2-40B4-BE49-F238E27FC236}">
-                  <a16:creationId xmlns:a16="http://schemas.microsoft.com/office/drawing/2014/main" id="{BB927645-12B5-283F-73E0-0B56C6709D9C}"/>
-                </a:ext>
-              </a:extLst>
-            </p:cNvPr>
-            <p:cNvSpPr/>
-            <p:nvPr/>
-          </p:nvSpPr>
-          <p:spPr>
-            <a:xfrm>
-              <a:off x="801928" y="6491617"/>
-              <a:ext cx="6402070" cy="3175"/>
-            </a:xfrm>
-            <a:custGeom>
-              <a:avLst/>
-              <a:gdLst/>
-              <a:ahLst/>
-              <a:cxnLst/>
-              <a:rect l="l" t="t" r="r" b="b"/>
-              <a:pathLst>
-                <a:path w="6402070" h="3175">
-                  <a:moveTo>
-                    <a:pt x="6402006" y="0"/>
-                  </a:moveTo>
-                  <a:lnTo>
-                    <a:pt x="6399022" y="0"/>
-                  </a:lnTo>
-                  <a:lnTo>
-                    <a:pt x="3048" y="0"/>
-                  </a:lnTo>
-                  <a:lnTo>
-                    <a:pt x="0" y="0"/>
-                  </a:lnTo>
-                  <a:lnTo>
-                    <a:pt x="0" y="3035"/>
-                  </a:lnTo>
-                  <a:lnTo>
-                    <a:pt x="3048" y="3035"/>
-                  </a:lnTo>
-                  <a:lnTo>
-                    <a:pt x="6398971" y="3035"/>
-                  </a:lnTo>
-                  <a:lnTo>
-                    <a:pt x="6402006" y="3035"/>
-                  </a:lnTo>
-                  <a:lnTo>
-                    <a:pt x="6402006" y="0"/>
-                  </a:lnTo>
-                  <a:close/>
-                </a:path>
-              </a:pathLst>
-            </a:custGeom>
-            <a:solidFill>
-              <a:srgbClr val="E2E2E2"/>
-            </a:solidFill>
-          </p:spPr>
-          <p:txBody>
-            <a:bodyPr wrap="square" lIns="0" tIns="0" rIns="0" bIns="0" rtlCol="0"/>
-            <a:lstStyle/>
-            <a:p>
-              <a:endParaRPr/>
-            </a:p>
-          </p:txBody>
-        </p:sp>
-      </p:grpSp>
-      <p:sp>
-        <p:nvSpPr>
-          <p:cNvPr id="36" name="object 36">
-            <a:extLst>
-              <a:ext uri="{FF2B5EF4-FFF2-40B4-BE49-F238E27FC236}">
-                <a16:creationId xmlns:a16="http://schemas.microsoft.com/office/drawing/2014/main" id="{C6F8C91A-DE82-E27A-9F35-97C92F7E9BB8}"/>
-              </a:ext>
-            </a:extLst>
-          </p:cNvPr>
-          <p:cNvSpPr txBox="1"/>
-          <p:nvPr/>
-        </p:nvSpPr>
-        <p:spPr>
-          <a:xfrm>
-            <a:off x="789228" y="6661784"/>
-            <a:ext cx="5911850" cy="1690847"/>
-          </a:xfrm>
-          <a:prstGeom prst="rect">
-            <a:avLst/>
-          </a:prstGeom>
-        </p:spPr>
-        <p:txBody>
-          <a:bodyPr vert="horz" wrap="square" lIns="0" tIns="13335" rIns="0" bIns="0" rtlCol="0">
-            <a:spAutoFit/>
-          </a:bodyPr>
-          <a:lstStyle/>
-          <a:p>
-            <a:pPr marL="12700">
-              <a:lnSpc>
-                <a:spcPct val="100000"/>
-              </a:lnSpc>
-              <a:spcBef>
-                <a:spcPts val="105"/>
-              </a:spcBef>
-            </a:pPr>
-            <a:r>
-              <a:rPr sz="1400" b="1" dirty="0">
-                <a:solidFill>
-                  <a:srgbClr val="3B78D7"/>
-                </a:solidFill>
-                <a:latin typeface="Times New Roman"/>
-                <a:cs typeface="Times New Roman"/>
-              </a:rPr>
-              <a:t>7.Learning</a:t>
-            </a:r>
-            <a:r>
-              <a:rPr sz="1400" b="1" spc="-45" dirty="0">
-                <a:solidFill>
-                  <a:srgbClr val="3B78D7"/>
-                </a:solidFill>
-                <a:latin typeface="Times New Roman"/>
-                <a:cs typeface="Times New Roman"/>
-              </a:rPr>
-              <a:t> </a:t>
-            </a:r>
-            <a:r>
-              <a:rPr sz="1400" b="1" spc="-10" dirty="0">
-                <a:solidFill>
-                  <a:srgbClr val="3B78D7"/>
-                </a:solidFill>
-                <a:latin typeface="Times New Roman"/>
-                <a:cs typeface="Times New Roman"/>
-              </a:rPr>
-              <a:t>Outcome:</a:t>
-            </a:r>
-            <a:endParaRPr sz="1400" dirty="0">
-              <a:latin typeface="Times New Roman"/>
-              <a:cs typeface="Times New Roman"/>
-            </a:endParaRPr>
-          </a:p>
-          <a:p>
-            <a:pPr marL="109855" marR="5080">
-              <a:lnSpc>
-                <a:spcPts val="1380"/>
-              </a:lnSpc>
-              <a:spcBef>
-                <a:spcPts val="1025"/>
-              </a:spcBef>
-            </a:pPr>
-            <a:r>
-              <a:rPr lang="en-US" sz="1300" b="1" dirty="0">
-                <a:latin typeface="Times New Roman"/>
-                <a:cs typeface="Times New Roman"/>
-              </a:rPr>
-              <a:t>Interactivity</a:t>
-            </a:r>
-            <a:r>
-              <a:rPr lang="en-US" sz="1300" dirty="0">
-                <a:latin typeface="Times New Roman"/>
-                <a:cs typeface="Times New Roman"/>
-              </a:rPr>
-              <a:t>: I learned how to move beyond static styling and create a functional web application using JavaScript.</a:t>
-            </a:r>
-          </a:p>
-          <a:p>
-            <a:pPr marL="109855" marR="5080">
-              <a:lnSpc>
-                <a:spcPts val="1380"/>
-              </a:lnSpc>
-              <a:spcBef>
-                <a:spcPts val="1025"/>
-              </a:spcBef>
-            </a:pPr>
-            <a:r>
-              <a:rPr lang="en-US" sz="1300" b="1" dirty="0">
-                <a:latin typeface="Times New Roman"/>
-                <a:cs typeface="Times New Roman"/>
-              </a:rPr>
-              <a:t>Data Integrity</a:t>
-            </a:r>
-            <a:r>
-              <a:rPr lang="en-US" sz="1300" dirty="0">
-                <a:latin typeface="Times New Roman"/>
-                <a:cs typeface="Times New Roman"/>
-              </a:rPr>
-              <a:t>: I understood how to enforce rules on user input to ensure the database (or table) only receives correctly formatted information.</a:t>
-            </a:r>
-          </a:p>
-          <a:p>
-            <a:pPr marL="109855" marR="5080">
-              <a:lnSpc>
-                <a:spcPts val="1380"/>
-              </a:lnSpc>
-              <a:spcBef>
-                <a:spcPts val="1025"/>
-              </a:spcBef>
-            </a:pPr>
-            <a:r>
-              <a:rPr lang="en-US" sz="1300" b="1" dirty="0">
-                <a:latin typeface="Times New Roman"/>
-                <a:cs typeface="Times New Roman"/>
-              </a:rPr>
-              <a:t>DOM Skills</a:t>
-            </a:r>
-            <a:r>
-              <a:rPr lang="en-US" sz="1300" dirty="0">
-                <a:latin typeface="Times New Roman"/>
-                <a:cs typeface="Times New Roman"/>
-              </a:rPr>
-              <a:t>: I gained confidence in manipulating the Document Object Model to change page content dynamically without a server.</a:t>
-            </a:r>
-            <a:endParaRPr sz="1300" dirty="0">
-              <a:latin typeface="Times New Roman"/>
-              <a:cs typeface="Times New Roman"/>
-            </a:endParaRPr>
-          </a:p>
-        </p:txBody>
-      </p:sp>
-      <p:grpSp>
-        <p:nvGrpSpPr>
-          <p:cNvPr id="37" name="object 37">
-            <a:extLst>
-              <a:ext uri="{FF2B5EF4-FFF2-40B4-BE49-F238E27FC236}">
-                <a16:creationId xmlns:a16="http://schemas.microsoft.com/office/drawing/2014/main" id="{F73209A1-B658-BB94-8DE9-97B9BAAF9651}"/>
-              </a:ext>
-            </a:extLst>
-          </p:cNvPr>
-          <p:cNvGrpSpPr/>
-          <p:nvPr/>
-        </p:nvGrpSpPr>
-        <p:grpSpPr>
-          <a:xfrm>
-            <a:off x="789228" y="8778875"/>
-            <a:ext cx="6402705" cy="20955"/>
-            <a:chOff x="801369" y="7811769"/>
-            <a:chExt cx="6402705" cy="20955"/>
-          </a:xfrm>
-        </p:grpSpPr>
-        <p:sp>
-          <p:nvSpPr>
-            <p:cNvPr id="38" name="object 38">
-              <a:extLst>
-                <a:ext uri="{FF2B5EF4-FFF2-40B4-BE49-F238E27FC236}">
-                  <a16:creationId xmlns:a16="http://schemas.microsoft.com/office/drawing/2014/main" id="{030DE98A-A045-F160-2CDB-9FED1A919A79}"/>
-                </a:ext>
-              </a:extLst>
-            </p:cNvPr>
-            <p:cNvSpPr/>
-            <p:nvPr/>
-          </p:nvSpPr>
-          <p:spPr>
-            <a:xfrm>
-              <a:off x="801370" y="7811769"/>
-              <a:ext cx="6400800" cy="20320"/>
-            </a:xfrm>
-            <a:custGeom>
-              <a:avLst/>
-              <a:gdLst/>
-              <a:ahLst/>
-              <a:cxnLst/>
-              <a:rect l="l" t="t" r="r" b="b"/>
-              <a:pathLst>
-                <a:path w="6400800" h="20320">
-                  <a:moveTo>
-                    <a:pt x="6400800" y="0"/>
-                  </a:moveTo>
-                  <a:lnTo>
-                    <a:pt x="0" y="0"/>
-                  </a:lnTo>
-                  <a:lnTo>
-                    <a:pt x="0" y="20320"/>
-                  </a:lnTo>
-                  <a:lnTo>
-                    <a:pt x="6400800" y="20320"/>
-                  </a:lnTo>
-                  <a:lnTo>
-                    <a:pt x="6400800" y="0"/>
-                  </a:lnTo>
-                  <a:close/>
-                </a:path>
-              </a:pathLst>
-            </a:custGeom>
-            <a:solidFill>
-              <a:srgbClr val="9F9F9F"/>
-            </a:solidFill>
-          </p:spPr>
-          <p:txBody>
-            <a:bodyPr wrap="square" lIns="0" tIns="0" rIns="0" bIns="0" rtlCol="0"/>
-            <a:lstStyle/>
-            <a:p>
-              <a:endParaRPr/>
-            </a:p>
-          </p:txBody>
-        </p:sp>
-        <p:sp>
-          <p:nvSpPr>
-            <p:cNvPr id="39" name="object 39">
-              <a:extLst>
-                <a:ext uri="{FF2B5EF4-FFF2-40B4-BE49-F238E27FC236}">
-                  <a16:creationId xmlns:a16="http://schemas.microsoft.com/office/drawing/2014/main" id="{1540B0B7-F66A-09A9-CEA7-C7BB52369222}"/>
-                </a:ext>
-              </a:extLst>
-            </p:cNvPr>
-            <p:cNvSpPr/>
-            <p:nvPr/>
-          </p:nvSpPr>
-          <p:spPr>
-            <a:xfrm>
-              <a:off x="7200899" y="7812912"/>
-              <a:ext cx="3175" cy="3175"/>
-            </a:xfrm>
-            <a:custGeom>
-              <a:avLst/>
-              <a:gdLst/>
-              <a:ahLst/>
-              <a:cxnLst/>
-              <a:rect l="l" t="t" r="r" b="b"/>
-              <a:pathLst>
-                <a:path w="3175" h="3175">
-                  <a:moveTo>
-                    <a:pt x="3047" y="0"/>
-                  </a:moveTo>
-                  <a:lnTo>
-                    <a:pt x="0" y="0"/>
-                  </a:lnTo>
-                  <a:lnTo>
-                    <a:pt x="0" y="3047"/>
-                  </a:lnTo>
-                  <a:lnTo>
-                    <a:pt x="3047" y="3047"/>
-                  </a:lnTo>
-                  <a:lnTo>
-                    <a:pt x="3047" y="0"/>
-                  </a:lnTo>
-                  <a:close/>
-                </a:path>
-              </a:pathLst>
-            </a:custGeom>
-            <a:solidFill>
-              <a:srgbClr val="E2E2E2"/>
-            </a:solidFill>
-          </p:spPr>
-          <p:txBody>
-            <a:bodyPr wrap="square" lIns="0" tIns="0" rIns="0" bIns="0" rtlCol="0"/>
-            <a:lstStyle/>
-            <a:p>
-              <a:endParaRPr/>
-            </a:p>
-          </p:txBody>
-        </p:sp>
-        <p:sp>
-          <p:nvSpPr>
-            <p:cNvPr id="40" name="object 40">
-              <a:extLst>
-                <a:ext uri="{FF2B5EF4-FFF2-40B4-BE49-F238E27FC236}">
-                  <a16:creationId xmlns:a16="http://schemas.microsoft.com/office/drawing/2014/main" id="{87BDBD3E-C8C7-D992-85CD-1D77F69529EA}"/>
-                </a:ext>
-              </a:extLst>
-            </p:cNvPr>
-            <p:cNvSpPr/>
-            <p:nvPr/>
-          </p:nvSpPr>
-          <p:spPr>
-            <a:xfrm>
-              <a:off x="801928" y="7812925"/>
-              <a:ext cx="6402070" cy="17145"/>
-            </a:xfrm>
-            <a:custGeom>
-              <a:avLst/>
-              <a:gdLst/>
-              <a:ahLst/>
-              <a:cxnLst/>
-              <a:rect l="l" t="t" r="r" b="b"/>
-              <a:pathLst>
-                <a:path w="6402070" h="17145">
-                  <a:moveTo>
-                    <a:pt x="3048" y="3035"/>
-                  </a:moveTo>
-                  <a:lnTo>
-                    <a:pt x="0" y="3035"/>
-                  </a:lnTo>
-                  <a:lnTo>
-                    <a:pt x="0" y="16751"/>
-                  </a:lnTo>
-                  <a:lnTo>
-                    <a:pt x="3048" y="16751"/>
-                  </a:lnTo>
-                  <a:lnTo>
-                    <a:pt x="3048" y="3035"/>
-                  </a:lnTo>
-                  <a:close/>
-                </a:path>
-                <a:path w="6402070" h="17145">
-                  <a:moveTo>
-                    <a:pt x="6402006" y="0"/>
-                  </a:moveTo>
-                  <a:lnTo>
-                    <a:pt x="6398971" y="0"/>
-                  </a:lnTo>
-                  <a:lnTo>
-                    <a:pt x="6398971" y="3035"/>
-                  </a:lnTo>
-                  <a:lnTo>
-                    <a:pt x="6402006" y="3035"/>
-                  </a:lnTo>
-                  <a:lnTo>
-                    <a:pt x="6402006" y="0"/>
-                  </a:lnTo>
-                  <a:close/>
-                </a:path>
-              </a:pathLst>
-            </a:custGeom>
-            <a:solidFill>
-              <a:srgbClr val="9F9F9F"/>
-            </a:solidFill>
-          </p:spPr>
-          <p:txBody>
-            <a:bodyPr wrap="square" lIns="0" tIns="0" rIns="0" bIns="0" rtlCol="0"/>
-            <a:lstStyle/>
-            <a:p>
-              <a:endParaRPr/>
-            </a:p>
-          </p:txBody>
-        </p:sp>
-        <p:sp>
-          <p:nvSpPr>
-            <p:cNvPr id="41" name="object 41">
-              <a:extLst>
-                <a:ext uri="{FF2B5EF4-FFF2-40B4-BE49-F238E27FC236}">
-                  <a16:creationId xmlns:a16="http://schemas.microsoft.com/office/drawing/2014/main" id="{1CB04381-D201-EF29-AD41-3AFB9B108ABB}"/>
-                </a:ext>
-              </a:extLst>
-            </p:cNvPr>
-            <p:cNvSpPr/>
-            <p:nvPr/>
-          </p:nvSpPr>
-          <p:spPr>
-            <a:xfrm>
-              <a:off x="7200899" y="7815960"/>
-              <a:ext cx="3175" cy="13970"/>
-            </a:xfrm>
-            <a:custGeom>
-              <a:avLst/>
-              <a:gdLst/>
-              <a:ahLst/>
-              <a:cxnLst/>
-              <a:rect l="l" t="t" r="r" b="b"/>
-              <a:pathLst>
-                <a:path w="3175" h="13970">
-                  <a:moveTo>
-                    <a:pt x="3047" y="0"/>
-                  </a:moveTo>
-                  <a:lnTo>
-                    <a:pt x="0" y="0"/>
-                  </a:lnTo>
-                  <a:lnTo>
-                    <a:pt x="0" y="13716"/>
-                  </a:lnTo>
-                  <a:lnTo>
-                    <a:pt x="3047" y="13716"/>
-                  </a:lnTo>
-                  <a:lnTo>
-                    <a:pt x="3047" y="0"/>
-                  </a:lnTo>
-                  <a:close/>
-                </a:path>
-              </a:pathLst>
-            </a:custGeom>
-            <a:solidFill>
-              <a:srgbClr val="E2E2E2"/>
-            </a:solidFill>
-          </p:spPr>
-          <p:txBody>
-            <a:bodyPr wrap="square" lIns="0" tIns="0" rIns="0" bIns="0" rtlCol="0"/>
-            <a:lstStyle/>
-            <a:p>
-              <a:endParaRPr/>
-            </a:p>
-          </p:txBody>
-        </p:sp>
-        <p:sp>
-          <p:nvSpPr>
-            <p:cNvPr id="42" name="object 42">
-              <a:extLst>
-                <a:ext uri="{FF2B5EF4-FFF2-40B4-BE49-F238E27FC236}">
-                  <a16:creationId xmlns:a16="http://schemas.microsoft.com/office/drawing/2014/main" id="{211F987A-1E45-144C-781C-439392BB5503}"/>
-                </a:ext>
-              </a:extLst>
-            </p:cNvPr>
-            <p:cNvSpPr/>
-            <p:nvPr/>
-          </p:nvSpPr>
-          <p:spPr>
-            <a:xfrm>
-              <a:off x="801928" y="7829676"/>
-              <a:ext cx="3175" cy="3175"/>
-            </a:xfrm>
-            <a:custGeom>
-              <a:avLst/>
-              <a:gdLst/>
-              <a:ahLst/>
-              <a:cxnLst/>
-              <a:rect l="l" t="t" r="r" b="b"/>
-              <a:pathLst>
-                <a:path w="3175" h="3175">
-                  <a:moveTo>
-                    <a:pt x="3048" y="0"/>
-                  </a:moveTo>
-                  <a:lnTo>
-                    <a:pt x="0" y="0"/>
-                  </a:lnTo>
-                  <a:lnTo>
-                    <a:pt x="0" y="3047"/>
-                  </a:lnTo>
-                  <a:lnTo>
-                    <a:pt x="3048" y="3047"/>
-                  </a:lnTo>
-                  <a:lnTo>
-                    <a:pt x="3048" y="0"/>
-                  </a:lnTo>
-                  <a:close/>
-                </a:path>
-              </a:pathLst>
-            </a:custGeom>
-            <a:solidFill>
-              <a:srgbClr val="9F9F9F"/>
-            </a:solidFill>
-          </p:spPr>
-          <p:txBody>
-            <a:bodyPr wrap="square" lIns="0" tIns="0" rIns="0" bIns="0" rtlCol="0"/>
-            <a:lstStyle/>
-            <a:p>
-              <a:endParaRPr/>
-            </a:p>
-          </p:txBody>
-        </p:sp>
-        <p:sp>
-          <p:nvSpPr>
-            <p:cNvPr id="43" name="object 43">
-              <a:extLst>
-                <a:ext uri="{FF2B5EF4-FFF2-40B4-BE49-F238E27FC236}">
-                  <a16:creationId xmlns:a16="http://schemas.microsoft.com/office/drawing/2014/main" id="{36F1915D-3794-8E80-8F51-6CFCAAD8563D}"/>
-                </a:ext>
-              </a:extLst>
-            </p:cNvPr>
-            <p:cNvSpPr/>
-            <p:nvPr/>
-          </p:nvSpPr>
-          <p:spPr>
-            <a:xfrm>
-              <a:off x="801928" y="7829689"/>
-              <a:ext cx="6402070" cy="3175"/>
-            </a:xfrm>
-            <a:custGeom>
-              <a:avLst/>
-              <a:gdLst/>
-              <a:ahLst/>
-              <a:cxnLst/>
-              <a:rect l="l" t="t" r="r" b="b"/>
-              <a:pathLst>
-                <a:path w="6402070" h="3175">
-                  <a:moveTo>
-                    <a:pt x="6402006" y="0"/>
-                  </a:moveTo>
-                  <a:lnTo>
-                    <a:pt x="6399022" y="0"/>
-                  </a:lnTo>
-                  <a:lnTo>
-                    <a:pt x="3048" y="0"/>
-                  </a:lnTo>
-                  <a:lnTo>
-                    <a:pt x="0" y="0"/>
-                  </a:lnTo>
-                  <a:lnTo>
-                    <a:pt x="0" y="3035"/>
-                  </a:lnTo>
-                  <a:lnTo>
-                    <a:pt x="3048" y="3035"/>
-                  </a:lnTo>
-                  <a:lnTo>
-                    <a:pt x="6398971" y="3035"/>
-                  </a:lnTo>
-                  <a:lnTo>
-                    <a:pt x="6402006" y="3035"/>
-                  </a:lnTo>
-                  <a:lnTo>
-                    <a:pt x="6402006" y="0"/>
-                  </a:lnTo>
-                  <a:close/>
-                </a:path>
-              </a:pathLst>
-            </a:custGeom>
-            <a:solidFill>
-              <a:srgbClr val="E2E2E2"/>
-            </a:solidFill>
-          </p:spPr>
-          <p:txBody>
-            <a:bodyPr wrap="square" lIns="0" tIns="0" rIns="0" bIns="0" rtlCol="0"/>
-            <a:lstStyle/>
-            <a:p>
-              <a:endParaRPr/>
-            </a:p>
-          </p:txBody>
-        </p:sp>
-      </p:grpSp>
-      <p:sp>
-        <p:nvSpPr>
-          <p:cNvPr id="44" name="object 44">
-            <a:extLst>
-              <a:ext uri="{FF2B5EF4-FFF2-40B4-BE49-F238E27FC236}">
-                <a16:creationId xmlns:a16="http://schemas.microsoft.com/office/drawing/2014/main" id="{A8350C30-62E4-4069-0527-5B936BEB3002}"/>
-              </a:ext>
-            </a:extLst>
-          </p:cNvPr>
-          <p:cNvSpPr txBox="1"/>
-          <p:nvPr/>
-        </p:nvSpPr>
-        <p:spPr>
-          <a:xfrm>
-            <a:off x="734047" y="8921270"/>
-            <a:ext cx="6414135" cy="1100301"/>
-          </a:xfrm>
-          <a:prstGeom prst="rect">
-            <a:avLst/>
-          </a:prstGeom>
-        </p:spPr>
-        <p:txBody>
-          <a:bodyPr vert="horz" wrap="square" lIns="0" tIns="12700" rIns="0" bIns="0" rtlCol="0">
-            <a:spAutoFit/>
-          </a:bodyPr>
-          <a:lstStyle/>
-          <a:p>
-            <a:pPr marL="12700">
-              <a:lnSpc>
-                <a:spcPct val="100000"/>
-              </a:lnSpc>
-              <a:spcBef>
-                <a:spcPts val="100"/>
-              </a:spcBef>
-            </a:pPr>
-            <a:r>
-              <a:rPr sz="1400" b="1" dirty="0">
-                <a:solidFill>
-                  <a:srgbClr val="3B78D7"/>
-                </a:solidFill>
-                <a:latin typeface="Times New Roman"/>
-                <a:cs typeface="Times New Roman"/>
-              </a:rPr>
-              <a:t>8.</a:t>
-            </a:r>
-            <a:r>
-              <a:rPr sz="1400" b="1" spc="-5" dirty="0">
-                <a:solidFill>
-                  <a:srgbClr val="3B78D7"/>
-                </a:solidFill>
-                <a:latin typeface="Times New Roman"/>
-                <a:cs typeface="Times New Roman"/>
-              </a:rPr>
-              <a:t> </a:t>
-            </a:r>
-            <a:r>
-              <a:rPr sz="1400" b="1" spc="-10" dirty="0">
-                <a:solidFill>
-                  <a:srgbClr val="3B78D7"/>
-                </a:solidFill>
-                <a:latin typeface="Times New Roman"/>
-                <a:cs typeface="Times New Roman"/>
-              </a:rPr>
-              <a:t>Conclusion:</a:t>
-            </a:r>
-            <a:endParaRPr sz="1400" dirty="0">
-              <a:latin typeface="Times New Roman"/>
-              <a:cs typeface="Times New Roman"/>
-            </a:endParaRPr>
-          </a:p>
-          <a:p>
-            <a:pPr marL="106680" marR="5080">
-              <a:lnSpc>
-                <a:spcPts val="1380"/>
-              </a:lnSpc>
-              <a:spcBef>
-                <a:spcPts val="1235"/>
-              </a:spcBef>
-            </a:pPr>
-            <a:r>
-              <a:rPr lang="en-US" sz="1300" dirty="0">
-                <a:latin typeface="Times New Roman"/>
-                <a:cs typeface="Times New Roman"/>
-              </a:rPr>
-              <a:t>The project successfully integrates HTML, CSS, and JavaScript to form a complete registration system. The validation logic ensures data quality, while the dynamic table update provides immediate satisfaction to the user, proving that client-side scripting is essential for a modern web experience.</a:t>
-            </a:r>
-            <a:endParaRPr sz="1300" dirty="0">
-              <a:latin typeface="Times New Roman"/>
-              <a:cs typeface="Times New Roman"/>
-            </a:endParaRPr>
-          </a:p>
-        </p:txBody>
-      </p:sp>
       <p:pic>
         <p:nvPicPr>
           <p:cNvPr id="45" name="object 45">
@@ -9827,10 +8813,1317 @@
       </p:pic>
       <p:pic>
         <p:nvPicPr>
+          <p:cNvPr id="6" name="Picture 5">
+            <a:extLst>
+              <a:ext uri="{FF2B5EF4-FFF2-40B4-BE49-F238E27FC236}">
+                <a16:creationId xmlns:a16="http://schemas.microsoft.com/office/drawing/2014/main" id="{B94C2DBF-2BFB-010F-2AAE-AA7E07D426D1}"/>
+              </a:ext>
+            </a:extLst>
+          </p:cNvPr>
+          <p:cNvPicPr>
+            <a:picLocks noChangeAspect="1"/>
+          </p:cNvPicPr>
+          <p:nvPr/>
+        </p:nvPicPr>
+        <p:blipFill>
+          <a:blip r:embed="rId6">
+            <a:extLst>
+              <a:ext uri="{28A0092B-C50C-407E-A947-70E740481C1C}">
+                <a14:useLocalDpi xmlns:a14="http://schemas.microsoft.com/office/drawing/2010/main" val="0"/>
+              </a:ext>
+            </a:extLst>
+          </a:blip>
+          <a:stretch>
+            <a:fillRect/>
+          </a:stretch>
+        </p:blipFill>
+        <p:spPr>
+          <a:xfrm>
+            <a:off x="0" y="1539875"/>
+            <a:ext cx="3474720" cy="2779776"/>
+          </a:xfrm>
+          <a:prstGeom prst="rect">
+            <a:avLst/>
+          </a:prstGeom>
+        </p:spPr>
+      </p:pic>
+      <p:pic>
+        <p:nvPicPr>
+          <p:cNvPr id="11" name="Picture 10">
+            <a:extLst>
+              <a:ext uri="{FF2B5EF4-FFF2-40B4-BE49-F238E27FC236}">
+                <a16:creationId xmlns:a16="http://schemas.microsoft.com/office/drawing/2014/main" id="{0A481255-9E89-2C84-57F1-2E3F5997ACB0}"/>
+              </a:ext>
+            </a:extLst>
+          </p:cNvPr>
+          <p:cNvPicPr>
+            <a:picLocks noChangeAspect="1"/>
+          </p:cNvPicPr>
+          <p:nvPr/>
+        </p:nvPicPr>
+        <p:blipFill>
+          <a:blip r:embed="rId7">
+            <a:extLst>
+              <a:ext uri="{28A0092B-C50C-407E-A947-70E740481C1C}">
+                <a14:useLocalDpi xmlns:a14="http://schemas.microsoft.com/office/drawing/2010/main" val="0"/>
+              </a:ext>
+            </a:extLst>
+          </a:blip>
+          <a:stretch>
+            <a:fillRect/>
+          </a:stretch>
+        </p:blipFill>
+        <p:spPr>
+          <a:xfrm>
+            <a:off x="3784600" y="1539875"/>
+            <a:ext cx="3474720" cy="3078988"/>
+          </a:xfrm>
+          <a:prstGeom prst="rect">
+            <a:avLst/>
+          </a:prstGeom>
+        </p:spPr>
+      </p:pic>
+      <p:pic>
+        <p:nvPicPr>
+          <p:cNvPr id="13" name="Picture 12">
+            <a:extLst>
+              <a:ext uri="{FF2B5EF4-FFF2-40B4-BE49-F238E27FC236}">
+                <a16:creationId xmlns:a16="http://schemas.microsoft.com/office/drawing/2014/main" id="{E050F338-1DD4-571E-A549-16A88B044F6F}"/>
+              </a:ext>
+            </a:extLst>
+          </p:cNvPr>
+          <p:cNvPicPr>
+            <a:picLocks noChangeAspect="1"/>
+          </p:cNvPicPr>
+          <p:nvPr/>
+        </p:nvPicPr>
+        <p:blipFill>
+          <a:blip r:embed="rId8">
+            <a:extLst>
+              <a:ext uri="{28A0092B-C50C-407E-A947-70E740481C1C}">
+                <a14:useLocalDpi xmlns:a14="http://schemas.microsoft.com/office/drawing/2010/main" val="0"/>
+              </a:ext>
+            </a:extLst>
+          </a:blip>
+          <a:stretch>
+            <a:fillRect/>
+          </a:stretch>
+        </p:blipFill>
+        <p:spPr>
+          <a:xfrm>
+            <a:off x="279628" y="5572705"/>
+            <a:ext cx="3474720" cy="3587170"/>
+          </a:xfrm>
+          <a:prstGeom prst="rect">
+            <a:avLst/>
+          </a:prstGeom>
+        </p:spPr>
+      </p:pic>
+      <p:pic>
+        <p:nvPicPr>
+          <p:cNvPr id="15" name="Picture 14">
+            <a:extLst>
+              <a:ext uri="{FF2B5EF4-FFF2-40B4-BE49-F238E27FC236}">
+                <a16:creationId xmlns:a16="http://schemas.microsoft.com/office/drawing/2014/main" id="{3C547904-FA0C-6F4D-CA41-5D20AD545790}"/>
+              </a:ext>
+            </a:extLst>
+          </p:cNvPr>
+          <p:cNvPicPr>
+            <a:picLocks noChangeAspect="1"/>
+          </p:cNvPicPr>
+          <p:nvPr/>
+        </p:nvPicPr>
+        <p:blipFill>
+          <a:blip r:embed="rId9">
+            <a:extLst>
+              <a:ext uri="{28A0092B-C50C-407E-A947-70E740481C1C}">
+                <a14:useLocalDpi xmlns:a14="http://schemas.microsoft.com/office/drawing/2010/main" val="0"/>
+              </a:ext>
+            </a:extLst>
+          </a:blip>
+          <a:stretch>
+            <a:fillRect/>
+          </a:stretch>
+        </p:blipFill>
+        <p:spPr>
+          <a:xfrm>
+            <a:off x="3958297" y="5555361"/>
+            <a:ext cx="3474720" cy="3621858"/>
+          </a:xfrm>
+          <a:prstGeom prst="rect">
+            <a:avLst/>
+          </a:prstGeom>
+        </p:spPr>
+      </p:pic>
+    </p:spTree>
+    <p:extLst>
+      <p:ext uri="{BB962C8B-B14F-4D97-AF65-F5344CB8AC3E}">
+        <p14:creationId xmlns:p14="http://schemas.microsoft.com/office/powerpoint/2010/main" val="2896398324"/>
+      </p:ext>
+    </p:extLst>
+  </p:cSld>
+  <p:clrMapOvr>
+    <a:masterClrMapping/>
+  </p:clrMapOvr>
+</p:sld>
+</file>
+
+<file path=ppt/slides/slide5.xml><?xml version="1.0" encoding="utf-8"?>
+<p:sld xmlns:a="http://schemas.openxmlformats.org/drawingml/2006/main" xmlns:r="http://schemas.openxmlformats.org/officeDocument/2006/relationships" xmlns:p="http://schemas.openxmlformats.org/presentationml/2006/main" showMasterSp="0">
+  <p:cSld>
+    <p:spTree>
+      <p:nvGrpSpPr>
+        <p:cNvPr id="1" name="">
+          <a:extLst>
+            <a:ext uri="{FF2B5EF4-FFF2-40B4-BE49-F238E27FC236}">
+              <a16:creationId xmlns:a16="http://schemas.microsoft.com/office/drawing/2014/main" id="{13918351-29E2-D76D-1FED-56D4707ACBED}"/>
+            </a:ext>
+          </a:extLst>
+        </p:cNvPr>
+        <p:cNvGrpSpPr/>
+        <p:nvPr/>
+      </p:nvGrpSpPr>
+      <p:grpSpPr>
+        <a:xfrm>
+          <a:off x="0" y="0"/>
+          <a:ext cx="0" cy="0"/>
+          <a:chOff x="0" y="0"/>
+          <a:chExt cx="0" cy="0"/>
+        </a:xfrm>
+      </p:grpSpPr>
+      <p:pic>
+        <p:nvPicPr>
+          <p:cNvPr id="2" name="object 2">
+            <a:extLst>
+              <a:ext uri="{FF2B5EF4-FFF2-40B4-BE49-F238E27FC236}">
+                <a16:creationId xmlns:a16="http://schemas.microsoft.com/office/drawing/2014/main" id="{C7395E98-6A20-E1EC-48B1-B8F87B928EE8}"/>
+              </a:ext>
+            </a:extLst>
+          </p:cNvPr>
+          <p:cNvPicPr/>
+          <p:nvPr/>
+        </p:nvPicPr>
+        <p:blipFill>
+          <a:blip r:embed="rId2" cstate="print"/>
+          <a:stretch>
+            <a:fillRect/>
+          </a:stretch>
+        </p:blipFill>
+        <p:spPr>
+          <a:xfrm>
+            <a:off x="4416425" y="644562"/>
+            <a:ext cx="996314" cy="434174"/>
+          </a:xfrm>
+          <a:prstGeom prst="rect">
+            <a:avLst/>
+          </a:prstGeom>
+        </p:spPr>
+      </p:pic>
+      <p:pic>
+        <p:nvPicPr>
+          <p:cNvPr id="3" name="object 3">
+            <a:extLst>
+              <a:ext uri="{FF2B5EF4-FFF2-40B4-BE49-F238E27FC236}">
+                <a16:creationId xmlns:a16="http://schemas.microsoft.com/office/drawing/2014/main" id="{76D0AAEE-AA8A-E512-BCE0-101AF2B8DA0B}"/>
+              </a:ext>
+            </a:extLst>
+          </p:cNvPr>
+          <p:cNvPicPr/>
+          <p:nvPr/>
+        </p:nvPicPr>
+        <p:blipFill>
+          <a:blip r:embed="rId3" cstate="print"/>
+          <a:stretch>
+            <a:fillRect/>
+          </a:stretch>
+        </p:blipFill>
+        <p:spPr>
+          <a:xfrm>
+            <a:off x="6073775" y="665479"/>
+            <a:ext cx="1074407" cy="401954"/>
+          </a:xfrm>
+          <a:prstGeom prst="rect">
+            <a:avLst/>
+          </a:prstGeom>
+        </p:spPr>
+      </p:pic>
+      <p:grpSp>
+        <p:nvGrpSpPr>
+          <p:cNvPr id="29" name="object 29">
+            <a:extLst>
+              <a:ext uri="{FF2B5EF4-FFF2-40B4-BE49-F238E27FC236}">
+                <a16:creationId xmlns:a16="http://schemas.microsoft.com/office/drawing/2014/main" id="{ACC51D0F-2CB6-7556-DC09-C43C2212855B}"/>
+              </a:ext>
+            </a:extLst>
+          </p:cNvPr>
+          <p:cNvGrpSpPr/>
+          <p:nvPr/>
+        </p:nvGrpSpPr>
+        <p:grpSpPr>
+          <a:xfrm>
+            <a:off x="801369" y="6473824"/>
+            <a:ext cx="6402705" cy="20955"/>
+            <a:chOff x="801369" y="6473824"/>
+            <a:chExt cx="6402705" cy="20955"/>
+          </a:xfrm>
+        </p:grpSpPr>
+        <p:sp>
+          <p:nvSpPr>
+            <p:cNvPr id="30" name="object 30">
+              <a:extLst>
+                <a:ext uri="{FF2B5EF4-FFF2-40B4-BE49-F238E27FC236}">
+                  <a16:creationId xmlns:a16="http://schemas.microsoft.com/office/drawing/2014/main" id="{4E5F7915-0FFA-D369-E35C-6182C31623B5}"/>
+                </a:ext>
+              </a:extLst>
+            </p:cNvPr>
+            <p:cNvSpPr/>
+            <p:nvPr/>
+          </p:nvSpPr>
+          <p:spPr>
+            <a:xfrm>
+              <a:off x="801370" y="6473824"/>
+              <a:ext cx="6400800" cy="19685"/>
+            </a:xfrm>
+            <a:custGeom>
+              <a:avLst/>
+              <a:gdLst/>
+              <a:ahLst/>
+              <a:cxnLst/>
+              <a:rect l="l" t="t" r="r" b="b"/>
+              <a:pathLst>
+                <a:path w="6400800" h="19685">
+                  <a:moveTo>
+                    <a:pt x="6400800" y="0"/>
+                  </a:moveTo>
+                  <a:lnTo>
+                    <a:pt x="0" y="0"/>
+                  </a:lnTo>
+                  <a:lnTo>
+                    <a:pt x="0" y="19685"/>
+                  </a:lnTo>
+                  <a:lnTo>
+                    <a:pt x="6400800" y="19685"/>
+                  </a:lnTo>
+                  <a:lnTo>
+                    <a:pt x="6400800" y="0"/>
+                  </a:lnTo>
+                  <a:close/>
+                </a:path>
+              </a:pathLst>
+            </a:custGeom>
+            <a:solidFill>
+              <a:srgbClr val="9F9F9F"/>
+            </a:solidFill>
+          </p:spPr>
+          <p:txBody>
+            <a:bodyPr wrap="square" lIns="0" tIns="0" rIns="0" bIns="0" rtlCol="0"/>
+            <a:lstStyle/>
+            <a:p>
+              <a:endParaRPr/>
+            </a:p>
+          </p:txBody>
+        </p:sp>
+        <p:sp>
+          <p:nvSpPr>
+            <p:cNvPr id="31" name="object 31">
+              <a:extLst>
+                <a:ext uri="{FF2B5EF4-FFF2-40B4-BE49-F238E27FC236}">
+                  <a16:creationId xmlns:a16="http://schemas.microsoft.com/office/drawing/2014/main" id="{2DB2C99D-CA2E-894B-00DE-91A8C61FC2EC}"/>
+                </a:ext>
+              </a:extLst>
+            </p:cNvPr>
+            <p:cNvSpPr/>
+            <p:nvPr/>
+          </p:nvSpPr>
+          <p:spPr>
+            <a:xfrm>
+              <a:off x="7200899" y="6474840"/>
+              <a:ext cx="3175" cy="3175"/>
+            </a:xfrm>
+            <a:custGeom>
+              <a:avLst/>
+              <a:gdLst/>
+              <a:ahLst/>
+              <a:cxnLst/>
+              <a:rect l="l" t="t" r="r" b="b"/>
+              <a:pathLst>
+                <a:path w="3175" h="3175">
+                  <a:moveTo>
+                    <a:pt x="3047" y="0"/>
+                  </a:moveTo>
+                  <a:lnTo>
+                    <a:pt x="0" y="0"/>
+                  </a:lnTo>
+                  <a:lnTo>
+                    <a:pt x="0" y="3047"/>
+                  </a:lnTo>
+                  <a:lnTo>
+                    <a:pt x="3047" y="3047"/>
+                  </a:lnTo>
+                  <a:lnTo>
+                    <a:pt x="3047" y="0"/>
+                  </a:lnTo>
+                  <a:close/>
+                </a:path>
+              </a:pathLst>
+            </a:custGeom>
+            <a:solidFill>
+              <a:srgbClr val="E2E2E2"/>
+            </a:solidFill>
+          </p:spPr>
+          <p:txBody>
+            <a:bodyPr wrap="square" lIns="0" tIns="0" rIns="0" bIns="0" rtlCol="0"/>
+            <a:lstStyle/>
+            <a:p>
+              <a:endParaRPr/>
+            </a:p>
+          </p:txBody>
+        </p:sp>
+        <p:sp>
+          <p:nvSpPr>
+            <p:cNvPr id="32" name="object 32">
+              <a:extLst>
+                <a:ext uri="{FF2B5EF4-FFF2-40B4-BE49-F238E27FC236}">
+                  <a16:creationId xmlns:a16="http://schemas.microsoft.com/office/drawing/2014/main" id="{F82D9680-D36E-DCEB-CAEF-CBB0F1BCE207}"/>
+                </a:ext>
+              </a:extLst>
+            </p:cNvPr>
+            <p:cNvSpPr/>
+            <p:nvPr/>
+          </p:nvSpPr>
+          <p:spPr>
+            <a:xfrm>
+              <a:off x="801928" y="6474853"/>
+              <a:ext cx="6402070" cy="17145"/>
+            </a:xfrm>
+            <a:custGeom>
+              <a:avLst/>
+              <a:gdLst/>
+              <a:ahLst/>
+              <a:cxnLst/>
+              <a:rect l="l" t="t" r="r" b="b"/>
+              <a:pathLst>
+                <a:path w="6402070" h="17145">
+                  <a:moveTo>
+                    <a:pt x="3048" y="3048"/>
+                  </a:moveTo>
+                  <a:lnTo>
+                    <a:pt x="0" y="3048"/>
+                  </a:lnTo>
+                  <a:lnTo>
+                    <a:pt x="0" y="16751"/>
+                  </a:lnTo>
+                  <a:lnTo>
+                    <a:pt x="3048" y="16751"/>
+                  </a:lnTo>
+                  <a:lnTo>
+                    <a:pt x="3048" y="3048"/>
+                  </a:lnTo>
+                  <a:close/>
+                </a:path>
+                <a:path w="6402070" h="17145">
+                  <a:moveTo>
+                    <a:pt x="6402006" y="0"/>
+                  </a:moveTo>
+                  <a:lnTo>
+                    <a:pt x="6398971" y="0"/>
+                  </a:lnTo>
+                  <a:lnTo>
+                    <a:pt x="6398971" y="3035"/>
+                  </a:lnTo>
+                  <a:lnTo>
+                    <a:pt x="6402006" y="3035"/>
+                  </a:lnTo>
+                  <a:lnTo>
+                    <a:pt x="6402006" y="0"/>
+                  </a:lnTo>
+                  <a:close/>
+                </a:path>
+              </a:pathLst>
+            </a:custGeom>
+            <a:solidFill>
+              <a:srgbClr val="9F9F9F"/>
+            </a:solidFill>
+          </p:spPr>
+          <p:txBody>
+            <a:bodyPr wrap="square" lIns="0" tIns="0" rIns="0" bIns="0" rtlCol="0"/>
+            <a:lstStyle/>
+            <a:p>
+              <a:endParaRPr/>
+            </a:p>
+          </p:txBody>
+        </p:sp>
+        <p:sp>
+          <p:nvSpPr>
+            <p:cNvPr id="33" name="object 33">
+              <a:extLst>
+                <a:ext uri="{FF2B5EF4-FFF2-40B4-BE49-F238E27FC236}">
+                  <a16:creationId xmlns:a16="http://schemas.microsoft.com/office/drawing/2014/main" id="{6E45B4E0-B0E0-64BF-4848-34588FEE044E}"/>
+                </a:ext>
+              </a:extLst>
+            </p:cNvPr>
+            <p:cNvSpPr/>
+            <p:nvPr/>
+          </p:nvSpPr>
+          <p:spPr>
+            <a:xfrm>
+              <a:off x="7200899" y="6477888"/>
+              <a:ext cx="3175" cy="13970"/>
+            </a:xfrm>
+            <a:custGeom>
+              <a:avLst/>
+              <a:gdLst/>
+              <a:ahLst/>
+              <a:cxnLst/>
+              <a:rect l="l" t="t" r="r" b="b"/>
+              <a:pathLst>
+                <a:path w="3175" h="13970">
+                  <a:moveTo>
+                    <a:pt x="3047" y="0"/>
+                  </a:moveTo>
+                  <a:lnTo>
+                    <a:pt x="0" y="0"/>
+                  </a:lnTo>
+                  <a:lnTo>
+                    <a:pt x="0" y="13715"/>
+                  </a:lnTo>
+                  <a:lnTo>
+                    <a:pt x="3047" y="13715"/>
+                  </a:lnTo>
+                  <a:lnTo>
+                    <a:pt x="3047" y="0"/>
+                  </a:lnTo>
+                  <a:close/>
+                </a:path>
+              </a:pathLst>
+            </a:custGeom>
+            <a:solidFill>
+              <a:srgbClr val="E2E2E2"/>
+            </a:solidFill>
+          </p:spPr>
+          <p:txBody>
+            <a:bodyPr wrap="square" lIns="0" tIns="0" rIns="0" bIns="0" rtlCol="0"/>
+            <a:lstStyle/>
+            <a:p>
+              <a:endParaRPr/>
+            </a:p>
+          </p:txBody>
+        </p:sp>
+        <p:sp>
+          <p:nvSpPr>
+            <p:cNvPr id="34" name="object 34">
+              <a:extLst>
+                <a:ext uri="{FF2B5EF4-FFF2-40B4-BE49-F238E27FC236}">
+                  <a16:creationId xmlns:a16="http://schemas.microsoft.com/office/drawing/2014/main" id="{268B20D4-F3A1-2038-25EB-1C2DF0AE6B34}"/>
+                </a:ext>
+              </a:extLst>
+            </p:cNvPr>
+            <p:cNvSpPr/>
+            <p:nvPr/>
+          </p:nvSpPr>
+          <p:spPr>
+            <a:xfrm>
+              <a:off x="801928" y="6491604"/>
+              <a:ext cx="3175" cy="3175"/>
+            </a:xfrm>
+            <a:custGeom>
+              <a:avLst/>
+              <a:gdLst/>
+              <a:ahLst/>
+              <a:cxnLst/>
+              <a:rect l="l" t="t" r="r" b="b"/>
+              <a:pathLst>
+                <a:path w="3175" h="3175">
+                  <a:moveTo>
+                    <a:pt x="3048" y="0"/>
+                  </a:moveTo>
+                  <a:lnTo>
+                    <a:pt x="0" y="0"/>
+                  </a:lnTo>
+                  <a:lnTo>
+                    <a:pt x="0" y="3047"/>
+                  </a:lnTo>
+                  <a:lnTo>
+                    <a:pt x="3048" y="3047"/>
+                  </a:lnTo>
+                  <a:lnTo>
+                    <a:pt x="3048" y="0"/>
+                  </a:lnTo>
+                  <a:close/>
+                </a:path>
+              </a:pathLst>
+            </a:custGeom>
+            <a:solidFill>
+              <a:srgbClr val="9F9F9F"/>
+            </a:solidFill>
+          </p:spPr>
+          <p:txBody>
+            <a:bodyPr wrap="square" lIns="0" tIns="0" rIns="0" bIns="0" rtlCol="0"/>
+            <a:lstStyle/>
+            <a:p>
+              <a:endParaRPr/>
+            </a:p>
+          </p:txBody>
+        </p:sp>
+        <p:sp>
+          <p:nvSpPr>
+            <p:cNvPr id="35" name="object 35">
+              <a:extLst>
+                <a:ext uri="{FF2B5EF4-FFF2-40B4-BE49-F238E27FC236}">
+                  <a16:creationId xmlns:a16="http://schemas.microsoft.com/office/drawing/2014/main" id="{40F6CB7C-61BE-2CD2-FCB1-51FF2F50E1EC}"/>
+                </a:ext>
+              </a:extLst>
+            </p:cNvPr>
+            <p:cNvSpPr/>
+            <p:nvPr/>
+          </p:nvSpPr>
+          <p:spPr>
+            <a:xfrm>
+              <a:off x="801928" y="6491617"/>
+              <a:ext cx="6402070" cy="3175"/>
+            </a:xfrm>
+            <a:custGeom>
+              <a:avLst/>
+              <a:gdLst/>
+              <a:ahLst/>
+              <a:cxnLst/>
+              <a:rect l="l" t="t" r="r" b="b"/>
+              <a:pathLst>
+                <a:path w="6402070" h="3175">
+                  <a:moveTo>
+                    <a:pt x="6402006" y="0"/>
+                  </a:moveTo>
+                  <a:lnTo>
+                    <a:pt x="6399022" y="0"/>
+                  </a:lnTo>
+                  <a:lnTo>
+                    <a:pt x="3048" y="0"/>
+                  </a:lnTo>
+                  <a:lnTo>
+                    <a:pt x="0" y="0"/>
+                  </a:lnTo>
+                  <a:lnTo>
+                    <a:pt x="0" y="3035"/>
+                  </a:lnTo>
+                  <a:lnTo>
+                    <a:pt x="3048" y="3035"/>
+                  </a:lnTo>
+                  <a:lnTo>
+                    <a:pt x="6398971" y="3035"/>
+                  </a:lnTo>
+                  <a:lnTo>
+                    <a:pt x="6402006" y="3035"/>
+                  </a:lnTo>
+                  <a:lnTo>
+                    <a:pt x="6402006" y="0"/>
+                  </a:lnTo>
+                  <a:close/>
+                </a:path>
+              </a:pathLst>
+            </a:custGeom>
+            <a:solidFill>
+              <a:srgbClr val="E2E2E2"/>
+            </a:solidFill>
+          </p:spPr>
+          <p:txBody>
+            <a:bodyPr wrap="square" lIns="0" tIns="0" rIns="0" bIns="0" rtlCol="0"/>
+            <a:lstStyle/>
+            <a:p>
+              <a:endParaRPr/>
+            </a:p>
+          </p:txBody>
+        </p:sp>
+      </p:grpSp>
+      <p:sp>
+        <p:nvSpPr>
+          <p:cNvPr id="36" name="object 36">
+            <a:extLst>
+              <a:ext uri="{FF2B5EF4-FFF2-40B4-BE49-F238E27FC236}">
+                <a16:creationId xmlns:a16="http://schemas.microsoft.com/office/drawing/2014/main" id="{FEE54F4A-8D18-B4C2-3886-833F88B9C603}"/>
+              </a:ext>
+            </a:extLst>
+          </p:cNvPr>
+          <p:cNvSpPr txBox="1"/>
+          <p:nvPr/>
+        </p:nvSpPr>
+        <p:spPr>
+          <a:xfrm>
+            <a:off x="789228" y="6661784"/>
+            <a:ext cx="5911850" cy="1690847"/>
+          </a:xfrm>
+          <a:prstGeom prst="rect">
+            <a:avLst/>
+          </a:prstGeom>
+        </p:spPr>
+        <p:txBody>
+          <a:bodyPr vert="horz" wrap="square" lIns="0" tIns="13335" rIns="0" bIns="0" rtlCol="0">
+            <a:spAutoFit/>
+          </a:bodyPr>
+          <a:lstStyle/>
+          <a:p>
+            <a:pPr marL="12700">
+              <a:lnSpc>
+                <a:spcPct val="100000"/>
+              </a:lnSpc>
+              <a:spcBef>
+                <a:spcPts val="105"/>
+              </a:spcBef>
+            </a:pPr>
+            <a:r>
+              <a:rPr sz="1400" b="1" dirty="0">
+                <a:solidFill>
+                  <a:srgbClr val="3B78D7"/>
+                </a:solidFill>
+                <a:latin typeface="Times New Roman"/>
+                <a:cs typeface="Times New Roman"/>
+              </a:rPr>
+              <a:t>7.Learning</a:t>
+            </a:r>
+            <a:r>
+              <a:rPr sz="1400" b="1" spc="-45" dirty="0">
+                <a:solidFill>
+                  <a:srgbClr val="3B78D7"/>
+                </a:solidFill>
+                <a:latin typeface="Times New Roman"/>
+                <a:cs typeface="Times New Roman"/>
+              </a:rPr>
+              <a:t> </a:t>
+            </a:r>
+            <a:r>
+              <a:rPr sz="1400" b="1" spc="-10" dirty="0">
+                <a:solidFill>
+                  <a:srgbClr val="3B78D7"/>
+                </a:solidFill>
+                <a:latin typeface="Times New Roman"/>
+                <a:cs typeface="Times New Roman"/>
+              </a:rPr>
+              <a:t>Outcome:</a:t>
+            </a:r>
+            <a:endParaRPr sz="1400" dirty="0">
+              <a:latin typeface="Times New Roman"/>
+              <a:cs typeface="Times New Roman"/>
+            </a:endParaRPr>
+          </a:p>
+          <a:p>
+            <a:pPr marL="109855" marR="5080">
+              <a:lnSpc>
+                <a:spcPts val="1380"/>
+              </a:lnSpc>
+              <a:spcBef>
+                <a:spcPts val="1025"/>
+              </a:spcBef>
+            </a:pPr>
+            <a:r>
+              <a:rPr lang="en-US" sz="1300" b="1" dirty="0">
+                <a:latin typeface="Times New Roman"/>
+                <a:cs typeface="Times New Roman"/>
+              </a:rPr>
+              <a:t>Interactivity</a:t>
+            </a:r>
+            <a:r>
+              <a:rPr lang="en-US" sz="1300" dirty="0">
+                <a:latin typeface="Times New Roman"/>
+                <a:cs typeface="Times New Roman"/>
+              </a:rPr>
+              <a:t>: I learned how to move beyond static styling and create a functional web application using JavaScript.</a:t>
+            </a:r>
+          </a:p>
+          <a:p>
+            <a:pPr marL="109855" marR="5080">
+              <a:lnSpc>
+                <a:spcPts val="1380"/>
+              </a:lnSpc>
+              <a:spcBef>
+                <a:spcPts val="1025"/>
+              </a:spcBef>
+            </a:pPr>
+            <a:r>
+              <a:rPr lang="en-US" sz="1300" b="1" dirty="0">
+                <a:latin typeface="Times New Roman"/>
+                <a:cs typeface="Times New Roman"/>
+              </a:rPr>
+              <a:t>Data Integrity</a:t>
+            </a:r>
+            <a:r>
+              <a:rPr lang="en-US" sz="1300" dirty="0">
+                <a:latin typeface="Times New Roman"/>
+                <a:cs typeface="Times New Roman"/>
+              </a:rPr>
+              <a:t>: I understood how to enforce rules on user input to ensure the database (or table) only receives correctly formatted information.</a:t>
+            </a:r>
+          </a:p>
+          <a:p>
+            <a:pPr marL="109855" marR="5080">
+              <a:lnSpc>
+                <a:spcPts val="1380"/>
+              </a:lnSpc>
+              <a:spcBef>
+                <a:spcPts val="1025"/>
+              </a:spcBef>
+            </a:pPr>
+            <a:r>
+              <a:rPr lang="en-US" sz="1300" b="1" dirty="0">
+                <a:latin typeface="Times New Roman"/>
+                <a:cs typeface="Times New Roman"/>
+              </a:rPr>
+              <a:t>DOM Skills</a:t>
+            </a:r>
+            <a:r>
+              <a:rPr lang="en-US" sz="1300" dirty="0">
+                <a:latin typeface="Times New Roman"/>
+                <a:cs typeface="Times New Roman"/>
+              </a:rPr>
+              <a:t>: I gained confidence in manipulating the Document Object Model to change page content dynamically without a server.</a:t>
+            </a:r>
+            <a:endParaRPr sz="1300" dirty="0">
+              <a:latin typeface="Times New Roman"/>
+              <a:cs typeface="Times New Roman"/>
+            </a:endParaRPr>
+          </a:p>
+        </p:txBody>
+      </p:sp>
+      <p:grpSp>
+        <p:nvGrpSpPr>
+          <p:cNvPr id="37" name="object 37">
+            <a:extLst>
+              <a:ext uri="{FF2B5EF4-FFF2-40B4-BE49-F238E27FC236}">
+                <a16:creationId xmlns:a16="http://schemas.microsoft.com/office/drawing/2014/main" id="{A73E787E-45C1-DD60-0357-45D77897E6F6}"/>
+              </a:ext>
+            </a:extLst>
+          </p:cNvPr>
+          <p:cNvGrpSpPr/>
+          <p:nvPr/>
+        </p:nvGrpSpPr>
+        <p:grpSpPr>
+          <a:xfrm>
+            <a:off x="789228" y="8778875"/>
+            <a:ext cx="6402705" cy="20955"/>
+            <a:chOff x="801369" y="7811769"/>
+            <a:chExt cx="6402705" cy="20955"/>
+          </a:xfrm>
+        </p:grpSpPr>
+        <p:sp>
+          <p:nvSpPr>
+            <p:cNvPr id="38" name="object 38">
+              <a:extLst>
+                <a:ext uri="{FF2B5EF4-FFF2-40B4-BE49-F238E27FC236}">
+                  <a16:creationId xmlns:a16="http://schemas.microsoft.com/office/drawing/2014/main" id="{5F42E02E-4019-95C7-99F8-3A3AFBEDA1A1}"/>
+                </a:ext>
+              </a:extLst>
+            </p:cNvPr>
+            <p:cNvSpPr/>
+            <p:nvPr/>
+          </p:nvSpPr>
+          <p:spPr>
+            <a:xfrm>
+              <a:off x="801370" y="7811769"/>
+              <a:ext cx="6400800" cy="20320"/>
+            </a:xfrm>
+            <a:custGeom>
+              <a:avLst/>
+              <a:gdLst/>
+              <a:ahLst/>
+              <a:cxnLst/>
+              <a:rect l="l" t="t" r="r" b="b"/>
+              <a:pathLst>
+                <a:path w="6400800" h="20320">
+                  <a:moveTo>
+                    <a:pt x="6400800" y="0"/>
+                  </a:moveTo>
+                  <a:lnTo>
+                    <a:pt x="0" y="0"/>
+                  </a:lnTo>
+                  <a:lnTo>
+                    <a:pt x="0" y="20320"/>
+                  </a:lnTo>
+                  <a:lnTo>
+                    <a:pt x="6400800" y="20320"/>
+                  </a:lnTo>
+                  <a:lnTo>
+                    <a:pt x="6400800" y="0"/>
+                  </a:lnTo>
+                  <a:close/>
+                </a:path>
+              </a:pathLst>
+            </a:custGeom>
+            <a:solidFill>
+              <a:srgbClr val="9F9F9F"/>
+            </a:solidFill>
+          </p:spPr>
+          <p:txBody>
+            <a:bodyPr wrap="square" lIns="0" tIns="0" rIns="0" bIns="0" rtlCol="0"/>
+            <a:lstStyle/>
+            <a:p>
+              <a:endParaRPr/>
+            </a:p>
+          </p:txBody>
+        </p:sp>
+        <p:sp>
+          <p:nvSpPr>
+            <p:cNvPr id="39" name="object 39">
+              <a:extLst>
+                <a:ext uri="{FF2B5EF4-FFF2-40B4-BE49-F238E27FC236}">
+                  <a16:creationId xmlns:a16="http://schemas.microsoft.com/office/drawing/2014/main" id="{298B2F9A-BCD7-FE6D-2DA0-3F914AF4A94F}"/>
+                </a:ext>
+              </a:extLst>
+            </p:cNvPr>
+            <p:cNvSpPr/>
+            <p:nvPr/>
+          </p:nvSpPr>
+          <p:spPr>
+            <a:xfrm>
+              <a:off x="7200899" y="7812912"/>
+              <a:ext cx="3175" cy="3175"/>
+            </a:xfrm>
+            <a:custGeom>
+              <a:avLst/>
+              <a:gdLst/>
+              <a:ahLst/>
+              <a:cxnLst/>
+              <a:rect l="l" t="t" r="r" b="b"/>
+              <a:pathLst>
+                <a:path w="3175" h="3175">
+                  <a:moveTo>
+                    <a:pt x="3047" y="0"/>
+                  </a:moveTo>
+                  <a:lnTo>
+                    <a:pt x="0" y="0"/>
+                  </a:lnTo>
+                  <a:lnTo>
+                    <a:pt x="0" y="3047"/>
+                  </a:lnTo>
+                  <a:lnTo>
+                    <a:pt x="3047" y="3047"/>
+                  </a:lnTo>
+                  <a:lnTo>
+                    <a:pt x="3047" y="0"/>
+                  </a:lnTo>
+                  <a:close/>
+                </a:path>
+              </a:pathLst>
+            </a:custGeom>
+            <a:solidFill>
+              <a:srgbClr val="E2E2E2"/>
+            </a:solidFill>
+          </p:spPr>
+          <p:txBody>
+            <a:bodyPr wrap="square" lIns="0" tIns="0" rIns="0" bIns="0" rtlCol="0"/>
+            <a:lstStyle/>
+            <a:p>
+              <a:endParaRPr/>
+            </a:p>
+          </p:txBody>
+        </p:sp>
+        <p:sp>
+          <p:nvSpPr>
+            <p:cNvPr id="40" name="object 40">
+              <a:extLst>
+                <a:ext uri="{FF2B5EF4-FFF2-40B4-BE49-F238E27FC236}">
+                  <a16:creationId xmlns:a16="http://schemas.microsoft.com/office/drawing/2014/main" id="{385EADFB-F88E-89BD-5A91-B4D4D1D069AE}"/>
+                </a:ext>
+              </a:extLst>
+            </p:cNvPr>
+            <p:cNvSpPr/>
+            <p:nvPr/>
+          </p:nvSpPr>
+          <p:spPr>
+            <a:xfrm>
+              <a:off x="801928" y="7812925"/>
+              <a:ext cx="6402070" cy="17145"/>
+            </a:xfrm>
+            <a:custGeom>
+              <a:avLst/>
+              <a:gdLst/>
+              <a:ahLst/>
+              <a:cxnLst/>
+              <a:rect l="l" t="t" r="r" b="b"/>
+              <a:pathLst>
+                <a:path w="6402070" h="17145">
+                  <a:moveTo>
+                    <a:pt x="3048" y="3035"/>
+                  </a:moveTo>
+                  <a:lnTo>
+                    <a:pt x="0" y="3035"/>
+                  </a:lnTo>
+                  <a:lnTo>
+                    <a:pt x="0" y="16751"/>
+                  </a:lnTo>
+                  <a:lnTo>
+                    <a:pt x="3048" y="16751"/>
+                  </a:lnTo>
+                  <a:lnTo>
+                    <a:pt x="3048" y="3035"/>
+                  </a:lnTo>
+                  <a:close/>
+                </a:path>
+                <a:path w="6402070" h="17145">
+                  <a:moveTo>
+                    <a:pt x="6402006" y="0"/>
+                  </a:moveTo>
+                  <a:lnTo>
+                    <a:pt x="6398971" y="0"/>
+                  </a:lnTo>
+                  <a:lnTo>
+                    <a:pt x="6398971" y="3035"/>
+                  </a:lnTo>
+                  <a:lnTo>
+                    <a:pt x="6402006" y="3035"/>
+                  </a:lnTo>
+                  <a:lnTo>
+                    <a:pt x="6402006" y="0"/>
+                  </a:lnTo>
+                  <a:close/>
+                </a:path>
+              </a:pathLst>
+            </a:custGeom>
+            <a:solidFill>
+              <a:srgbClr val="9F9F9F"/>
+            </a:solidFill>
+          </p:spPr>
+          <p:txBody>
+            <a:bodyPr wrap="square" lIns="0" tIns="0" rIns="0" bIns="0" rtlCol="0"/>
+            <a:lstStyle/>
+            <a:p>
+              <a:endParaRPr/>
+            </a:p>
+          </p:txBody>
+        </p:sp>
+        <p:sp>
+          <p:nvSpPr>
+            <p:cNvPr id="41" name="object 41">
+              <a:extLst>
+                <a:ext uri="{FF2B5EF4-FFF2-40B4-BE49-F238E27FC236}">
+                  <a16:creationId xmlns:a16="http://schemas.microsoft.com/office/drawing/2014/main" id="{BE9BF930-354F-EA55-BEAA-58457AC12B10}"/>
+                </a:ext>
+              </a:extLst>
+            </p:cNvPr>
+            <p:cNvSpPr/>
+            <p:nvPr/>
+          </p:nvSpPr>
+          <p:spPr>
+            <a:xfrm>
+              <a:off x="7200899" y="7815960"/>
+              <a:ext cx="3175" cy="13970"/>
+            </a:xfrm>
+            <a:custGeom>
+              <a:avLst/>
+              <a:gdLst/>
+              <a:ahLst/>
+              <a:cxnLst/>
+              <a:rect l="l" t="t" r="r" b="b"/>
+              <a:pathLst>
+                <a:path w="3175" h="13970">
+                  <a:moveTo>
+                    <a:pt x="3047" y="0"/>
+                  </a:moveTo>
+                  <a:lnTo>
+                    <a:pt x="0" y="0"/>
+                  </a:lnTo>
+                  <a:lnTo>
+                    <a:pt x="0" y="13716"/>
+                  </a:lnTo>
+                  <a:lnTo>
+                    <a:pt x="3047" y="13716"/>
+                  </a:lnTo>
+                  <a:lnTo>
+                    <a:pt x="3047" y="0"/>
+                  </a:lnTo>
+                  <a:close/>
+                </a:path>
+              </a:pathLst>
+            </a:custGeom>
+            <a:solidFill>
+              <a:srgbClr val="E2E2E2"/>
+            </a:solidFill>
+          </p:spPr>
+          <p:txBody>
+            <a:bodyPr wrap="square" lIns="0" tIns="0" rIns="0" bIns="0" rtlCol="0"/>
+            <a:lstStyle/>
+            <a:p>
+              <a:endParaRPr/>
+            </a:p>
+          </p:txBody>
+        </p:sp>
+        <p:sp>
+          <p:nvSpPr>
+            <p:cNvPr id="42" name="object 42">
+              <a:extLst>
+                <a:ext uri="{FF2B5EF4-FFF2-40B4-BE49-F238E27FC236}">
+                  <a16:creationId xmlns:a16="http://schemas.microsoft.com/office/drawing/2014/main" id="{5D0ECD1B-5AC3-D267-7DC9-BD038839AA29}"/>
+                </a:ext>
+              </a:extLst>
+            </p:cNvPr>
+            <p:cNvSpPr/>
+            <p:nvPr/>
+          </p:nvSpPr>
+          <p:spPr>
+            <a:xfrm>
+              <a:off x="801928" y="7829676"/>
+              <a:ext cx="3175" cy="3175"/>
+            </a:xfrm>
+            <a:custGeom>
+              <a:avLst/>
+              <a:gdLst/>
+              <a:ahLst/>
+              <a:cxnLst/>
+              <a:rect l="l" t="t" r="r" b="b"/>
+              <a:pathLst>
+                <a:path w="3175" h="3175">
+                  <a:moveTo>
+                    <a:pt x="3048" y="0"/>
+                  </a:moveTo>
+                  <a:lnTo>
+                    <a:pt x="0" y="0"/>
+                  </a:lnTo>
+                  <a:lnTo>
+                    <a:pt x="0" y="3047"/>
+                  </a:lnTo>
+                  <a:lnTo>
+                    <a:pt x="3048" y="3047"/>
+                  </a:lnTo>
+                  <a:lnTo>
+                    <a:pt x="3048" y="0"/>
+                  </a:lnTo>
+                  <a:close/>
+                </a:path>
+              </a:pathLst>
+            </a:custGeom>
+            <a:solidFill>
+              <a:srgbClr val="9F9F9F"/>
+            </a:solidFill>
+          </p:spPr>
+          <p:txBody>
+            <a:bodyPr wrap="square" lIns="0" tIns="0" rIns="0" bIns="0" rtlCol="0"/>
+            <a:lstStyle/>
+            <a:p>
+              <a:endParaRPr/>
+            </a:p>
+          </p:txBody>
+        </p:sp>
+        <p:sp>
+          <p:nvSpPr>
+            <p:cNvPr id="43" name="object 43">
+              <a:extLst>
+                <a:ext uri="{FF2B5EF4-FFF2-40B4-BE49-F238E27FC236}">
+                  <a16:creationId xmlns:a16="http://schemas.microsoft.com/office/drawing/2014/main" id="{E1F203BE-9F4F-409A-B60D-281EDA850CCE}"/>
+                </a:ext>
+              </a:extLst>
+            </p:cNvPr>
+            <p:cNvSpPr/>
+            <p:nvPr/>
+          </p:nvSpPr>
+          <p:spPr>
+            <a:xfrm>
+              <a:off x="801928" y="7829689"/>
+              <a:ext cx="6402070" cy="3175"/>
+            </a:xfrm>
+            <a:custGeom>
+              <a:avLst/>
+              <a:gdLst/>
+              <a:ahLst/>
+              <a:cxnLst/>
+              <a:rect l="l" t="t" r="r" b="b"/>
+              <a:pathLst>
+                <a:path w="6402070" h="3175">
+                  <a:moveTo>
+                    <a:pt x="6402006" y="0"/>
+                  </a:moveTo>
+                  <a:lnTo>
+                    <a:pt x="6399022" y="0"/>
+                  </a:lnTo>
+                  <a:lnTo>
+                    <a:pt x="3048" y="0"/>
+                  </a:lnTo>
+                  <a:lnTo>
+                    <a:pt x="0" y="0"/>
+                  </a:lnTo>
+                  <a:lnTo>
+                    <a:pt x="0" y="3035"/>
+                  </a:lnTo>
+                  <a:lnTo>
+                    <a:pt x="3048" y="3035"/>
+                  </a:lnTo>
+                  <a:lnTo>
+                    <a:pt x="6398971" y="3035"/>
+                  </a:lnTo>
+                  <a:lnTo>
+                    <a:pt x="6402006" y="3035"/>
+                  </a:lnTo>
+                  <a:lnTo>
+                    <a:pt x="6402006" y="0"/>
+                  </a:lnTo>
+                  <a:close/>
+                </a:path>
+              </a:pathLst>
+            </a:custGeom>
+            <a:solidFill>
+              <a:srgbClr val="E2E2E2"/>
+            </a:solidFill>
+          </p:spPr>
+          <p:txBody>
+            <a:bodyPr wrap="square" lIns="0" tIns="0" rIns="0" bIns="0" rtlCol="0"/>
+            <a:lstStyle/>
+            <a:p>
+              <a:endParaRPr/>
+            </a:p>
+          </p:txBody>
+        </p:sp>
+      </p:grpSp>
+      <p:sp>
+        <p:nvSpPr>
+          <p:cNvPr id="44" name="object 44">
+            <a:extLst>
+              <a:ext uri="{FF2B5EF4-FFF2-40B4-BE49-F238E27FC236}">
+                <a16:creationId xmlns:a16="http://schemas.microsoft.com/office/drawing/2014/main" id="{009EBF4E-06F3-B7F0-D41E-0591EE2EB9F1}"/>
+              </a:ext>
+            </a:extLst>
+          </p:cNvPr>
+          <p:cNvSpPr txBox="1"/>
+          <p:nvPr/>
+        </p:nvSpPr>
+        <p:spPr>
+          <a:xfrm>
+            <a:off x="734047" y="8921270"/>
+            <a:ext cx="6414135" cy="1100301"/>
+          </a:xfrm>
+          <a:prstGeom prst="rect">
+            <a:avLst/>
+          </a:prstGeom>
+        </p:spPr>
+        <p:txBody>
+          <a:bodyPr vert="horz" wrap="square" lIns="0" tIns="12700" rIns="0" bIns="0" rtlCol="0">
+            <a:spAutoFit/>
+          </a:bodyPr>
+          <a:lstStyle/>
+          <a:p>
+            <a:pPr marL="12700">
+              <a:lnSpc>
+                <a:spcPct val="100000"/>
+              </a:lnSpc>
+              <a:spcBef>
+                <a:spcPts val="100"/>
+              </a:spcBef>
+            </a:pPr>
+            <a:r>
+              <a:rPr sz="1400" b="1" dirty="0">
+                <a:solidFill>
+                  <a:srgbClr val="3B78D7"/>
+                </a:solidFill>
+                <a:latin typeface="Times New Roman"/>
+                <a:cs typeface="Times New Roman"/>
+              </a:rPr>
+              <a:t>8.</a:t>
+            </a:r>
+            <a:r>
+              <a:rPr sz="1400" b="1" spc="-5" dirty="0">
+                <a:solidFill>
+                  <a:srgbClr val="3B78D7"/>
+                </a:solidFill>
+                <a:latin typeface="Times New Roman"/>
+                <a:cs typeface="Times New Roman"/>
+              </a:rPr>
+              <a:t> </a:t>
+            </a:r>
+            <a:r>
+              <a:rPr sz="1400" b="1" spc="-10" dirty="0">
+                <a:solidFill>
+                  <a:srgbClr val="3B78D7"/>
+                </a:solidFill>
+                <a:latin typeface="Times New Roman"/>
+                <a:cs typeface="Times New Roman"/>
+              </a:rPr>
+              <a:t>Conclusion:</a:t>
+            </a:r>
+            <a:endParaRPr sz="1400" dirty="0">
+              <a:latin typeface="Times New Roman"/>
+              <a:cs typeface="Times New Roman"/>
+            </a:endParaRPr>
+          </a:p>
+          <a:p>
+            <a:pPr marL="106680" marR="5080">
+              <a:lnSpc>
+                <a:spcPts val="1380"/>
+              </a:lnSpc>
+              <a:spcBef>
+                <a:spcPts val="1235"/>
+              </a:spcBef>
+            </a:pPr>
+            <a:r>
+              <a:rPr lang="en-US" sz="1300" dirty="0">
+                <a:latin typeface="Times New Roman"/>
+                <a:cs typeface="Times New Roman"/>
+              </a:rPr>
+              <a:t>The project successfully integrates HTML, CSS, and JavaScript to form a complete registration system. The validation logic ensures data quality, while the dynamic table update provides immediate satisfaction to the user, proving that client-side scripting is essential for a modern web experience.</a:t>
+            </a:r>
+            <a:endParaRPr sz="1300" dirty="0">
+              <a:latin typeface="Times New Roman"/>
+              <a:cs typeface="Times New Roman"/>
+            </a:endParaRPr>
+          </a:p>
+        </p:txBody>
+      </p:sp>
+      <p:pic>
+        <p:nvPicPr>
+          <p:cNvPr id="45" name="object 45">
+            <a:extLst>
+              <a:ext uri="{FF2B5EF4-FFF2-40B4-BE49-F238E27FC236}">
+                <a16:creationId xmlns:a16="http://schemas.microsoft.com/office/drawing/2014/main" id="{4E14490B-BAB5-82C5-4733-185491BD7FFF}"/>
+              </a:ext>
+            </a:extLst>
+          </p:cNvPr>
+          <p:cNvPicPr/>
+          <p:nvPr/>
+        </p:nvPicPr>
+        <p:blipFill>
+          <a:blip r:embed="rId4" cstate="print"/>
+          <a:stretch>
+            <a:fillRect/>
+          </a:stretch>
+        </p:blipFill>
+        <p:spPr>
+          <a:xfrm>
+            <a:off x="2749550" y="577849"/>
+            <a:ext cx="1004798" cy="566420"/>
+          </a:xfrm>
+          <a:prstGeom prst="rect">
+            <a:avLst/>
+          </a:prstGeom>
+        </p:spPr>
+      </p:pic>
+      <p:pic>
+        <p:nvPicPr>
+          <p:cNvPr id="46" name="object 46">
+            <a:extLst>
+              <a:ext uri="{FF2B5EF4-FFF2-40B4-BE49-F238E27FC236}">
+                <a16:creationId xmlns:a16="http://schemas.microsoft.com/office/drawing/2014/main" id="{16E70FD3-1B3E-10B9-38C7-02E02D754392}"/>
+              </a:ext>
+            </a:extLst>
+          </p:cNvPr>
+          <p:cNvPicPr/>
+          <p:nvPr/>
+        </p:nvPicPr>
+        <p:blipFill>
+          <a:blip r:embed="rId5" cstate="print"/>
+          <a:stretch>
+            <a:fillRect/>
+          </a:stretch>
+        </p:blipFill>
+        <p:spPr>
+          <a:xfrm>
+            <a:off x="739775" y="615949"/>
+            <a:ext cx="1495933" cy="370204"/>
+          </a:xfrm>
+          <a:prstGeom prst="rect">
+            <a:avLst/>
+          </a:prstGeom>
+        </p:spPr>
+      </p:pic>
+      <p:pic>
+        <p:nvPicPr>
           <p:cNvPr id="5" name="Picture 4">
             <a:extLst>
               <a:ext uri="{FF2B5EF4-FFF2-40B4-BE49-F238E27FC236}">
-                <a16:creationId xmlns:a16="http://schemas.microsoft.com/office/drawing/2014/main" id="{3E183A41-7022-1A96-B9FC-B2F9FAF9457C}"/>
+                <a16:creationId xmlns:a16="http://schemas.microsoft.com/office/drawing/2014/main" id="{D662F9CA-F018-F1C9-26D5-0CAD3BECA16B}"/>
               </a:ext>
             </a:extLst>
           </p:cNvPr>
@@ -9866,7 +10159,7 @@
           <p:cNvPr id="7" name="Picture 6">
             <a:extLst>
               <a:ext uri="{FF2B5EF4-FFF2-40B4-BE49-F238E27FC236}">
-                <a16:creationId xmlns:a16="http://schemas.microsoft.com/office/drawing/2014/main" id="{8D5180CA-F9E0-B35A-6A06-E1F76EAF7461}"/>
+                <a16:creationId xmlns:a16="http://schemas.microsoft.com/office/drawing/2014/main" id="{8E7B0E5F-8DB7-6E25-B04A-0F290D1EA0E1}"/>
               </a:ext>
             </a:extLst>
           </p:cNvPr>
@@ -9902,7 +10195,7 @@
           <p:cNvPr id="9" name="TextBox 8">
             <a:extLst>
               <a:ext uri="{FF2B5EF4-FFF2-40B4-BE49-F238E27FC236}">
-                <a16:creationId xmlns:a16="http://schemas.microsoft.com/office/drawing/2014/main" id="{B4FFF8F5-F465-EEAD-94F2-DFE71FD159EF}"/>
+                <a16:creationId xmlns:a16="http://schemas.microsoft.com/office/drawing/2014/main" id="{5172B020-282A-C6C0-E08D-59F61CB35C37}"/>
               </a:ext>
             </a:extLst>
           </p:cNvPr>
@@ -9943,7 +10236,7 @@
           <p:cNvPr id="10" name="TextBox 9">
             <a:extLst>
               <a:ext uri="{FF2B5EF4-FFF2-40B4-BE49-F238E27FC236}">
-                <a16:creationId xmlns:a16="http://schemas.microsoft.com/office/drawing/2014/main" id="{B1C78DB6-42BB-7613-22CF-59752FF4090D}"/>
+                <a16:creationId xmlns:a16="http://schemas.microsoft.com/office/drawing/2014/main" id="{6A936738-DFD8-441E-C393-2CEEE3B2C783}"/>
               </a:ext>
             </a:extLst>
           </p:cNvPr>
@@ -9982,7 +10275,7 @@
     </p:spTree>
     <p:extLst>
       <p:ext uri="{BB962C8B-B14F-4D97-AF65-F5344CB8AC3E}">
-        <p14:creationId xmlns:p14="http://schemas.microsoft.com/office/powerpoint/2010/main" val="2896398324"/>
+        <p14:creationId xmlns:p14="http://schemas.microsoft.com/office/powerpoint/2010/main" val="2071083046"/>
       </p:ext>
     </p:extLst>
   </p:cSld>
